--- a/1.3 Architecture/1.3 Architecture.pptx
+++ b/1.3 Architecture/1.3 Architecture.pptx
@@ -17,6 +17,13 @@
     <p:sldId id="262" r:id="rId11"/>
     <p:sldId id="266" r:id="rId12"/>
     <p:sldId id="267" r:id="rId13"/>
+    <p:sldId id="268" r:id="rId14"/>
+    <p:sldId id="269" r:id="rId15"/>
+    <p:sldId id="270" r:id="rId16"/>
+    <p:sldId id="271" r:id="rId17"/>
+    <p:sldId id="272" r:id="rId18"/>
+    <p:sldId id="273" r:id="rId19"/>
+    <p:sldId id="274" r:id="rId20"/>
   </p:sldIdLst>
   <p:sldSz cx="12192000" cy="6858000"/>
   <p:notesSz cx="6858000" cy="9144000"/>
@@ -115,6 +122,11 @@
       </a:defRPr>
     </a:lvl9pPr>
   </p:defaultTextStyle>
+  <p:extLst>
+    <p:ext uri="{EFAFB233-063F-42B5-8137-9DF3F51BA10A}">
+      <p15:sldGuideLst xmlns:p15="http://schemas.microsoft.com/office/powerpoint/2012/main"/>
+    </p:ext>
+  </p:extLst>
 </p:presentation>
 </file>
 
@@ -175,7 +187,7 @@
           <a:noFill/>
           <a:extLst>
             <a:ext uri="{909E8E84-426E-40dd-AFC4-6F175D3DCCD1}">
-              <a14:hiddenFill xmlns:a14="http://schemas.microsoft.com/office/drawing/2010/main" xmlns="">
+              <a14:hiddenFill xmlns="" xmlns:a14="http://schemas.microsoft.com/office/drawing/2010/main">
                 <a:solidFill>
                   <a:srgbClr val="FFFFFF"/>
                 </a:solidFill>
@@ -234,7 +246,7 @@
             </a:ln>
             <a:extLst>
               <a:ext uri="{91240B29-F687-4f45-9708-019B960494DF}">
-                <a14:hiddenLine xmlns:a14="http://schemas.microsoft.com/office/drawing/2010/main" xmlns="" w="9525">
+                <a14:hiddenLine xmlns="" xmlns:a14="http://schemas.microsoft.com/office/drawing/2010/main" w="9525">
                   <a:solidFill>
                     <a:srgbClr val="000000"/>
                   </a:solidFill>
@@ -324,7 +336,7 @@
             </a:ln>
             <a:extLst>
               <a:ext uri="{91240B29-F687-4f45-9708-019B960494DF}">
-                <a14:hiddenLine xmlns:a14="http://schemas.microsoft.com/office/drawing/2010/main" xmlns="" w="9525">
+                <a14:hiddenLine xmlns="" xmlns:a14="http://schemas.microsoft.com/office/drawing/2010/main" w="9525">
                   <a:solidFill>
                     <a:srgbClr val="000000"/>
                   </a:solidFill>
@@ -414,7 +426,7 @@
             </a:ln>
             <a:extLst>
               <a:ext uri="{91240B29-F687-4f45-9708-019B960494DF}">
-                <a14:hiddenLine xmlns:a14="http://schemas.microsoft.com/office/drawing/2010/main" xmlns="" w="9525">
+                <a14:hiddenLine xmlns="" xmlns:a14="http://schemas.microsoft.com/office/drawing/2010/main" w="9525">
                   <a:solidFill>
                     <a:srgbClr val="000000"/>
                   </a:solidFill>
@@ -448,7 +460,7 @@
             </a:ln>
             <a:extLst>
               <a:ext uri="{91240B29-F687-4f45-9708-019B960494DF}">
-                <a14:hiddenLine xmlns:a14="http://schemas.microsoft.com/office/drawing/2010/main" xmlns="" w="9525">
+                <a14:hiddenLine xmlns="" xmlns:a14="http://schemas.microsoft.com/office/drawing/2010/main" w="9525">
                   <a:solidFill>
                     <a:srgbClr val="000000"/>
                   </a:solidFill>
@@ -538,7 +550,7 @@
             </a:ln>
             <a:extLst>
               <a:ext uri="{91240B29-F687-4f45-9708-019B960494DF}">
-                <a14:hiddenLine xmlns:a14="http://schemas.microsoft.com/office/drawing/2010/main" xmlns="" w="9525">
+                <a14:hiddenLine xmlns="" xmlns:a14="http://schemas.microsoft.com/office/drawing/2010/main" w="9525">
                   <a:solidFill>
                     <a:srgbClr val="000000"/>
                   </a:solidFill>
@@ -600,7 +612,7 @@
             </a:ln>
             <a:extLst>
               <a:ext uri="{91240B29-F687-4f45-9708-019B960494DF}">
-                <a14:hiddenLine xmlns:a14="http://schemas.microsoft.com/office/drawing/2010/main" xmlns="" w="9525">
+                <a14:hiddenLine xmlns="" xmlns:a14="http://schemas.microsoft.com/office/drawing/2010/main" w="9525">
                   <a:solidFill>
                     <a:srgbClr val="000000"/>
                   </a:solidFill>
@@ -662,7 +674,7 @@
             </a:ln>
             <a:extLst>
               <a:ext uri="{91240B29-F687-4f45-9708-019B960494DF}">
-                <a14:hiddenLine xmlns:a14="http://schemas.microsoft.com/office/drawing/2010/main" xmlns="" w="9525">
+                <a14:hiddenLine xmlns="" xmlns:a14="http://schemas.microsoft.com/office/drawing/2010/main" w="9525">
                   <a:solidFill>
                     <a:srgbClr val="000000"/>
                   </a:solidFill>
@@ -752,7 +764,7 @@
             </a:ln>
             <a:extLst>
               <a:ext uri="{91240B29-F687-4f45-9708-019B960494DF}">
-                <a14:hiddenLine xmlns:a14="http://schemas.microsoft.com/office/drawing/2010/main" xmlns="" w="9525">
+                <a14:hiddenLine xmlns="" xmlns:a14="http://schemas.microsoft.com/office/drawing/2010/main" w="9525">
                   <a:solidFill>
                     <a:srgbClr val="000000"/>
                   </a:solidFill>
@@ -814,7 +826,7 @@
             </a:ln>
             <a:extLst>
               <a:ext uri="{91240B29-F687-4f45-9708-019B960494DF}">
-                <a14:hiddenLine xmlns:a14="http://schemas.microsoft.com/office/drawing/2010/main" xmlns="" w="9525">
+                <a14:hiddenLine xmlns="" xmlns:a14="http://schemas.microsoft.com/office/drawing/2010/main" w="9525">
                   <a:solidFill>
                     <a:srgbClr val="000000"/>
                   </a:solidFill>
@@ -876,7 +888,7 @@
             </a:ln>
             <a:extLst>
               <a:ext uri="{91240B29-F687-4f45-9708-019B960494DF}">
-                <a14:hiddenLine xmlns:a14="http://schemas.microsoft.com/office/drawing/2010/main" xmlns="" w="9525">
+                <a14:hiddenLine xmlns="" xmlns:a14="http://schemas.microsoft.com/office/drawing/2010/main" w="9525">
                   <a:solidFill>
                     <a:srgbClr val="000000"/>
                   </a:solidFill>
@@ -966,7 +978,7 @@
             </a:ln>
             <a:extLst>
               <a:ext uri="{91240B29-F687-4f45-9708-019B960494DF}">
-                <a14:hiddenLine xmlns:a14="http://schemas.microsoft.com/office/drawing/2010/main" xmlns="" w="9525">
+                <a14:hiddenLine xmlns="" xmlns:a14="http://schemas.microsoft.com/office/drawing/2010/main" w="9525">
                   <a:solidFill>
                     <a:srgbClr val="000000"/>
                   </a:solidFill>
@@ -1056,7 +1068,7 @@
             </a:ln>
             <a:extLst>
               <a:ext uri="{91240B29-F687-4f45-9708-019B960494DF}">
-                <a14:hiddenLine xmlns:a14="http://schemas.microsoft.com/office/drawing/2010/main" xmlns="" w="9525">
+                <a14:hiddenLine xmlns="" xmlns:a14="http://schemas.microsoft.com/office/drawing/2010/main" w="9525">
                   <a:solidFill>
                     <a:srgbClr val="000000"/>
                   </a:solidFill>
@@ -1118,7 +1130,7 @@
             </a:ln>
             <a:extLst>
               <a:ext uri="{91240B29-F687-4f45-9708-019B960494DF}">
-                <a14:hiddenLine xmlns:a14="http://schemas.microsoft.com/office/drawing/2010/main" xmlns="" w="9525">
+                <a14:hiddenLine xmlns="" xmlns:a14="http://schemas.microsoft.com/office/drawing/2010/main" w="9525">
                   <a:solidFill>
                     <a:srgbClr val="000000"/>
                   </a:solidFill>
@@ -1228,7 +1240,7 @@
             </a:ln>
             <a:extLst>
               <a:ext uri="{91240B29-F687-4f45-9708-019B960494DF}">
-                <a14:hiddenLine xmlns:a14="http://schemas.microsoft.com/office/drawing/2010/main" xmlns="" w="9525">
+                <a14:hiddenLine xmlns="" xmlns:a14="http://schemas.microsoft.com/office/drawing/2010/main" w="9525">
                   <a:solidFill>
                     <a:srgbClr val="000000"/>
                   </a:solidFill>
@@ -1290,7 +1302,7 @@
             </a:ln>
             <a:extLst>
               <a:ext uri="{91240B29-F687-4f45-9708-019B960494DF}">
-                <a14:hiddenLine xmlns:a14="http://schemas.microsoft.com/office/drawing/2010/main" xmlns="" w="9525">
+                <a14:hiddenLine xmlns="" xmlns:a14="http://schemas.microsoft.com/office/drawing/2010/main" w="9525">
                   <a:solidFill>
                     <a:srgbClr val="000000"/>
                   </a:solidFill>
@@ -1380,7 +1392,7 @@
             </a:ln>
             <a:extLst>
               <a:ext uri="{91240B29-F687-4f45-9708-019B960494DF}">
-                <a14:hiddenLine xmlns:a14="http://schemas.microsoft.com/office/drawing/2010/main" xmlns="" w="9525">
+                <a14:hiddenLine xmlns="" xmlns:a14="http://schemas.microsoft.com/office/drawing/2010/main" w="9525">
                   <a:solidFill>
                     <a:srgbClr val="000000"/>
                   </a:solidFill>
@@ -1470,7 +1482,7 @@
             </a:ln>
             <a:extLst>
               <a:ext uri="{91240B29-F687-4f45-9708-019B960494DF}">
-                <a14:hiddenLine xmlns:a14="http://schemas.microsoft.com/office/drawing/2010/main" xmlns="" w="9525">
+                <a14:hiddenLine xmlns="" xmlns:a14="http://schemas.microsoft.com/office/drawing/2010/main" w="9525">
                   <a:solidFill>
                     <a:srgbClr val="000000"/>
                   </a:solidFill>
@@ -1532,7 +1544,7 @@
             </a:ln>
             <a:extLst>
               <a:ext uri="{91240B29-F687-4f45-9708-019B960494DF}">
-                <a14:hiddenLine xmlns:a14="http://schemas.microsoft.com/office/drawing/2010/main" xmlns="" w="9525">
+                <a14:hiddenLine xmlns="" xmlns:a14="http://schemas.microsoft.com/office/drawing/2010/main" w="9525">
                   <a:solidFill>
                     <a:srgbClr val="000000"/>
                   </a:solidFill>
@@ -1622,7 +1634,7 @@
             </a:ln>
             <a:extLst>
               <a:ext uri="{91240B29-F687-4f45-9708-019B960494DF}">
-                <a14:hiddenLine xmlns:a14="http://schemas.microsoft.com/office/drawing/2010/main" xmlns="" w="9525">
+                <a14:hiddenLine xmlns="" xmlns:a14="http://schemas.microsoft.com/office/drawing/2010/main" w="9525">
                   <a:solidFill>
                     <a:srgbClr val="000000"/>
                   </a:solidFill>
@@ -1712,7 +1724,7 @@
             </a:ln>
             <a:extLst>
               <a:ext uri="{91240B29-F687-4f45-9708-019B960494DF}">
-                <a14:hiddenLine xmlns:a14="http://schemas.microsoft.com/office/drawing/2010/main" xmlns="" w="9525">
+                <a14:hiddenLine xmlns="" xmlns:a14="http://schemas.microsoft.com/office/drawing/2010/main" w="9525">
                   <a:solidFill>
                     <a:srgbClr val="000000"/>
                   </a:solidFill>
@@ -1768,7 +1780,7 @@
             </a:ln>
             <a:extLst>
               <a:ext uri="{91240B29-F687-4f45-9708-019B960494DF}">
-                <a14:hiddenLine xmlns:a14="http://schemas.microsoft.com/office/drawing/2010/main" xmlns="" w="9525">
+                <a14:hiddenLine xmlns="" xmlns:a14="http://schemas.microsoft.com/office/drawing/2010/main" w="9525">
                   <a:solidFill>
                     <a:srgbClr val="000000"/>
                   </a:solidFill>
@@ -1858,7 +1870,7 @@
             </a:ln>
             <a:extLst>
               <a:ext uri="{91240B29-F687-4f45-9708-019B960494DF}">
-                <a14:hiddenLine xmlns:a14="http://schemas.microsoft.com/office/drawing/2010/main" xmlns="" w="9525">
+                <a14:hiddenLine xmlns="" xmlns:a14="http://schemas.microsoft.com/office/drawing/2010/main" w="9525">
                   <a:solidFill>
                     <a:srgbClr val="000000"/>
                   </a:solidFill>
@@ -1914,7 +1926,7 @@
             </a:ln>
             <a:extLst>
               <a:ext uri="{91240B29-F687-4f45-9708-019B960494DF}">
-                <a14:hiddenLine xmlns:a14="http://schemas.microsoft.com/office/drawing/2010/main" xmlns="" w="9525">
+                <a14:hiddenLine xmlns="" xmlns:a14="http://schemas.microsoft.com/office/drawing/2010/main" w="9525">
                   <a:solidFill>
                     <a:srgbClr val="000000"/>
                   </a:solidFill>
@@ -2004,7 +2016,7 @@
             </a:ln>
             <a:extLst>
               <a:ext uri="{91240B29-F687-4f45-9708-019B960494DF}">
-                <a14:hiddenLine xmlns:a14="http://schemas.microsoft.com/office/drawing/2010/main" xmlns="" w="9525">
+                <a14:hiddenLine xmlns="" xmlns:a14="http://schemas.microsoft.com/office/drawing/2010/main" w="9525">
                   <a:solidFill>
                     <a:srgbClr val="000000"/>
                   </a:solidFill>
@@ -2072,7 +2084,7 @@
             </a:ln>
             <a:extLst>
               <a:ext uri="{91240B29-F687-4f45-9708-019B960494DF}">
-                <a14:hiddenLine xmlns:a14="http://schemas.microsoft.com/office/drawing/2010/main" xmlns="" w="9525">
+                <a14:hiddenLine xmlns="" xmlns:a14="http://schemas.microsoft.com/office/drawing/2010/main" w="9525">
                   <a:solidFill>
                     <a:srgbClr val="000000"/>
                   </a:solidFill>
@@ -2162,7 +2174,7 @@
             </a:ln>
             <a:extLst>
               <a:ext uri="{91240B29-F687-4f45-9708-019B960494DF}">
-                <a14:hiddenLine xmlns:a14="http://schemas.microsoft.com/office/drawing/2010/main" xmlns="" w="9525">
+                <a14:hiddenLine xmlns="" xmlns:a14="http://schemas.microsoft.com/office/drawing/2010/main" w="9525">
                   <a:solidFill>
                     <a:srgbClr val="000000"/>
                   </a:solidFill>
@@ -2230,7 +2242,7 @@
             </a:ln>
             <a:extLst>
               <a:ext uri="{91240B29-F687-4f45-9708-019B960494DF}">
-                <a14:hiddenLine xmlns:a14="http://schemas.microsoft.com/office/drawing/2010/main" xmlns="" w="9525">
+                <a14:hiddenLine xmlns="" xmlns:a14="http://schemas.microsoft.com/office/drawing/2010/main" w="9525">
                   <a:solidFill>
                     <a:srgbClr val="000000"/>
                   </a:solidFill>
@@ -2320,7 +2332,7 @@
             </a:ln>
             <a:extLst>
               <a:ext uri="{91240B29-F687-4f45-9708-019B960494DF}">
-                <a14:hiddenLine xmlns:a14="http://schemas.microsoft.com/office/drawing/2010/main" xmlns="" w="9525">
+                <a14:hiddenLine xmlns="" xmlns:a14="http://schemas.microsoft.com/office/drawing/2010/main" w="9525">
                   <a:solidFill>
                     <a:srgbClr val="000000"/>
                   </a:solidFill>
@@ -2354,7 +2366,7 @@
             </a:ln>
             <a:extLst>
               <a:ext uri="{91240B29-F687-4f45-9708-019B960494DF}">
-                <a14:hiddenLine xmlns:a14="http://schemas.microsoft.com/office/drawing/2010/main" xmlns="" w="9525">
+                <a14:hiddenLine xmlns="" xmlns:a14="http://schemas.microsoft.com/office/drawing/2010/main" w="9525">
                   <a:solidFill>
                     <a:srgbClr val="000000"/>
                   </a:solidFill>
@@ -2444,7 +2456,7 @@
             </a:ln>
             <a:extLst>
               <a:ext uri="{91240B29-F687-4f45-9708-019B960494DF}">
-                <a14:hiddenLine xmlns:a14="http://schemas.microsoft.com/office/drawing/2010/main" xmlns="" w="9525">
+                <a14:hiddenLine xmlns="" xmlns:a14="http://schemas.microsoft.com/office/drawing/2010/main" w="9525">
                   <a:solidFill>
                     <a:srgbClr val="000000"/>
                   </a:solidFill>
@@ -2506,7 +2518,7 @@
             </a:ln>
             <a:extLst>
               <a:ext uri="{91240B29-F687-4f45-9708-019B960494DF}">
-                <a14:hiddenLine xmlns:a14="http://schemas.microsoft.com/office/drawing/2010/main" xmlns="" w="9525">
+                <a14:hiddenLine xmlns="" xmlns:a14="http://schemas.microsoft.com/office/drawing/2010/main" w="9525">
                   <a:solidFill>
                     <a:srgbClr val="000000"/>
                   </a:solidFill>
@@ -2568,7 +2580,7 @@
             </a:ln>
             <a:extLst>
               <a:ext uri="{91240B29-F687-4f45-9708-019B960494DF}">
-                <a14:hiddenLine xmlns:a14="http://schemas.microsoft.com/office/drawing/2010/main" xmlns="" w="9525">
+                <a14:hiddenLine xmlns="" xmlns:a14="http://schemas.microsoft.com/office/drawing/2010/main" w="9525">
                   <a:solidFill>
                     <a:srgbClr val="000000"/>
                   </a:solidFill>
@@ -2658,7 +2670,7 @@
             </a:ln>
             <a:extLst>
               <a:ext uri="{91240B29-F687-4f45-9708-019B960494DF}">
-                <a14:hiddenLine xmlns:a14="http://schemas.microsoft.com/office/drawing/2010/main" xmlns="" w="9525">
+                <a14:hiddenLine xmlns="" xmlns:a14="http://schemas.microsoft.com/office/drawing/2010/main" w="9525">
                   <a:solidFill>
                     <a:srgbClr val="000000"/>
                   </a:solidFill>
@@ -2726,7 +2738,7 @@
             </a:ln>
             <a:extLst>
               <a:ext uri="{91240B29-F687-4f45-9708-019B960494DF}">
-                <a14:hiddenLine xmlns:a14="http://schemas.microsoft.com/office/drawing/2010/main" xmlns="" w="9525">
+                <a14:hiddenLine xmlns="" xmlns:a14="http://schemas.microsoft.com/office/drawing/2010/main" w="9525">
                   <a:solidFill>
                     <a:srgbClr val="000000"/>
                   </a:solidFill>
@@ -2788,7 +2800,7 @@
             </a:ln>
             <a:extLst>
               <a:ext uri="{91240B29-F687-4f45-9708-019B960494DF}">
-                <a14:hiddenLine xmlns:a14="http://schemas.microsoft.com/office/drawing/2010/main" xmlns="" w="9525">
+                <a14:hiddenLine xmlns="" xmlns:a14="http://schemas.microsoft.com/office/drawing/2010/main" w="9525">
                   <a:solidFill>
                     <a:srgbClr val="000000"/>
                   </a:solidFill>
@@ -2878,7 +2890,7 @@
             </a:ln>
             <a:extLst>
               <a:ext uri="{91240B29-F687-4f45-9708-019B960494DF}">
-                <a14:hiddenLine xmlns:a14="http://schemas.microsoft.com/office/drawing/2010/main" xmlns="" w="9525">
+                <a14:hiddenLine xmlns="" xmlns:a14="http://schemas.microsoft.com/office/drawing/2010/main" w="9525">
                   <a:solidFill>
                     <a:srgbClr val="000000"/>
                   </a:solidFill>
@@ -2940,7 +2952,7 @@
             </a:ln>
             <a:extLst>
               <a:ext uri="{91240B29-F687-4f45-9708-019B960494DF}">
-                <a14:hiddenLine xmlns:a14="http://schemas.microsoft.com/office/drawing/2010/main" xmlns="" w="9525">
+                <a14:hiddenLine xmlns="" xmlns:a14="http://schemas.microsoft.com/office/drawing/2010/main" w="9525">
                   <a:solidFill>
                     <a:srgbClr val="000000"/>
                   </a:solidFill>
@@ -3030,7 +3042,7 @@
             </a:ln>
             <a:extLst>
               <a:ext uri="{91240B29-F687-4f45-9708-019B960494DF}">
-                <a14:hiddenLine xmlns:a14="http://schemas.microsoft.com/office/drawing/2010/main" xmlns="" w="9525">
+                <a14:hiddenLine xmlns="" xmlns:a14="http://schemas.microsoft.com/office/drawing/2010/main" w="9525">
                   <a:solidFill>
                     <a:srgbClr val="000000"/>
                   </a:solidFill>
@@ -3092,7 +3104,7 @@
             </a:ln>
             <a:extLst>
               <a:ext uri="{91240B29-F687-4f45-9708-019B960494DF}">
-                <a14:hiddenLine xmlns:a14="http://schemas.microsoft.com/office/drawing/2010/main" xmlns="" w="9525">
+                <a14:hiddenLine xmlns="" xmlns:a14="http://schemas.microsoft.com/office/drawing/2010/main" w="9525">
                   <a:solidFill>
                     <a:srgbClr val="000000"/>
                   </a:solidFill>
@@ -3182,7 +3194,7 @@
             </a:ln>
             <a:extLst>
               <a:ext uri="{91240B29-F687-4f45-9708-019B960494DF}">
-                <a14:hiddenLine xmlns:a14="http://schemas.microsoft.com/office/drawing/2010/main" xmlns="" w="9525">
+                <a14:hiddenLine xmlns="" xmlns:a14="http://schemas.microsoft.com/office/drawing/2010/main" w="9525">
                   <a:solidFill>
                     <a:srgbClr val="000000"/>
                   </a:solidFill>
@@ -3216,7 +3228,7 @@
             </a:ln>
             <a:extLst>
               <a:ext uri="{91240B29-F687-4f45-9708-019B960494DF}">
-                <a14:hiddenLine xmlns:a14="http://schemas.microsoft.com/office/drawing/2010/main" xmlns="" w="9525">
+                <a14:hiddenLine xmlns="" xmlns:a14="http://schemas.microsoft.com/office/drawing/2010/main" w="9525">
                   <a:solidFill>
                     <a:srgbClr val="000000"/>
                   </a:solidFill>
@@ -3281,7 +3293,7 @@
             </a:ln>
             <a:extLst>
               <a:ext uri="{91240B29-F687-4f45-9708-019B960494DF}">
-                <a14:hiddenLine xmlns:a14="http://schemas.microsoft.com/office/drawing/2010/main" xmlns="" w="9525">
+                <a14:hiddenLine xmlns="" xmlns:a14="http://schemas.microsoft.com/office/drawing/2010/main" w="9525">
                   <a:solidFill>
                     <a:srgbClr val="000000"/>
                   </a:solidFill>
@@ -3371,7 +3383,7 @@
             </a:ln>
             <a:extLst>
               <a:ext uri="{91240B29-F687-4f45-9708-019B960494DF}">
-                <a14:hiddenLine xmlns:a14="http://schemas.microsoft.com/office/drawing/2010/main" xmlns="" w="9525">
+                <a14:hiddenLine xmlns="" xmlns:a14="http://schemas.microsoft.com/office/drawing/2010/main" w="9525">
                   <a:solidFill>
                     <a:srgbClr val="000000"/>
                   </a:solidFill>
@@ -3433,7 +3445,7 @@
             </a:ln>
             <a:extLst>
               <a:ext uri="{91240B29-F687-4f45-9708-019B960494DF}">
-                <a14:hiddenLine xmlns:a14="http://schemas.microsoft.com/office/drawing/2010/main" xmlns="" w="9525">
+                <a14:hiddenLine xmlns="" xmlns:a14="http://schemas.microsoft.com/office/drawing/2010/main" w="9525">
                   <a:solidFill>
                     <a:srgbClr val="000000"/>
                   </a:solidFill>
@@ -3523,7 +3535,7 @@
             </a:ln>
             <a:extLst>
               <a:ext uri="{91240B29-F687-4f45-9708-019B960494DF}">
-                <a14:hiddenLine xmlns:a14="http://schemas.microsoft.com/office/drawing/2010/main" xmlns="" w="9525">
+                <a14:hiddenLine xmlns="" xmlns:a14="http://schemas.microsoft.com/office/drawing/2010/main" w="9525">
                   <a:solidFill>
                     <a:srgbClr val="000000"/>
                   </a:solidFill>
@@ -3613,7 +3625,7 @@
             </a:ln>
             <a:extLst>
               <a:ext uri="{91240B29-F687-4f45-9708-019B960494DF}">
-                <a14:hiddenLine xmlns:a14="http://schemas.microsoft.com/office/drawing/2010/main" xmlns="" w="9525">
+                <a14:hiddenLine xmlns="" xmlns:a14="http://schemas.microsoft.com/office/drawing/2010/main" w="9525">
                   <a:solidFill>
                     <a:srgbClr val="000000"/>
                   </a:solidFill>
@@ -3678,7 +3690,7 @@
             </a:ln>
             <a:extLst>
               <a:ext uri="{91240B29-F687-4f45-9708-019B960494DF}">
-                <a14:hiddenLine xmlns:a14="http://schemas.microsoft.com/office/drawing/2010/main" xmlns="" w="9525">
+                <a14:hiddenLine xmlns="" xmlns:a14="http://schemas.microsoft.com/office/drawing/2010/main" w="9525">
                   <a:solidFill>
                     <a:srgbClr val="000000"/>
                   </a:solidFill>
@@ -3740,7 +3752,7 @@
             </a:ln>
             <a:extLst>
               <a:ext uri="{91240B29-F687-4f45-9708-019B960494DF}">
-                <a14:hiddenLine xmlns:a14="http://schemas.microsoft.com/office/drawing/2010/main" xmlns="" w="9525">
+                <a14:hiddenLine xmlns="" xmlns:a14="http://schemas.microsoft.com/office/drawing/2010/main" w="9525">
                   <a:solidFill>
                     <a:srgbClr val="000000"/>
                   </a:solidFill>
@@ -3830,7 +3842,7 @@
             </a:ln>
             <a:extLst>
               <a:ext uri="{91240B29-F687-4f45-9708-019B960494DF}">
-                <a14:hiddenLine xmlns:a14="http://schemas.microsoft.com/office/drawing/2010/main" xmlns="" w="9525">
+                <a14:hiddenLine xmlns="" xmlns:a14="http://schemas.microsoft.com/office/drawing/2010/main" w="9525">
                   <a:solidFill>
                     <a:srgbClr val="000000"/>
                   </a:solidFill>
@@ -3920,7 +3932,7 @@
             </a:ln>
             <a:extLst>
               <a:ext uri="{91240B29-F687-4f45-9708-019B960494DF}">
-                <a14:hiddenLine xmlns:a14="http://schemas.microsoft.com/office/drawing/2010/main" xmlns="" w="9525">
+                <a14:hiddenLine xmlns="" xmlns:a14="http://schemas.microsoft.com/office/drawing/2010/main" w="9525">
                   <a:solidFill>
                     <a:srgbClr val="000000"/>
                   </a:solidFill>
@@ -3982,7 +3994,7 @@
             </a:ln>
             <a:extLst>
               <a:ext uri="{91240B29-F687-4f45-9708-019B960494DF}">
-                <a14:hiddenLine xmlns:a14="http://schemas.microsoft.com/office/drawing/2010/main" xmlns="" w="9525">
+                <a14:hiddenLine xmlns="" xmlns:a14="http://schemas.microsoft.com/office/drawing/2010/main" w="9525">
                   <a:solidFill>
                     <a:srgbClr val="000000"/>
                   </a:solidFill>
@@ -4102,7 +4114,7 @@
             </a:ln>
             <a:extLst>
               <a:ext uri="{91240B29-F687-4f45-9708-019B960494DF}">
-                <a14:hiddenLine xmlns:a14="http://schemas.microsoft.com/office/drawing/2010/main" xmlns="" w="9525">
+                <a14:hiddenLine xmlns="" xmlns:a14="http://schemas.microsoft.com/office/drawing/2010/main" w="9525">
                   <a:solidFill>
                     <a:srgbClr val="000000"/>
                   </a:solidFill>
@@ -4170,7 +4182,7 @@
             </a:ln>
             <a:extLst>
               <a:ext uri="{91240B29-F687-4f45-9708-019B960494DF}">
-                <a14:hiddenLine xmlns:a14="http://schemas.microsoft.com/office/drawing/2010/main" xmlns="" w="9525">
+                <a14:hiddenLine xmlns="" xmlns:a14="http://schemas.microsoft.com/office/drawing/2010/main" w="9525">
                   <a:solidFill>
                     <a:srgbClr val="000000"/>
                   </a:solidFill>
@@ -4260,7 +4272,7 @@
             </a:ln>
             <a:extLst>
               <a:ext uri="{91240B29-F687-4f45-9708-019B960494DF}">
-                <a14:hiddenLine xmlns:a14="http://schemas.microsoft.com/office/drawing/2010/main" xmlns="" w="9525">
+                <a14:hiddenLine xmlns="" xmlns:a14="http://schemas.microsoft.com/office/drawing/2010/main" w="9525">
                   <a:solidFill>
                     <a:srgbClr val="000000"/>
                   </a:solidFill>
@@ -4400,7 +4412,7 @@
           <a:p>
             <a:fld id="{6AC27FFC-58F7-4A0B-910F-2453E6738501}" type="datetimeFigureOut">
               <a:rPr lang="ru-RU" smtClean="0"/>
-              <a:t>27.08.2026</a:t>
+              <a:t>30.08.2026</a:t>
             </a:fld>
             <a:endParaRPr lang="ru-RU"/>
           </a:p>
@@ -4667,7 +4679,7 @@
           <a:p>
             <a:fld id="{6AC27FFC-58F7-4A0B-910F-2453E6738501}" type="datetimeFigureOut">
               <a:rPr lang="ru-RU" smtClean="0"/>
-              <a:t>27.08.2026</a:t>
+              <a:t>30.08.2026</a:t>
             </a:fld>
             <a:endParaRPr lang="ru-RU"/>
           </a:p>
@@ -4863,7 +4875,7 @@
           <a:p>
             <a:fld id="{6AC27FFC-58F7-4A0B-910F-2453E6738501}" type="datetimeFigureOut">
               <a:rPr lang="ru-RU" smtClean="0"/>
-              <a:t>27.08.2026</a:t>
+              <a:t>30.08.2026</a:t>
             </a:fld>
             <a:endParaRPr lang="ru-RU"/>
           </a:p>
@@ -5126,7 +5138,7 @@
           <a:p>
             <a:fld id="{6AC27FFC-58F7-4A0B-910F-2453E6738501}" type="datetimeFigureOut">
               <a:rPr lang="ru-RU" smtClean="0"/>
-              <a:t>27.08.2026</a:t>
+              <a:t>30.08.2026</a:t>
             </a:fld>
             <a:endParaRPr lang="ru-RU"/>
           </a:p>
@@ -5560,7 +5572,7 @@
           <a:p>
             <a:fld id="{6AC27FFC-58F7-4A0B-910F-2453E6738501}" type="datetimeFigureOut">
               <a:rPr lang="ru-RU" smtClean="0"/>
-              <a:t>27.08.2026</a:t>
+              <a:t>30.08.2026</a:t>
             </a:fld>
             <a:endParaRPr lang="ru-RU"/>
           </a:p>
@@ -6106,7 +6118,7 @@
           <a:p>
             <a:fld id="{6AC27FFC-58F7-4A0B-910F-2453E6738501}" type="datetimeFigureOut">
               <a:rPr lang="ru-RU" smtClean="0"/>
-              <a:t>27.08.2026</a:t>
+              <a:t>30.08.2026</a:t>
             </a:fld>
             <a:endParaRPr lang="ru-RU"/>
           </a:p>
@@ -6826,7 +6838,7 @@
           <a:p>
             <a:fld id="{6AC27FFC-58F7-4A0B-910F-2453E6738501}" type="datetimeFigureOut">
               <a:rPr lang="ru-RU" smtClean="0"/>
-              <a:t>27.08.2026</a:t>
+              <a:t>30.08.2026</a:t>
             </a:fld>
             <a:endParaRPr lang="ru-RU"/>
           </a:p>
@@ -6996,7 +7008,7 @@
           <a:p>
             <a:fld id="{6AC27FFC-58F7-4A0B-910F-2453E6738501}" type="datetimeFigureOut">
               <a:rPr lang="ru-RU" smtClean="0"/>
-              <a:t>27.08.2026</a:t>
+              <a:t>30.08.2026</a:t>
             </a:fld>
             <a:endParaRPr lang="ru-RU"/>
           </a:p>
@@ -7176,7 +7188,7 @@
           <a:p>
             <a:fld id="{6AC27FFC-58F7-4A0B-910F-2453E6738501}" type="datetimeFigureOut">
               <a:rPr lang="ru-RU" smtClean="0"/>
-              <a:t>27.08.2026</a:t>
+              <a:t>30.08.2026</a:t>
             </a:fld>
             <a:endParaRPr lang="ru-RU"/>
           </a:p>
@@ -7346,7 +7358,7 @@
           <a:p>
             <a:fld id="{6AC27FFC-58F7-4A0B-910F-2453E6738501}" type="datetimeFigureOut">
               <a:rPr lang="ru-RU" smtClean="0"/>
-              <a:t>27.08.2026</a:t>
+              <a:t>30.08.2026</a:t>
             </a:fld>
             <a:endParaRPr lang="ru-RU"/>
           </a:p>
@@ -7596,7 +7608,7 @@
           <a:p>
             <a:fld id="{6AC27FFC-58F7-4A0B-910F-2453E6738501}" type="datetimeFigureOut">
               <a:rPr lang="ru-RU" smtClean="0"/>
-              <a:t>27.08.2026</a:t>
+              <a:t>30.08.2026</a:t>
             </a:fld>
             <a:endParaRPr lang="ru-RU"/>
           </a:p>
@@ -7828,7 +7840,7 @@
           <a:p>
             <a:fld id="{6AC27FFC-58F7-4A0B-910F-2453E6738501}" type="datetimeFigureOut">
               <a:rPr lang="ru-RU" smtClean="0"/>
-              <a:t>27.08.2026</a:t>
+              <a:t>30.08.2026</a:t>
             </a:fld>
             <a:endParaRPr lang="ru-RU"/>
           </a:p>
@@ -8209,7 +8221,7 @@
           <a:p>
             <a:fld id="{6AC27FFC-58F7-4A0B-910F-2453E6738501}" type="datetimeFigureOut">
               <a:rPr lang="ru-RU" smtClean="0"/>
-              <a:t>27.08.2026</a:t>
+              <a:t>30.08.2026</a:t>
             </a:fld>
             <a:endParaRPr lang="ru-RU"/>
           </a:p>
@@ -8327,7 +8339,7 @@
           <a:p>
             <a:fld id="{6AC27FFC-58F7-4A0B-910F-2453E6738501}" type="datetimeFigureOut">
               <a:rPr lang="ru-RU" smtClean="0"/>
-              <a:t>27.08.2026</a:t>
+              <a:t>30.08.2026</a:t>
             </a:fld>
             <a:endParaRPr lang="ru-RU"/>
           </a:p>
@@ -8422,7 +8434,7 @@
           <a:p>
             <a:fld id="{6AC27FFC-58F7-4A0B-910F-2453E6738501}" type="datetimeFigureOut">
               <a:rPr lang="ru-RU" smtClean="0"/>
-              <a:t>27.08.2026</a:t>
+              <a:t>30.08.2026</a:t>
             </a:fld>
             <a:endParaRPr lang="ru-RU"/>
           </a:p>
@@ -8671,7 +8683,7 @@
           <a:p>
             <a:fld id="{6AC27FFC-58F7-4A0B-910F-2453E6738501}" type="datetimeFigureOut">
               <a:rPr lang="ru-RU" smtClean="0"/>
-              <a:t>27.08.2026</a:t>
+              <a:t>30.08.2026</a:t>
             </a:fld>
             <a:endParaRPr lang="ru-RU"/>
           </a:p>
@@ -8951,7 +8963,7 @@
           <a:p>
             <a:fld id="{6AC27FFC-58F7-4A0B-910F-2453E6738501}" type="datetimeFigureOut">
               <a:rPr lang="ru-RU" smtClean="0"/>
-              <a:t>27.08.2026</a:t>
+              <a:t>30.08.2026</a:t>
             </a:fld>
             <a:endParaRPr lang="ru-RU"/>
           </a:p>
@@ -9074,7 +9086,7 @@
           <a:noFill/>
           <a:extLst>
             <a:ext uri="{909E8E84-426E-40dd-AFC4-6F175D3DCCD1}">
-              <a14:hiddenFill xmlns:a14="http://schemas.microsoft.com/office/drawing/2010/main" xmlns="">
+              <a14:hiddenFill xmlns="" xmlns:a14="http://schemas.microsoft.com/office/drawing/2010/main">
                 <a:solidFill>
                   <a:srgbClr val="FFFFFF"/>
                 </a:solidFill>
@@ -9148,7 +9160,7 @@
               </a:ln>
               <a:extLst>
                 <a:ext uri="{91240B29-F687-4f45-9708-019B960494DF}">
-                  <a14:hiddenLine xmlns:a14="http://schemas.microsoft.com/office/drawing/2010/main" xmlns="" w="9525">
+                  <a14:hiddenLine xmlns="" xmlns:a14="http://schemas.microsoft.com/office/drawing/2010/main" w="9525">
                     <a:solidFill>
                       <a:srgbClr val="000000"/>
                     </a:solidFill>
@@ -9238,7 +9250,7 @@
               </a:ln>
               <a:extLst>
                 <a:ext uri="{91240B29-F687-4f45-9708-019B960494DF}">
-                  <a14:hiddenLine xmlns:a14="http://schemas.microsoft.com/office/drawing/2010/main" xmlns="" w="9525">
+                  <a14:hiddenLine xmlns="" xmlns:a14="http://schemas.microsoft.com/office/drawing/2010/main" w="9525">
                     <a:solidFill>
                       <a:srgbClr val="000000"/>
                     </a:solidFill>
@@ -9328,7 +9340,7 @@
               </a:ln>
               <a:extLst>
                 <a:ext uri="{91240B29-F687-4f45-9708-019B960494DF}">
-                  <a14:hiddenLine xmlns:a14="http://schemas.microsoft.com/office/drawing/2010/main" xmlns="" w="9525">
+                  <a14:hiddenLine xmlns="" xmlns:a14="http://schemas.microsoft.com/office/drawing/2010/main" w="9525">
                     <a:solidFill>
                       <a:srgbClr val="000000"/>
                     </a:solidFill>
@@ -9390,7 +9402,7 @@
               </a:ln>
               <a:extLst>
                 <a:ext uri="{91240B29-F687-4f45-9708-019B960494DF}">
-                  <a14:hiddenLine xmlns:a14="http://schemas.microsoft.com/office/drawing/2010/main" xmlns="" w="9525">
+                  <a14:hiddenLine xmlns="" xmlns:a14="http://schemas.microsoft.com/office/drawing/2010/main" w="9525">
                     <a:solidFill>
                       <a:srgbClr val="000000"/>
                     </a:solidFill>
@@ -9480,7 +9492,7 @@
               </a:ln>
               <a:extLst>
                 <a:ext uri="{91240B29-F687-4f45-9708-019B960494DF}">
-                  <a14:hiddenLine xmlns:a14="http://schemas.microsoft.com/office/drawing/2010/main" xmlns="" w="9525">
+                  <a14:hiddenLine xmlns="" xmlns:a14="http://schemas.microsoft.com/office/drawing/2010/main" w="9525">
                     <a:solidFill>
                       <a:srgbClr val="000000"/>
                     </a:solidFill>
@@ -9542,7 +9554,7 @@
               </a:ln>
               <a:extLst>
                 <a:ext uri="{91240B29-F687-4f45-9708-019B960494DF}">
-                  <a14:hiddenLine xmlns:a14="http://schemas.microsoft.com/office/drawing/2010/main" xmlns="" w="9525">
+                  <a14:hiddenLine xmlns="" xmlns:a14="http://schemas.microsoft.com/office/drawing/2010/main" w="9525">
                     <a:solidFill>
                       <a:srgbClr val="000000"/>
                     </a:solidFill>
@@ -9604,7 +9616,7 @@
               </a:ln>
               <a:extLst>
                 <a:ext uri="{91240B29-F687-4f45-9708-019B960494DF}">
-                  <a14:hiddenLine xmlns:a14="http://schemas.microsoft.com/office/drawing/2010/main" xmlns="" w="9525">
+                  <a14:hiddenLine xmlns="" xmlns:a14="http://schemas.microsoft.com/office/drawing/2010/main" w="9525">
                     <a:solidFill>
                       <a:srgbClr val="000000"/>
                     </a:solidFill>
@@ -9694,7 +9706,7 @@
               </a:ln>
               <a:extLst>
                 <a:ext uri="{91240B29-F687-4f45-9708-019B960494DF}">
-                  <a14:hiddenLine xmlns:a14="http://schemas.microsoft.com/office/drawing/2010/main" xmlns="" w="9525">
+                  <a14:hiddenLine xmlns="" xmlns:a14="http://schemas.microsoft.com/office/drawing/2010/main" w="9525">
                     <a:solidFill>
                       <a:srgbClr val="000000"/>
                     </a:solidFill>
@@ -9784,7 +9796,7 @@
               </a:ln>
               <a:extLst>
                 <a:ext uri="{91240B29-F687-4f45-9708-019B960494DF}">
-                  <a14:hiddenLine xmlns:a14="http://schemas.microsoft.com/office/drawing/2010/main" xmlns="" w="9525">
+                  <a14:hiddenLine xmlns="" xmlns:a14="http://schemas.microsoft.com/office/drawing/2010/main" w="9525">
                     <a:solidFill>
                       <a:srgbClr val="000000"/>
                     </a:solidFill>
@@ -9846,7 +9858,7 @@
               </a:ln>
               <a:extLst>
                 <a:ext uri="{91240B29-F687-4f45-9708-019B960494DF}">
-                  <a14:hiddenLine xmlns:a14="http://schemas.microsoft.com/office/drawing/2010/main" xmlns="" w="9525">
+                  <a14:hiddenLine xmlns="" xmlns:a14="http://schemas.microsoft.com/office/drawing/2010/main" w="9525">
                     <a:solidFill>
                       <a:srgbClr val="000000"/>
                     </a:solidFill>
@@ -9956,7 +9968,7 @@
               </a:ln>
               <a:extLst>
                 <a:ext uri="{91240B29-F687-4f45-9708-019B960494DF}">
-                  <a14:hiddenLine xmlns:a14="http://schemas.microsoft.com/office/drawing/2010/main" xmlns="" w="9525">
+                  <a14:hiddenLine xmlns="" xmlns:a14="http://schemas.microsoft.com/office/drawing/2010/main" w="9525">
                     <a:solidFill>
                       <a:srgbClr val="000000"/>
                     </a:solidFill>
@@ -10040,7 +10052,7 @@
               </a:ln>
               <a:extLst>
                 <a:ext uri="{91240B29-F687-4f45-9708-019B960494DF}">
-                  <a14:hiddenLine xmlns:a14="http://schemas.microsoft.com/office/drawing/2010/main" xmlns="" w="9525">
+                  <a14:hiddenLine xmlns="" xmlns:a14="http://schemas.microsoft.com/office/drawing/2010/main" w="9525">
                     <a:solidFill>
                       <a:srgbClr val="000000"/>
                     </a:solidFill>
@@ -10102,7 +10114,7 @@
               </a:ln>
               <a:extLst>
                 <a:ext uri="{91240B29-F687-4f45-9708-019B960494DF}">
-                  <a14:hiddenLine xmlns:a14="http://schemas.microsoft.com/office/drawing/2010/main" xmlns="" w="9525">
+                  <a14:hiddenLine xmlns="" xmlns:a14="http://schemas.microsoft.com/office/drawing/2010/main" w="9525">
                     <a:solidFill>
                       <a:srgbClr val="000000"/>
                     </a:solidFill>
@@ -10164,7 +10176,7 @@
               </a:ln>
               <a:extLst>
                 <a:ext uri="{91240B29-F687-4f45-9708-019B960494DF}">
-                  <a14:hiddenLine xmlns:a14="http://schemas.microsoft.com/office/drawing/2010/main" xmlns="" w="9525">
+                  <a14:hiddenLine xmlns="" xmlns:a14="http://schemas.microsoft.com/office/drawing/2010/main" w="9525">
                     <a:solidFill>
                       <a:srgbClr val="000000"/>
                     </a:solidFill>
@@ -10254,7 +10266,7 @@
               </a:ln>
               <a:extLst>
                 <a:ext uri="{91240B29-F687-4f45-9708-019B960494DF}">
-                  <a14:hiddenLine xmlns:a14="http://schemas.microsoft.com/office/drawing/2010/main" xmlns="" w="9525">
+                  <a14:hiddenLine xmlns="" xmlns:a14="http://schemas.microsoft.com/office/drawing/2010/main" w="9525">
                     <a:solidFill>
                       <a:srgbClr val="000000"/>
                     </a:solidFill>
@@ -10288,7 +10300,7 @@
               </a:ln>
               <a:extLst>
                 <a:ext uri="{91240B29-F687-4f45-9708-019B960494DF}">
-                  <a14:hiddenLine xmlns:a14="http://schemas.microsoft.com/office/drawing/2010/main" xmlns="" w="9525">
+                  <a14:hiddenLine xmlns="" xmlns:a14="http://schemas.microsoft.com/office/drawing/2010/main" w="9525">
                     <a:solidFill>
                       <a:srgbClr val="000000"/>
                     </a:solidFill>
@@ -10353,7 +10365,7 @@
               </a:ln>
               <a:extLst>
                 <a:ext uri="{91240B29-F687-4f45-9708-019B960494DF}">
-                  <a14:hiddenLine xmlns:a14="http://schemas.microsoft.com/office/drawing/2010/main" xmlns="" w="9525">
+                  <a14:hiddenLine xmlns="" xmlns:a14="http://schemas.microsoft.com/office/drawing/2010/main" w="9525">
                     <a:solidFill>
                       <a:srgbClr val="000000"/>
                     </a:solidFill>
@@ -10443,7 +10455,7 @@
               </a:ln>
               <a:extLst>
                 <a:ext uri="{91240B29-F687-4f45-9708-019B960494DF}">
-                  <a14:hiddenLine xmlns:a14="http://schemas.microsoft.com/office/drawing/2010/main" xmlns="" w="9525">
+                  <a14:hiddenLine xmlns="" xmlns:a14="http://schemas.microsoft.com/office/drawing/2010/main" w="9525">
                     <a:solidFill>
                       <a:srgbClr val="000000"/>
                     </a:solidFill>
@@ -10505,7 +10517,7 @@
               </a:ln>
               <a:extLst>
                 <a:ext uri="{91240B29-F687-4f45-9708-019B960494DF}">
-                  <a14:hiddenLine xmlns:a14="http://schemas.microsoft.com/office/drawing/2010/main" xmlns="" w="9525">
+                  <a14:hiddenLine xmlns="" xmlns:a14="http://schemas.microsoft.com/office/drawing/2010/main" w="9525">
                     <a:solidFill>
                       <a:srgbClr val="000000"/>
                     </a:solidFill>
@@ -10595,7 +10607,7 @@
               </a:ln>
               <a:extLst>
                 <a:ext uri="{91240B29-F687-4f45-9708-019B960494DF}">
-                  <a14:hiddenLine xmlns:a14="http://schemas.microsoft.com/office/drawing/2010/main" xmlns="" w="9525">
+                  <a14:hiddenLine xmlns="" xmlns:a14="http://schemas.microsoft.com/office/drawing/2010/main" w="9525">
                     <a:solidFill>
                       <a:srgbClr val="000000"/>
                     </a:solidFill>
@@ -10660,7 +10672,7 @@
               </a:ln>
               <a:extLst>
                 <a:ext uri="{91240B29-F687-4f45-9708-019B960494DF}">
-                  <a14:hiddenLine xmlns:a14="http://schemas.microsoft.com/office/drawing/2010/main" xmlns="" w="9525">
+                  <a14:hiddenLine xmlns="" xmlns:a14="http://schemas.microsoft.com/office/drawing/2010/main" w="9525">
                     <a:solidFill>
                       <a:srgbClr val="000000"/>
                     </a:solidFill>
@@ -10722,7 +10734,7 @@
               </a:ln>
               <a:extLst>
                 <a:ext uri="{91240B29-F687-4f45-9708-019B960494DF}">
-                  <a14:hiddenLine xmlns:a14="http://schemas.microsoft.com/office/drawing/2010/main" xmlns="" w="9525">
+                  <a14:hiddenLine xmlns="" xmlns:a14="http://schemas.microsoft.com/office/drawing/2010/main" w="9525">
                     <a:solidFill>
                       <a:srgbClr val="000000"/>
                     </a:solidFill>
@@ -10812,7 +10824,7 @@
               </a:ln>
               <a:extLst>
                 <a:ext uri="{91240B29-F687-4f45-9708-019B960494DF}">
-                  <a14:hiddenLine xmlns:a14="http://schemas.microsoft.com/office/drawing/2010/main" xmlns="" w="9525">
+                  <a14:hiddenLine xmlns="" xmlns:a14="http://schemas.microsoft.com/office/drawing/2010/main" w="9525">
                     <a:solidFill>
                       <a:srgbClr val="000000"/>
                     </a:solidFill>
@@ -10902,7 +10914,7 @@
               </a:ln>
               <a:extLst>
                 <a:ext uri="{91240B29-F687-4f45-9708-019B960494DF}">
-                  <a14:hiddenLine xmlns:a14="http://schemas.microsoft.com/office/drawing/2010/main" xmlns="" w="9525">
+                  <a14:hiddenLine xmlns="" xmlns:a14="http://schemas.microsoft.com/office/drawing/2010/main" w="9525">
                     <a:solidFill>
                       <a:srgbClr val="000000"/>
                     </a:solidFill>
@@ -10967,7 +10979,7 @@
               </a:ln>
               <a:extLst>
                 <a:ext uri="{91240B29-F687-4f45-9708-019B960494DF}">
-                  <a14:hiddenLine xmlns:a14="http://schemas.microsoft.com/office/drawing/2010/main" xmlns="" w="9525">
+                  <a14:hiddenLine xmlns="" xmlns:a14="http://schemas.microsoft.com/office/drawing/2010/main" w="9525">
                     <a:solidFill>
                       <a:srgbClr val="000000"/>
                     </a:solidFill>
@@ -11087,7 +11099,7 @@
               </a:ln>
               <a:extLst>
                 <a:ext uri="{91240B29-F687-4f45-9708-019B960494DF}">
-                  <a14:hiddenLine xmlns:a14="http://schemas.microsoft.com/office/drawing/2010/main" xmlns="" w="9525">
+                  <a14:hiddenLine xmlns="" xmlns:a14="http://schemas.microsoft.com/office/drawing/2010/main" w="9525">
                     <a:solidFill>
                       <a:srgbClr val="000000"/>
                     </a:solidFill>
@@ -11168,7 +11180,7 @@
               </a:ln>
               <a:extLst>
                 <a:ext uri="{91240B29-F687-4f45-9708-019B960494DF}">
-                  <a14:hiddenLine xmlns:a14="http://schemas.microsoft.com/office/drawing/2010/main" xmlns="" w="9525">
+                  <a14:hiddenLine xmlns="" xmlns:a14="http://schemas.microsoft.com/office/drawing/2010/main" w="9525">
                     <a:solidFill>
                       <a:srgbClr val="000000"/>
                     </a:solidFill>
@@ -11283,7 +11295,7 @@
               </a:ln>
               <a:extLst>
                 <a:ext uri="{91240B29-F687-4f45-9708-019B960494DF}">
-                  <a14:hiddenLine xmlns:a14="http://schemas.microsoft.com/office/drawing/2010/main" xmlns="" w="9525">
+                  <a14:hiddenLine xmlns="" xmlns:a14="http://schemas.microsoft.com/office/drawing/2010/main" w="9525">
                     <a:solidFill>
                       <a:srgbClr val="000000"/>
                     </a:solidFill>
@@ -11373,7 +11385,7 @@
               </a:ln>
               <a:extLst>
                 <a:ext uri="{91240B29-F687-4f45-9708-019B960494DF}">
-                  <a14:hiddenLine xmlns:a14="http://schemas.microsoft.com/office/drawing/2010/main" xmlns="" w="9525">
+                  <a14:hiddenLine xmlns="" xmlns:a14="http://schemas.microsoft.com/office/drawing/2010/main" w="9525">
                     <a:solidFill>
                       <a:srgbClr val="000000"/>
                     </a:solidFill>
@@ -11438,7 +11450,7 @@
               </a:ln>
               <a:extLst>
                 <a:ext uri="{91240B29-F687-4f45-9708-019B960494DF}">
-                  <a14:hiddenLine xmlns:a14="http://schemas.microsoft.com/office/drawing/2010/main" xmlns="" w="9525">
+                  <a14:hiddenLine xmlns="" xmlns:a14="http://schemas.microsoft.com/office/drawing/2010/main" w="9525">
                     <a:solidFill>
                       <a:srgbClr val="000000"/>
                     </a:solidFill>
@@ -11528,7 +11540,7 @@
               </a:ln>
               <a:extLst>
                 <a:ext uri="{91240B29-F687-4f45-9708-019B960494DF}">
-                  <a14:hiddenLine xmlns:a14="http://schemas.microsoft.com/office/drawing/2010/main" xmlns="" w="9525">
+                  <a14:hiddenLine xmlns="" xmlns:a14="http://schemas.microsoft.com/office/drawing/2010/main" w="9525">
                     <a:solidFill>
                       <a:srgbClr val="000000"/>
                     </a:solidFill>
@@ -11596,7 +11608,7 @@
               </a:ln>
               <a:extLst>
                 <a:ext uri="{91240B29-F687-4f45-9708-019B960494DF}">
-                  <a14:hiddenLine xmlns:a14="http://schemas.microsoft.com/office/drawing/2010/main" xmlns="" w="9525">
+                  <a14:hiddenLine xmlns="" xmlns:a14="http://schemas.microsoft.com/office/drawing/2010/main" w="9525">
                     <a:solidFill>
                       <a:srgbClr val="000000"/>
                     </a:solidFill>
@@ -11686,7 +11698,7 @@
               </a:ln>
               <a:extLst>
                 <a:ext uri="{91240B29-F687-4f45-9708-019B960494DF}">
-                  <a14:hiddenLine xmlns:a14="http://schemas.microsoft.com/office/drawing/2010/main" xmlns="" w="9525">
+                  <a14:hiddenLine xmlns="" xmlns:a14="http://schemas.microsoft.com/office/drawing/2010/main" w="9525">
                     <a:solidFill>
                       <a:srgbClr val="000000"/>
                     </a:solidFill>
@@ -11754,7 +11766,7 @@
               </a:ln>
               <a:extLst>
                 <a:ext uri="{91240B29-F687-4f45-9708-019B960494DF}">
-                  <a14:hiddenLine xmlns:a14="http://schemas.microsoft.com/office/drawing/2010/main" xmlns="" w="9525">
+                  <a14:hiddenLine xmlns="" xmlns:a14="http://schemas.microsoft.com/office/drawing/2010/main" w="9525">
                     <a:solidFill>
                       <a:srgbClr val="000000"/>
                     </a:solidFill>
@@ -11844,7 +11856,7 @@
               </a:ln>
               <a:extLst>
                 <a:ext uri="{91240B29-F687-4f45-9708-019B960494DF}">
-                  <a14:hiddenLine xmlns:a14="http://schemas.microsoft.com/office/drawing/2010/main" xmlns="" w="9525">
+                  <a14:hiddenLine xmlns="" xmlns:a14="http://schemas.microsoft.com/office/drawing/2010/main" w="9525">
                     <a:solidFill>
                       <a:srgbClr val="000000"/>
                     </a:solidFill>
@@ -11878,7 +11890,7 @@
               </a:ln>
               <a:extLst>
                 <a:ext uri="{91240B29-F687-4f45-9708-019B960494DF}">
-                  <a14:hiddenLine xmlns:a14="http://schemas.microsoft.com/office/drawing/2010/main" xmlns="" w="9525">
+                  <a14:hiddenLine xmlns="" xmlns:a14="http://schemas.microsoft.com/office/drawing/2010/main" w="9525">
                     <a:solidFill>
                       <a:srgbClr val="000000"/>
                     </a:solidFill>
@@ -12018,7 +12030,7 @@
           <a:p>
             <a:fld id="{6AC27FFC-58F7-4A0B-910F-2453E6738501}" type="datetimeFigureOut">
               <a:rPr lang="ru-RU" smtClean="0"/>
-              <a:t>27.08.2026</a:t>
+              <a:t>30.08.2026</a:t>
             </a:fld>
             <a:endParaRPr lang="ru-RU"/>
           </a:p>
@@ -12459,10 +12471,6 @@
               <a:rPr lang="ru-RU" dirty="0"/>
               <a:t>Архитектура сетей и показатели производительности </a:t>
             </a:r>
-            <a:r>
-              <a:rPr lang="ru-RU" dirty="0"/>
-              <a:t/>
-            </a:r>
             <a:br>
               <a:rPr lang="ru-RU" dirty="0"/>
             </a:br>
@@ -12965,6 +12973,2582 @@
 </p:sld>
 </file>
 
+<file path=ppt/slides/slide13.xml><?xml version="1.0" encoding="utf-8"?>
+<p:sld xmlns:a="http://schemas.openxmlformats.org/drawingml/2006/main" xmlns:r="http://schemas.openxmlformats.org/officeDocument/2006/relationships" xmlns:p="http://schemas.openxmlformats.org/presentationml/2006/main">
+  <p:cSld>
+    <p:spTree>
+      <p:nvGrpSpPr>
+        <p:cNvPr id="1" name=""/>
+        <p:cNvGrpSpPr/>
+        <p:nvPr/>
+      </p:nvGrpSpPr>
+      <p:grpSpPr>
+        <a:xfrm>
+          <a:off x="0" y="0"/>
+          <a:ext cx="0" cy="0"/>
+          <a:chOff x="0" y="0"/>
+          <a:chExt cx="0" cy="0"/>
+        </a:xfrm>
+      </p:grpSpPr>
+      <p:sp>
+        <p:nvSpPr>
+          <p:cNvPr id="2" name="Заголовок 1"/>
+          <p:cNvSpPr>
+            <a:spLocks noGrp="1"/>
+          </p:cNvSpPr>
+          <p:nvPr>
+            <p:ph type="title"/>
+          </p:nvPr>
+        </p:nvSpPr>
+        <p:spPr/>
+        <p:txBody>
+          <a:bodyPr>
+            <a:normAutofit fontScale="90000"/>
+          </a:bodyPr>
+          <a:lstStyle/>
+          <a:p>
+            <a:r>
+              <a:rPr lang="ru-RU" b="1" dirty="0"/>
+              <a:t>«Путь конверта» (Инкапсуляция)</a:t>
+            </a:r>
+            <a:br>
+              <a:rPr lang="ru-RU" b="1" dirty="0"/>
+            </a:br>
+            <a:r>
+              <a:rPr lang="ru-RU" i="1" dirty="0"/>
+              <a:t>Формат: расставьте шаги в правильном порядке от отправки до получения.</a:t>
+            </a:r>
+            <a:r>
+              <a:rPr lang="ru-RU" dirty="0"/>
+              <a:t/>
+            </a:r>
+            <a:br>
+              <a:rPr lang="ru-RU" dirty="0"/>
+            </a:br>
+            <a:endParaRPr lang="ru-RU" dirty="0"/>
+          </a:p>
+        </p:txBody>
+      </p:sp>
+      <p:sp>
+        <p:nvSpPr>
+          <p:cNvPr id="3" name="Объект 2"/>
+          <p:cNvSpPr>
+            <a:spLocks noGrp="1"/>
+          </p:cNvSpPr>
+          <p:nvPr>
+            <p:ph idx="1"/>
+          </p:nvPr>
+        </p:nvSpPr>
+        <p:spPr/>
+        <p:txBody>
+          <a:bodyPr>
+            <a:normAutofit fontScale="92500" lnSpcReduction="20000"/>
+          </a:bodyPr>
+          <a:lstStyle/>
+          <a:p>
+            <a:r>
+              <a:rPr lang="ru-RU" b="1" dirty="0"/>
+              <a:t>А)</a:t>
+            </a:r>
+            <a:r>
+              <a:rPr lang="ru-RU" dirty="0"/>
+              <a:t> Канальный уровень добавляет заголовок и </a:t>
+            </a:r>
+            <a:r>
+              <a:rPr lang="ru-RU" dirty="0" err="1"/>
+              <a:t>концевик</a:t>
+            </a:r>
+            <a:r>
+              <a:rPr lang="ru-RU" dirty="0"/>
+              <a:t> (трейлер), формируя </a:t>
+            </a:r>
+            <a:r>
+              <a:rPr lang="ru-RU" i="1" dirty="0"/>
+              <a:t>кадр</a:t>
+            </a:r>
+            <a:r>
+              <a:rPr lang="ru-RU" dirty="0"/>
+              <a:t>.</a:t>
+            </a:r>
+          </a:p>
+          <a:p>
+            <a:r>
+              <a:rPr lang="ru-RU" b="1" dirty="0"/>
+              <a:t>Б)</a:t>
+            </a:r>
+            <a:r>
+              <a:rPr lang="ru-RU" dirty="0"/>
+              <a:t> Физический уровень передаёт </a:t>
+            </a:r>
+            <a:r>
+              <a:rPr lang="ru-RU" i="1" dirty="0"/>
+              <a:t>сырые биты</a:t>
+            </a:r>
+            <a:r>
+              <a:rPr lang="ru-RU" dirty="0"/>
+              <a:t> по кабелю / радиоканалу.</a:t>
+            </a:r>
+          </a:p>
+          <a:p>
+            <a:r>
+              <a:rPr lang="ru-RU" b="1" dirty="0"/>
+              <a:t>В)</a:t>
+            </a:r>
+            <a:r>
+              <a:rPr lang="ru-RU" dirty="0"/>
+              <a:t> Сетевой уровень разбивает данные на </a:t>
+            </a:r>
+            <a:r>
+              <a:rPr lang="ru-RU" i="1" dirty="0"/>
+              <a:t>пакеты</a:t>
+            </a:r>
+            <a:r>
+              <a:rPr lang="ru-RU" dirty="0"/>
+              <a:t> и добавляет заголовок маршрутизации.</a:t>
+            </a:r>
+          </a:p>
+          <a:p>
+            <a:r>
+              <a:rPr lang="ru-RU" b="1" dirty="0"/>
+              <a:t>Г)</a:t>
+            </a:r>
+            <a:r>
+              <a:rPr lang="ru-RU" dirty="0"/>
+              <a:t> Прикладной уровень генерирует исходное сообщение M</a:t>
+            </a:r>
+            <a:r>
+              <a:rPr lang="ru-RU" i="1" dirty="0"/>
+              <a:t>M</a:t>
+            </a:r>
+            <a:r>
+              <a:rPr lang="ru-RU" dirty="0"/>
+              <a:t>.</a:t>
+            </a:r>
+          </a:p>
+          <a:p>
+            <a:r>
+              <a:rPr lang="ru-RU" b="1" dirty="0"/>
+              <a:t>Д)</a:t>
+            </a:r>
+            <a:r>
+              <a:rPr lang="ru-RU" dirty="0"/>
+              <a:t> Транспортный уровень добавляет свой заголовок (управляющую информацию и адреса портов).</a:t>
+            </a:r>
+          </a:p>
+          <a:p>
+            <a:endParaRPr lang="ru-RU" dirty="0"/>
+          </a:p>
+        </p:txBody>
+      </p:sp>
+    </p:spTree>
+    <p:extLst>
+      <p:ext uri="{BB962C8B-B14F-4D97-AF65-F5344CB8AC3E}">
+        <p14:creationId xmlns:p14="http://schemas.microsoft.com/office/powerpoint/2010/main" val="597210264"/>
+      </p:ext>
+    </p:extLst>
+  </p:cSld>
+  <p:clrMapOvr>
+    <a:masterClrMapping/>
+  </p:clrMapOvr>
+</p:sld>
+</file>
+
+<file path=ppt/slides/slide14.xml><?xml version="1.0" encoding="utf-8"?>
+<p:sld xmlns:a="http://schemas.openxmlformats.org/drawingml/2006/main" xmlns:r="http://schemas.openxmlformats.org/officeDocument/2006/relationships" xmlns:p="http://schemas.openxmlformats.org/presentationml/2006/main">
+  <p:cSld>
+    <p:spTree>
+      <p:nvGrpSpPr>
+        <p:cNvPr id="1" name=""/>
+        <p:cNvGrpSpPr/>
+        <p:nvPr/>
+      </p:nvGrpSpPr>
+      <p:grpSpPr>
+        <a:xfrm>
+          <a:off x="0" y="0"/>
+          <a:ext cx="0" cy="0"/>
+          <a:chOff x="0" y="0"/>
+          <a:chExt cx="0" cy="0"/>
+        </a:xfrm>
+      </p:grpSpPr>
+      <p:sp>
+        <p:nvSpPr>
+          <p:cNvPr id="2" name="Заголовок 1"/>
+          <p:cNvSpPr>
+            <a:spLocks noGrp="1"/>
+          </p:cNvSpPr>
+          <p:nvPr>
+            <p:ph type="title"/>
+          </p:nvPr>
+        </p:nvSpPr>
+        <p:spPr/>
+        <p:txBody>
+          <a:bodyPr>
+            <a:normAutofit fontScale="90000"/>
+          </a:bodyPr>
+          <a:lstStyle/>
+          <a:p>
+            <a:r>
+              <a:rPr lang="ru-RU" dirty="0"/>
+              <a:t>Как официально называется «порция данных» на каждом из уровней? Соедините пары:</a:t>
+            </a:r>
+            <a:endParaRPr lang="ru-RU" dirty="0"/>
+          </a:p>
+        </p:txBody>
+      </p:sp>
+      <p:sp>
+        <p:nvSpPr>
+          <p:cNvPr id="3" name="Объект 2"/>
+          <p:cNvSpPr>
+            <a:spLocks noGrp="1"/>
+          </p:cNvSpPr>
+          <p:nvPr>
+            <p:ph idx="1"/>
+          </p:nvPr>
+        </p:nvSpPr>
+        <p:spPr/>
+        <p:txBody>
+          <a:bodyPr/>
+          <a:lstStyle/>
+          <a:p>
+            <a:r>
+              <a:rPr lang="ru-RU" b="1" dirty="0"/>
+              <a:t>Транспортный уровень (</a:t>
+            </a:r>
+            <a:r>
+              <a:rPr lang="ru-RU" b="1" dirty="0" err="1"/>
+              <a:t>Layer</a:t>
+            </a:r>
+            <a:r>
+              <a:rPr lang="ru-RU" b="1" dirty="0"/>
+              <a:t> 4)</a:t>
+            </a:r>
+            <a:r>
+              <a:rPr lang="ru-RU" dirty="0"/>
+              <a:t> →→ ???</a:t>
+            </a:r>
+          </a:p>
+          <a:p>
+            <a:r>
+              <a:rPr lang="ru-RU" b="1" dirty="0"/>
+              <a:t>Сетевой уровень (</a:t>
+            </a:r>
+            <a:r>
+              <a:rPr lang="ru-RU" b="1" dirty="0" err="1"/>
+              <a:t>Layer</a:t>
+            </a:r>
+            <a:r>
+              <a:rPr lang="ru-RU" b="1" dirty="0"/>
+              <a:t> 3)</a:t>
+            </a:r>
+            <a:r>
+              <a:rPr lang="ru-RU" dirty="0"/>
+              <a:t> →→ ???</a:t>
+            </a:r>
+          </a:p>
+          <a:p>
+            <a:r>
+              <a:rPr lang="ru-RU" b="1" dirty="0"/>
+              <a:t>Канальный уровень (</a:t>
+            </a:r>
+            <a:r>
+              <a:rPr lang="ru-RU" b="1" dirty="0" err="1"/>
+              <a:t>Layer</a:t>
+            </a:r>
+            <a:r>
+              <a:rPr lang="ru-RU" b="1" dirty="0"/>
+              <a:t> 2)</a:t>
+            </a:r>
+            <a:r>
+              <a:rPr lang="ru-RU" dirty="0"/>
+              <a:t> →→ ???</a:t>
+            </a:r>
+          </a:p>
+          <a:p>
+            <a:r>
+              <a:rPr lang="ru-RU" b="1" dirty="0"/>
+              <a:t>Физический уровень (</a:t>
+            </a:r>
+            <a:r>
+              <a:rPr lang="ru-RU" b="1" dirty="0" err="1"/>
+              <a:t>Layer</a:t>
+            </a:r>
+            <a:r>
+              <a:rPr lang="ru-RU" b="1" dirty="0"/>
+              <a:t> 1)</a:t>
+            </a:r>
+            <a:r>
+              <a:rPr lang="ru-RU" dirty="0"/>
+              <a:t> →→ ???</a:t>
+            </a:r>
+          </a:p>
+          <a:p>
+            <a:pPr marL="0" indent="0">
+              <a:buNone/>
+            </a:pPr>
+            <a:r>
+              <a:rPr lang="ru-RU" i="1" dirty="0"/>
+              <a:t>(Варианты: Бит, Сегмент, Кадр/Фрейм, Пакет)</a:t>
+            </a:r>
+            <a:endParaRPr lang="ru-RU" dirty="0"/>
+          </a:p>
+        </p:txBody>
+      </p:sp>
+    </p:spTree>
+    <p:extLst>
+      <p:ext uri="{BB962C8B-B14F-4D97-AF65-F5344CB8AC3E}">
+        <p14:creationId xmlns:p14="http://schemas.microsoft.com/office/powerpoint/2010/main" val="3149630925"/>
+      </p:ext>
+    </p:extLst>
+  </p:cSld>
+  <p:clrMapOvr>
+    <a:masterClrMapping/>
+  </p:clrMapOvr>
+</p:sld>
+</file>
+
+<file path=ppt/slides/slide15.xml><?xml version="1.0" encoding="utf-8"?>
+<p:sld xmlns:a="http://schemas.openxmlformats.org/drawingml/2006/main" xmlns:r="http://schemas.openxmlformats.org/officeDocument/2006/relationships" xmlns:p="http://schemas.openxmlformats.org/presentationml/2006/main">
+  <p:cSld>
+    <p:spTree>
+      <p:nvGrpSpPr>
+        <p:cNvPr id="1" name=""/>
+        <p:cNvGrpSpPr/>
+        <p:nvPr/>
+      </p:nvGrpSpPr>
+      <p:grpSpPr>
+        <a:xfrm>
+          <a:off x="0" y="0"/>
+          <a:ext cx="0" cy="0"/>
+          <a:chOff x="0" y="0"/>
+          <a:chExt cx="0" cy="0"/>
+        </a:xfrm>
+      </p:grpSpPr>
+      <p:sp>
+        <p:nvSpPr>
+          <p:cNvPr id="2" name="Заголовок 1"/>
+          <p:cNvSpPr>
+            <a:spLocks noGrp="1"/>
+          </p:cNvSpPr>
+          <p:nvPr>
+            <p:ph type="title"/>
+          </p:nvPr>
+        </p:nvSpPr>
+        <p:spPr/>
+        <p:txBody>
+          <a:bodyPr>
+            <a:normAutofit fontScale="90000"/>
+          </a:bodyPr>
+          <a:lstStyle/>
+          <a:p>
+            <a:r>
+              <a:rPr lang="ru-RU" dirty="0"/>
+              <a:t>Разделите сущности на </a:t>
+            </a:r>
+            <a:r>
+              <a:rPr lang="ru-RU" b="1" dirty="0"/>
+              <a:t>«С установлением соединения»</a:t>
+            </a:r>
+            <a:r>
+              <a:rPr lang="ru-RU" dirty="0"/>
+              <a:t> и </a:t>
+            </a:r>
+            <a:r>
+              <a:rPr lang="ru-RU" b="1" dirty="0"/>
+              <a:t>«Без установления соединения»</a:t>
+            </a:r>
+            <a:r>
+              <a:rPr lang="ru-RU" dirty="0"/>
+              <a:t>:</a:t>
+            </a:r>
+            <a:endParaRPr lang="ru-RU" dirty="0"/>
+          </a:p>
+        </p:txBody>
+      </p:sp>
+      <p:sp>
+        <p:nvSpPr>
+          <p:cNvPr id="3" name="Объект 2"/>
+          <p:cNvSpPr>
+            <a:spLocks noGrp="1"/>
+          </p:cNvSpPr>
+          <p:nvPr>
+            <p:ph idx="1"/>
+          </p:nvPr>
+        </p:nvSpPr>
+        <p:spPr/>
+        <p:txBody>
+          <a:bodyPr/>
+          <a:lstStyle/>
+          <a:p>
+            <a:r>
+              <a:rPr lang="ru-RU" dirty="0"/>
+              <a:t>Телефонный звонок другу.</a:t>
+            </a:r>
+          </a:p>
+          <a:p>
+            <a:r>
+              <a:rPr lang="ru-RU" dirty="0"/>
+              <a:t>Бумажное письмо в почтовом конверте.</a:t>
+            </a:r>
+          </a:p>
+          <a:p>
+            <a:r>
+              <a:rPr lang="ru-RU" dirty="0"/>
+              <a:t>Протокол TCP.</a:t>
+            </a:r>
+          </a:p>
+          <a:p>
+            <a:r>
+              <a:rPr lang="ru-RU" dirty="0"/>
+              <a:t>Протокол UDP.</a:t>
+            </a:r>
+          </a:p>
+        </p:txBody>
+      </p:sp>
+    </p:spTree>
+    <p:extLst>
+      <p:ext uri="{BB962C8B-B14F-4D97-AF65-F5344CB8AC3E}">
+        <p14:creationId xmlns:p14="http://schemas.microsoft.com/office/powerpoint/2010/main" val="3797661691"/>
+      </p:ext>
+    </p:extLst>
+  </p:cSld>
+  <p:clrMapOvr>
+    <a:masterClrMapping/>
+  </p:clrMapOvr>
+</p:sld>
+</file>
+
+<file path=ppt/slides/slide16.xml><?xml version="1.0" encoding="utf-8"?>
+<p:sld xmlns:a="http://schemas.openxmlformats.org/drawingml/2006/main" xmlns:r="http://schemas.openxmlformats.org/officeDocument/2006/relationships" xmlns:p="http://schemas.openxmlformats.org/presentationml/2006/main">
+  <p:cSld>
+    <p:spTree>
+      <p:nvGrpSpPr>
+        <p:cNvPr id="1" name=""/>
+        <p:cNvGrpSpPr/>
+        <p:nvPr/>
+      </p:nvGrpSpPr>
+      <p:grpSpPr>
+        <a:xfrm>
+          <a:off x="0" y="0"/>
+          <a:ext cx="0" cy="0"/>
+          <a:chOff x="0" y="0"/>
+          <a:chExt cx="0" cy="0"/>
+        </a:xfrm>
+      </p:grpSpPr>
+      <p:sp>
+        <p:nvSpPr>
+          <p:cNvPr id="2" name="Заголовок 1"/>
+          <p:cNvSpPr>
+            <a:spLocks noGrp="1"/>
+          </p:cNvSpPr>
+          <p:nvPr>
+            <p:ph type="title"/>
+          </p:nvPr>
+        </p:nvSpPr>
+        <p:spPr/>
+        <p:txBody>
+          <a:bodyPr/>
+          <a:lstStyle/>
+          <a:p>
+            <a:r>
+              <a:rPr lang="af-ZA" b="1" dirty="0"/>
+              <a:t>Bandwidth vs </a:t>
+            </a:r>
+            <a:r>
+              <a:rPr lang="af-ZA" b="1" dirty="0" smtClean="0"/>
+              <a:t>Throughput</a:t>
+            </a:r>
+            <a:endParaRPr lang="ru-RU" dirty="0"/>
+          </a:p>
+        </p:txBody>
+      </p:sp>
+      <p:sp>
+        <p:nvSpPr>
+          <p:cNvPr id="3" name="Объект 2"/>
+          <p:cNvSpPr>
+            <a:spLocks noGrp="1"/>
+          </p:cNvSpPr>
+          <p:nvPr>
+            <p:ph idx="1"/>
+          </p:nvPr>
+        </p:nvSpPr>
+        <p:spPr/>
+        <p:txBody>
+          <a:bodyPr/>
+          <a:lstStyle/>
+          <a:p>
+            <a:pPr marL="0" indent="0">
+              <a:buNone/>
+            </a:pPr>
+            <a:r>
+              <a:rPr lang="ru-RU" i="1" dirty="0"/>
+              <a:t>«Тариф вашего домашнего интернета — </a:t>
+            </a:r>
+            <a:r>
+              <a:rPr lang="ru-RU" b="1" i="1" dirty="0"/>
+              <a:t>500 Мбит/с</a:t>
+            </a:r>
+            <a:r>
+              <a:rPr lang="ru-RU" i="1" dirty="0"/>
+              <a:t>. Однако при скачивании игры реальная средняя скорость загрузки составила </a:t>
+            </a:r>
+            <a:r>
+              <a:rPr lang="ru-RU" b="1" i="1" dirty="0"/>
+              <a:t>320 Мбит/с</a:t>
+            </a:r>
+            <a:r>
+              <a:rPr lang="ru-RU" i="1" dirty="0" smtClean="0"/>
+              <a:t>».</a:t>
+            </a:r>
+            <a:endParaRPr lang="en-US" i="1" dirty="0" smtClean="0"/>
+          </a:p>
+          <a:p>
+            <a:pPr marL="0" indent="0">
+              <a:buNone/>
+            </a:pPr>
+            <a:r>
+              <a:rPr lang="ru-RU" b="1" dirty="0"/>
+              <a:t>Вопрос:</a:t>
+            </a:r>
+            <a:r>
+              <a:rPr lang="ru-RU" dirty="0"/>
+              <a:t> Какое из этих двух чисел является </a:t>
+            </a:r>
+            <a:r>
+              <a:rPr lang="ru-RU" b="1" dirty="0" err="1"/>
+              <a:t>Bandwidth</a:t>
+            </a:r>
+            <a:r>
+              <a:rPr lang="ru-RU" dirty="0"/>
+              <a:t> (пропускной способностью канала), а какое — </a:t>
+            </a:r>
+            <a:r>
+              <a:rPr lang="ru-RU" b="1" dirty="0" err="1"/>
+              <a:t>Throughput</a:t>
+            </a:r>
+            <a:r>
+              <a:rPr lang="ru-RU" dirty="0"/>
+              <a:t> (реальной пропускной способностью)?</a:t>
+            </a:r>
+            <a:endParaRPr lang="en-US" i="1" dirty="0"/>
+          </a:p>
+        </p:txBody>
+      </p:sp>
+    </p:spTree>
+    <p:extLst>
+      <p:ext uri="{BB962C8B-B14F-4D97-AF65-F5344CB8AC3E}">
+        <p14:creationId xmlns:p14="http://schemas.microsoft.com/office/powerpoint/2010/main" val="3784396190"/>
+      </p:ext>
+    </p:extLst>
+  </p:cSld>
+  <p:clrMapOvr>
+    <a:masterClrMapping/>
+  </p:clrMapOvr>
+</p:sld>
+</file>
+
+<file path=ppt/slides/slide17.xml><?xml version="1.0" encoding="utf-8"?>
+<p:sld xmlns:a="http://schemas.openxmlformats.org/drawingml/2006/main" xmlns:r="http://schemas.openxmlformats.org/officeDocument/2006/relationships" xmlns:p="http://schemas.openxmlformats.org/presentationml/2006/main">
+  <p:cSld>
+    <p:spTree>
+      <p:nvGrpSpPr>
+        <p:cNvPr id="1" name=""/>
+        <p:cNvGrpSpPr/>
+        <p:nvPr/>
+      </p:nvGrpSpPr>
+      <p:grpSpPr>
+        <a:xfrm>
+          <a:off x="0" y="0"/>
+          <a:ext cx="0" cy="0"/>
+          <a:chOff x="0" y="0"/>
+          <a:chExt cx="0" cy="0"/>
+        </a:xfrm>
+      </p:grpSpPr>
+      <p:sp>
+        <p:nvSpPr>
+          <p:cNvPr id="2" name="Заголовок 1"/>
+          <p:cNvSpPr>
+            <a:spLocks noGrp="1"/>
+          </p:cNvSpPr>
+          <p:nvPr>
+            <p:ph type="title"/>
+          </p:nvPr>
+        </p:nvSpPr>
+        <p:spPr/>
+        <p:txBody>
+          <a:bodyPr/>
+          <a:lstStyle/>
+          <a:p>
+            <a:r>
+              <a:rPr lang="ru-RU" b="1" dirty="0"/>
+              <a:t>Какая сетевая характеристика вызывает эту проблему?</a:t>
+            </a:r>
+            <a:endParaRPr lang="ru-RU" dirty="0"/>
+          </a:p>
+        </p:txBody>
+      </p:sp>
+      <p:sp>
+        <p:nvSpPr>
+          <p:cNvPr id="3" name="Объект 2"/>
+          <p:cNvSpPr>
+            <a:spLocks noGrp="1"/>
+          </p:cNvSpPr>
+          <p:nvPr>
+            <p:ph idx="1"/>
+          </p:nvPr>
+        </p:nvSpPr>
+        <p:spPr>
+          <a:xfrm>
+            <a:off x="1141412" y="2249486"/>
+            <a:ext cx="9905999" cy="3975467"/>
+          </a:xfrm>
+        </p:spPr>
+        <p:txBody>
+          <a:bodyPr>
+            <a:normAutofit lnSpcReduction="10000"/>
+          </a:bodyPr>
+          <a:lstStyle/>
+          <a:p>
+            <a:pPr marL="0" indent="0">
+              <a:buNone/>
+            </a:pPr>
+            <a:r>
+              <a:rPr lang="ru-RU" dirty="0"/>
+              <a:t>Во время </a:t>
+            </a:r>
+            <a:r>
+              <a:rPr lang="ru-RU" dirty="0" err="1"/>
+              <a:t>видеозвонка</a:t>
+            </a:r>
+            <a:r>
+              <a:rPr lang="ru-RU" dirty="0"/>
+              <a:t> собеседник слышит ваш голос то с ускорением, то с паузами («заикание»), хотя средняя задержка не превышает 40 </a:t>
+            </a:r>
+            <a:r>
+              <a:rPr lang="ru-RU" dirty="0" err="1"/>
+              <a:t>мс</a:t>
+            </a:r>
+            <a:r>
+              <a:rPr lang="ru-RU" dirty="0"/>
+              <a:t>. Пакеты отправлялись стабильно каждые 30 </a:t>
+            </a:r>
+            <a:r>
+              <a:rPr lang="ru-RU" dirty="0" err="1"/>
+              <a:t>мс</a:t>
+            </a:r>
+            <a:r>
+              <a:rPr lang="ru-RU" dirty="0"/>
+              <a:t>, но доходили с интервалами: </a:t>
+            </a:r>
+            <a:r>
+              <a:rPr lang="ru-RU" b="1" dirty="0"/>
+              <a:t>30 </a:t>
+            </a:r>
+            <a:r>
+              <a:rPr lang="ru-RU" b="1" dirty="0" err="1"/>
+              <a:t>мс</a:t>
+            </a:r>
+            <a:r>
+              <a:rPr lang="ru-RU" b="1" dirty="0"/>
+              <a:t> →→ 95 </a:t>
+            </a:r>
+            <a:r>
+              <a:rPr lang="ru-RU" b="1" dirty="0" err="1"/>
+              <a:t>мс</a:t>
+            </a:r>
+            <a:r>
+              <a:rPr lang="ru-RU" b="1" dirty="0"/>
+              <a:t> →→ 15 </a:t>
+            </a:r>
+            <a:r>
+              <a:rPr lang="ru-RU" b="1" dirty="0" err="1"/>
+              <a:t>мс</a:t>
+            </a:r>
+            <a:r>
+              <a:rPr lang="ru-RU" b="1" dirty="0"/>
+              <a:t> →→ 120 </a:t>
+            </a:r>
+            <a:r>
+              <a:rPr lang="ru-RU" b="1" dirty="0" err="1"/>
+              <a:t>мс</a:t>
+            </a:r>
+            <a:r>
+              <a:rPr lang="ru-RU" dirty="0" smtClean="0"/>
+              <a:t>.</a:t>
+            </a:r>
+            <a:endParaRPr lang="en-US" dirty="0" smtClean="0"/>
+          </a:p>
+          <a:p>
+            <a:r>
+              <a:rPr lang="ru-RU" b="1" dirty="0"/>
+              <a:t>А)</a:t>
+            </a:r>
+            <a:r>
+              <a:rPr lang="ru-RU" dirty="0"/>
+              <a:t> Слишком низкий RTT</a:t>
+            </a:r>
+          </a:p>
+          <a:p>
+            <a:r>
+              <a:rPr lang="ru-RU" b="1" dirty="0"/>
+              <a:t>Б)</a:t>
+            </a:r>
+            <a:r>
+              <a:rPr lang="ru-RU" dirty="0"/>
+              <a:t> Высокий </a:t>
+            </a:r>
+            <a:r>
+              <a:rPr lang="ru-RU" dirty="0" err="1"/>
+              <a:t>джиттер</a:t>
+            </a:r>
+            <a:r>
+              <a:rPr lang="ru-RU" dirty="0"/>
+              <a:t> (</a:t>
+            </a:r>
+            <a:r>
+              <a:rPr lang="ru-RU" dirty="0" err="1"/>
+              <a:t>Jitter</a:t>
+            </a:r>
+            <a:r>
+              <a:rPr lang="ru-RU" dirty="0"/>
+              <a:t>)</a:t>
+            </a:r>
+          </a:p>
+          <a:p>
+            <a:r>
+              <a:rPr lang="ru-RU" b="1" dirty="0"/>
+              <a:t>В)</a:t>
+            </a:r>
+            <a:r>
+              <a:rPr lang="ru-RU" dirty="0"/>
+              <a:t> Неправильная </a:t>
+            </a:r>
+            <a:r>
+              <a:rPr lang="ru-RU" dirty="0" err="1"/>
+              <a:t>декапсуляция</a:t>
+            </a:r>
+            <a:endParaRPr lang="ru-RU" dirty="0"/>
+          </a:p>
+          <a:p>
+            <a:r>
+              <a:rPr lang="ru-RU" b="1" dirty="0"/>
+              <a:t>Г)</a:t>
+            </a:r>
+            <a:r>
+              <a:rPr lang="ru-RU" dirty="0"/>
+              <a:t> Переход с модели OSI на TCP/IP</a:t>
+            </a:r>
+          </a:p>
+          <a:p>
+            <a:pPr marL="0" indent="0">
+              <a:buNone/>
+            </a:pPr>
+            <a:endParaRPr lang="en-US" dirty="0"/>
+          </a:p>
+        </p:txBody>
+      </p:sp>
+    </p:spTree>
+    <p:extLst>
+      <p:ext uri="{BB962C8B-B14F-4D97-AF65-F5344CB8AC3E}">
+        <p14:creationId xmlns:p14="http://schemas.microsoft.com/office/powerpoint/2010/main" val="2529589641"/>
+      </p:ext>
+    </p:extLst>
+  </p:cSld>
+  <p:clrMapOvr>
+    <a:masterClrMapping/>
+  </p:clrMapOvr>
+</p:sld>
+</file>
+
+<file path=ppt/slides/slide18.xml><?xml version="1.0" encoding="utf-8"?>
+<p:sld xmlns:a="http://schemas.openxmlformats.org/drawingml/2006/main" xmlns:r="http://schemas.openxmlformats.org/officeDocument/2006/relationships" xmlns:p="http://schemas.openxmlformats.org/presentationml/2006/main">
+  <p:cSld>
+    <p:spTree>
+      <p:nvGrpSpPr>
+        <p:cNvPr id="1" name=""/>
+        <p:cNvGrpSpPr/>
+        <p:nvPr/>
+      </p:nvGrpSpPr>
+      <p:grpSpPr>
+        <a:xfrm>
+          <a:off x="0" y="0"/>
+          <a:ext cx="0" cy="0"/>
+          <a:chOff x="0" y="0"/>
+          <a:chExt cx="0" cy="0"/>
+        </a:xfrm>
+      </p:grpSpPr>
+      <p:sp>
+        <p:nvSpPr>
+          <p:cNvPr id="2" name="Заголовок 1"/>
+          <p:cNvSpPr>
+            <a:spLocks noGrp="1"/>
+          </p:cNvSpPr>
+          <p:nvPr>
+            <p:ph type="title"/>
+          </p:nvPr>
+        </p:nvSpPr>
+        <p:spPr/>
+        <p:txBody>
+          <a:bodyPr/>
+          <a:lstStyle/>
+          <a:p>
+            <a:r>
+              <a:rPr lang="ru-RU" b="1" dirty="0"/>
+              <a:t>Из чего складывается сетевая задержка</a:t>
+            </a:r>
+            <a:r>
+              <a:rPr lang="ru-RU" b="1" dirty="0" smtClean="0"/>
+              <a:t>?</a:t>
+            </a:r>
+            <a:endParaRPr lang="ru-RU" dirty="0"/>
+          </a:p>
+        </p:txBody>
+      </p:sp>
+      <p:graphicFrame>
+        <p:nvGraphicFramePr>
+          <p:cNvPr id="4" name="Объект 3"/>
+          <p:cNvGraphicFramePr>
+            <a:graphicFrameLocks noGrp="1"/>
+          </p:cNvGraphicFramePr>
+          <p:nvPr>
+            <p:ph idx="1"/>
+            <p:extLst>
+              <p:ext uri="{D42A27DB-BD31-4B8C-83A1-F6EECF244321}">
+                <p14:modId xmlns:p14="http://schemas.microsoft.com/office/powerpoint/2010/main" val="1765818131"/>
+              </p:ext>
+            </p:extLst>
+          </p:nvPr>
+        </p:nvGraphicFramePr>
+        <p:xfrm>
+          <a:off x="896814" y="2226754"/>
+          <a:ext cx="10410094" cy="3576687"/>
+        </p:xfrm>
+        <a:graphic>
+          <a:graphicData uri="http://schemas.openxmlformats.org/drawingml/2006/table">
+            <a:tbl>
+              <a:tblPr/>
+              <a:tblGrid>
+                <a:gridCol w="5205047">
+                  <a:extLst>
+                    <a:ext uri="{9D8B030D-6E8A-4147-A177-3AD203B41FA5}">
+                      <a16:colId xmlns:a16="http://schemas.microsoft.com/office/drawing/2014/main" val="3888890095"/>
+                    </a:ext>
+                  </a:extLst>
+                </a:gridCol>
+                <a:gridCol w="5205047">
+                  <a:extLst>
+                    <a:ext uri="{9D8B030D-6E8A-4147-A177-3AD203B41FA5}">
+                      <a16:colId xmlns:a16="http://schemas.microsoft.com/office/drawing/2014/main" val="108323516"/>
+                    </a:ext>
+                  </a:extLst>
+                </a:gridCol>
+              </a:tblGrid>
+              <a:tr h="323795">
+                <a:tc>
+                  <a:txBody>
+                    <a:bodyPr/>
+                    <a:lstStyle/>
+                    <a:p>
+                      <a:pPr algn="l"/>
+                      <a:r>
+                        <a:rPr lang="ru-RU" sz="1600" dirty="0">
+                          <a:effectLst/>
+                        </a:rPr>
+                        <a:t>Название компонента</a:t>
+                      </a:r>
+                    </a:p>
+                  </a:txBody>
+                  <a:tcPr marL="83452" marR="83452" marT="41726" marB="41726" anchor="ctr">
+                    <a:lnL w="12700" cap="flat" cmpd="sng" algn="ctr">
+                      <a:solidFill>
+                        <a:schemeClr val="tx1"/>
+                      </a:solidFill>
+                      <a:prstDash val="solid"/>
+                      <a:round/>
+                      <a:headEnd type="none" w="med" len="med"/>
+                      <a:tailEnd type="none" w="med" len="med"/>
+                    </a:lnL>
+                    <a:lnR w="12700" cap="flat" cmpd="sng" algn="ctr">
+                      <a:solidFill>
+                        <a:schemeClr val="tx1"/>
+                      </a:solidFill>
+                      <a:prstDash val="solid"/>
+                      <a:round/>
+                      <a:headEnd type="none" w="med" len="med"/>
+                      <a:tailEnd type="none" w="med" len="med"/>
+                    </a:lnR>
+                    <a:lnT w="12700" cap="flat" cmpd="sng" algn="ctr">
+                      <a:solidFill>
+                        <a:schemeClr val="tx1"/>
+                      </a:solidFill>
+                      <a:prstDash val="solid"/>
+                      <a:round/>
+                      <a:headEnd type="none" w="med" len="med"/>
+                      <a:tailEnd type="none" w="med" len="med"/>
+                    </a:lnT>
+                    <a:lnB w="12700" cap="flat" cmpd="sng" algn="ctr">
+                      <a:solidFill>
+                        <a:schemeClr val="tx1"/>
+                      </a:solidFill>
+                      <a:prstDash val="solid"/>
+                      <a:round/>
+                      <a:headEnd type="none" w="med" len="med"/>
+                      <a:tailEnd type="none" w="med" len="med"/>
+                    </a:lnB>
+                  </a:tcPr>
+                </a:tc>
+                <a:tc>
+                  <a:txBody>
+                    <a:bodyPr/>
+                    <a:lstStyle/>
+                    <a:p>
+                      <a:pPr algn="l"/>
+                      <a:r>
+                        <a:rPr lang="ru-RU" sz="1600" dirty="0">
+                          <a:effectLst/>
+                        </a:rPr>
+                        <a:t>Описание процесса</a:t>
+                      </a:r>
+                    </a:p>
+                  </a:txBody>
+                  <a:tcPr marL="83452" marR="83452" marT="41726" marB="41726" anchor="ctr">
+                    <a:lnL w="12700" cap="flat" cmpd="sng" algn="ctr">
+                      <a:solidFill>
+                        <a:schemeClr val="tx1"/>
+                      </a:solidFill>
+                      <a:prstDash val="solid"/>
+                      <a:round/>
+                      <a:headEnd type="none" w="med" len="med"/>
+                      <a:tailEnd type="none" w="med" len="med"/>
+                    </a:lnL>
+                    <a:lnR w="12700" cap="flat" cmpd="sng" algn="ctr">
+                      <a:solidFill>
+                        <a:schemeClr val="tx1"/>
+                      </a:solidFill>
+                      <a:prstDash val="solid"/>
+                      <a:round/>
+                      <a:headEnd type="none" w="med" len="med"/>
+                      <a:tailEnd type="none" w="med" len="med"/>
+                    </a:lnR>
+                    <a:lnT w="12700" cap="flat" cmpd="sng" algn="ctr">
+                      <a:solidFill>
+                        <a:schemeClr val="tx1"/>
+                      </a:solidFill>
+                      <a:prstDash val="solid"/>
+                      <a:round/>
+                      <a:headEnd type="none" w="med" len="med"/>
+                      <a:tailEnd type="none" w="med" len="med"/>
+                    </a:lnT>
+                    <a:lnB w="12700" cap="flat" cmpd="sng" algn="ctr">
+                      <a:solidFill>
+                        <a:schemeClr val="tx1"/>
+                      </a:solidFill>
+                      <a:prstDash val="solid"/>
+                      <a:round/>
+                      <a:headEnd type="none" w="med" len="med"/>
+                      <a:tailEnd type="none" w="med" len="med"/>
+                    </a:lnB>
+                  </a:tcPr>
+                </a:tc>
+                <a:extLst>
+                  <a:ext uri="{0D108BD9-81ED-4DB2-BD59-A6C34878D82A}">
+                    <a16:rowId xmlns:a16="http://schemas.microsoft.com/office/drawing/2014/main" val="486066429"/>
+                  </a:ext>
+                </a:extLst>
+              </a:tr>
+              <a:tr h="804479">
+                <a:tc>
+                  <a:txBody>
+                    <a:bodyPr/>
+                    <a:lstStyle/>
+                    <a:p>
+                      <a:pPr algn="l"/>
+                      <a:r>
+                        <a:rPr lang="ru-RU" sz="1600" b="1" dirty="0">
+                          <a:effectLst/>
+                        </a:rPr>
+                        <a:t>1. Задержка распространения</a:t>
+                      </a:r>
+                      <a:r>
+                        <a:rPr lang="ru-RU" sz="1600" dirty="0">
+                          <a:effectLst/>
+                        </a:rPr>
+                        <a:t> </a:t>
+                      </a:r>
+                      <a:r>
+                        <a:rPr lang="ru-RU" sz="1600" i="1" dirty="0">
+                          <a:effectLst/>
+                        </a:rPr>
+                        <a:t>(</a:t>
+                      </a:r>
+                      <a:r>
+                        <a:rPr lang="ru-RU" sz="1600" i="1" dirty="0" err="1">
+                          <a:effectLst/>
+                        </a:rPr>
+                        <a:t>Propagation</a:t>
+                      </a:r>
+                      <a:r>
+                        <a:rPr lang="ru-RU" sz="1600" i="1" dirty="0">
+                          <a:effectLst/>
+                        </a:rPr>
+                        <a:t> </a:t>
+                      </a:r>
+                      <a:r>
+                        <a:rPr lang="ru-RU" sz="1600" i="1" dirty="0" err="1">
+                          <a:effectLst/>
+                        </a:rPr>
+                        <a:t>Delay</a:t>
+                      </a:r>
+                      <a:r>
+                        <a:rPr lang="ru-RU" sz="1600" i="1" dirty="0">
+                          <a:effectLst/>
+                        </a:rPr>
+                        <a:t>)</a:t>
+                      </a:r>
+                      <a:endParaRPr lang="ru-RU" sz="1600" dirty="0">
+                        <a:effectLst/>
+                      </a:endParaRPr>
+                    </a:p>
+                  </a:txBody>
+                  <a:tcPr marL="83452" marR="83452" marT="41726" marB="41726" anchor="ctr">
+                    <a:lnL w="12700" cap="flat" cmpd="sng" algn="ctr">
+                      <a:solidFill>
+                        <a:schemeClr val="tx1"/>
+                      </a:solidFill>
+                      <a:prstDash val="solid"/>
+                      <a:round/>
+                      <a:headEnd type="none" w="med" len="med"/>
+                      <a:tailEnd type="none" w="med" len="med"/>
+                    </a:lnL>
+                    <a:lnR w="12700" cap="flat" cmpd="sng" algn="ctr">
+                      <a:solidFill>
+                        <a:schemeClr val="tx1"/>
+                      </a:solidFill>
+                      <a:prstDash val="solid"/>
+                      <a:round/>
+                      <a:headEnd type="none" w="med" len="med"/>
+                      <a:tailEnd type="none" w="med" len="med"/>
+                    </a:lnR>
+                    <a:lnT w="12700" cap="flat" cmpd="sng" algn="ctr">
+                      <a:solidFill>
+                        <a:schemeClr val="tx1"/>
+                      </a:solidFill>
+                      <a:prstDash val="solid"/>
+                      <a:round/>
+                      <a:headEnd type="none" w="med" len="med"/>
+                      <a:tailEnd type="none" w="med" len="med"/>
+                    </a:lnT>
+                    <a:lnB w="12700" cap="flat" cmpd="sng" algn="ctr">
+                      <a:solidFill>
+                        <a:schemeClr val="tx1"/>
+                      </a:solidFill>
+                      <a:prstDash val="solid"/>
+                      <a:round/>
+                      <a:headEnd type="none" w="med" len="med"/>
+                      <a:tailEnd type="none" w="med" len="med"/>
+                    </a:lnB>
+                  </a:tcPr>
+                </a:tc>
+                <a:tc>
+                  <a:txBody>
+                    <a:bodyPr/>
+                    <a:lstStyle/>
+                    <a:p>
+                      <a:pPr algn="l"/>
+                      <a:r>
+                        <a:rPr lang="ru-RU" sz="1600" b="1">
+                          <a:effectLst/>
+                        </a:rPr>
+                        <a:t>А)</a:t>
+                      </a:r>
+                      <a:r>
+                        <a:rPr lang="ru-RU" sz="1600">
+                          <a:effectLst/>
+                        </a:rPr>
+                        <a:t> Время ожидания пакета в буфере памяти маршрутизатора из-за занятости исходящей линии.</a:t>
+                      </a:r>
+                    </a:p>
+                  </a:txBody>
+                  <a:tcPr marL="83452" marR="83452" marT="41726" marB="41726" anchor="ctr">
+                    <a:lnL w="12700" cap="flat" cmpd="sng" algn="ctr">
+                      <a:solidFill>
+                        <a:schemeClr val="tx1"/>
+                      </a:solidFill>
+                      <a:prstDash val="solid"/>
+                      <a:round/>
+                      <a:headEnd type="none" w="med" len="med"/>
+                      <a:tailEnd type="none" w="med" len="med"/>
+                    </a:lnL>
+                    <a:lnR w="12700" cap="flat" cmpd="sng" algn="ctr">
+                      <a:solidFill>
+                        <a:schemeClr val="tx1"/>
+                      </a:solidFill>
+                      <a:prstDash val="solid"/>
+                      <a:round/>
+                      <a:headEnd type="none" w="med" len="med"/>
+                      <a:tailEnd type="none" w="med" len="med"/>
+                    </a:lnR>
+                    <a:lnT w="12700" cap="flat" cmpd="sng" algn="ctr">
+                      <a:solidFill>
+                        <a:schemeClr val="tx1"/>
+                      </a:solidFill>
+                      <a:prstDash val="solid"/>
+                      <a:round/>
+                      <a:headEnd type="none" w="med" len="med"/>
+                      <a:tailEnd type="none" w="med" len="med"/>
+                    </a:lnT>
+                    <a:lnB w="12700" cap="flat" cmpd="sng" algn="ctr">
+                      <a:solidFill>
+                        <a:schemeClr val="tx1"/>
+                      </a:solidFill>
+                      <a:prstDash val="solid"/>
+                      <a:round/>
+                      <a:headEnd type="none" w="med" len="med"/>
+                      <a:tailEnd type="none" w="med" len="med"/>
+                    </a:lnB>
+                  </a:tcPr>
+                </a:tc>
+                <a:extLst>
+                  <a:ext uri="{0D108BD9-81ED-4DB2-BD59-A6C34878D82A}">
+                    <a16:rowId xmlns:a16="http://schemas.microsoft.com/office/drawing/2014/main" val="2918902853"/>
+                  </a:ext>
+                </a:extLst>
+              </a:tr>
+              <a:tr h="804479">
+                <a:tc>
+                  <a:txBody>
+                    <a:bodyPr/>
+                    <a:lstStyle/>
+                    <a:p>
+                      <a:pPr algn="l"/>
+                      <a:r>
+                        <a:rPr lang="ru-RU" sz="1600" b="1" dirty="0">
+                          <a:effectLst/>
+                        </a:rPr>
+                        <a:t>2. Задержка передачи</a:t>
+                      </a:r>
+                      <a:r>
+                        <a:rPr lang="ru-RU" sz="1600" dirty="0">
+                          <a:effectLst/>
+                        </a:rPr>
+                        <a:t> </a:t>
+                      </a:r>
+                      <a:r>
+                        <a:rPr lang="ru-RU" sz="1600" i="1" dirty="0">
+                          <a:effectLst/>
+                        </a:rPr>
+                        <a:t>(</a:t>
+                      </a:r>
+                      <a:r>
+                        <a:rPr lang="ru-RU" sz="1600" i="1" dirty="0" err="1">
+                          <a:effectLst/>
+                        </a:rPr>
+                        <a:t>Transmission</a:t>
+                      </a:r>
+                      <a:r>
+                        <a:rPr lang="ru-RU" sz="1600" i="1" dirty="0">
+                          <a:effectLst/>
+                        </a:rPr>
+                        <a:t> </a:t>
+                      </a:r>
+                      <a:r>
+                        <a:rPr lang="ru-RU" sz="1600" i="1" dirty="0" err="1">
+                          <a:effectLst/>
+                        </a:rPr>
+                        <a:t>Delay</a:t>
+                      </a:r>
+                      <a:r>
+                        <a:rPr lang="ru-RU" sz="1600" i="1" dirty="0">
+                          <a:effectLst/>
+                        </a:rPr>
+                        <a:t>)</a:t>
+                      </a:r>
+                      <a:endParaRPr lang="ru-RU" sz="1600" dirty="0">
+                        <a:effectLst/>
+                      </a:endParaRPr>
+                    </a:p>
+                  </a:txBody>
+                  <a:tcPr marL="83452" marR="83452" marT="41726" marB="41726" anchor="ctr">
+                    <a:lnL w="12700" cap="flat" cmpd="sng" algn="ctr">
+                      <a:solidFill>
+                        <a:schemeClr val="tx1"/>
+                      </a:solidFill>
+                      <a:prstDash val="solid"/>
+                      <a:round/>
+                      <a:headEnd type="none" w="med" len="med"/>
+                      <a:tailEnd type="none" w="med" len="med"/>
+                    </a:lnL>
+                    <a:lnR w="12700" cap="flat" cmpd="sng" algn="ctr">
+                      <a:solidFill>
+                        <a:schemeClr val="tx1"/>
+                      </a:solidFill>
+                      <a:prstDash val="solid"/>
+                      <a:round/>
+                      <a:headEnd type="none" w="med" len="med"/>
+                      <a:tailEnd type="none" w="med" len="med"/>
+                    </a:lnR>
+                    <a:lnT w="12700" cap="flat" cmpd="sng" algn="ctr">
+                      <a:solidFill>
+                        <a:schemeClr val="tx1"/>
+                      </a:solidFill>
+                      <a:prstDash val="solid"/>
+                      <a:round/>
+                      <a:headEnd type="none" w="med" len="med"/>
+                      <a:tailEnd type="none" w="med" len="med"/>
+                    </a:lnT>
+                    <a:lnB w="12700" cap="flat" cmpd="sng" algn="ctr">
+                      <a:solidFill>
+                        <a:schemeClr val="tx1"/>
+                      </a:solidFill>
+                      <a:prstDash val="solid"/>
+                      <a:round/>
+                      <a:headEnd type="none" w="med" len="med"/>
+                      <a:tailEnd type="none" w="med" len="med"/>
+                    </a:lnB>
+                  </a:tcPr>
+                </a:tc>
+                <a:tc>
+                  <a:txBody>
+                    <a:bodyPr/>
+                    <a:lstStyle/>
+                    <a:p>
+                      <a:pPr algn="l"/>
+                      <a:r>
+                        <a:rPr lang="ru-RU" sz="1600" b="1">
+                          <a:effectLst/>
+                        </a:rPr>
+                        <a:t>Б)</a:t>
+                      </a:r>
+                      <a:r>
+                        <a:rPr lang="ru-RU" sz="1600">
+                          <a:effectLst/>
+                        </a:rPr>
+                        <a:t> Время, которое процессор маршрутизатора тратит на проверку заголовков, контрольной суммы и поиск маршрута.</a:t>
+                      </a:r>
+                    </a:p>
+                  </a:txBody>
+                  <a:tcPr marL="83452" marR="83452" marT="41726" marB="41726" anchor="ctr">
+                    <a:lnL w="12700" cap="flat" cmpd="sng" algn="ctr">
+                      <a:solidFill>
+                        <a:schemeClr val="tx1"/>
+                      </a:solidFill>
+                      <a:prstDash val="solid"/>
+                      <a:round/>
+                      <a:headEnd type="none" w="med" len="med"/>
+                      <a:tailEnd type="none" w="med" len="med"/>
+                    </a:lnL>
+                    <a:lnR w="12700" cap="flat" cmpd="sng" algn="ctr">
+                      <a:solidFill>
+                        <a:schemeClr val="tx1"/>
+                      </a:solidFill>
+                      <a:prstDash val="solid"/>
+                      <a:round/>
+                      <a:headEnd type="none" w="med" len="med"/>
+                      <a:tailEnd type="none" w="med" len="med"/>
+                    </a:lnR>
+                    <a:lnT w="12700" cap="flat" cmpd="sng" algn="ctr">
+                      <a:solidFill>
+                        <a:schemeClr val="tx1"/>
+                      </a:solidFill>
+                      <a:prstDash val="solid"/>
+                      <a:round/>
+                      <a:headEnd type="none" w="med" len="med"/>
+                      <a:tailEnd type="none" w="med" len="med"/>
+                    </a:lnT>
+                    <a:lnB w="12700" cap="flat" cmpd="sng" algn="ctr">
+                      <a:solidFill>
+                        <a:schemeClr val="tx1"/>
+                      </a:solidFill>
+                      <a:prstDash val="solid"/>
+                      <a:round/>
+                      <a:headEnd type="none" w="med" len="med"/>
+                      <a:tailEnd type="none" w="med" len="med"/>
+                    </a:lnB>
+                  </a:tcPr>
+                </a:tc>
+                <a:extLst>
+                  <a:ext uri="{0D108BD9-81ED-4DB2-BD59-A6C34878D82A}">
+                    <a16:rowId xmlns:a16="http://schemas.microsoft.com/office/drawing/2014/main" val="1278937417"/>
+                  </a:ext>
+                </a:extLst>
+              </a:tr>
+              <a:tr h="804479">
+                <a:tc>
+                  <a:txBody>
+                    <a:bodyPr/>
+                    <a:lstStyle/>
+                    <a:p>
+                      <a:pPr algn="l"/>
+                      <a:r>
+                        <a:rPr lang="ru-RU" sz="1600" b="1">
+                          <a:effectLst/>
+                        </a:rPr>
+                        <a:t>3. Задержка в очереди</a:t>
+                      </a:r>
+                      <a:r>
+                        <a:rPr lang="ru-RU" sz="1600">
+                          <a:effectLst/>
+                        </a:rPr>
+                        <a:t> </a:t>
+                      </a:r>
+                      <a:r>
+                        <a:rPr lang="ru-RU" sz="1600" i="1">
+                          <a:effectLst/>
+                        </a:rPr>
+                        <a:t>(Queuing Delay)</a:t>
+                      </a:r>
+                      <a:endParaRPr lang="ru-RU" sz="1600">
+                        <a:effectLst/>
+                      </a:endParaRPr>
+                    </a:p>
+                  </a:txBody>
+                  <a:tcPr marL="83452" marR="83452" marT="41726" marB="41726" anchor="ctr">
+                    <a:lnL w="12700" cap="flat" cmpd="sng" algn="ctr">
+                      <a:solidFill>
+                        <a:schemeClr val="tx1"/>
+                      </a:solidFill>
+                      <a:prstDash val="solid"/>
+                      <a:round/>
+                      <a:headEnd type="none" w="med" len="med"/>
+                      <a:tailEnd type="none" w="med" len="med"/>
+                    </a:lnL>
+                    <a:lnR w="12700" cap="flat" cmpd="sng" algn="ctr">
+                      <a:solidFill>
+                        <a:schemeClr val="tx1"/>
+                      </a:solidFill>
+                      <a:prstDash val="solid"/>
+                      <a:round/>
+                      <a:headEnd type="none" w="med" len="med"/>
+                      <a:tailEnd type="none" w="med" len="med"/>
+                    </a:lnR>
+                    <a:lnT w="12700" cap="flat" cmpd="sng" algn="ctr">
+                      <a:solidFill>
+                        <a:schemeClr val="tx1"/>
+                      </a:solidFill>
+                      <a:prstDash val="solid"/>
+                      <a:round/>
+                      <a:headEnd type="none" w="med" len="med"/>
+                      <a:tailEnd type="none" w="med" len="med"/>
+                    </a:lnT>
+                    <a:lnB w="12700" cap="flat" cmpd="sng" algn="ctr">
+                      <a:solidFill>
+                        <a:schemeClr val="tx1"/>
+                      </a:solidFill>
+                      <a:prstDash val="solid"/>
+                      <a:round/>
+                      <a:headEnd type="none" w="med" len="med"/>
+                      <a:tailEnd type="none" w="med" len="med"/>
+                    </a:lnB>
+                  </a:tcPr>
+                </a:tc>
+                <a:tc>
+                  <a:txBody>
+                    <a:bodyPr/>
+                    <a:lstStyle/>
+                    <a:p>
+                      <a:pPr algn="l"/>
+                      <a:r>
+                        <a:rPr lang="ru-RU" sz="1600" b="1">
+                          <a:effectLst/>
+                        </a:rPr>
+                        <a:t>В)</a:t>
+                      </a:r>
+                      <a:r>
+                        <a:rPr lang="ru-RU" sz="1600">
+                          <a:effectLst/>
+                        </a:rPr>
+                        <a:t> Время физического движения сигнала (электромагнитной волны) по кабелю от точки А до точки Б со скоростью света.</a:t>
+                      </a:r>
+                    </a:p>
+                  </a:txBody>
+                  <a:tcPr marL="83452" marR="83452" marT="41726" marB="41726" anchor="ctr">
+                    <a:lnL w="12700" cap="flat" cmpd="sng" algn="ctr">
+                      <a:solidFill>
+                        <a:schemeClr val="tx1"/>
+                      </a:solidFill>
+                      <a:prstDash val="solid"/>
+                      <a:round/>
+                      <a:headEnd type="none" w="med" len="med"/>
+                      <a:tailEnd type="none" w="med" len="med"/>
+                    </a:lnL>
+                    <a:lnR w="12700" cap="flat" cmpd="sng" algn="ctr">
+                      <a:solidFill>
+                        <a:schemeClr val="tx1"/>
+                      </a:solidFill>
+                      <a:prstDash val="solid"/>
+                      <a:round/>
+                      <a:headEnd type="none" w="med" len="med"/>
+                      <a:tailEnd type="none" w="med" len="med"/>
+                    </a:lnR>
+                    <a:lnT w="12700" cap="flat" cmpd="sng" algn="ctr">
+                      <a:solidFill>
+                        <a:schemeClr val="tx1"/>
+                      </a:solidFill>
+                      <a:prstDash val="solid"/>
+                      <a:round/>
+                      <a:headEnd type="none" w="med" len="med"/>
+                      <a:tailEnd type="none" w="med" len="med"/>
+                    </a:lnT>
+                    <a:lnB w="12700" cap="flat" cmpd="sng" algn="ctr">
+                      <a:solidFill>
+                        <a:schemeClr val="tx1"/>
+                      </a:solidFill>
+                      <a:prstDash val="solid"/>
+                      <a:round/>
+                      <a:headEnd type="none" w="med" len="med"/>
+                      <a:tailEnd type="none" w="med" len="med"/>
+                    </a:lnB>
+                  </a:tcPr>
+                </a:tc>
+                <a:extLst>
+                  <a:ext uri="{0D108BD9-81ED-4DB2-BD59-A6C34878D82A}">
+                    <a16:rowId xmlns:a16="http://schemas.microsoft.com/office/drawing/2014/main" val="1296039251"/>
+                  </a:ext>
+                </a:extLst>
+              </a:tr>
+              <a:tr h="804479">
+                <a:tc>
+                  <a:txBody>
+                    <a:bodyPr/>
+                    <a:lstStyle/>
+                    <a:p>
+                      <a:pPr algn="l"/>
+                      <a:r>
+                        <a:rPr lang="ru-RU" sz="1600" b="1">
+                          <a:effectLst/>
+                        </a:rPr>
+                        <a:t>4. Задержка обработки</a:t>
+                      </a:r>
+                      <a:r>
+                        <a:rPr lang="ru-RU" sz="1600">
+                          <a:effectLst/>
+                        </a:rPr>
+                        <a:t> </a:t>
+                      </a:r>
+                      <a:r>
+                        <a:rPr lang="ru-RU" sz="1600" i="1">
+                          <a:effectLst/>
+                        </a:rPr>
+                        <a:t>(Processing Delay)</a:t>
+                      </a:r>
+                      <a:endParaRPr lang="ru-RU" sz="1600">
+                        <a:effectLst/>
+                      </a:endParaRPr>
+                    </a:p>
+                  </a:txBody>
+                  <a:tcPr marL="83452" marR="83452" marT="41726" marB="41726" anchor="ctr">
+                    <a:lnL w="12700" cap="flat" cmpd="sng" algn="ctr">
+                      <a:solidFill>
+                        <a:schemeClr val="tx1"/>
+                      </a:solidFill>
+                      <a:prstDash val="solid"/>
+                      <a:round/>
+                      <a:headEnd type="none" w="med" len="med"/>
+                      <a:tailEnd type="none" w="med" len="med"/>
+                    </a:lnL>
+                    <a:lnR w="12700" cap="flat" cmpd="sng" algn="ctr">
+                      <a:solidFill>
+                        <a:schemeClr val="tx1"/>
+                      </a:solidFill>
+                      <a:prstDash val="solid"/>
+                      <a:round/>
+                      <a:headEnd type="none" w="med" len="med"/>
+                      <a:tailEnd type="none" w="med" len="med"/>
+                    </a:lnR>
+                    <a:lnT w="12700" cap="flat" cmpd="sng" algn="ctr">
+                      <a:solidFill>
+                        <a:schemeClr val="tx1"/>
+                      </a:solidFill>
+                      <a:prstDash val="solid"/>
+                      <a:round/>
+                      <a:headEnd type="none" w="med" len="med"/>
+                      <a:tailEnd type="none" w="med" len="med"/>
+                    </a:lnT>
+                    <a:lnB w="12700" cap="flat" cmpd="sng" algn="ctr">
+                      <a:solidFill>
+                        <a:schemeClr val="tx1"/>
+                      </a:solidFill>
+                      <a:prstDash val="solid"/>
+                      <a:round/>
+                      <a:headEnd type="none" w="med" len="med"/>
+                      <a:tailEnd type="none" w="med" len="med"/>
+                    </a:lnB>
+                  </a:tcPr>
+                </a:tc>
+                <a:tc>
+                  <a:txBody>
+                    <a:bodyPr/>
+                    <a:lstStyle/>
+                    <a:p>
+                      <a:pPr algn="l"/>
+                      <a:r>
+                        <a:rPr lang="ru-RU" sz="1600" b="1" dirty="0">
+                          <a:effectLst/>
+                        </a:rPr>
+                        <a:t>Г)</a:t>
+                      </a:r>
+                      <a:r>
+                        <a:rPr lang="ru-RU" sz="1600" dirty="0">
+                          <a:effectLst/>
+                        </a:rPr>
+                        <a:t> Время, необходимое передатчику, чтобы «вытолкнуть» все биты пакета в кабель (зависит от размера пакета и ширины канала).</a:t>
+                      </a:r>
+                    </a:p>
+                  </a:txBody>
+                  <a:tcPr marL="83452" marR="83452" marT="41726" marB="41726" anchor="ctr">
+                    <a:lnL w="12700" cap="flat" cmpd="sng" algn="ctr">
+                      <a:solidFill>
+                        <a:schemeClr val="tx1"/>
+                      </a:solidFill>
+                      <a:prstDash val="solid"/>
+                      <a:round/>
+                      <a:headEnd type="none" w="med" len="med"/>
+                      <a:tailEnd type="none" w="med" len="med"/>
+                    </a:lnL>
+                    <a:lnR w="12700" cap="flat" cmpd="sng" algn="ctr">
+                      <a:solidFill>
+                        <a:schemeClr val="tx1"/>
+                      </a:solidFill>
+                      <a:prstDash val="solid"/>
+                      <a:round/>
+                      <a:headEnd type="none" w="med" len="med"/>
+                      <a:tailEnd type="none" w="med" len="med"/>
+                    </a:lnR>
+                    <a:lnT w="12700" cap="flat" cmpd="sng" algn="ctr">
+                      <a:solidFill>
+                        <a:schemeClr val="tx1"/>
+                      </a:solidFill>
+                      <a:prstDash val="solid"/>
+                      <a:round/>
+                      <a:headEnd type="none" w="med" len="med"/>
+                      <a:tailEnd type="none" w="med" len="med"/>
+                    </a:lnT>
+                    <a:lnB w="12700" cap="flat" cmpd="sng" algn="ctr">
+                      <a:solidFill>
+                        <a:schemeClr val="tx1"/>
+                      </a:solidFill>
+                      <a:prstDash val="solid"/>
+                      <a:round/>
+                      <a:headEnd type="none" w="med" len="med"/>
+                      <a:tailEnd type="none" w="med" len="med"/>
+                    </a:lnB>
+                  </a:tcPr>
+                </a:tc>
+                <a:extLst>
+                  <a:ext uri="{0D108BD9-81ED-4DB2-BD59-A6C34878D82A}">
+                    <a16:rowId xmlns:a16="http://schemas.microsoft.com/office/drawing/2014/main" val="1525125794"/>
+                  </a:ext>
+                </a:extLst>
+              </a:tr>
+            </a:tbl>
+          </a:graphicData>
+        </a:graphic>
+      </p:graphicFrame>
+      <p:sp>
+        <p:nvSpPr>
+          <p:cNvPr id="5" name="Rectangle 1"/>
+          <p:cNvSpPr>
+            <a:spLocks noChangeArrowheads="1"/>
+          </p:cNvSpPr>
+          <p:nvPr/>
+        </p:nvSpPr>
+        <p:spPr bwMode="auto">
+          <a:xfrm>
+            <a:off x="-1205405" y="-323165"/>
+            <a:ext cx="14623737" cy="646331"/>
+          </a:xfrm>
+          <a:prstGeom prst="rect">
+            <a:avLst/>
+          </a:prstGeom>
+          <a:noFill/>
+          <a:ln>
+            <a:noFill/>
+          </a:ln>
+          <a:effectLst/>
+          <a:extLst>
+            <a:ext uri="{909E8E84-426E-40DD-AFC4-6F175D3DCCD1}">
+              <a14:hiddenFill xmlns:a14="http://schemas.microsoft.com/office/drawing/2010/main">
+                <a:solidFill>
+                  <a:schemeClr val="accent1"/>
+                </a:solidFill>
+              </a14:hiddenFill>
+            </a:ext>
+            <a:ext uri="{91240B29-F687-4F45-9708-019B960494DF}">
+              <a14:hiddenLine xmlns:a14="http://schemas.microsoft.com/office/drawing/2010/main" w="9525">
+                <a:solidFill>
+                  <a:schemeClr val="tx1"/>
+                </a:solidFill>
+                <a:miter lim="800000"/>
+                <a:headEnd/>
+                <a:tailEnd/>
+              </a14:hiddenLine>
+            </a:ext>
+            <a:ext uri="{AF507438-7753-43E0-B8FC-AC1667EBCBE1}">
+              <a14:hiddenEffects xmlns:a14="http://schemas.microsoft.com/office/drawing/2010/main">
+                <a:effectLst>
+                  <a:outerShdw dist="35921" dir="2700000" algn="ctr" rotWithShape="0">
+                    <a:schemeClr val="bg2"/>
+                  </a:outerShdw>
+                </a:effectLst>
+              </a14:hiddenEffects>
+            </a:ext>
+          </a:extLst>
+        </p:spPr>
+        <p:txBody>
+          <a:bodyPr vert="horz" wrap="square" lIns="91440" tIns="45720" rIns="91440" bIns="45720" numCol="1" anchor="ctr" anchorCtr="0" compatLnSpc="1">
+            <a:prstTxWarp prst="textNoShape">
+              <a:avLst/>
+            </a:prstTxWarp>
+            <a:spAutoFit/>
+          </a:bodyPr>
+          <a:lstStyle/>
+          <a:p>
+            <a:pPr marL="0" marR="0" lvl="0" indent="0" algn="l" defTabSz="914400" rtl="0" eaLnBrk="0" fontAlgn="base" latinLnBrk="0" hangingPunct="0">
+              <a:lnSpc>
+                <a:spcPct val="100000"/>
+              </a:lnSpc>
+              <a:spcBef>
+                <a:spcPct val="0"/>
+              </a:spcBef>
+              <a:spcAft>
+                <a:spcPct val="0"/>
+              </a:spcAft>
+              <a:buClrTx/>
+              <a:buSzTx/>
+              <a:buFontTx/>
+              <a:buNone/>
+              <a:tabLst/>
+            </a:pPr>
+            <a:r>
+              <a:rPr kumimoji="0" lang="ru-RU" altLang="ru-RU" sz="1800" b="0" i="0" u="none" strike="noStrike" cap="none" normalizeH="0" baseline="0" smtClean="0">
+                <a:ln>
+                  <a:noFill/>
+                </a:ln>
+                <a:solidFill>
+                  <a:schemeClr val="tx1"/>
+                </a:solidFill>
+                <a:effectLst/>
+                <a:latin typeface="Arial" panose="020B0604020202020204" pitchFamily="34" charset="0"/>
+              </a:rPr>
+              <a:t/>
+            </a:r>
+            <a:br>
+              <a:rPr kumimoji="0" lang="ru-RU" altLang="ru-RU" sz="1800" b="0" i="0" u="none" strike="noStrike" cap="none" normalizeH="0" baseline="0" smtClean="0">
+                <a:ln>
+                  <a:noFill/>
+                </a:ln>
+                <a:solidFill>
+                  <a:schemeClr val="tx1"/>
+                </a:solidFill>
+                <a:effectLst/>
+                <a:latin typeface="Arial" panose="020B0604020202020204" pitchFamily="34" charset="0"/>
+              </a:rPr>
+            </a:br>
+            <a:endParaRPr kumimoji="0" lang="ru-RU" altLang="ru-RU" sz="1800" b="0" i="0" u="none" strike="noStrike" cap="none" normalizeH="0" baseline="0" smtClean="0">
+              <a:ln>
+                <a:noFill/>
+              </a:ln>
+              <a:solidFill>
+                <a:schemeClr val="tx1"/>
+              </a:solidFill>
+              <a:effectLst/>
+              <a:latin typeface="Arial" panose="020B0604020202020204" pitchFamily="34" charset="0"/>
+            </a:endParaRPr>
+          </a:p>
+        </p:txBody>
+      </p:sp>
+    </p:spTree>
+    <p:extLst>
+      <p:ext uri="{BB962C8B-B14F-4D97-AF65-F5344CB8AC3E}">
+        <p14:creationId xmlns:p14="http://schemas.microsoft.com/office/powerpoint/2010/main" val="422948468"/>
+      </p:ext>
+    </p:extLst>
+  </p:cSld>
+  <p:clrMapOvr>
+    <a:masterClrMapping/>
+  </p:clrMapOvr>
+</p:sld>
+</file>
+
+<file path=ppt/slides/slide19.xml><?xml version="1.0" encoding="utf-8"?>
+<p:sld xmlns:a="http://schemas.openxmlformats.org/drawingml/2006/main" xmlns:r="http://schemas.openxmlformats.org/officeDocument/2006/relationships" xmlns:p="http://schemas.openxmlformats.org/presentationml/2006/main">
+  <p:cSld>
+    <p:spTree>
+      <p:nvGrpSpPr>
+        <p:cNvPr id="1" name=""/>
+        <p:cNvGrpSpPr/>
+        <p:nvPr/>
+      </p:nvGrpSpPr>
+      <p:grpSpPr>
+        <a:xfrm>
+          <a:off x="0" y="0"/>
+          <a:ext cx="0" cy="0"/>
+          <a:chOff x="0" y="0"/>
+          <a:chExt cx="0" cy="0"/>
+        </a:xfrm>
+      </p:grpSpPr>
+      <p:sp>
+        <p:nvSpPr>
+          <p:cNvPr id="2" name="Заголовок 1"/>
+          <p:cNvSpPr>
+            <a:spLocks noGrp="1"/>
+          </p:cNvSpPr>
+          <p:nvPr>
+            <p:ph type="title"/>
+          </p:nvPr>
+        </p:nvSpPr>
+        <p:spPr/>
+        <p:txBody>
+          <a:bodyPr>
+            <a:normAutofit/>
+          </a:bodyPr>
+          <a:lstStyle/>
+          <a:p>
+            <a:r>
+              <a:rPr lang="ru-RU" b="1" dirty="0"/>
+              <a:t>Уровни стека TCP/IP и единицы данных (PDU</a:t>
+            </a:r>
+            <a:r>
+              <a:rPr lang="ru-RU" b="1" dirty="0" smtClean="0"/>
+              <a:t>)</a:t>
+            </a:r>
+            <a:endParaRPr lang="ru-RU" dirty="0"/>
+          </a:p>
+        </p:txBody>
+      </p:sp>
+      <p:graphicFrame>
+        <p:nvGraphicFramePr>
+          <p:cNvPr id="4" name="Объект 3"/>
+          <p:cNvGraphicFramePr>
+            <a:graphicFrameLocks noGrp="1"/>
+          </p:cNvGraphicFramePr>
+          <p:nvPr>
+            <p:ph idx="1"/>
+            <p:extLst>
+              <p:ext uri="{D42A27DB-BD31-4B8C-83A1-F6EECF244321}">
+                <p14:modId xmlns:p14="http://schemas.microsoft.com/office/powerpoint/2010/main" val="75786122"/>
+              </p:ext>
+            </p:extLst>
+          </p:nvPr>
+        </p:nvGraphicFramePr>
+        <p:xfrm>
+          <a:off x="1141413" y="2822099"/>
+          <a:ext cx="9906000" cy="2396490"/>
+        </p:xfrm>
+        <a:graphic>
+          <a:graphicData uri="http://schemas.openxmlformats.org/drawingml/2006/table">
+            <a:tbl>
+              <a:tblPr/>
+              <a:tblGrid>
+                <a:gridCol w="4953000">
+                  <a:extLst>
+                    <a:ext uri="{9D8B030D-6E8A-4147-A177-3AD203B41FA5}">
+                      <a16:colId xmlns:a16="http://schemas.microsoft.com/office/drawing/2014/main" val="3072767915"/>
+                    </a:ext>
+                  </a:extLst>
+                </a:gridCol>
+                <a:gridCol w="4953000">
+                  <a:extLst>
+                    <a:ext uri="{9D8B030D-6E8A-4147-A177-3AD203B41FA5}">
+                      <a16:colId xmlns:a16="http://schemas.microsoft.com/office/drawing/2014/main" val="2140664790"/>
+                    </a:ext>
+                  </a:extLst>
+                </a:gridCol>
+              </a:tblGrid>
+              <a:tr h="0">
+                <a:tc>
+                  <a:txBody>
+                    <a:bodyPr/>
+                    <a:lstStyle/>
+                    <a:p>
+                      <a:pPr algn="l"/>
+                      <a:r>
+                        <a:rPr lang="ru-RU" dirty="0">
+                          <a:effectLst/>
+                        </a:rPr>
+                        <a:t>Уровень модели </a:t>
+                      </a:r>
+                      <a:r>
+                        <a:rPr lang="af-ZA" dirty="0">
+                          <a:effectLst/>
+                        </a:rPr>
+                        <a:t>TCP/IP</a:t>
+                      </a:r>
+                    </a:p>
+                  </a:txBody>
+                  <a:tcPr marL="95250" marR="95250" marT="47625" marB="47625" anchor="ctr">
+                    <a:lnL w="12700" cap="flat" cmpd="sng" algn="ctr">
+                      <a:solidFill>
+                        <a:schemeClr val="tx1"/>
+                      </a:solidFill>
+                      <a:prstDash val="solid"/>
+                      <a:round/>
+                      <a:headEnd type="none" w="med" len="med"/>
+                      <a:tailEnd type="none" w="med" len="med"/>
+                    </a:lnL>
+                    <a:lnR w="12700" cap="flat" cmpd="sng" algn="ctr">
+                      <a:solidFill>
+                        <a:schemeClr val="tx1"/>
+                      </a:solidFill>
+                      <a:prstDash val="solid"/>
+                      <a:round/>
+                      <a:headEnd type="none" w="med" len="med"/>
+                      <a:tailEnd type="none" w="med" len="med"/>
+                    </a:lnR>
+                    <a:lnT w="12700" cap="flat" cmpd="sng" algn="ctr">
+                      <a:solidFill>
+                        <a:schemeClr val="tx1"/>
+                      </a:solidFill>
+                      <a:prstDash val="solid"/>
+                      <a:round/>
+                      <a:headEnd type="none" w="med" len="med"/>
+                      <a:tailEnd type="none" w="med" len="med"/>
+                    </a:lnT>
+                    <a:lnB w="12700" cap="flat" cmpd="sng" algn="ctr">
+                      <a:solidFill>
+                        <a:schemeClr val="tx1"/>
+                      </a:solidFill>
+                      <a:prstDash val="solid"/>
+                      <a:round/>
+                      <a:headEnd type="none" w="med" len="med"/>
+                      <a:tailEnd type="none" w="med" len="med"/>
+                    </a:lnB>
+                  </a:tcPr>
+                </a:tc>
+                <a:tc>
+                  <a:txBody>
+                    <a:bodyPr/>
+                    <a:lstStyle/>
+                    <a:p>
+                      <a:pPr algn="l"/>
+                      <a:r>
+                        <a:rPr lang="ru-RU">
+                          <a:effectLst/>
+                        </a:rPr>
+                        <a:t>Единица данных (</a:t>
+                      </a:r>
+                      <a:r>
+                        <a:rPr lang="af-ZA">
+                          <a:effectLst/>
+                        </a:rPr>
+                        <a:t>PDU)</a:t>
+                      </a:r>
+                    </a:p>
+                  </a:txBody>
+                  <a:tcPr marL="95250" marR="95250" marT="47625" marB="47625" anchor="ctr">
+                    <a:lnL w="12700" cap="flat" cmpd="sng" algn="ctr">
+                      <a:solidFill>
+                        <a:schemeClr val="tx1"/>
+                      </a:solidFill>
+                      <a:prstDash val="solid"/>
+                      <a:round/>
+                      <a:headEnd type="none" w="med" len="med"/>
+                      <a:tailEnd type="none" w="med" len="med"/>
+                    </a:lnL>
+                    <a:lnR w="12700" cap="flat" cmpd="sng" algn="ctr">
+                      <a:solidFill>
+                        <a:schemeClr val="tx1"/>
+                      </a:solidFill>
+                      <a:prstDash val="solid"/>
+                      <a:round/>
+                      <a:headEnd type="none" w="med" len="med"/>
+                      <a:tailEnd type="none" w="med" len="med"/>
+                    </a:lnR>
+                    <a:lnT w="12700" cap="flat" cmpd="sng" algn="ctr">
+                      <a:solidFill>
+                        <a:schemeClr val="tx1"/>
+                      </a:solidFill>
+                      <a:prstDash val="solid"/>
+                      <a:round/>
+                      <a:headEnd type="none" w="med" len="med"/>
+                      <a:tailEnd type="none" w="med" len="med"/>
+                    </a:lnT>
+                    <a:lnB w="12700" cap="flat" cmpd="sng" algn="ctr">
+                      <a:solidFill>
+                        <a:schemeClr val="tx1"/>
+                      </a:solidFill>
+                      <a:prstDash val="solid"/>
+                      <a:round/>
+                      <a:headEnd type="none" w="med" len="med"/>
+                      <a:tailEnd type="none" w="med" len="med"/>
+                    </a:lnB>
+                  </a:tcPr>
+                </a:tc>
+                <a:extLst>
+                  <a:ext uri="{0D108BD9-81ED-4DB2-BD59-A6C34878D82A}">
+                    <a16:rowId xmlns:a16="http://schemas.microsoft.com/office/drawing/2014/main" val="1776809965"/>
+                  </a:ext>
+                </a:extLst>
+              </a:tr>
+              <a:tr h="0">
+                <a:tc>
+                  <a:txBody>
+                    <a:bodyPr/>
+                    <a:lstStyle/>
+                    <a:p>
+                      <a:pPr algn="l"/>
+                      <a:r>
+                        <a:rPr lang="ru-RU" b="1" dirty="0">
+                          <a:effectLst/>
+                        </a:rPr>
+                        <a:t>1. Прикладной уровень</a:t>
+                      </a:r>
+                      <a:r>
+                        <a:rPr lang="ru-RU" dirty="0">
+                          <a:effectLst/>
+                        </a:rPr>
+                        <a:t> </a:t>
+                      </a:r>
+                      <a:r>
+                        <a:rPr lang="ru-RU" i="1" dirty="0">
+                          <a:effectLst/>
+                        </a:rPr>
+                        <a:t>(</a:t>
+                      </a:r>
+                      <a:r>
+                        <a:rPr lang="af-ZA" i="1" dirty="0">
+                          <a:effectLst/>
+                        </a:rPr>
+                        <a:t>Application)</a:t>
+                      </a:r>
+                      <a:endParaRPr lang="af-ZA" dirty="0">
+                        <a:effectLst/>
+                      </a:endParaRPr>
+                    </a:p>
+                  </a:txBody>
+                  <a:tcPr marL="95250" marR="95250" marT="47625" marB="47625" anchor="ctr">
+                    <a:lnL w="12700" cap="flat" cmpd="sng" algn="ctr">
+                      <a:solidFill>
+                        <a:schemeClr val="tx1"/>
+                      </a:solidFill>
+                      <a:prstDash val="solid"/>
+                      <a:round/>
+                      <a:headEnd type="none" w="med" len="med"/>
+                      <a:tailEnd type="none" w="med" len="med"/>
+                    </a:lnL>
+                    <a:lnR w="12700" cap="flat" cmpd="sng" algn="ctr">
+                      <a:solidFill>
+                        <a:schemeClr val="tx1"/>
+                      </a:solidFill>
+                      <a:prstDash val="solid"/>
+                      <a:round/>
+                      <a:headEnd type="none" w="med" len="med"/>
+                      <a:tailEnd type="none" w="med" len="med"/>
+                    </a:lnR>
+                    <a:lnT w="12700" cap="flat" cmpd="sng" algn="ctr">
+                      <a:solidFill>
+                        <a:schemeClr val="tx1"/>
+                      </a:solidFill>
+                      <a:prstDash val="solid"/>
+                      <a:round/>
+                      <a:headEnd type="none" w="med" len="med"/>
+                      <a:tailEnd type="none" w="med" len="med"/>
+                    </a:lnT>
+                    <a:lnB w="12700" cap="flat" cmpd="sng" algn="ctr">
+                      <a:solidFill>
+                        <a:schemeClr val="tx1"/>
+                      </a:solidFill>
+                      <a:prstDash val="solid"/>
+                      <a:round/>
+                      <a:headEnd type="none" w="med" len="med"/>
+                      <a:tailEnd type="none" w="med" len="med"/>
+                    </a:lnB>
+                  </a:tcPr>
+                </a:tc>
+                <a:tc>
+                  <a:txBody>
+                    <a:bodyPr/>
+                    <a:lstStyle/>
+                    <a:p>
+                      <a:pPr algn="l"/>
+                      <a:r>
+                        <a:rPr lang="ru-RU" b="1">
+                          <a:effectLst/>
+                        </a:rPr>
+                        <a:t>А)</a:t>
+                      </a:r>
+                      <a:r>
+                        <a:rPr lang="ru-RU">
+                          <a:effectLst/>
+                        </a:rPr>
+                        <a:t> Пакет </a:t>
+                      </a:r>
+                      <a:r>
+                        <a:rPr lang="ru-RU" i="1">
+                          <a:effectLst/>
+                        </a:rPr>
+                        <a:t>(</a:t>
+                      </a:r>
+                      <a:r>
+                        <a:rPr lang="af-ZA" i="1">
+                          <a:effectLst/>
+                        </a:rPr>
+                        <a:t>Packet)</a:t>
+                      </a:r>
+                      <a:r>
+                        <a:rPr lang="af-ZA">
+                          <a:effectLst/>
+                        </a:rPr>
+                        <a:t> / IP-</a:t>
+                      </a:r>
+                      <a:r>
+                        <a:rPr lang="ru-RU">
+                          <a:effectLst/>
+                        </a:rPr>
+                        <a:t>дейтаграмма</a:t>
+                      </a:r>
+                    </a:p>
+                  </a:txBody>
+                  <a:tcPr marL="95250" marR="95250" marT="47625" marB="47625" anchor="ctr">
+                    <a:lnL w="12700" cap="flat" cmpd="sng" algn="ctr">
+                      <a:solidFill>
+                        <a:schemeClr val="tx1"/>
+                      </a:solidFill>
+                      <a:prstDash val="solid"/>
+                      <a:round/>
+                      <a:headEnd type="none" w="med" len="med"/>
+                      <a:tailEnd type="none" w="med" len="med"/>
+                    </a:lnL>
+                    <a:lnR w="12700" cap="flat" cmpd="sng" algn="ctr">
+                      <a:solidFill>
+                        <a:schemeClr val="tx1"/>
+                      </a:solidFill>
+                      <a:prstDash val="solid"/>
+                      <a:round/>
+                      <a:headEnd type="none" w="med" len="med"/>
+                      <a:tailEnd type="none" w="med" len="med"/>
+                    </a:lnR>
+                    <a:lnT w="12700" cap="flat" cmpd="sng" algn="ctr">
+                      <a:solidFill>
+                        <a:schemeClr val="tx1"/>
+                      </a:solidFill>
+                      <a:prstDash val="solid"/>
+                      <a:round/>
+                      <a:headEnd type="none" w="med" len="med"/>
+                      <a:tailEnd type="none" w="med" len="med"/>
+                    </a:lnT>
+                    <a:lnB w="12700" cap="flat" cmpd="sng" algn="ctr">
+                      <a:solidFill>
+                        <a:schemeClr val="tx1"/>
+                      </a:solidFill>
+                      <a:prstDash val="solid"/>
+                      <a:round/>
+                      <a:headEnd type="none" w="med" len="med"/>
+                      <a:tailEnd type="none" w="med" len="med"/>
+                    </a:lnB>
+                  </a:tcPr>
+                </a:tc>
+                <a:extLst>
+                  <a:ext uri="{0D108BD9-81ED-4DB2-BD59-A6C34878D82A}">
+                    <a16:rowId xmlns:a16="http://schemas.microsoft.com/office/drawing/2014/main" val="3011183116"/>
+                  </a:ext>
+                </a:extLst>
+              </a:tr>
+              <a:tr h="0">
+                <a:tc>
+                  <a:txBody>
+                    <a:bodyPr/>
+                    <a:lstStyle/>
+                    <a:p>
+                      <a:pPr algn="l"/>
+                      <a:r>
+                        <a:rPr lang="ru-RU" b="1" dirty="0">
+                          <a:effectLst/>
+                        </a:rPr>
+                        <a:t>2. Транспортный уровень</a:t>
+                      </a:r>
+                      <a:r>
+                        <a:rPr lang="ru-RU" dirty="0">
+                          <a:effectLst/>
+                        </a:rPr>
+                        <a:t> </a:t>
+                      </a:r>
+                      <a:r>
+                        <a:rPr lang="ru-RU" i="1" dirty="0">
+                          <a:effectLst/>
+                        </a:rPr>
+                        <a:t>(</a:t>
+                      </a:r>
+                      <a:r>
+                        <a:rPr lang="af-ZA" i="1" dirty="0">
+                          <a:effectLst/>
+                        </a:rPr>
+                        <a:t>Transport)</a:t>
+                      </a:r>
+                      <a:endParaRPr lang="af-ZA" dirty="0">
+                        <a:effectLst/>
+                      </a:endParaRPr>
+                    </a:p>
+                  </a:txBody>
+                  <a:tcPr marL="95250" marR="95250" marT="47625" marB="47625" anchor="ctr">
+                    <a:lnL w="12700" cap="flat" cmpd="sng" algn="ctr">
+                      <a:solidFill>
+                        <a:schemeClr val="tx1"/>
+                      </a:solidFill>
+                      <a:prstDash val="solid"/>
+                      <a:round/>
+                      <a:headEnd type="none" w="med" len="med"/>
+                      <a:tailEnd type="none" w="med" len="med"/>
+                    </a:lnL>
+                    <a:lnR w="12700" cap="flat" cmpd="sng" algn="ctr">
+                      <a:solidFill>
+                        <a:schemeClr val="tx1"/>
+                      </a:solidFill>
+                      <a:prstDash val="solid"/>
+                      <a:round/>
+                      <a:headEnd type="none" w="med" len="med"/>
+                      <a:tailEnd type="none" w="med" len="med"/>
+                    </a:lnR>
+                    <a:lnT w="12700" cap="flat" cmpd="sng" algn="ctr">
+                      <a:solidFill>
+                        <a:schemeClr val="tx1"/>
+                      </a:solidFill>
+                      <a:prstDash val="solid"/>
+                      <a:round/>
+                      <a:headEnd type="none" w="med" len="med"/>
+                      <a:tailEnd type="none" w="med" len="med"/>
+                    </a:lnT>
+                    <a:lnB w="12700" cap="flat" cmpd="sng" algn="ctr">
+                      <a:solidFill>
+                        <a:schemeClr val="tx1"/>
+                      </a:solidFill>
+                      <a:prstDash val="solid"/>
+                      <a:round/>
+                      <a:headEnd type="none" w="med" len="med"/>
+                      <a:tailEnd type="none" w="med" len="med"/>
+                    </a:lnB>
+                  </a:tcPr>
+                </a:tc>
+                <a:tc>
+                  <a:txBody>
+                    <a:bodyPr/>
+                    <a:lstStyle/>
+                    <a:p>
+                      <a:pPr algn="l"/>
+                      <a:r>
+                        <a:rPr lang="ru-RU" b="1" dirty="0">
+                          <a:effectLst/>
+                        </a:rPr>
+                        <a:t>Б)</a:t>
+                      </a:r>
+                      <a:r>
+                        <a:rPr lang="ru-RU" dirty="0">
+                          <a:effectLst/>
+                        </a:rPr>
+                        <a:t> Кадр / Фрейм </a:t>
+                      </a:r>
+                      <a:r>
+                        <a:rPr lang="ru-RU" i="1" dirty="0">
+                          <a:effectLst/>
+                        </a:rPr>
+                        <a:t>(</a:t>
+                      </a:r>
+                      <a:r>
+                        <a:rPr lang="af-ZA" i="1" dirty="0">
+                          <a:effectLst/>
+                        </a:rPr>
+                        <a:t>Frame)</a:t>
+                      </a:r>
+                      <a:endParaRPr lang="af-ZA" dirty="0">
+                        <a:effectLst/>
+                      </a:endParaRPr>
+                    </a:p>
+                  </a:txBody>
+                  <a:tcPr marL="95250" marR="95250" marT="47625" marB="47625" anchor="ctr">
+                    <a:lnL w="12700" cap="flat" cmpd="sng" algn="ctr">
+                      <a:solidFill>
+                        <a:schemeClr val="tx1"/>
+                      </a:solidFill>
+                      <a:prstDash val="solid"/>
+                      <a:round/>
+                      <a:headEnd type="none" w="med" len="med"/>
+                      <a:tailEnd type="none" w="med" len="med"/>
+                    </a:lnL>
+                    <a:lnR w="12700" cap="flat" cmpd="sng" algn="ctr">
+                      <a:solidFill>
+                        <a:schemeClr val="tx1"/>
+                      </a:solidFill>
+                      <a:prstDash val="solid"/>
+                      <a:round/>
+                      <a:headEnd type="none" w="med" len="med"/>
+                      <a:tailEnd type="none" w="med" len="med"/>
+                    </a:lnR>
+                    <a:lnT w="12700" cap="flat" cmpd="sng" algn="ctr">
+                      <a:solidFill>
+                        <a:schemeClr val="tx1"/>
+                      </a:solidFill>
+                      <a:prstDash val="solid"/>
+                      <a:round/>
+                      <a:headEnd type="none" w="med" len="med"/>
+                      <a:tailEnd type="none" w="med" len="med"/>
+                    </a:lnT>
+                    <a:lnB w="12700" cap="flat" cmpd="sng" algn="ctr">
+                      <a:solidFill>
+                        <a:schemeClr val="tx1"/>
+                      </a:solidFill>
+                      <a:prstDash val="solid"/>
+                      <a:round/>
+                      <a:headEnd type="none" w="med" len="med"/>
+                      <a:tailEnd type="none" w="med" len="med"/>
+                    </a:lnB>
+                  </a:tcPr>
+                </a:tc>
+                <a:extLst>
+                  <a:ext uri="{0D108BD9-81ED-4DB2-BD59-A6C34878D82A}">
+                    <a16:rowId xmlns:a16="http://schemas.microsoft.com/office/drawing/2014/main" val="2412800141"/>
+                  </a:ext>
+                </a:extLst>
+              </a:tr>
+              <a:tr h="0">
+                <a:tc>
+                  <a:txBody>
+                    <a:bodyPr/>
+                    <a:lstStyle/>
+                    <a:p>
+                      <a:pPr algn="l"/>
+                      <a:r>
+                        <a:rPr lang="ru-RU" b="1">
+                          <a:effectLst/>
+                        </a:rPr>
+                        <a:t>3. Межсетевой / Сетевой уровень</a:t>
+                      </a:r>
+                      <a:r>
+                        <a:rPr lang="ru-RU">
+                          <a:effectLst/>
+                        </a:rPr>
+                        <a:t> </a:t>
+                      </a:r>
+                      <a:r>
+                        <a:rPr lang="ru-RU" i="1">
+                          <a:effectLst/>
+                        </a:rPr>
+                        <a:t>(Internet / Network)</a:t>
+                      </a:r>
+                      <a:endParaRPr lang="ru-RU">
+                        <a:effectLst/>
+                      </a:endParaRPr>
+                    </a:p>
+                  </a:txBody>
+                  <a:tcPr marL="95250" marR="95250" marT="47625" marB="47625" anchor="ctr">
+                    <a:lnL w="12700" cap="flat" cmpd="sng" algn="ctr">
+                      <a:solidFill>
+                        <a:schemeClr val="tx1"/>
+                      </a:solidFill>
+                      <a:prstDash val="solid"/>
+                      <a:round/>
+                      <a:headEnd type="none" w="med" len="med"/>
+                      <a:tailEnd type="none" w="med" len="med"/>
+                    </a:lnL>
+                    <a:lnR w="12700" cap="flat" cmpd="sng" algn="ctr">
+                      <a:solidFill>
+                        <a:schemeClr val="tx1"/>
+                      </a:solidFill>
+                      <a:prstDash val="solid"/>
+                      <a:round/>
+                      <a:headEnd type="none" w="med" len="med"/>
+                      <a:tailEnd type="none" w="med" len="med"/>
+                    </a:lnR>
+                    <a:lnT w="12700" cap="flat" cmpd="sng" algn="ctr">
+                      <a:solidFill>
+                        <a:schemeClr val="tx1"/>
+                      </a:solidFill>
+                      <a:prstDash val="solid"/>
+                      <a:round/>
+                      <a:headEnd type="none" w="med" len="med"/>
+                      <a:tailEnd type="none" w="med" len="med"/>
+                    </a:lnT>
+                    <a:lnB w="12700" cap="flat" cmpd="sng" algn="ctr">
+                      <a:solidFill>
+                        <a:schemeClr val="tx1"/>
+                      </a:solidFill>
+                      <a:prstDash val="solid"/>
+                      <a:round/>
+                      <a:headEnd type="none" w="med" len="med"/>
+                      <a:tailEnd type="none" w="med" len="med"/>
+                    </a:lnB>
+                  </a:tcPr>
+                </a:tc>
+                <a:tc>
+                  <a:txBody>
+                    <a:bodyPr/>
+                    <a:lstStyle/>
+                    <a:p>
+                      <a:pPr algn="l"/>
+                      <a:r>
+                        <a:rPr lang="ru-RU" b="1" dirty="0">
+                          <a:effectLst/>
+                        </a:rPr>
+                        <a:t>В)</a:t>
+                      </a:r>
+                      <a:r>
+                        <a:rPr lang="ru-RU" dirty="0">
+                          <a:effectLst/>
+                        </a:rPr>
+                        <a:t> Сообщение / Данные </a:t>
+                      </a:r>
+                      <a:r>
+                        <a:rPr lang="ru-RU" i="1" dirty="0">
+                          <a:effectLst/>
+                        </a:rPr>
+                        <a:t>(</a:t>
+                      </a:r>
+                      <a:r>
+                        <a:rPr lang="ru-RU" i="1" dirty="0" err="1">
+                          <a:effectLst/>
+                        </a:rPr>
+                        <a:t>Data</a:t>
+                      </a:r>
+                      <a:r>
+                        <a:rPr lang="ru-RU" i="1" dirty="0">
+                          <a:effectLst/>
+                        </a:rPr>
+                        <a:t> / </a:t>
+                      </a:r>
+                      <a:r>
+                        <a:rPr lang="ru-RU" i="1" dirty="0" err="1">
+                          <a:effectLst/>
+                        </a:rPr>
+                        <a:t>Message</a:t>
+                      </a:r>
+                      <a:r>
+                        <a:rPr lang="ru-RU" i="1" dirty="0">
+                          <a:effectLst/>
+                        </a:rPr>
+                        <a:t>)</a:t>
+                      </a:r>
+                      <a:endParaRPr lang="ru-RU" dirty="0">
+                        <a:effectLst/>
+                      </a:endParaRPr>
+                    </a:p>
+                  </a:txBody>
+                  <a:tcPr marL="95250" marR="95250" marT="47625" marB="47625" anchor="ctr">
+                    <a:lnL w="12700" cap="flat" cmpd="sng" algn="ctr">
+                      <a:solidFill>
+                        <a:schemeClr val="tx1"/>
+                      </a:solidFill>
+                      <a:prstDash val="solid"/>
+                      <a:round/>
+                      <a:headEnd type="none" w="med" len="med"/>
+                      <a:tailEnd type="none" w="med" len="med"/>
+                    </a:lnL>
+                    <a:lnR w="12700" cap="flat" cmpd="sng" algn="ctr">
+                      <a:solidFill>
+                        <a:schemeClr val="tx1"/>
+                      </a:solidFill>
+                      <a:prstDash val="solid"/>
+                      <a:round/>
+                      <a:headEnd type="none" w="med" len="med"/>
+                      <a:tailEnd type="none" w="med" len="med"/>
+                    </a:lnR>
+                    <a:lnT w="12700" cap="flat" cmpd="sng" algn="ctr">
+                      <a:solidFill>
+                        <a:schemeClr val="tx1"/>
+                      </a:solidFill>
+                      <a:prstDash val="solid"/>
+                      <a:round/>
+                      <a:headEnd type="none" w="med" len="med"/>
+                      <a:tailEnd type="none" w="med" len="med"/>
+                    </a:lnT>
+                    <a:lnB w="12700" cap="flat" cmpd="sng" algn="ctr">
+                      <a:solidFill>
+                        <a:schemeClr val="tx1"/>
+                      </a:solidFill>
+                      <a:prstDash val="solid"/>
+                      <a:round/>
+                      <a:headEnd type="none" w="med" len="med"/>
+                      <a:tailEnd type="none" w="med" len="med"/>
+                    </a:lnB>
+                  </a:tcPr>
+                </a:tc>
+                <a:extLst>
+                  <a:ext uri="{0D108BD9-81ED-4DB2-BD59-A6C34878D82A}">
+                    <a16:rowId xmlns:a16="http://schemas.microsoft.com/office/drawing/2014/main" val="2058905341"/>
+                  </a:ext>
+                </a:extLst>
+              </a:tr>
+              <a:tr h="0">
+                <a:tc>
+                  <a:txBody>
+                    <a:bodyPr/>
+                    <a:lstStyle/>
+                    <a:p>
+                      <a:pPr algn="l"/>
+                      <a:r>
+                        <a:rPr lang="ru-RU" b="1">
+                          <a:effectLst/>
+                        </a:rPr>
+                        <a:t>4. Канальный уровень / Доступа к сети</a:t>
+                      </a:r>
+                      <a:r>
+                        <a:rPr lang="ru-RU">
+                          <a:effectLst/>
+                        </a:rPr>
+                        <a:t> </a:t>
+                      </a:r>
+                      <a:r>
+                        <a:rPr lang="ru-RU" i="1">
+                          <a:effectLst/>
+                        </a:rPr>
+                        <a:t>(Data Link)</a:t>
+                      </a:r>
+                      <a:endParaRPr lang="ru-RU">
+                        <a:effectLst/>
+                      </a:endParaRPr>
+                    </a:p>
+                  </a:txBody>
+                  <a:tcPr marL="95250" marR="95250" marT="47625" marB="47625" anchor="ctr">
+                    <a:lnL w="12700" cap="flat" cmpd="sng" algn="ctr">
+                      <a:solidFill>
+                        <a:schemeClr val="tx1"/>
+                      </a:solidFill>
+                      <a:prstDash val="solid"/>
+                      <a:round/>
+                      <a:headEnd type="none" w="med" len="med"/>
+                      <a:tailEnd type="none" w="med" len="med"/>
+                    </a:lnL>
+                    <a:lnR w="12700" cap="flat" cmpd="sng" algn="ctr">
+                      <a:solidFill>
+                        <a:schemeClr val="tx1"/>
+                      </a:solidFill>
+                      <a:prstDash val="solid"/>
+                      <a:round/>
+                      <a:headEnd type="none" w="med" len="med"/>
+                      <a:tailEnd type="none" w="med" len="med"/>
+                    </a:lnR>
+                    <a:lnT w="12700" cap="flat" cmpd="sng" algn="ctr">
+                      <a:solidFill>
+                        <a:schemeClr val="tx1"/>
+                      </a:solidFill>
+                      <a:prstDash val="solid"/>
+                      <a:round/>
+                      <a:headEnd type="none" w="med" len="med"/>
+                      <a:tailEnd type="none" w="med" len="med"/>
+                    </a:lnT>
+                    <a:lnB w="12700" cap="flat" cmpd="sng" algn="ctr">
+                      <a:solidFill>
+                        <a:schemeClr val="tx1"/>
+                      </a:solidFill>
+                      <a:prstDash val="solid"/>
+                      <a:round/>
+                      <a:headEnd type="none" w="med" len="med"/>
+                      <a:tailEnd type="none" w="med" len="med"/>
+                    </a:lnB>
+                  </a:tcPr>
+                </a:tc>
+                <a:tc>
+                  <a:txBody>
+                    <a:bodyPr/>
+                    <a:lstStyle/>
+                    <a:p>
+                      <a:pPr algn="l"/>
+                      <a:r>
+                        <a:rPr lang="ru-RU" b="1" dirty="0">
+                          <a:effectLst/>
+                        </a:rPr>
+                        <a:t>Г)</a:t>
+                      </a:r>
+                      <a:r>
+                        <a:rPr lang="ru-RU" dirty="0">
+                          <a:effectLst/>
+                        </a:rPr>
+                        <a:t> Сегмент </a:t>
+                      </a:r>
+                      <a:r>
+                        <a:rPr lang="ru-RU" i="1" dirty="0">
+                          <a:effectLst/>
+                        </a:rPr>
+                        <a:t>(</a:t>
+                      </a:r>
+                      <a:r>
+                        <a:rPr lang="ru-RU" i="1" dirty="0" err="1">
+                          <a:effectLst/>
+                        </a:rPr>
+                        <a:t>Segment</a:t>
+                      </a:r>
+                      <a:r>
+                        <a:rPr lang="ru-RU" i="1" dirty="0">
+                          <a:effectLst/>
+                        </a:rPr>
+                        <a:t>)</a:t>
+                      </a:r>
+                      <a:r>
+                        <a:rPr lang="ru-RU" dirty="0">
+                          <a:effectLst/>
+                        </a:rPr>
+                        <a:t> / Дейтаграмма </a:t>
+                      </a:r>
+                      <a:r>
+                        <a:rPr lang="ru-RU" i="1" dirty="0">
+                          <a:effectLst/>
+                        </a:rPr>
+                        <a:t>(UDP)</a:t>
+                      </a:r>
+                      <a:endParaRPr lang="ru-RU" dirty="0">
+                        <a:effectLst/>
+                      </a:endParaRPr>
+                    </a:p>
+                  </a:txBody>
+                  <a:tcPr marL="95250" marR="95250" marT="47625" marB="47625" anchor="ctr">
+                    <a:lnL w="12700" cap="flat" cmpd="sng" algn="ctr">
+                      <a:solidFill>
+                        <a:schemeClr val="tx1"/>
+                      </a:solidFill>
+                      <a:prstDash val="solid"/>
+                      <a:round/>
+                      <a:headEnd type="none" w="med" len="med"/>
+                      <a:tailEnd type="none" w="med" len="med"/>
+                    </a:lnL>
+                    <a:lnR w="12700" cap="flat" cmpd="sng" algn="ctr">
+                      <a:solidFill>
+                        <a:schemeClr val="tx1"/>
+                      </a:solidFill>
+                      <a:prstDash val="solid"/>
+                      <a:round/>
+                      <a:headEnd type="none" w="med" len="med"/>
+                      <a:tailEnd type="none" w="med" len="med"/>
+                    </a:lnR>
+                    <a:lnT w="12700" cap="flat" cmpd="sng" algn="ctr">
+                      <a:solidFill>
+                        <a:schemeClr val="tx1"/>
+                      </a:solidFill>
+                      <a:prstDash val="solid"/>
+                      <a:round/>
+                      <a:headEnd type="none" w="med" len="med"/>
+                      <a:tailEnd type="none" w="med" len="med"/>
+                    </a:lnT>
+                    <a:lnB w="12700" cap="flat" cmpd="sng" algn="ctr">
+                      <a:solidFill>
+                        <a:schemeClr val="tx1"/>
+                      </a:solidFill>
+                      <a:prstDash val="solid"/>
+                      <a:round/>
+                      <a:headEnd type="none" w="med" len="med"/>
+                      <a:tailEnd type="none" w="med" len="med"/>
+                    </a:lnB>
+                  </a:tcPr>
+                </a:tc>
+                <a:extLst>
+                  <a:ext uri="{0D108BD9-81ED-4DB2-BD59-A6C34878D82A}">
+                    <a16:rowId xmlns:a16="http://schemas.microsoft.com/office/drawing/2014/main" val="1464320019"/>
+                  </a:ext>
+                </a:extLst>
+              </a:tr>
+            </a:tbl>
+          </a:graphicData>
+        </a:graphic>
+      </p:graphicFrame>
+    </p:spTree>
+    <p:extLst>
+      <p:ext uri="{BB962C8B-B14F-4D97-AF65-F5344CB8AC3E}">
+        <p14:creationId xmlns:p14="http://schemas.microsoft.com/office/powerpoint/2010/main" val="2092077124"/>
+      </p:ext>
+    </p:extLst>
+  </p:cSld>
+  <p:clrMapOvr>
+    <a:masterClrMapping/>
+  </p:clrMapOvr>
+</p:sld>
+</file>
+
 <file path=ppt/slides/slide2.xml><?xml version="1.0" encoding="utf-8"?>
 <p:sld xmlns:a="http://schemas.openxmlformats.org/drawingml/2006/main" xmlns:r="http://schemas.openxmlformats.org/officeDocument/2006/relationships" xmlns:p="http://schemas.openxmlformats.org/presentationml/2006/main">
   <p:cSld>
@@ -13001,7 +15585,6 @@
               <a:rPr lang="ru-RU" dirty="0"/>
               <a:t>Архитектурные принципы проектирования сетей</a:t>
             </a:r>
-            <a:endParaRPr lang="ru-RU" dirty="0"/>
           </a:p>
         </p:txBody>
       </p:sp>
@@ -13184,7 +15767,6 @@
               <a:rPr lang="ru-RU" dirty="0"/>
               <a:t>Протоколы, интерфейсы и стек</a:t>
             </a:r>
-            <a:endParaRPr lang="ru-RU" dirty="0"/>
           </a:p>
         </p:txBody>
       </p:sp>
@@ -15277,7 +17859,6 @@
               <a:rPr lang="ru-RU" dirty="0"/>
               <a:t>Модель TCP/IP в сравнении с моделью OSI</a:t>
             </a:r>
-            <a:endParaRPr lang="ru-RU" dirty="0"/>
           </a:p>
         </p:txBody>
       </p:sp>
@@ -15538,7 +18119,9 @@
           </a:xfrm>
         </p:spPr>
         <p:txBody>
-          <a:bodyPr/>
+          <a:bodyPr>
+            <a:normAutofit lnSpcReduction="10000"/>
+          </a:bodyPr>
           <a:lstStyle/>
           <a:p>
             <a:r>

--- a/1.3 Architecture/1.3 Architecture.pptx
+++ b/1.3 Architecture/1.3 Architecture.pptx
@@ -7,23 +7,25 @@
   <p:sldIdLst>
     <p:sldId id="256" r:id="rId2"/>
     <p:sldId id="257" r:id="rId3"/>
-    <p:sldId id="258" r:id="rId4"/>
-    <p:sldId id="259" r:id="rId5"/>
-    <p:sldId id="263" r:id="rId6"/>
-    <p:sldId id="260" r:id="rId7"/>
-    <p:sldId id="264" r:id="rId8"/>
-    <p:sldId id="261" r:id="rId9"/>
-    <p:sldId id="265" r:id="rId10"/>
-    <p:sldId id="262" r:id="rId11"/>
-    <p:sldId id="266" r:id="rId12"/>
-    <p:sldId id="267" r:id="rId13"/>
-    <p:sldId id="268" r:id="rId14"/>
-    <p:sldId id="269" r:id="rId15"/>
-    <p:sldId id="270" r:id="rId16"/>
-    <p:sldId id="271" r:id="rId17"/>
-    <p:sldId id="272" r:id="rId18"/>
-    <p:sldId id="273" r:id="rId19"/>
-    <p:sldId id="274" r:id="rId20"/>
+    <p:sldId id="275" r:id="rId4"/>
+    <p:sldId id="276" r:id="rId5"/>
+    <p:sldId id="258" r:id="rId6"/>
+    <p:sldId id="259" r:id="rId7"/>
+    <p:sldId id="263" r:id="rId8"/>
+    <p:sldId id="260" r:id="rId9"/>
+    <p:sldId id="264" r:id="rId10"/>
+    <p:sldId id="261" r:id="rId11"/>
+    <p:sldId id="265" r:id="rId12"/>
+    <p:sldId id="262" r:id="rId13"/>
+    <p:sldId id="266" r:id="rId14"/>
+    <p:sldId id="267" r:id="rId15"/>
+    <p:sldId id="268" r:id="rId16"/>
+    <p:sldId id="269" r:id="rId17"/>
+    <p:sldId id="270" r:id="rId18"/>
+    <p:sldId id="271" r:id="rId19"/>
+    <p:sldId id="272" r:id="rId20"/>
+    <p:sldId id="273" r:id="rId21"/>
+    <p:sldId id="274" r:id="rId22"/>
   </p:sldIdLst>
   <p:sldSz cx="12192000" cy="6858000"/>
   <p:notesSz cx="6858000" cy="9144000"/>
@@ -187,7 +189,7 @@
           <a:noFill/>
           <a:extLst>
             <a:ext uri="{909E8E84-426E-40dd-AFC4-6F175D3DCCD1}">
-              <a14:hiddenFill xmlns="" xmlns:a14="http://schemas.microsoft.com/office/drawing/2010/main">
+              <a14:hiddenFill xmlns:a14="http://schemas.microsoft.com/office/drawing/2010/main" xmlns="">
                 <a:solidFill>
                   <a:srgbClr val="FFFFFF"/>
                 </a:solidFill>
@@ -246,7 +248,7 @@
             </a:ln>
             <a:extLst>
               <a:ext uri="{91240B29-F687-4f45-9708-019B960494DF}">
-                <a14:hiddenLine xmlns="" xmlns:a14="http://schemas.microsoft.com/office/drawing/2010/main" w="9525">
+                <a14:hiddenLine xmlns:a14="http://schemas.microsoft.com/office/drawing/2010/main" xmlns="" w="9525">
                   <a:solidFill>
                     <a:srgbClr val="000000"/>
                   </a:solidFill>
@@ -336,7 +338,7 @@
             </a:ln>
             <a:extLst>
               <a:ext uri="{91240B29-F687-4f45-9708-019B960494DF}">
-                <a14:hiddenLine xmlns="" xmlns:a14="http://schemas.microsoft.com/office/drawing/2010/main" w="9525">
+                <a14:hiddenLine xmlns:a14="http://schemas.microsoft.com/office/drawing/2010/main" xmlns="" w="9525">
                   <a:solidFill>
                     <a:srgbClr val="000000"/>
                   </a:solidFill>
@@ -426,7 +428,7 @@
             </a:ln>
             <a:extLst>
               <a:ext uri="{91240B29-F687-4f45-9708-019B960494DF}">
-                <a14:hiddenLine xmlns="" xmlns:a14="http://schemas.microsoft.com/office/drawing/2010/main" w="9525">
+                <a14:hiddenLine xmlns:a14="http://schemas.microsoft.com/office/drawing/2010/main" xmlns="" w="9525">
                   <a:solidFill>
                     <a:srgbClr val="000000"/>
                   </a:solidFill>
@@ -460,7 +462,7 @@
             </a:ln>
             <a:extLst>
               <a:ext uri="{91240B29-F687-4f45-9708-019B960494DF}">
-                <a14:hiddenLine xmlns="" xmlns:a14="http://schemas.microsoft.com/office/drawing/2010/main" w="9525">
+                <a14:hiddenLine xmlns:a14="http://schemas.microsoft.com/office/drawing/2010/main" xmlns="" w="9525">
                   <a:solidFill>
                     <a:srgbClr val="000000"/>
                   </a:solidFill>
@@ -550,7 +552,7 @@
             </a:ln>
             <a:extLst>
               <a:ext uri="{91240B29-F687-4f45-9708-019B960494DF}">
-                <a14:hiddenLine xmlns="" xmlns:a14="http://schemas.microsoft.com/office/drawing/2010/main" w="9525">
+                <a14:hiddenLine xmlns:a14="http://schemas.microsoft.com/office/drawing/2010/main" xmlns="" w="9525">
                   <a:solidFill>
                     <a:srgbClr val="000000"/>
                   </a:solidFill>
@@ -612,7 +614,7 @@
             </a:ln>
             <a:extLst>
               <a:ext uri="{91240B29-F687-4f45-9708-019B960494DF}">
-                <a14:hiddenLine xmlns="" xmlns:a14="http://schemas.microsoft.com/office/drawing/2010/main" w="9525">
+                <a14:hiddenLine xmlns:a14="http://schemas.microsoft.com/office/drawing/2010/main" xmlns="" w="9525">
                   <a:solidFill>
                     <a:srgbClr val="000000"/>
                   </a:solidFill>
@@ -674,7 +676,7 @@
             </a:ln>
             <a:extLst>
               <a:ext uri="{91240B29-F687-4f45-9708-019B960494DF}">
-                <a14:hiddenLine xmlns="" xmlns:a14="http://schemas.microsoft.com/office/drawing/2010/main" w="9525">
+                <a14:hiddenLine xmlns:a14="http://schemas.microsoft.com/office/drawing/2010/main" xmlns="" w="9525">
                   <a:solidFill>
                     <a:srgbClr val="000000"/>
                   </a:solidFill>
@@ -764,7 +766,7 @@
             </a:ln>
             <a:extLst>
               <a:ext uri="{91240B29-F687-4f45-9708-019B960494DF}">
-                <a14:hiddenLine xmlns="" xmlns:a14="http://schemas.microsoft.com/office/drawing/2010/main" w="9525">
+                <a14:hiddenLine xmlns:a14="http://schemas.microsoft.com/office/drawing/2010/main" xmlns="" w="9525">
                   <a:solidFill>
                     <a:srgbClr val="000000"/>
                   </a:solidFill>
@@ -826,7 +828,7 @@
             </a:ln>
             <a:extLst>
               <a:ext uri="{91240B29-F687-4f45-9708-019B960494DF}">
-                <a14:hiddenLine xmlns="" xmlns:a14="http://schemas.microsoft.com/office/drawing/2010/main" w="9525">
+                <a14:hiddenLine xmlns:a14="http://schemas.microsoft.com/office/drawing/2010/main" xmlns="" w="9525">
                   <a:solidFill>
                     <a:srgbClr val="000000"/>
                   </a:solidFill>
@@ -888,7 +890,7 @@
             </a:ln>
             <a:extLst>
               <a:ext uri="{91240B29-F687-4f45-9708-019B960494DF}">
-                <a14:hiddenLine xmlns="" xmlns:a14="http://schemas.microsoft.com/office/drawing/2010/main" w="9525">
+                <a14:hiddenLine xmlns:a14="http://schemas.microsoft.com/office/drawing/2010/main" xmlns="" w="9525">
                   <a:solidFill>
                     <a:srgbClr val="000000"/>
                   </a:solidFill>
@@ -978,7 +980,7 @@
             </a:ln>
             <a:extLst>
               <a:ext uri="{91240B29-F687-4f45-9708-019B960494DF}">
-                <a14:hiddenLine xmlns="" xmlns:a14="http://schemas.microsoft.com/office/drawing/2010/main" w="9525">
+                <a14:hiddenLine xmlns:a14="http://schemas.microsoft.com/office/drawing/2010/main" xmlns="" w="9525">
                   <a:solidFill>
                     <a:srgbClr val="000000"/>
                   </a:solidFill>
@@ -1068,7 +1070,7 @@
             </a:ln>
             <a:extLst>
               <a:ext uri="{91240B29-F687-4f45-9708-019B960494DF}">
-                <a14:hiddenLine xmlns="" xmlns:a14="http://schemas.microsoft.com/office/drawing/2010/main" w="9525">
+                <a14:hiddenLine xmlns:a14="http://schemas.microsoft.com/office/drawing/2010/main" xmlns="" w="9525">
                   <a:solidFill>
                     <a:srgbClr val="000000"/>
                   </a:solidFill>
@@ -1130,7 +1132,7 @@
             </a:ln>
             <a:extLst>
               <a:ext uri="{91240B29-F687-4f45-9708-019B960494DF}">
-                <a14:hiddenLine xmlns="" xmlns:a14="http://schemas.microsoft.com/office/drawing/2010/main" w="9525">
+                <a14:hiddenLine xmlns:a14="http://schemas.microsoft.com/office/drawing/2010/main" xmlns="" w="9525">
                   <a:solidFill>
                     <a:srgbClr val="000000"/>
                   </a:solidFill>
@@ -1240,7 +1242,7 @@
             </a:ln>
             <a:extLst>
               <a:ext uri="{91240B29-F687-4f45-9708-019B960494DF}">
-                <a14:hiddenLine xmlns="" xmlns:a14="http://schemas.microsoft.com/office/drawing/2010/main" w="9525">
+                <a14:hiddenLine xmlns:a14="http://schemas.microsoft.com/office/drawing/2010/main" xmlns="" w="9525">
                   <a:solidFill>
                     <a:srgbClr val="000000"/>
                   </a:solidFill>
@@ -1302,7 +1304,7 @@
             </a:ln>
             <a:extLst>
               <a:ext uri="{91240B29-F687-4f45-9708-019B960494DF}">
-                <a14:hiddenLine xmlns="" xmlns:a14="http://schemas.microsoft.com/office/drawing/2010/main" w="9525">
+                <a14:hiddenLine xmlns:a14="http://schemas.microsoft.com/office/drawing/2010/main" xmlns="" w="9525">
                   <a:solidFill>
                     <a:srgbClr val="000000"/>
                   </a:solidFill>
@@ -1392,7 +1394,7 @@
             </a:ln>
             <a:extLst>
               <a:ext uri="{91240B29-F687-4f45-9708-019B960494DF}">
-                <a14:hiddenLine xmlns="" xmlns:a14="http://schemas.microsoft.com/office/drawing/2010/main" w="9525">
+                <a14:hiddenLine xmlns:a14="http://schemas.microsoft.com/office/drawing/2010/main" xmlns="" w="9525">
                   <a:solidFill>
                     <a:srgbClr val="000000"/>
                   </a:solidFill>
@@ -1482,7 +1484,7 @@
             </a:ln>
             <a:extLst>
               <a:ext uri="{91240B29-F687-4f45-9708-019B960494DF}">
-                <a14:hiddenLine xmlns="" xmlns:a14="http://schemas.microsoft.com/office/drawing/2010/main" w="9525">
+                <a14:hiddenLine xmlns:a14="http://schemas.microsoft.com/office/drawing/2010/main" xmlns="" w="9525">
                   <a:solidFill>
                     <a:srgbClr val="000000"/>
                   </a:solidFill>
@@ -1544,7 +1546,7 @@
             </a:ln>
             <a:extLst>
               <a:ext uri="{91240B29-F687-4f45-9708-019B960494DF}">
-                <a14:hiddenLine xmlns="" xmlns:a14="http://schemas.microsoft.com/office/drawing/2010/main" w="9525">
+                <a14:hiddenLine xmlns:a14="http://schemas.microsoft.com/office/drawing/2010/main" xmlns="" w="9525">
                   <a:solidFill>
                     <a:srgbClr val="000000"/>
                   </a:solidFill>
@@ -1634,7 +1636,7 @@
             </a:ln>
             <a:extLst>
               <a:ext uri="{91240B29-F687-4f45-9708-019B960494DF}">
-                <a14:hiddenLine xmlns="" xmlns:a14="http://schemas.microsoft.com/office/drawing/2010/main" w="9525">
+                <a14:hiddenLine xmlns:a14="http://schemas.microsoft.com/office/drawing/2010/main" xmlns="" w="9525">
                   <a:solidFill>
                     <a:srgbClr val="000000"/>
                   </a:solidFill>
@@ -1724,7 +1726,7 @@
             </a:ln>
             <a:extLst>
               <a:ext uri="{91240B29-F687-4f45-9708-019B960494DF}">
-                <a14:hiddenLine xmlns="" xmlns:a14="http://schemas.microsoft.com/office/drawing/2010/main" w="9525">
+                <a14:hiddenLine xmlns:a14="http://schemas.microsoft.com/office/drawing/2010/main" xmlns="" w="9525">
                   <a:solidFill>
                     <a:srgbClr val="000000"/>
                   </a:solidFill>
@@ -1780,7 +1782,7 @@
             </a:ln>
             <a:extLst>
               <a:ext uri="{91240B29-F687-4f45-9708-019B960494DF}">
-                <a14:hiddenLine xmlns="" xmlns:a14="http://schemas.microsoft.com/office/drawing/2010/main" w="9525">
+                <a14:hiddenLine xmlns:a14="http://schemas.microsoft.com/office/drawing/2010/main" xmlns="" w="9525">
                   <a:solidFill>
                     <a:srgbClr val="000000"/>
                   </a:solidFill>
@@ -1870,7 +1872,7 @@
             </a:ln>
             <a:extLst>
               <a:ext uri="{91240B29-F687-4f45-9708-019B960494DF}">
-                <a14:hiddenLine xmlns="" xmlns:a14="http://schemas.microsoft.com/office/drawing/2010/main" w="9525">
+                <a14:hiddenLine xmlns:a14="http://schemas.microsoft.com/office/drawing/2010/main" xmlns="" w="9525">
                   <a:solidFill>
                     <a:srgbClr val="000000"/>
                   </a:solidFill>
@@ -1926,7 +1928,7 @@
             </a:ln>
             <a:extLst>
               <a:ext uri="{91240B29-F687-4f45-9708-019B960494DF}">
-                <a14:hiddenLine xmlns="" xmlns:a14="http://schemas.microsoft.com/office/drawing/2010/main" w="9525">
+                <a14:hiddenLine xmlns:a14="http://schemas.microsoft.com/office/drawing/2010/main" xmlns="" w="9525">
                   <a:solidFill>
                     <a:srgbClr val="000000"/>
                   </a:solidFill>
@@ -2016,7 +2018,7 @@
             </a:ln>
             <a:extLst>
               <a:ext uri="{91240B29-F687-4f45-9708-019B960494DF}">
-                <a14:hiddenLine xmlns="" xmlns:a14="http://schemas.microsoft.com/office/drawing/2010/main" w="9525">
+                <a14:hiddenLine xmlns:a14="http://schemas.microsoft.com/office/drawing/2010/main" xmlns="" w="9525">
                   <a:solidFill>
                     <a:srgbClr val="000000"/>
                   </a:solidFill>
@@ -2084,7 +2086,7 @@
             </a:ln>
             <a:extLst>
               <a:ext uri="{91240B29-F687-4f45-9708-019B960494DF}">
-                <a14:hiddenLine xmlns="" xmlns:a14="http://schemas.microsoft.com/office/drawing/2010/main" w="9525">
+                <a14:hiddenLine xmlns:a14="http://schemas.microsoft.com/office/drawing/2010/main" xmlns="" w="9525">
                   <a:solidFill>
                     <a:srgbClr val="000000"/>
                   </a:solidFill>
@@ -2174,7 +2176,7 @@
             </a:ln>
             <a:extLst>
               <a:ext uri="{91240B29-F687-4f45-9708-019B960494DF}">
-                <a14:hiddenLine xmlns="" xmlns:a14="http://schemas.microsoft.com/office/drawing/2010/main" w="9525">
+                <a14:hiddenLine xmlns:a14="http://schemas.microsoft.com/office/drawing/2010/main" xmlns="" w="9525">
                   <a:solidFill>
                     <a:srgbClr val="000000"/>
                   </a:solidFill>
@@ -2242,7 +2244,7 @@
             </a:ln>
             <a:extLst>
               <a:ext uri="{91240B29-F687-4f45-9708-019B960494DF}">
-                <a14:hiddenLine xmlns="" xmlns:a14="http://schemas.microsoft.com/office/drawing/2010/main" w="9525">
+                <a14:hiddenLine xmlns:a14="http://schemas.microsoft.com/office/drawing/2010/main" xmlns="" w="9525">
                   <a:solidFill>
                     <a:srgbClr val="000000"/>
                   </a:solidFill>
@@ -2332,7 +2334,7 @@
             </a:ln>
             <a:extLst>
               <a:ext uri="{91240B29-F687-4f45-9708-019B960494DF}">
-                <a14:hiddenLine xmlns="" xmlns:a14="http://schemas.microsoft.com/office/drawing/2010/main" w="9525">
+                <a14:hiddenLine xmlns:a14="http://schemas.microsoft.com/office/drawing/2010/main" xmlns="" w="9525">
                   <a:solidFill>
                     <a:srgbClr val="000000"/>
                   </a:solidFill>
@@ -2366,7 +2368,7 @@
             </a:ln>
             <a:extLst>
               <a:ext uri="{91240B29-F687-4f45-9708-019B960494DF}">
-                <a14:hiddenLine xmlns="" xmlns:a14="http://schemas.microsoft.com/office/drawing/2010/main" w="9525">
+                <a14:hiddenLine xmlns:a14="http://schemas.microsoft.com/office/drawing/2010/main" xmlns="" w="9525">
                   <a:solidFill>
                     <a:srgbClr val="000000"/>
                   </a:solidFill>
@@ -2456,7 +2458,7 @@
             </a:ln>
             <a:extLst>
               <a:ext uri="{91240B29-F687-4f45-9708-019B960494DF}">
-                <a14:hiddenLine xmlns="" xmlns:a14="http://schemas.microsoft.com/office/drawing/2010/main" w="9525">
+                <a14:hiddenLine xmlns:a14="http://schemas.microsoft.com/office/drawing/2010/main" xmlns="" w="9525">
                   <a:solidFill>
                     <a:srgbClr val="000000"/>
                   </a:solidFill>
@@ -2518,7 +2520,7 @@
             </a:ln>
             <a:extLst>
               <a:ext uri="{91240B29-F687-4f45-9708-019B960494DF}">
-                <a14:hiddenLine xmlns="" xmlns:a14="http://schemas.microsoft.com/office/drawing/2010/main" w="9525">
+                <a14:hiddenLine xmlns:a14="http://schemas.microsoft.com/office/drawing/2010/main" xmlns="" w="9525">
                   <a:solidFill>
                     <a:srgbClr val="000000"/>
                   </a:solidFill>
@@ -2580,7 +2582,7 @@
             </a:ln>
             <a:extLst>
               <a:ext uri="{91240B29-F687-4f45-9708-019B960494DF}">
-                <a14:hiddenLine xmlns="" xmlns:a14="http://schemas.microsoft.com/office/drawing/2010/main" w="9525">
+                <a14:hiddenLine xmlns:a14="http://schemas.microsoft.com/office/drawing/2010/main" xmlns="" w="9525">
                   <a:solidFill>
                     <a:srgbClr val="000000"/>
                   </a:solidFill>
@@ -2670,7 +2672,7 @@
             </a:ln>
             <a:extLst>
               <a:ext uri="{91240B29-F687-4f45-9708-019B960494DF}">
-                <a14:hiddenLine xmlns="" xmlns:a14="http://schemas.microsoft.com/office/drawing/2010/main" w="9525">
+                <a14:hiddenLine xmlns:a14="http://schemas.microsoft.com/office/drawing/2010/main" xmlns="" w="9525">
                   <a:solidFill>
                     <a:srgbClr val="000000"/>
                   </a:solidFill>
@@ -2738,7 +2740,7 @@
             </a:ln>
             <a:extLst>
               <a:ext uri="{91240B29-F687-4f45-9708-019B960494DF}">
-                <a14:hiddenLine xmlns="" xmlns:a14="http://schemas.microsoft.com/office/drawing/2010/main" w="9525">
+                <a14:hiddenLine xmlns:a14="http://schemas.microsoft.com/office/drawing/2010/main" xmlns="" w="9525">
                   <a:solidFill>
                     <a:srgbClr val="000000"/>
                   </a:solidFill>
@@ -2800,7 +2802,7 @@
             </a:ln>
             <a:extLst>
               <a:ext uri="{91240B29-F687-4f45-9708-019B960494DF}">
-                <a14:hiddenLine xmlns="" xmlns:a14="http://schemas.microsoft.com/office/drawing/2010/main" w="9525">
+                <a14:hiddenLine xmlns:a14="http://schemas.microsoft.com/office/drawing/2010/main" xmlns="" w="9525">
                   <a:solidFill>
                     <a:srgbClr val="000000"/>
                   </a:solidFill>
@@ -2890,7 +2892,7 @@
             </a:ln>
             <a:extLst>
               <a:ext uri="{91240B29-F687-4f45-9708-019B960494DF}">
-                <a14:hiddenLine xmlns="" xmlns:a14="http://schemas.microsoft.com/office/drawing/2010/main" w="9525">
+                <a14:hiddenLine xmlns:a14="http://schemas.microsoft.com/office/drawing/2010/main" xmlns="" w="9525">
                   <a:solidFill>
                     <a:srgbClr val="000000"/>
                   </a:solidFill>
@@ -2952,7 +2954,7 @@
             </a:ln>
             <a:extLst>
               <a:ext uri="{91240B29-F687-4f45-9708-019B960494DF}">
-                <a14:hiddenLine xmlns="" xmlns:a14="http://schemas.microsoft.com/office/drawing/2010/main" w="9525">
+                <a14:hiddenLine xmlns:a14="http://schemas.microsoft.com/office/drawing/2010/main" xmlns="" w="9525">
                   <a:solidFill>
                     <a:srgbClr val="000000"/>
                   </a:solidFill>
@@ -3042,7 +3044,7 @@
             </a:ln>
             <a:extLst>
               <a:ext uri="{91240B29-F687-4f45-9708-019B960494DF}">
-                <a14:hiddenLine xmlns="" xmlns:a14="http://schemas.microsoft.com/office/drawing/2010/main" w="9525">
+                <a14:hiddenLine xmlns:a14="http://schemas.microsoft.com/office/drawing/2010/main" xmlns="" w="9525">
                   <a:solidFill>
                     <a:srgbClr val="000000"/>
                   </a:solidFill>
@@ -3104,7 +3106,7 @@
             </a:ln>
             <a:extLst>
               <a:ext uri="{91240B29-F687-4f45-9708-019B960494DF}">
-                <a14:hiddenLine xmlns="" xmlns:a14="http://schemas.microsoft.com/office/drawing/2010/main" w="9525">
+                <a14:hiddenLine xmlns:a14="http://schemas.microsoft.com/office/drawing/2010/main" xmlns="" w="9525">
                   <a:solidFill>
                     <a:srgbClr val="000000"/>
                   </a:solidFill>
@@ -3194,7 +3196,7 @@
             </a:ln>
             <a:extLst>
               <a:ext uri="{91240B29-F687-4f45-9708-019B960494DF}">
-                <a14:hiddenLine xmlns="" xmlns:a14="http://schemas.microsoft.com/office/drawing/2010/main" w="9525">
+                <a14:hiddenLine xmlns:a14="http://schemas.microsoft.com/office/drawing/2010/main" xmlns="" w="9525">
                   <a:solidFill>
                     <a:srgbClr val="000000"/>
                   </a:solidFill>
@@ -3228,7 +3230,7 @@
             </a:ln>
             <a:extLst>
               <a:ext uri="{91240B29-F687-4f45-9708-019B960494DF}">
-                <a14:hiddenLine xmlns="" xmlns:a14="http://schemas.microsoft.com/office/drawing/2010/main" w="9525">
+                <a14:hiddenLine xmlns:a14="http://schemas.microsoft.com/office/drawing/2010/main" xmlns="" w="9525">
                   <a:solidFill>
                     <a:srgbClr val="000000"/>
                   </a:solidFill>
@@ -3293,7 +3295,7 @@
             </a:ln>
             <a:extLst>
               <a:ext uri="{91240B29-F687-4f45-9708-019B960494DF}">
-                <a14:hiddenLine xmlns="" xmlns:a14="http://schemas.microsoft.com/office/drawing/2010/main" w="9525">
+                <a14:hiddenLine xmlns:a14="http://schemas.microsoft.com/office/drawing/2010/main" xmlns="" w="9525">
                   <a:solidFill>
                     <a:srgbClr val="000000"/>
                   </a:solidFill>
@@ -3383,7 +3385,7 @@
             </a:ln>
             <a:extLst>
               <a:ext uri="{91240B29-F687-4f45-9708-019B960494DF}">
-                <a14:hiddenLine xmlns="" xmlns:a14="http://schemas.microsoft.com/office/drawing/2010/main" w="9525">
+                <a14:hiddenLine xmlns:a14="http://schemas.microsoft.com/office/drawing/2010/main" xmlns="" w="9525">
                   <a:solidFill>
                     <a:srgbClr val="000000"/>
                   </a:solidFill>
@@ -3445,7 +3447,7 @@
             </a:ln>
             <a:extLst>
               <a:ext uri="{91240B29-F687-4f45-9708-019B960494DF}">
-                <a14:hiddenLine xmlns="" xmlns:a14="http://schemas.microsoft.com/office/drawing/2010/main" w="9525">
+                <a14:hiddenLine xmlns:a14="http://schemas.microsoft.com/office/drawing/2010/main" xmlns="" w="9525">
                   <a:solidFill>
                     <a:srgbClr val="000000"/>
                   </a:solidFill>
@@ -3535,7 +3537,7 @@
             </a:ln>
             <a:extLst>
               <a:ext uri="{91240B29-F687-4f45-9708-019B960494DF}">
-                <a14:hiddenLine xmlns="" xmlns:a14="http://schemas.microsoft.com/office/drawing/2010/main" w="9525">
+                <a14:hiddenLine xmlns:a14="http://schemas.microsoft.com/office/drawing/2010/main" xmlns="" w="9525">
                   <a:solidFill>
                     <a:srgbClr val="000000"/>
                   </a:solidFill>
@@ -3625,7 +3627,7 @@
             </a:ln>
             <a:extLst>
               <a:ext uri="{91240B29-F687-4f45-9708-019B960494DF}">
-                <a14:hiddenLine xmlns="" xmlns:a14="http://schemas.microsoft.com/office/drawing/2010/main" w="9525">
+                <a14:hiddenLine xmlns:a14="http://schemas.microsoft.com/office/drawing/2010/main" xmlns="" w="9525">
                   <a:solidFill>
                     <a:srgbClr val="000000"/>
                   </a:solidFill>
@@ -3690,7 +3692,7 @@
             </a:ln>
             <a:extLst>
               <a:ext uri="{91240B29-F687-4f45-9708-019B960494DF}">
-                <a14:hiddenLine xmlns="" xmlns:a14="http://schemas.microsoft.com/office/drawing/2010/main" w="9525">
+                <a14:hiddenLine xmlns:a14="http://schemas.microsoft.com/office/drawing/2010/main" xmlns="" w="9525">
                   <a:solidFill>
                     <a:srgbClr val="000000"/>
                   </a:solidFill>
@@ -3752,7 +3754,7 @@
             </a:ln>
             <a:extLst>
               <a:ext uri="{91240B29-F687-4f45-9708-019B960494DF}">
-                <a14:hiddenLine xmlns="" xmlns:a14="http://schemas.microsoft.com/office/drawing/2010/main" w="9525">
+                <a14:hiddenLine xmlns:a14="http://schemas.microsoft.com/office/drawing/2010/main" xmlns="" w="9525">
                   <a:solidFill>
                     <a:srgbClr val="000000"/>
                   </a:solidFill>
@@ -3842,7 +3844,7 @@
             </a:ln>
             <a:extLst>
               <a:ext uri="{91240B29-F687-4f45-9708-019B960494DF}">
-                <a14:hiddenLine xmlns="" xmlns:a14="http://schemas.microsoft.com/office/drawing/2010/main" w="9525">
+                <a14:hiddenLine xmlns:a14="http://schemas.microsoft.com/office/drawing/2010/main" xmlns="" w="9525">
                   <a:solidFill>
                     <a:srgbClr val="000000"/>
                   </a:solidFill>
@@ -3932,7 +3934,7 @@
             </a:ln>
             <a:extLst>
               <a:ext uri="{91240B29-F687-4f45-9708-019B960494DF}">
-                <a14:hiddenLine xmlns="" xmlns:a14="http://schemas.microsoft.com/office/drawing/2010/main" w="9525">
+                <a14:hiddenLine xmlns:a14="http://schemas.microsoft.com/office/drawing/2010/main" xmlns="" w="9525">
                   <a:solidFill>
                     <a:srgbClr val="000000"/>
                   </a:solidFill>
@@ -3994,7 +3996,7 @@
             </a:ln>
             <a:extLst>
               <a:ext uri="{91240B29-F687-4f45-9708-019B960494DF}">
-                <a14:hiddenLine xmlns="" xmlns:a14="http://schemas.microsoft.com/office/drawing/2010/main" w="9525">
+                <a14:hiddenLine xmlns:a14="http://schemas.microsoft.com/office/drawing/2010/main" xmlns="" w="9525">
                   <a:solidFill>
                     <a:srgbClr val="000000"/>
                   </a:solidFill>
@@ -4114,7 +4116,7 @@
             </a:ln>
             <a:extLst>
               <a:ext uri="{91240B29-F687-4f45-9708-019B960494DF}">
-                <a14:hiddenLine xmlns="" xmlns:a14="http://schemas.microsoft.com/office/drawing/2010/main" w="9525">
+                <a14:hiddenLine xmlns:a14="http://schemas.microsoft.com/office/drawing/2010/main" xmlns="" w="9525">
                   <a:solidFill>
                     <a:srgbClr val="000000"/>
                   </a:solidFill>
@@ -4182,7 +4184,7 @@
             </a:ln>
             <a:extLst>
               <a:ext uri="{91240B29-F687-4f45-9708-019B960494DF}">
-                <a14:hiddenLine xmlns="" xmlns:a14="http://schemas.microsoft.com/office/drawing/2010/main" w="9525">
+                <a14:hiddenLine xmlns:a14="http://schemas.microsoft.com/office/drawing/2010/main" xmlns="" w="9525">
                   <a:solidFill>
                     <a:srgbClr val="000000"/>
                   </a:solidFill>
@@ -4272,7 +4274,7 @@
             </a:ln>
             <a:extLst>
               <a:ext uri="{91240B29-F687-4f45-9708-019B960494DF}">
-                <a14:hiddenLine xmlns="" xmlns:a14="http://schemas.microsoft.com/office/drawing/2010/main" w="9525">
+                <a14:hiddenLine xmlns:a14="http://schemas.microsoft.com/office/drawing/2010/main" xmlns="" w="9525">
                   <a:solidFill>
                     <a:srgbClr val="000000"/>
                   </a:solidFill>
@@ -4412,7 +4414,7 @@
           <a:p>
             <a:fld id="{6AC27FFC-58F7-4A0B-910F-2453E6738501}" type="datetimeFigureOut">
               <a:rPr lang="ru-RU" smtClean="0"/>
-              <a:t>30.08.2026</a:t>
+              <a:t>31.08.2026</a:t>
             </a:fld>
             <a:endParaRPr lang="ru-RU"/>
           </a:p>
@@ -4679,7 +4681,7 @@
           <a:p>
             <a:fld id="{6AC27FFC-58F7-4A0B-910F-2453E6738501}" type="datetimeFigureOut">
               <a:rPr lang="ru-RU" smtClean="0"/>
-              <a:t>30.08.2026</a:t>
+              <a:t>31.08.2026</a:t>
             </a:fld>
             <a:endParaRPr lang="ru-RU"/>
           </a:p>
@@ -4875,7 +4877,7 @@
           <a:p>
             <a:fld id="{6AC27FFC-58F7-4A0B-910F-2453E6738501}" type="datetimeFigureOut">
               <a:rPr lang="ru-RU" smtClean="0"/>
-              <a:t>30.08.2026</a:t>
+              <a:t>31.08.2026</a:t>
             </a:fld>
             <a:endParaRPr lang="ru-RU"/>
           </a:p>
@@ -5138,7 +5140,7 @@
           <a:p>
             <a:fld id="{6AC27FFC-58F7-4A0B-910F-2453E6738501}" type="datetimeFigureOut">
               <a:rPr lang="ru-RU" smtClean="0"/>
-              <a:t>30.08.2026</a:t>
+              <a:t>31.08.2026</a:t>
             </a:fld>
             <a:endParaRPr lang="ru-RU"/>
           </a:p>
@@ -5572,7 +5574,7 @@
           <a:p>
             <a:fld id="{6AC27FFC-58F7-4A0B-910F-2453E6738501}" type="datetimeFigureOut">
               <a:rPr lang="ru-RU" smtClean="0"/>
-              <a:t>30.08.2026</a:t>
+              <a:t>31.08.2026</a:t>
             </a:fld>
             <a:endParaRPr lang="ru-RU"/>
           </a:p>
@@ -6118,7 +6120,7 @@
           <a:p>
             <a:fld id="{6AC27FFC-58F7-4A0B-910F-2453E6738501}" type="datetimeFigureOut">
               <a:rPr lang="ru-RU" smtClean="0"/>
-              <a:t>30.08.2026</a:t>
+              <a:t>31.08.2026</a:t>
             </a:fld>
             <a:endParaRPr lang="ru-RU"/>
           </a:p>
@@ -6838,7 +6840,7 @@
           <a:p>
             <a:fld id="{6AC27FFC-58F7-4A0B-910F-2453E6738501}" type="datetimeFigureOut">
               <a:rPr lang="ru-RU" smtClean="0"/>
-              <a:t>30.08.2026</a:t>
+              <a:t>31.08.2026</a:t>
             </a:fld>
             <a:endParaRPr lang="ru-RU"/>
           </a:p>
@@ -7008,7 +7010,7 @@
           <a:p>
             <a:fld id="{6AC27FFC-58F7-4A0B-910F-2453E6738501}" type="datetimeFigureOut">
               <a:rPr lang="ru-RU" smtClean="0"/>
-              <a:t>30.08.2026</a:t>
+              <a:t>31.08.2026</a:t>
             </a:fld>
             <a:endParaRPr lang="ru-RU"/>
           </a:p>
@@ -7188,7 +7190,7 @@
           <a:p>
             <a:fld id="{6AC27FFC-58F7-4A0B-910F-2453E6738501}" type="datetimeFigureOut">
               <a:rPr lang="ru-RU" smtClean="0"/>
-              <a:t>30.08.2026</a:t>
+              <a:t>31.08.2026</a:t>
             </a:fld>
             <a:endParaRPr lang="ru-RU"/>
           </a:p>
@@ -7358,7 +7360,7 @@
           <a:p>
             <a:fld id="{6AC27FFC-58F7-4A0B-910F-2453E6738501}" type="datetimeFigureOut">
               <a:rPr lang="ru-RU" smtClean="0"/>
-              <a:t>30.08.2026</a:t>
+              <a:t>31.08.2026</a:t>
             </a:fld>
             <a:endParaRPr lang="ru-RU"/>
           </a:p>
@@ -7608,7 +7610,7 @@
           <a:p>
             <a:fld id="{6AC27FFC-58F7-4A0B-910F-2453E6738501}" type="datetimeFigureOut">
               <a:rPr lang="ru-RU" smtClean="0"/>
-              <a:t>30.08.2026</a:t>
+              <a:t>31.08.2026</a:t>
             </a:fld>
             <a:endParaRPr lang="ru-RU"/>
           </a:p>
@@ -7840,7 +7842,7 @@
           <a:p>
             <a:fld id="{6AC27FFC-58F7-4A0B-910F-2453E6738501}" type="datetimeFigureOut">
               <a:rPr lang="ru-RU" smtClean="0"/>
-              <a:t>30.08.2026</a:t>
+              <a:t>31.08.2026</a:t>
             </a:fld>
             <a:endParaRPr lang="ru-RU"/>
           </a:p>
@@ -8221,7 +8223,7 @@
           <a:p>
             <a:fld id="{6AC27FFC-58F7-4A0B-910F-2453E6738501}" type="datetimeFigureOut">
               <a:rPr lang="ru-RU" smtClean="0"/>
-              <a:t>30.08.2026</a:t>
+              <a:t>31.08.2026</a:t>
             </a:fld>
             <a:endParaRPr lang="ru-RU"/>
           </a:p>
@@ -8339,7 +8341,7 @@
           <a:p>
             <a:fld id="{6AC27FFC-58F7-4A0B-910F-2453E6738501}" type="datetimeFigureOut">
               <a:rPr lang="ru-RU" smtClean="0"/>
-              <a:t>30.08.2026</a:t>
+              <a:t>31.08.2026</a:t>
             </a:fld>
             <a:endParaRPr lang="ru-RU"/>
           </a:p>
@@ -8434,7 +8436,7 @@
           <a:p>
             <a:fld id="{6AC27FFC-58F7-4A0B-910F-2453E6738501}" type="datetimeFigureOut">
               <a:rPr lang="ru-RU" smtClean="0"/>
-              <a:t>30.08.2026</a:t>
+              <a:t>31.08.2026</a:t>
             </a:fld>
             <a:endParaRPr lang="ru-RU"/>
           </a:p>
@@ -8683,7 +8685,7 @@
           <a:p>
             <a:fld id="{6AC27FFC-58F7-4A0B-910F-2453E6738501}" type="datetimeFigureOut">
               <a:rPr lang="ru-RU" smtClean="0"/>
-              <a:t>30.08.2026</a:t>
+              <a:t>31.08.2026</a:t>
             </a:fld>
             <a:endParaRPr lang="ru-RU"/>
           </a:p>
@@ -8963,7 +8965,7 @@
           <a:p>
             <a:fld id="{6AC27FFC-58F7-4A0B-910F-2453E6738501}" type="datetimeFigureOut">
               <a:rPr lang="ru-RU" smtClean="0"/>
-              <a:t>30.08.2026</a:t>
+              <a:t>31.08.2026</a:t>
             </a:fld>
             <a:endParaRPr lang="ru-RU"/>
           </a:p>
@@ -9086,7 +9088,7 @@
           <a:noFill/>
           <a:extLst>
             <a:ext uri="{909E8E84-426E-40dd-AFC4-6F175D3DCCD1}">
-              <a14:hiddenFill xmlns="" xmlns:a14="http://schemas.microsoft.com/office/drawing/2010/main">
+              <a14:hiddenFill xmlns:a14="http://schemas.microsoft.com/office/drawing/2010/main" xmlns="">
                 <a:solidFill>
                   <a:srgbClr val="FFFFFF"/>
                 </a:solidFill>
@@ -9160,7 +9162,7 @@
               </a:ln>
               <a:extLst>
                 <a:ext uri="{91240B29-F687-4f45-9708-019B960494DF}">
-                  <a14:hiddenLine xmlns="" xmlns:a14="http://schemas.microsoft.com/office/drawing/2010/main" w="9525">
+                  <a14:hiddenLine xmlns:a14="http://schemas.microsoft.com/office/drawing/2010/main" xmlns="" w="9525">
                     <a:solidFill>
                       <a:srgbClr val="000000"/>
                     </a:solidFill>
@@ -9250,7 +9252,7 @@
               </a:ln>
               <a:extLst>
                 <a:ext uri="{91240B29-F687-4f45-9708-019B960494DF}">
-                  <a14:hiddenLine xmlns="" xmlns:a14="http://schemas.microsoft.com/office/drawing/2010/main" w="9525">
+                  <a14:hiddenLine xmlns:a14="http://schemas.microsoft.com/office/drawing/2010/main" xmlns="" w="9525">
                     <a:solidFill>
                       <a:srgbClr val="000000"/>
                     </a:solidFill>
@@ -9340,7 +9342,7 @@
               </a:ln>
               <a:extLst>
                 <a:ext uri="{91240B29-F687-4f45-9708-019B960494DF}">
-                  <a14:hiddenLine xmlns="" xmlns:a14="http://schemas.microsoft.com/office/drawing/2010/main" w="9525">
+                  <a14:hiddenLine xmlns:a14="http://schemas.microsoft.com/office/drawing/2010/main" xmlns="" w="9525">
                     <a:solidFill>
                       <a:srgbClr val="000000"/>
                     </a:solidFill>
@@ -9402,7 +9404,7 @@
               </a:ln>
               <a:extLst>
                 <a:ext uri="{91240B29-F687-4f45-9708-019B960494DF}">
-                  <a14:hiddenLine xmlns="" xmlns:a14="http://schemas.microsoft.com/office/drawing/2010/main" w="9525">
+                  <a14:hiddenLine xmlns:a14="http://schemas.microsoft.com/office/drawing/2010/main" xmlns="" w="9525">
                     <a:solidFill>
                       <a:srgbClr val="000000"/>
                     </a:solidFill>
@@ -9492,7 +9494,7 @@
               </a:ln>
               <a:extLst>
                 <a:ext uri="{91240B29-F687-4f45-9708-019B960494DF}">
-                  <a14:hiddenLine xmlns="" xmlns:a14="http://schemas.microsoft.com/office/drawing/2010/main" w="9525">
+                  <a14:hiddenLine xmlns:a14="http://schemas.microsoft.com/office/drawing/2010/main" xmlns="" w="9525">
                     <a:solidFill>
                       <a:srgbClr val="000000"/>
                     </a:solidFill>
@@ -9554,7 +9556,7 @@
               </a:ln>
               <a:extLst>
                 <a:ext uri="{91240B29-F687-4f45-9708-019B960494DF}">
-                  <a14:hiddenLine xmlns="" xmlns:a14="http://schemas.microsoft.com/office/drawing/2010/main" w="9525">
+                  <a14:hiddenLine xmlns:a14="http://schemas.microsoft.com/office/drawing/2010/main" xmlns="" w="9525">
                     <a:solidFill>
                       <a:srgbClr val="000000"/>
                     </a:solidFill>
@@ -9616,7 +9618,7 @@
               </a:ln>
               <a:extLst>
                 <a:ext uri="{91240B29-F687-4f45-9708-019B960494DF}">
-                  <a14:hiddenLine xmlns="" xmlns:a14="http://schemas.microsoft.com/office/drawing/2010/main" w="9525">
+                  <a14:hiddenLine xmlns:a14="http://schemas.microsoft.com/office/drawing/2010/main" xmlns="" w="9525">
                     <a:solidFill>
                       <a:srgbClr val="000000"/>
                     </a:solidFill>
@@ -9706,7 +9708,7 @@
               </a:ln>
               <a:extLst>
                 <a:ext uri="{91240B29-F687-4f45-9708-019B960494DF}">
-                  <a14:hiddenLine xmlns="" xmlns:a14="http://schemas.microsoft.com/office/drawing/2010/main" w="9525">
+                  <a14:hiddenLine xmlns:a14="http://schemas.microsoft.com/office/drawing/2010/main" xmlns="" w="9525">
                     <a:solidFill>
                       <a:srgbClr val="000000"/>
                     </a:solidFill>
@@ -9796,7 +9798,7 @@
               </a:ln>
               <a:extLst>
                 <a:ext uri="{91240B29-F687-4f45-9708-019B960494DF}">
-                  <a14:hiddenLine xmlns="" xmlns:a14="http://schemas.microsoft.com/office/drawing/2010/main" w="9525">
+                  <a14:hiddenLine xmlns:a14="http://schemas.microsoft.com/office/drawing/2010/main" xmlns="" w="9525">
                     <a:solidFill>
                       <a:srgbClr val="000000"/>
                     </a:solidFill>
@@ -9858,7 +9860,7 @@
               </a:ln>
               <a:extLst>
                 <a:ext uri="{91240B29-F687-4f45-9708-019B960494DF}">
-                  <a14:hiddenLine xmlns="" xmlns:a14="http://schemas.microsoft.com/office/drawing/2010/main" w="9525">
+                  <a14:hiddenLine xmlns:a14="http://schemas.microsoft.com/office/drawing/2010/main" xmlns="" w="9525">
                     <a:solidFill>
                       <a:srgbClr val="000000"/>
                     </a:solidFill>
@@ -9968,7 +9970,7 @@
               </a:ln>
               <a:extLst>
                 <a:ext uri="{91240B29-F687-4f45-9708-019B960494DF}">
-                  <a14:hiddenLine xmlns="" xmlns:a14="http://schemas.microsoft.com/office/drawing/2010/main" w="9525">
+                  <a14:hiddenLine xmlns:a14="http://schemas.microsoft.com/office/drawing/2010/main" xmlns="" w="9525">
                     <a:solidFill>
                       <a:srgbClr val="000000"/>
                     </a:solidFill>
@@ -10052,7 +10054,7 @@
               </a:ln>
               <a:extLst>
                 <a:ext uri="{91240B29-F687-4f45-9708-019B960494DF}">
-                  <a14:hiddenLine xmlns="" xmlns:a14="http://schemas.microsoft.com/office/drawing/2010/main" w="9525">
+                  <a14:hiddenLine xmlns:a14="http://schemas.microsoft.com/office/drawing/2010/main" xmlns="" w="9525">
                     <a:solidFill>
                       <a:srgbClr val="000000"/>
                     </a:solidFill>
@@ -10114,7 +10116,7 @@
               </a:ln>
               <a:extLst>
                 <a:ext uri="{91240B29-F687-4f45-9708-019B960494DF}">
-                  <a14:hiddenLine xmlns="" xmlns:a14="http://schemas.microsoft.com/office/drawing/2010/main" w="9525">
+                  <a14:hiddenLine xmlns:a14="http://schemas.microsoft.com/office/drawing/2010/main" xmlns="" w="9525">
                     <a:solidFill>
                       <a:srgbClr val="000000"/>
                     </a:solidFill>
@@ -10176,7 +10178,7 @@
               </a:ln>
               <a:extLst>
                 <a:ext uri="{91240B29-F687-4f45-9708-019B960494DF}">
-                  <a14:hiddenLine xmlns="" xmlns:a14="http://schemas.microsoft.com/office/drawing/2010/main" w="9525">
+                  <a14:hiddenLine xmlns:a14="http://schemas.microsoft.com/office/drawing/2010/main" xmlns="" w="9525">
                     <a:solidFill>
                       <a:srgbClr val="000000"/>
                     </a:solidFill>
@@ -10266,7 +10268,7 @@
               </a:ln>
               <a:extLst>
                 <a:ext uri="{91240B29-F687-4f45-9708-019B960494DF}">
-                  <a14:hiddenLine xmlns="" xmlns:a14="http://schemas.microsoft.com/office/drawing/2010/main" w="9525">
+                  <a14:hiddenLine xmlns:a14="http://schemas.microsoft.com/office/drawing/2010/main" xmlns="" w="9525">
                     <a:solidFill>
                       <a:srgbClr val="000000"/>
                     </a:solidFill>
@@ -10300,7 +10302,7 @@
               </a:ln>
               <a:extLst>
                 <a:ext uri="{91240B29-F687-4f45-9708-019B960494DF}">
-                  <a14:hiddenLine xmlns="" xmlns:a14="http://schemas.microsoft.com/office/drawing/2010/main" w="9525">
+                  <a14:hiddenLine xmlns:a14="http://schemas.microsoft.com/office/drawing/2010/main" xmlns="" w="9525">
                     <a:solidFill>
                       <a:srgbClr val="000000"/>
                     </a:solidFill>
@@ -10365,7 +10367,7 @@
               </a:ln>
               <a:extLst>
                 <a:ext uri="{91240B29-F687-4f45-9708-019B960494DF}">
-                  <a14:hiddenLine xmlns="" xmlns:a14="http://schemas.microsoft.com/office/drawing/2010/main" w="9525">
+                  <a14:hiddenLine xmlns:a14="http://schemas.microsoft.com/office/drawing/2010/main" xmlns="" w="9525">
                     <a:solidFill>
                       <a:srgbClr val="000000"/>
                     </a:solidFill>
@@ -10455,7 +10457,7 @@
               </a:ln>
               <a:extLst>
                 <a:ext uri="{91240B29-F687-4f45-9708-019B960494DF}">
-                  <a14:hiddenLine xmlns="" xmlns:a14="http://schemas.microsoft.com/office/drawing/2010/main" w="9525">
+                  <a14:hiddenLine xmlns:a14="http://schemas.microsoft.com/office/drawing/2010/main" xmlns="" w="9525">
                     <a:solidFill>
                       <a:srgbClr val="000000"/>
                     </a:solidFill>
@@ -10517,7 +10519,7 @@
               </a:ln>
               <a:extLst>
                 <a:ext uri="{91240B29-F687-4f45-9708-019B960494DF}">
-                  <a14:hiddenLine xmlns="" xmlns:a14="http://schemas.microsoft.com/office/drawing/2010/main" w="9525">
+                  <a14:hiddenLine xmlns:a14="http://schemas.microsoft.com/office/drawing/2010/main" xmlns="" w="9525">
                     <a:solidFill>
                       <a:srgbClr val="000000"/>
                     </a:solidFill>
@@ -10607,7 +10609,7 @@
               </a:ln>
               <a:extLst>
                 <a:ext uri="{91240B29-F687-4f45-9708-019B960494DF}">
-                  <a14:hiddenLine xmlns="" xmlns:a14="http://schemas.microsoft.com/office/drawing/2010/main" w="9525">
+                  <a14:hiddenLine xmlns:a14="http://schemas.microsoft.com/office/drawing/2010/main" xmlns="" w="9525">
                     <a:solidFill>
                       <a:srgbClr val="000000"/>
                     </a:solidFill>
@@ -10672,7 +10674,7 @@
               </a:ln>
               <a:extLst>
                 <a:ext uri="{91240B29-F687-4f45-9708-019B960494DF}">
-                  <a14:hiddenLine xmlns="" xmlns:a14="http://schemas.microsoft.com/office/drawing/2010/main" w="9525">
+                  <a14:hiddenLine xmlns:a14="http://schemas.microsoft.com/office/drawing/2010/main" xmlns="" w="9525">
                     <a:solidFill>
                       <a:srgbClr val="000000"/>
                     </a:solidFill>
@@ -10734,7 +10736,7 @@
               </a:ln>
               <a:extLst>
                 <a:ext uri="{91240B29-F687-4f45-9708-019B960494DF}">
-                  <a14:hiddenLine xmlns="" xmlns:a14="http://schemas.microsoft.com/office/drawing/2010/main" w="9525">
+                  <a14:hiddenLine xmlns:a14="http://schemas.microsoft.com/office/drawing/2010/main" xmlns="" w="9525">
                     <a:solidFill>
                       <a:srgbClr val="000000"/>
                     </a:solidFill>
@@ -10824,7 +10826,7 @@
               </a:ln>
               <a:extLst>
                 <a:ext uri="{91240B29-F687-4f45-9708-019B960494DF}">
-                  <a14:hiddenLine xmlns="" xmlns:a14="http://schemas.microsoft.com/office/drawing/2010/main" w="9525">
+                  <a14:hiddenLine xmlns:a14="http://schemas.microsoft.com/office/drawing/2010/main" xmlns="" w="9525">
                     <a:solidFill>
                       <a:srgbClr val="000000"/>
                     </a:solidFill>
@@ -10914,7 +10916,7 @@
               </a:ln>
               <a:extLst>
                 <a:ext uri="{91240B29-F687-4f45-9708-019B960494DF}">
-                  <a14:hiddenLine xmlns="" xmlns:a14="http://schemas.microsoft.com/office/drawing/2010/main" w="9525">
+                  <a14:hiddenLine xmlns:a14="http://schemas.microsoft.com/office/drawing/2010/main" xmlns="" w="9525">
                     <a:solidFill>
                       <a:srgbClr val="000000"/>
                     </a:solidFill>
@@ -10979,7 +10981,7 @@
               </a:ln>
               <a:extLst>
                 <a:ext uri="{91240B29-F687-4f45-9708-019B960494DF}">
-                  <a14:hiddenLine xmlns="" xmlns:a14="http://schemas.microsoft.com/office/drawing/2010/main" w="9525">
+                  <a14:hiddenLine xmlns:a14="http://schemas.microsoft.com/office/drawing/2010/main" xmlns="" w="9525">
                     <a:solidFill>
                       <a:srgbClr val="000000"/>
                     </a:solidFill>
@@ -11099,7 +11101,7 @@
               </a:ln>
               <a:extLst>
                 <a:ext uri="{91240B29-F687-4f45-9708-019B960494DF}">
-                  <a14:hiddenLine xmlns="" xmlns:a14="http://schemas.microsoft.com/office/drawing/2010/main" w="9525">
+                  <a14:hiddenLine xmlns:a14="http://schemas.microsoft.com/office/drawing/2010/main" xmlns="" w="9525">
                     <a:solidFill>
                       <a:srgbClr val="000000"/>
                     </a:solidFill>
@@ -11180,7 +11182,7 @@
               </a:ln>
               <a:extLst>
                 <a:ext uri="{91240B29-F687-4f45-9708-019B960494DF}">
-                  <a14:hiddenLine xmlns="" xmlns:a14="http://schemas.microsoft.com/office/drawing/2010/main" w="9525">
+                  <a14:hiddenLine xmlns:a14="http://schemas.microsoft.com/office/drawing/2010/main" xmlns="" w="9525">
                     <a:solidFill>
                       <a:srgbClr val="000000"/>
                     </a:solidFill>
@@ -11295,7 +11297,7 @@
               </a:ln>
               <a:extLst>
                 <a:ext uri="{91240B29-F687-4f45-9708-019B960494DF}">
-                  <a14:hiddenLine xmlns="" xmlns:a14="http://schemas.microsoft.com/office/drawing/2010/main" w="9525">
+                  <a14:hiddenLine xmlns:a14="http://schemas.microsoft.com/office/drawing/2010/main" xmlns="" w="9525">
                     <a:solidFill>
                       <a:srgbClr val="000000"/>
                     </a:solidFill>
@@ -11385,7 +11387,7 @@
               </a:ln>
               <a:extLst>
                 <a:ext uri="{91240B29-F687-4f45-9708-019B960494DF}">
-                  <a14:hiddenLine xmlns="" xmlns:a14="http://schemas.microsoft.com/office/drawing/2010/main" w="9525">
+                  <a14:hiddenLine xmlns:a14="http://schemas.microsoft.com/office/drawing/2010/main" xmlns="" w="9525">
                     <a:solidFill>
                       <a:srgbClr val="000000"/>
                     </a:solidFill>
@@ -11450,7 +11452,7 @@
               </a:ln>
               <a:extLst>
                 <a:ext uri="{91240B29-F687-4f45-9708-019B960494DF}">
-                  <a14:hiddenLine xmlns="" xmlns:a14="http://schemas.microsoft.com/office/drawing/2010/main" w="9525">
+                  <a14:hiddenLine xmlns:a14="http://schemas.microsoft.com/office/drawing/2010/main" xmlns="" w="9525">
                     <a:solidFill>
                       <a:srgbClr val="000000"/>
                     </a:solidFill>
@@ -11540,7 +11542,7 @@
               </a:ln>
               <a:extLst>
                 <a:ext uri="{91240B29-F687-4f45-9708-019B960494DF}">
-                  <a14:hiddenLine xmlns="" xmlns:a14="http://schemas.microsoft.com/office/drawing/2010/main" w="9525">
+                  <a14:hiddenLine xmlns:a14="http://schemas.microsoft.com/office/drawing/2010/main" xmlns="" w="9525">
                     <a:solidFill>
                       <a:srgbClr val="000000"/>
                     </a:solidFill>
@@ -11608,7 +11610,7 @@
               </a:ln>
               <a:extLst>
                 <a:ext uri="{91240B29-F687-4f45-9708-019B960494DF}">
-                  <a14:hiddenLine xmlns="" xmlns:a14="http://schemas.microsoft.com/office/drawing/2010/main" w="9525">
+                  <a14:hiddenLine xmlns:a14="http://schemas.microsoft.com/office/drawing/2010/main" xmlns="" w="9525">
                     <a:solidFill>
                       <a:srgbClr val="000000"/>
                     </a:solidFill>
@@ -11698,7 +11700,7 @@
               </a:ln>
               <a:extLst>
                 <a:ext uri="{91240B29-F687-4f45-9708-019B960494DF}">
-                  <a14:hiddenLine xmlns="" xmlns:a14="http://schemas.microsoft.com/office/drawing/2010/main" w="9525">
+                  <a14:hiddenLine xmlns:a14="http://schemas.microsoft.com/office/drawing/2010/main" xmlns="" w="9525">
                     <a:solidFill>
                       <a:srgbClr val="000000"/>
                     </a:solidFill>
@@ -11766,7 +11768,7 @@
               </a:ln>
               <a:extLst>
                 <a:ext uri="{91240B29-F687-4f45-9708-019B960494DF}">
-                  <a14:hiddenLine xmlns="" xmlns:a14="http://schemas.microsoft.com/office/drawing/2010/main" w="9525">
+                  <a14:hiddenLine xmlns:a14="http://schemas.microsoft.com/office/drawing/2010/main" xmlns="" w="9525">
                     <a:solidFill>
                       <a:srgbClr val="000000"/>
                     </a:solidFill>
@@ -11856,7 +11858,7 @@
               </a:ln>
               <a:extLst>
                 <a:ext uri="{91240B29-F687-4f45-9708-019B960494DF}">
-                  <a14:hiddenLine xmlns="" xmlns:a14="http://schemas.microsoft.com/office/drawing/2010/main" w="9525">
+                  <a14:hiddenLine xmlns:a14="http://schemas.microsoft.com/office/drawing/2010/main" xmlns="" w="9525">
                     <a:solidFill>
                       <a:srgbClr val="000000"/>
                     </a:solidFill>
@@ -11890,7 +11892,7 @@
               </a:ln>
               <a:extLst>
                 <a:ext uri="{91240B29-F687-4f45-9708-019B960494DF}">
-                  <a14:hiddenLine xmlns="" xmlns:a14="http://schemas.microsoft.com/office/drawing/2010/main" w="9525">
+                  <a14:hiddenLine xmlns:a14="http://schemas.microsoft.com/office/drawing/2010/main" xmlns="" w="9525">
                     <a:solidFill>
                       <a:srgbClr val="000000"/>
                     </a:solidFill>
@@ -12030,7 +12032,7 @@
           <a:p>
             <a:fld id="{6AC27FFC-58F7-4A0B-910F-2453E6738501}" type="datetimeFigureOut">
               <a:rPr lang="ru-RU" smtClean="0"/>
-              <a:t>30.08.2026</a:t>
+              <a:t>31.08.2026</a:t>
             </a:fld>
             <a:endParaRPr lang="ru-RU"/>
           </a:p>
@@ -12527,20 +12529,13 @@
         </p:nvSpPr>
         <p:spPr/>
         <p:txBody>
-          <a:bodyPr>
-            <a:normAutofit/>
-          </a:bodyPr>
+          <a:bodyPr/>
           <a:lstStyle/>
           <a:p>
             <a:r>
-              <a:rPr lang="ru-RU" b="1" dirty="0"/>
-              <a:t>Производительность сети: Скорость </a:t>
-            </a:r>
-            <a:r>
-              <a:rPr lang="ru-RU" b="1" dirty="0" smtClean="0"/>
-              <a:t>передачи</a:t>
-            </a:r>
-            <a:endParaRPr lang="ru-RU" dirty="0"/>
+              <a:rPr lang="ru-RU" dirty="0"/>
+              <a:t>Модель TCP/IP в сравнении с моделью OSI</a:t>
+            </a:r>
           </a:p>
         </p:txBody>
       </p:sp>
@@ -12554,7 +12549,252 @@
             <p:ph idx="1"/>
           </p:nvPr>
         </p:nvSpPr>
-        <p:spPr/>
+        <p:spPr>
+          <a:xfrm>
+            <a:off x="309562" y="1828004"/>
+            <a:ext cx="5342731" cy="4741863"/>
+          </a:xfrm>
+        </p:spPr>
+        <p:txBody>
+          <a:bodyPr>
+            <a:normAutofit fontScale="92500" lnSpcReduction="20000"/>
+          </a:bodyPr>
+          <a:lstStyle/>
+          <a:p>
+            <a:r>
+              <a:rPr lang="ru-RU" b="1" dirty="0"/>
+              <a:t>Сравнение моделей:</a:t>
+            </a:r>
+            <a:endParaRPr lang="ru-RU" dirty="0"/>
+          </a:p>
+          <a:p>
+            <a:pPr lvl="1"/>
+            <a:r>
+              <a:rPr lang="ru-RU" dirty="0"/>
+              <a:t>Прикладной уровень </a:t>
+            </a:r>
+            <a:r>
+              <a:rPr lang="af-ZA" dirty="0"/>
+              <a:t>TCP/IP </a:t>
+            </a:r>
+            <a:r>
+              <a:rPr lang="af-ZA" dirty="0" smtClean="0"/>
+              <a:t>≈</a:t>
+            </a:r>
+            <a:r>
+              <a:rPr lang="af-ZA" dirty="0"/>
+              <a:t> </a:t>
+            </a:r>
+            <a:r>
+              <a:rPr lang="ru-RU" dirty="0"/>
+              <a:t>Уровни 5, 6, 7 модели </a:t>
+            </a:r>
+            <a:r>
+              <a:rPr lang="af-ZA" dirty="0"/>
+              <a:t>OSI.</a:t>
+            </a:r>
+          </a:p>
+          <a:p>
+            <a:pPr lvl="1"/>
+            <a:r>
+              <a:rPr lang="ru-RU" dirty="0"/>
+              <a:t>Транспортный уровень </a:t>
+            </a:r>
+            <a:r>
+              <a:rPr lang="af-ZA" dirty="0"/>
+              <a:t>TCP/IP </a:t>
+            </a:r>
+            <a:r>
+              <a:rPr lang="af-ZA" dirty="0" smtClean="0"/>
+              <a:t>≈</a:t>
+            </a:r>
+            <a:r>
+              <a:rPr lang="af-ZA" dirty="0"/>
+              <a:t> </a:t>
+            </a:r>
+            <a:r>
+              <a:rPr lang="ru-RU" dirty="0"/>
+              <a:t>Уровень 4 </a:t>
+            </a:r>
+            <a:r>
+              <a:rPr lang="af-ZA" dirty="0"/>
+              <a:t>OSI (TCP, UDP).</a:t>
+            </a:r>
+          </a:p>
+          <a:p>
+            <a:pPr lvl="1"/>
+            <a:r>
+              <a:rPr lang="ru-RU" dirty="0"/>
+              <a:t>Межсетевой уровень (</a:t>
+            </a:r>
+            <a:r>
+              <a:rPr lang="af-ZA" dirty="0"/>
+              <a:t>Internet) </a:t>
+            </a:r>
+            <a:r>
+              <a:rPr lang="af-ZA" dirty="0" smtClean="0"/>
+              <a:t>≈</a:t>
+            </a:r>
+            <a:r>
+              <a:rPr lang="af-ZA" dirty="0"/>
+              <a:t> </a:t>
+            </a:r>
+            <a:r>
+              <a:rPr lang="ru-RU" dirty="0"/>
+              <a:t>Уровень 3 </a:t>
+            </a:r>
+            <a:r>
+              <a:rPr lang="af-ZA" dirty="0"/>
+              <a:t>OSI (IP, ICMP).</a:t>
+            </a:r>
+          </a:p>
+          <a:p>
+            <a:pPr lvl="1"/>
+            <a:r>
+              <a:rPr lang="ru-RU" dirty="0"/>
+              <a:t>Уровень сетевого доступа </a:t>
+            </a:r>
+            <a:r>
+              <a:rPr lang="ru-RU" dirty="0" smtClean="0"/>
+              <a:t>≈</a:t>
+            </a:r>
+            <a:r>
+              <a:rPr lang="ru-RU" dirty="0"/>
+              <a:t> Уровни 1, 2 </a:t>
+            </a:r>
+            <a:r>
+              <a:rPr lang="af-ZA" dirty="0"/>
+              <a:t>OSI (Ethernet, Wi-Fi, PPP).</a:t>
+            </a:r>
+          </a:p>
+          <a:p>
+            <a:r>
+              <a:rPr lang="ru-RU" b="1" dirty="0"/>
+              <a:t>Ключевой вывод:</a:t>
+            </a:r>
+            <a:r>
+              <a:rPr lang="ru-RU" dirty="0"/>
+              <a:t> </a:t>
+            </a:r>
+            <a:r>
+              <a:rPr lang="af-ZA" dirty="0"/>
+              <a:t>OSI — </a:t>
+            </a:r>
+            <a:r>
+              <a:rPr lang="ru-RU" dirty="0"/>
+              <a:t>концептуальный эталон; </a:t>
+            </a:r>
+            <a:r>
+              <a:rPr lang="af-ZA" dirty="0"/>
+              <a:t>TCP/IP — </a:t>
+            </a:r>
+            <a:r>
+              <a:rPr lang="ru-RU" dirty="0"/>
+              <a:t>практическая реализация современного Интернета.</a:t>
+            </a:r>
+          </a:p>
+          <a:p>
+            <a:pPr marL="0" indent="0">
+              <a:buNone/>
+            </a:pPr>
+            <a:endParaRPr lang="ru-RU" dirty="0"/>
+          </a:p>
+        </p:txBody>
+      </p:sp>
+      <p:pic>
+        <p:nvPicPr>
+          <p:cNvPr id="2050" name="Picture 2" descr="Open Systems Interconnection Model (OSI Model)"/>
+          <p:cNvPicPr>
+            <a:picLocks noChangeAspect="1" noChangeArrowheads="1"/>
+          </p:cNvPicPr>
+          <p:nvPr/>
+        </p:nvPicPr>
+        <p:blipFill>
+          <a:blip r:embed="rId2">
+            <a:extLst>
+              <a:ext uri="{28A0092B-C50C-407E-A947-70E740481C1C}">
+                <a14:useLocalDpi xmlns:a14="http://schemas.microsoft.com/office/drawing/2010/main" val="0"/>
+              </a:ext>
+            </a:extLst>
+          </a:blip>
+          <a:srcRect/>
+          <a:stretch>
+            <a:fillRect/>
+          </a:stretch>
+        </p:blipFill>
+        <p:spPr bwMode="auto">
+          <a:xfrm>
+            <a:off x="5817393" y="2641599"/>
+            <a:ext cx="6229350" cy="3114675"/>
+          </a:xfrm>
+          <a:prstGeom prst="rect">
+            <a:avLst/>
+          </a:prstGeom>
+          <a:noFill/>
+          <a:extLst>
+            <a:ext uri="{909E8E84-426E-40DD-AFC4-6F175D3DCCD1}">
+              <a14:hiddenFill xmlns:a14="http://schemas.microsoft.com/office/drawing/2010/main">
+                <a:solidFill>
+                  <a:srgbClr val="FFFFFF"/>
+                </a:solidFill>
+              </a14:hiddenFill>
+            </a:ext>
+          </a:extLst>
+        </p:spPr>
+      </p:pic>
+    </p:spTree>
+    <p:extLst>
+      <p:ext uri="{BB962C8B-B14F-4D97-AF65-F5344CB8AC3E}">
+        <p14:creationId xmlns:p14="http://schemas.microsoft.com/office/powerpoint/2010/main" val="4207400647"/>
+      </p:ext>
+    </p:extLst>
+  </p:cSld>
+  <p:clrMapOvr>
+    <a:masterClrMapping/>
+  </p:clrMapOvr>
+  <p:timing>
+    <p:tnLst>
+      <p:par>
+        <p:cTn id="1" dur="indefinite" restart="never" nodeType="tmRoot"/>
+      </p:par>
+    </p:tnLst>
+  </p:timing>
+</p:sld>
+</file>
+
+<file path=ppt/slides/slide11.xml><?xml version="1.0" encoding="utf-8"?>
+<p:sld xmlns:a="http://schemas.openxmlformats.org/drawingml/2006/main" xmlns:r="http://schemas.openxmlformats.org/officeDocument/2006/relationships" xmlns:p="http://schemas.openxmlformats.org/presentationml/2006/main">
+  <p:cSld>
+    <p:spTree>
+      <p:nvGrpSpPr>
+        <p:cNvPr id="1" name=""/>
+        <p:cNvGrpSpPr/>
+        <p:nvPr/>
+      </p:nvGrpSpPr>
+      <p:grpSpPr>
+        <a:xfrm>
+          <a:off x="0" y="0"/>
+          <a:ext cx="0" cy="0"/>
+          <a:chOff x="0" y="0"/>
+          <a:chExt cx="0" cy="0"/>
+        </a:xfrm>
+      </p:grpSpPr>
+      <p:sp>
+        <p:nvSpPr>
+          <p:cNvPr id="3" name="Объект 2"/>
+          <p:cNvSpPr>
+            <a:spLocks noGrp="1"/>
+          </p:cNvSpPr>
+          <p:nvPr>
+            <p:ph idx="1"/>
+          </p:nvPr>
+        </p:nvSpPr>
+        <p:spPr>
+          <a:xfrm>
+            <a:off x="1141412" y="1690687"/>
+            <a:ext cx="9905999" cy="3541714"/>
+          </a:xfrm>
+        </p:spPr>
         <p:txBody>
           <a:bodyPr>
             <a:normAutofit lnSpcReduction="10000"/>
@@ -12562,63 +12802,110 @@
           <a:lstStyle/>
           <a:p>
             <a:r>
-              <a:rPr lang="ru-RU" b="1" dirty="0" err="1"/>
-              <a:t>Bandwidth</a:t>
-            </a:r>
-            <a:r>
               <a:rPr lang="ru-RU" b="1" dirty="0"/>
-              <a:t> (Ширина пропускания):</a:t>
-            </a:r>
-            <a:endParaRPr lang="ru-RU" dirty="0"/>
-          </a:p>
-          <a:p>
-            <a:pPr lvl="1"/>
+              <a:t>Уровень сетевого доступа (</a:t>
+            </a:r>
+            <a:r>
+              <a:rPr lang="af-ZA" b="1" dirty="0"/>
+              <a:t>Network Access):</a:t>
+            </a:r>
+            <a:r>
+              <a:rPr lang="af-ZA" dirty="0"/>
+              <a:t> </a:t>
+            </a:r>
             <a:r>
               <a:rPr lang="ru-RU" dirty="0"/>
-              <a:t>Теоретический предел среды передачи (бит/с).</a:t>
-            </a:r>
-          </a:p>
-          <a:p>
-            <a:pPr lvl="1"/>
+              <a:t>объединяет физический и канальный уровни (</a:t>
+            </a:r>
+            <a:r>
+              <a:rPr lang="af-ZA" dirty="0"/>
+              <a:t>Ethernet, Wi-Fi).</a:t>
+            </a:r>
+          </a:p>
+          <a:p>
+            <a:r>
+              <a:rPr lang="ru-RU" b="1" dirty="0"/>
+              <a:t>Межсетевой уровень (</a:t>
+            </a:r>
+            <a:r>
+              <a:rPr lang="af-ZA" b="1" dirty="0"/>
+              <a:t>Internet):</a:t>
+            </a:r>
+            <a:r>
+              <a:rPr lang="af-ZA" dirty="0"/>
+              <a:t> </a:t>
+            </a:r>
             <a:r>
               <a:rPr lang="ru-RU" dirty="0"/>
-              <a:t>Соотношение: 1 Гбит/с=1000 Мбит/с=106 Кбит/с=109 бит/с1 Гбит/с=1000 Мбит/с=106 Кбит/с=109 бит/с.</a:t>
-            </a:r>
-          </a:p>
-          <a:p>
-            <a:r>
-              <a:rPr lang="ru-RU" b="1" dirty="0" err="1"/>
-              <a:t>Throughput</a:t>
-            </a:r>
+              <a:t>адресация и маршрутизация (</a:t>
+            </a:r>
+            <a:r>
+              <a:rPr lang="af-ZA" dirty="0"/>
+              <a:t>IP, ICMP).</a:t>
+            </a:r>
+          </a:p>
+          <a:p>
             <a:r>
               <a:rPr lang="ru-RU" b="1" dirty="0"/>
-              <a:t> (Полезная / реальная пропускная способность):</a:t>
-            </a:r>
-            <a:endParaRPr lang="ru-RU" dirty="0"/>
-          </a:p>
-          <a:p>
-            <a:pPr lvl="1"/>
+              <a:t>Транспортный уровень (</a:t>
+            </a:r>
+            <a:r>
+              <a:rPr lang="af-ZA" b="1" dirty="0"/>
+              <a:t>Transport):</a:t>
+            </a:r>
+            <a:r>
+              <a:rPr lang="af-ZA" dirty="0"/>
+              <a:t> TCP (</a:t>
+            </a:r>
             <a:r>
               <a:rPr lang="ru-RU" dirty="0"/>
-              <a:t>Объём полезных данных, доставленных в единицу времени.</a:t>
-            </a:r>
-          </a:p>
-          <a:p>
-            <a:pPr lvl="1"/>
+              <a:t>надёжный, потоковый, с соединением), </a:t>
+            </a:r>
+            <a:r>
+              <a:rPr lang="af-ZA" dirty="0"/>
+              <a:t>UDP (</a:t>
+            </a:r>
             <a:r>
               <a:rPr lang="ru-RU" dirty="0"/>
-              <a:t>Всегда меньше ширины канала из-за служебных заголовков, коллизий и задержек.</a:t>
-            </a:r>
-          </a:p>
-          <a:p>
-            <a:endParaRPr lang="ru-RU" dirty="0"/>
+              <a:t>ненадёжный, </a:t>
+            </a:r>
+            <a:r>
+              <a:rPr lang="ru-RU" dirty="0" err="1"/>
+              <a:t>дейтаграммный</a:t>
+            </a:r>
+            <a:r>
+              <a:rPr lang="ru-RU" dirty="0"/>
+              <a:t>, без соединения).</a:t>
+            </a:r>
+          </a:p>
+          <a:p>
+            <a:r>
+              <a:rPr lang="ru-RU" b="1" dirty="0"/>
+              <a:t>Прикладной уровень (</a:t>
+            </a:r>
+            <a:r>
+              <a:rPr lang="af-ZA" b="1" dirty="0"/>
+              <a:t>Application):</a:t>
+            </a:r>
+            <a:r>
+              <a:rPr lang="af-ZA" dirty="0"/>
+              <a:t> </a:t>
+            </a:r>
+            <a:r>
+              <a:rPr lang="ru-RU" dirty="0"/>
+              <a:t>объединяет прикладной, представительский и сеансовый уровни </a:t>
+            </a:r>
+            <a:r>
+              <a:rPr lang="af-ZA" dirty="0"/>
+              <a:t>OSI (HTTP, SMTP, SSH, DNS).</a:t>
+            </a:r>
           </a:p>
         </p:txBody>
       </p:sp>
     </p:spTree>
     <p:extLst>
       <p:ext uri="{BB962C8B-B14F-4D97-AF65-F5344CB8AC3E}">
-        <p14:creationId xmlns:p14="http://schemas.microsoft.com/office/powerpoint/2010/main" val="4246593416"/>
+        <p14:creationId xmlns:p14="http://schemas.microsoft.com/office/powerpoint/2010/main" val="3195823794"/>
       </p:ext>
     </p:extLst>
   </p:cSld>
@@ -12628,7 +12915,7 @@
 </p:sld>
 </file>
 
-<file path=ppt/slides/slide11.xml><?xml version="1.0" encoding="utf-8"?>
+<file path=ppt/slides/slide12.xml><?xml version="1.0" encoding="utf-8"?>
 <p:sld xmlns:a="http://schemas.openxmlformats.org/drawingml/2006/main" xmlns:r="http://schemas.openxmlformats.org/officeDocument/2006/relationships" xmlns:p="http://schemas.openxmlformats.org/presentationml/2006/main">
   <p:cSld>
     <p:spTree>
@@ -12664,19 +12951,11 @@
           <a:p>
             <a:r>
               <a:rPr lang="ru-RU" b="1" dirty="0"/>
-              <a:t>Производительность сети: </a:t>
-            </a:r>
-            <a:r>
-              <a:rPr lang="ru-RU" b="1" dirty="0" err="1"/>
-              <a:t>Временны́е</a:t>
-            </a:r>
-            <a:r>
-              <a:rPr lang="ru-RU" b="1" dirty="0"/>
-              <a:t> </a:t>
+              <a:t>Производительность сети: Скорость </a:t>
             </a:r>
             <a:r>
               <a:rPr lang="ru-RU" b="1" dirty="0" smtClean="0"/>
-              <a:t>характеристики</a:t>
+              <a:t>передачи</a:t>
             </a:r>
             <a:endParaRPr lang="ru-RU" dirty="0"/>
           </a:p>
@@ -12694,103 +12973,58 @@
         </p:nvSpPr>
         <p:spPr/>
         <p:txBody>
-          <a:bodyPr/>
+          <a:bodyPr>
+            <a:normAutofit lnSpcReduction="10000"/>
+          </a:bodyPr>
           <a:lstStyle/>
           <a:p>
             <a:r>
               <a:rPr lang="ru-RU" b="1" dirty="0" err="1"/>
-              <a:t>Latency</a:t>
+              <a:t>Bandwidth</a:t>
             </a:r>
             <a:r>
               <a:rPr lang="ru-RU" b="1" dirty="0"/>
-              <a:t> / </a:t>
-            </a:r>
+              <a:t> (Ширина пропускания):</a:t>
+            </a:r>
+            <a:endParaRPr lang="ru-RU" dirty="0"/>
+          </a:p>
+          <a:p>
+            <a:pPr lvl="1"/>
+            <a:r>
+              <a:rPr lang="ru-RU" dirty="0"/>
+              <a:t>Теоретический предел среды передачи (бит/с).</a:t>
+            </a:r>
+          </a:p>
+          <a:p>
+            <a:pPr lvl="1"/>
+            <a:r>
+              <a:rPr lang="ru-RU" dirty="0"/>
+              <a:t>Соотношение: 1 Гбит/с=1000 Мбит/с=106 Кбит/с=109 бит/с1 Гбит/с=1000 Мбит/с=106 Кбит/с=109 бит/с.</a:t>
+            </a:r>
+          </a:p>
+          <a:p>
             <a:r>
               <a:rPr lang="ru-RU" b="1" dirty="0" err="1"/>
-              <a:t>Delay</a:t>
+              <a:t>Throughput</a:t>
             </a:r>
             <a:r>
               <a:rPr lang="ru-RU" b="1" dirty="0"/>
-              <a:t> (Задержка):</a:t>
-            </a:r>
+              <a:t> (Полезная / реальная пропускная способность):</a:t>
+            </a:r>
+            <a:endParaRPr lang="ru-RU" dirty="0"/>
+          </a:p>
+          <a:p>
+            <a:pPr lvl="1"/>
             <a:r>
               <a:rPr lang="ru-RU" dirty="0"/>
-              <a:t> время перемещения пакета от источника к приёмнику (</a:t>
-            </a:r>
-            <a:r>
-              <a:rPr lang="ru-RU" dirty="0" err="1"/>
-              <a:t>мс</a:t>
-            </a:r>
+              <a:t>Объём полезных данных, доставленных в единицу времени.</a:t>
+            </a:r>
+          </a:p>
+          <a:p>
+            <a:pPr lvl="1"/>
             <a:r>
               <a:rPr lang="ru-RU" dirty="0"/>
-              <a:t>).</a:t>
-            </a:r>
-          </a:p>
-          <a:p>
-            <a:r>
-              <a:rPr lang="ru-RU" b="1" dirty="0"/>
-              <a:t>RTT (</a:t>
-            </a:r>
-            <a:r>
-              <a:rPr lang="ru-RU" b="1" dirty="0" err="1"/>
-              <a:t>Round-Trip</a:t>
-            </a:r>
-            <a:r>
-              <a:rPr lang="ru-RU" b="1" dirty="0"/>
-              <a:t> </a:t>
-            </a:r>
-            <a:r>
-              <a:rPr lang="ru-RU" b="1" dirty="0" err="1"/>
-              <a:t>Time</a:t>
-            </a:r>
-            <a:r>
-              <a:rPr lang="ru-RU" b="1" dirty="0"/>
-              <a:t>):</a:t>
-            </a:r>
-            <a:r>
-              <a:rPr lang="ru-RU" dirty="0"/>
-              <a:t> суммарное время доставки пакета до цели и возврата ответа обратно.</a:t>
-            </a:r>
-          </a:p>
-          <a:p>
-            <a:r>
-              <a:rPr lang="ru-RU" b="1" dirty="0" err="1"/>
-              <a:t>Jitter</a:t>
-            </a:r>
-            <a:r>
-              <a:rPr lang="ru-RU" b="1" dirty="0"/>
-              <a:t> (</a:t>
-            </a:r>
-            <a:r>
-              <a:rPr lang="ru-RU" b="1" dirty="0" err="1"/>
-              <a:t>Джиттер</a:t>
-            </a:r>
-            <a:r>
-              <a:rPr lang="ru-RU" b="1" dirty="0"/>
-              <a:t>):</a:t>
-            </a:r>
-            <a:endParaRPr lang="ru-RU" dirty="0"/>
-          </a:p>
-          <a:p>
-            <a:pPr lvl="1"/>
-            <a:r>
-              <a:rPr lang="ru-RU" dirty="0"/>
-              <a:t>Колебание задержки последовательно идущих пакетов.</a:t>
-            </a:r>
-          </a:p>
-          <a:p>
-            <a:pPr lvl="1"/>
-            <a:r>
-              <a:rPr lang="ru-RU" dirty="0"/>
-              <a:t>Критически важен для потокового медиа (видеосвязь, </a:t>
-            </a:r>
-            <a:r>
-              <a:rPr lang="ru-RU" dirty="0" err="1"/>
-              <a:t>VoIP</a:t>
-            </a:r>
-            <a:r>
-              <a:rPr lang="ru-RU" dirty="0"/>
-              <a:t>, онлайн-игры).</a:t>
+              <a:t>Всегда меньше ширины канала из-за служебных заголовков, коллизий и задержек.</a:t>
             </a:r>
           </a:p>
           <a:p>
@@ -12801,169 +13035,7 @@
     </p:spTree>
     <p:extLst>
       <p:ext uri="{BB962C8B-B14F-4D97-AF65-F5344CB8AC3E}">
-        <p14:creationId xmlns:p14="http://schemas.microsoft.com/office/powerpoint/2010/main" val="1538228521"/>
-      </p:ext>
-    </p:extLst>
-  </p:cSld>
-  <p:clrMapOvr>
-    <a:masterClrMapping/>
-  </p:clrMapOvr>
-</p:sld>
-</file>
-
-<file path=ppt/slides/slide12.xml><?xml version="1.0" encoding="utf-8"?>
-<p:sld xmlns:a="http://schemas.openxmlformats.org/drawingml/2006/main" xmlns:r="http://schemas.openxmlformats.org/officeDocument/2006/relationships" xmlns:p="http://schemas.openxmlformats.org/presentationml/2006/main">
-  <p:cSld>
-    <p:spTree>
-      <p:nvGrpSpPr>
-        <p:cNvPr id="1" name=""/>
-        <p:cNvGrpSpPr/>
-        <p:nvPr/>
-      </p:nvGrpSpPr>
-      <p:grpSpPr>
-        <a:xfrm>
-          <a:off x="0" y="0"/>
-          <a:ext cx="0" cy="0"/>
-          <a:chOff x="0" y="0"/>
-          <a:chExt cx="0" cy="0"/>
-        </a:xfrm>
-      </p:grpSpPr>
-      <p:sp>
-        <p:nvSpPr>
-          <p:cNvPr id="3" name="Объект 2"/>
-          <p:cNvSpPr>
-            <a:spLocks noGrp="1"/>
-          </p:cNvSpPr>
-          <p:nvPr>
-            <p:ph idx="1"/>
-          </p:nvPr>
-        </p:nvSpPr>
-        <p:spPr>
-          <a:xfrm>
-            <a:off x="1014412" y="865186"/>
-            <a:ext cx="10339388" cy="5357813"/>
-          </a:xfrm>
-        </p:spPr>
-        <p:txBody>
-          <a:bodyPr>
-            <a:normAutofit lnSpcReduction="10000"/>
-          </a:bodyPr>
-          <a:lstStyle/>
-          <a:p>
-            <a:r>
-              <a:rPr lang="ru-RU" b="1" dirty="0" err="1"/>
-              <a:t>Bandwidth</a:t>
-            </a:r>
-            <a:r>
-              <a:rPr lang="ru-RU" b="1" dirty="0"/>
-              <a:t> (Ширина канала / теоретическая пропускная способность):</a:t>
-            </a:r>
-            <a:r>
-              <a:rPr lang="ru-RU" dirty="0"/>
-              <a:t> максимальный теоретический объём данных, который среда может пропустить за единицу времени (бит/с).</a:t>
-            </a:r>
-          </a:p>
-          <a:p>
-            <a:r>
-              <a:rPr lang="ru-RU" b="1" dirty="0" err="1"/>
-              <a:t>Throughput</a:t>
-            </a:r>
-            <a:r>
-              <a:rPr lang="ru-RU" b="1" dirty="0"/>
-              <a:t> (Реальная пропускная способность):</a:t>
-            </a:r>
-            <a:r>
-              <a:rPr lang="ru-RU" dirty="0"/>
-              <a:t> фактическая скорость успешной передачи данных с учётом накладных расходов, задержек и ошибок.</a:t>
-            </a:r>
-          </a:p>
-          <a:p>
-            <a:r>
-              <a:rPr lang="ru-RU" b="1" dirty="0" err="1"/>
-              <a:t>Latency</a:t>
-            </a:r>
-            <a:r>
-              <a:rPr lang="ru-RU" b="1" dirty="0"/>
-              <a:t> / </a:t>
-            </a:r>
-            <a:r>
-              <a:rPr lang="ru-RU" b="1" dirty="0" err="1"/>
-              <a:t>Delay</a:t>
-            </a:r>
-            <a:r>
-              <a:rPr lang="ru-RU" b="1" dirty="0"/>
-              <a:t> (Задержка):</a:t>
-            </a:r>
-            <a:r>
-              <a:rPr lang="ru-RU" dirty="0"/>
-              <a:t> время доставки данных от отправителя к получателю.</a:t>
-            </a:r>
-          </a:p>
-          <a:p>
-            <a:r>
-              <a:rPr lang="ru-RU" b="1" dirty="0"/>
-              <a:t>RTT (</a:t>
-            </a:r>
-            <a:r>
-              <a:rPr lang="ru-RU" b="1" dirty="0" err="1"/>
-              <a:t>Round</a:t>
-            </a:r>
-            <a:r>
-              <a:rPr lang="ru-RU" b="1" dirty="0"/>
-              <a:t> </a:t>
-            </a:r>
-            <a:r>
-              <a:rPr lang="ru-RU" b="1" dirty="0" err="1"/>
-              <a:t>Trip</a:t>
-            </a:r>
-            <a:r>
-              <a:rPr lang="ru-RU" b="1" dirty="0"/>
-              <a:t> </a:t>
-            </a:r>
-            <a:r>
-              <a:rPr lang="ru-RU" b="1" dirty="0" err="1"/>
-              <a:t>Time</a:t>
-            </a:r>
-            <a:r>
-              <a:rPr lang="ru-RU" b="1" dirty="0"/>
-              <a:t>):</a:t>
-            </a:r>
-            <a:r>
-              <a:rPr lang="ru-RU" dirty="0"/>
-              <a:t> время полного оборота пакета (туда и обратно).</a:t>
-            </a:r>
-          </a:p>
-          <a:p>
-            <a:r>
-              <a:rPr lang="ru-RU" b="1" dirty="0" err="1"/>
-              <a:t>Джиттер</a:t>
-            </a:r>
-            <a:r>
-              <a:rPr lang="ru-RU" b="1" dirty="0"/>
-              <a:t> (</a:t>
-            </a:r>
-            <a:r>
-              <a:rPr lang="ru-RU" b="1" dirty="0" err="1"/>
-              <a:t>Jitter</a:t>
-            </a:r>
-            <a:r>
-              <a:rPr lang="ru-RU" b="1" dirty="0"/>
-              <a:t>):</a:t>
-            </a:r>
-            <a:r>
-              <a:rPr lang="ru-RU" dirty="0"/>
-              <a:t> вариация (колебание) задержки пакетов в потоке относительно друг друга.</a:t>
-            </a:r>
-          </a:p>
-          <a:p>
-            <a:endParaRPr lang="ru-RU" dirty="0"/>
-          </a:p>
-        </p:txBody>
-      </p:sp>
-    </p:spTree>
-    <p:extLst>
-      <p:ext uri="{BB962C8B-B14F-4D97-AF65-F5344CB8AC3E}">
-        <p14:creationId xmlns:p14="http://schemas.microsoft.com/office/powerpoint/2010/main" val="883577798"/>
+        <p14:creationId xmlns:p14="http://schemas.microsoft.com/office/powerpoint/2010/main" val="4246593416"/>
       </p:ext>
     </p:extLst>
   </p:cSld>
@@ -13003,28 +13075,26 @@
         <p:spPr/>
         <p:txBody>
           <a:bodyPr>
-            <a:normAutofit fontScale="90000"/>
+            <a:normAutofit/>
           </a:bodyPr>
           <a:lstStyle/>
           <a:p>
             <a:r>
               <a:rPr lang="ru-RU" b="1" dirty="0"/>
-              <a:t>«Путь конверта» (Инкапсуляция)</a:t>
-            </a:r>
-            <a:br>
+              <a:t>Производительность сети: </a:t>
+            </a:r>
+            <a:r>
+              <a:rPr lang="ru-RU" b="1" dirty="0" err="1"/>
+              <a:t>Временны́е</a:t>
+            </a:r>
+            <a:r>
               <a:rPr lang="ru-RU" b="1" dirty="0"/>
-            </a:br>
-            <a:r>
-              <a:rPr lang="ru-RU" i="1" dirty="0"/>
-              <a:t>Формат: расставьте шаги в правильном порядке от отправки до получения.</a:t>
-            </a:r>
-            <a:r>
-              <a:rPr lang="ru-RU" dirty="0"/>
-              <a:t/>
-            </a:r>
-            <a:br>
-              <a:rPr lang="ru-RU" dirty="0"/>
-            </a:br>
+              <a:t> </a:t>
+            </a:r>
+            <a:r>
+              <a:rPr lang="ru-RU" b="1" dirty="0" smtClean="0"/>
+              <a:t>характеристики</a:t>
+            </a:r>
             <a:endParaRPr lang="ru-RU" dirty="0"/>
           </a:p>
         </p:txBody>
@@ -13041,98 +13111,103 @@
         </p:nvSpPr>
         <p:spPr/>
         <p:txBody>
-          <a:bodyPr>
-            <a:normAutofit fontScale="92500" lnSpcReduction="20000"/>
-          </a:bodyPr>
+          <a:bodyPr/>
           <a:lstStyle/>
           <a:p>
             <a:r>
+              <a:rPr lang="ru-RU" b="1" dirty="0" err="1"/>
+              <a:t>Latency</a:t>
+            </a:r>
+            <a:r>
               <a:rPr lang="ru-RU" b="1" dirty="0"/>
-              <a:t>А)</a:t>
+              <a:t> / </a:t>
+            </a:r>
+            <a:r>
+              <a:rPr lang="ru-RU" b="1" dirty="0" err="1"/>
+              <a:t>Delay</a:t>
+            </a:r>
+            <a:r>
+              <a:rPr lang="ru-RU" b="1" dirty="0"/>
+              <a:t> (Задержка):</a:t>
             </a:r>
             <a:r>
               <a:rPr lang="ru-RU" dirty="0"/>
-              <a:t> Канальный уровень добавляет заголовок и </a:t>
+              <a:t> время перемещения пакета от источника к приёмнику (</a:t>
             </a:r>
             <a:r>
               <a:rPr lang="ru-RU" dirty="0" err="1"/>
-              <a:t>концевик</a:t>
+              <a:t>мс</a:t>
             </a:r>
             <a:r>
               <a:rPr lang="ru-RU" dirty="0"/>
-              <a:t> (трейлер), формируя </a:t>
-            </a:r>
-            <a:r>
-              <a:rPr lang="ru-RU" i="1" dirty="0"/>
-              <a:t>кадр</a:t>
+              <a:t>).</a:t>
+            </a:r>
+          </a:p>
+          <a:p>
+            <a:r>
+              <a:rPr lang="ru-RU" b="1" dirty="0"/>
+              <a:t>RTT (</a:t>
+            </a:r>
+            <a:r>
+              <a:rPr lang="ru-RU" b="1" dirty="0" err="1"/>
+              <a:t>Round-Trip</a:t>
+            </a:r>
+            <a:r>
+              <a:rPr lang="ru-RU" b="1" dirty="0"/>
+              <a:t> </a:t>
+            </a:r>
+            <a:r>
+              <a:rPr lang="ru-RU" b="1" dirty="0" err="1"/>
+              <a:t>Time</a:t>
+            </a:r>
+            <a:r>
+              <a:rPr lang="ru-RU" b="1" dirty="0"/>
+              <a:t>):</a:t>
             </a:r>
             <a:r>
               <a:rPr lang="ru-RU" dirty="0"/>
-              <a:t>.</a:t>
-            </a:r>
-          </a:p>
-          <a:p>
+              <a:t> суммарное время доставки пакета до цели и возврата ответа обратно.</a:t>
+            </a:r>
+          </a:p>
+          <a:p>
+            <a:r>
+              <a:rPr lang="ru-RU" b="1" dirty="0" err="1"/>
+              <a:t>Jitter</a:t>
+            </a:r>
             <a:r>
               <a:rPr lang="ru-RU" b="1" dirty="0"/>
-              <a:t>Б)</a:t>
-            </a:r>
+              <a:t> (</a:t>
+            </a:r>
+            <a:r>
+              <a:rPr lang="ru-RU" b="1" dirty="0" err="1"/>
+              <a:t>Джиттер</a:t>
+            </a:r>
+            <a:r>
+              <a:rPr lang="ru-RU" b="1" dirty="0"/>
+              <a:t>):</a:t>
+            </a:r>
+            <a:endParaRPr lang="ru-RU" dirty="0"/>
+          </a:p>
+          <a:p>
+            <a:pPr lvl="1"/>
             <a:r>
               <a:rPr lang="ru-RU" dirty="0"/>
-              <a:t> Физический уровень передаёт </a:t>
-            </a:r>
-            <a:r>
-              <a:rPr lang="ru-RU" i="1" dirty="0"/>
-              <a:t>сырые биты</a:t>
-            </a:r>
+              <a:t>Колебание задержки последовательно идущих пакетов.</a:t>
+            </a:r>
+          </a:p>
+          <a:p>
+            <a:pPr lvl="1"/>
             <a:r>
               <a:rPr lang="ru-RU" dirty="0"/>
-              <a:t> по кабелю / радиоканалу.</a:t>
-            </a:r>
-          </a:p>
-          <a:p>
-            <a:r>
-              <a:rPr lang="ru-RU" b="1" dirty="0"/>
-              <a:t>В)</a:t>
+              <a:t>Критически важен для потокового медиа (видеосвязь, </a:t>
+            </a:r>
+            <a:r>
+              <a:rPr lang="ru-RU" dirty="0" err="1"/>
+              <a:t>VoIP</a:t>
             </a:r>
             <a:r>
               <a:rPr lang="ru-RU" dirty="0"/>
-              <a:t> Сетевой уровень разбивает данные на </a:t>
-            </a:r>
-            <a:r>
-              <a:rPr lang="ru-RU" i="1" dirty="0"/>
-              <a:t>пакеты</a:t>
-            </a:r>
-            <a:r>
-              <a:rPr lang="ru-RU" dirty="0"/>
-              <a:t> и добавляет заголовок маршрутизации.</a:t>
-            </a:r>
-          </a:p>
-          <a:p>
-            <a:r>
-              <a:rPr lang="ru-RU" b="1" dirty="0"/>
-              <a:t>Г)</a:t>
-            </a:r>
-            <a:r>
-              <a:rPr lang="ru-RU" dirty="0"/>
-              <a:t> Прикладной уровень генерирует исходное сообщение M</a:t>
-            </a:r>
-            <a:r>
-              <a:rPr lang="ru-RU" i="1" dirty="0"/>
-              <a:t>M</a:t>
-            </a:r>
-            <a:r>
-              <a:rPr lang="ru-RU" dirty="0"/>
-              <a:t>.</a:t>
-            </a:r>
-          </a:p>
-          <a:p>
-            <a:r>
-              <a:rPr lang="ru-RU" b="1" dirty="0"/>
-              <a:t>Д)</a:t>
-            </a:r>
-            <a:r>
-              <a:rPr lang="ru-RU" dirty="0"/>
-              <a:t> Транспортный уровень добавляет свой заголовок (управляющую информацию и адреса портов).</a:t>
+              <a:t>, онлайн-игры).</a:t>
             </a:r>
           </a:p>
           <a:p>
@@ -13143,7 +13218,7 @@
     </p:spTree>
     <p:extLst>
       <p:ext uri="{BB962C8B-B14F-4D97-AF65-F5344CB8AC3E}">
-        <p14:creationId xmlns:p14="http://schemas.microsoft.com/office/powerpoint/2010/main" val="597210264"/>
+        <p14:creationId xmlns:p14="http://schemas.microsoft.com/office/powerpoint/2010/main" val="1538228521"/>
       </p:ext>
     </p:extLst>
   </p:cSld>
@@ -13172,31 +13247,6 @@
       </p:grpSpPr>
       <p:sp>
         <p:nvSpPr>
-          <p:cNvPr id="2" name="Заголовок 1"/>
-          <p:cNvSpPr>
-            <a:spLocks noGrp="1"/>
-          </p:cNvSpPr>
-          <p:nvPr>
-            <p:ph type="title"/>
-          </p:nvPr>
-        </p:nvSpPr>
-        <p:spPr/>
-        <p:txBody>
-          <a:bodyPr>
-            <a:normAutofit fontScale="90000"/>
-          </a:bodyPr>
-          <a:lstStyle/>
-          <a:p>
-            <a:r>
-              <a:rPr lang="ru-RU" dirty="0"/>
-              <a:t>Как официально называется «порция данных» на каждом из уровней? Соедините пары:</a:t>
-            </a:r>
-            <a:endParaRPr lang="ru-RU" dirty="0"/>
-          </a:p>
-        </p:txBody>
-      </p:sp>
-      <p:sp>
-        <p:nvSpPr>
           <p:cNvPr id="3" name="Объект 2"/>
           <p:cNvSpPr>
             <a:spLocks noGrp="1"/>
@@ -13205,90 +13255,124 @@
             <p:ph idx="1"/>
           </p:nvPr>
         </p:nvSpPr>
-        <p:spPr/>
+        <p:spPr>
+          <a:xfrm>
+            <a:off x="1014412" y="865186"/>
+            <a:ext cx="10339388" cy="5357813"/>
+          </a:xfrm>
+        </p:spPr>
         <p:txBody>
-          <a:bodyPr/>
+          <a:bodyPr>
+            <a:normAutofit lnSpcReduction="10000"/>
+          </a:bodyPr>
           <a:lstStyle/>
           <a:p>
             <a:r>
+              <a:rPr lang="ru-RU" b="1" dirty="0" err="1"/>
+              <a:t>Bandwidth</a:t>
+            </a:r>
+            <a:r>
               <a:rPr lang="ru-RU" b="1" dirty="0"/>
-              <a:t>Транспортный уровень (</a:t>
-            </a:r>
+              <a:t> (Ширина канала / теоретическая пропускная способность):</a:t>
+            </a:r>
+            <a:r>
+              <a:rPr lang="ru-RU" dirty="0"/>
+              <a:t> максимальный теоретический объём данных, который среда может пропустить за единицу времени (бит/с).</a:t>
+            </a:r>
+          </a:p>
+          <a:p>
             <a:r>
               <a:rPr lang="ru-RU" b="1" dirty="0" err="1"/>
-              <a:t>Layer</a:t>
+              <a:t>Throughput</a:t>
             </a:r>
             <a:r>
               <a:rPr lang="ru-RU" b="1" dirty="0"/>
-              <a:t> 4)</a:t>
+              <a:t> (Реальная пропускная способность):</a:t>
             </a:r>
             <a:r>
               <a:rPr lang="ru-RU" dirty="0"/>
-              <a:t> →→ ???</a:t>
-            </a:r>
-          </a:p>
-          <a:p>
+              <a:t> фактическая скорость успешной передачи данных с учётом накладных расходов, задержек и ошибок.</a:t>
+            </a:r>
+          </a:p>
+          <a:p>
+            <a:r>
+              <a:rPr lang="ru-RU" b="1" dirty="0" err="1"/>
+              <a:t>Latency</a:t>
+            </a:r>
             <a:r>
               <a:rPr lang="ru-RU" b="1" dirty="0"/>
-              <a:t>Сетевой уровень (</a:t>
+              <a:t> / </a:t>
             </a:r>
             <a:r>
               <a:rPr lang="ru-RU" b="1" dirty="0" err="1"/>
-              <a:t>Layer</a:t>
+              <a:t>Delay</a:t>
             </a:r>
             <a:r>
               <a:rPr lang="ru-RU" b="1" dirty="0"/>
-              <a:t> 3)</a:t>
+              <a:t> (Задержка):</a:t>
             </a:r>
             <a:r>
               <a:rPr lang="ru-RU" dirty="0"/>
-              <a:t> →→ ???</a:t>
+              <a:t> время доставки данных от отправителя к получателю.</a:t>
             </a:r>
           </a:p>
           <a:p>
             <a:r>
               <a:rPr lang="ru-RU" b="1" dirty="0"/>
-              <a:t>Канальный уровень (</a:t>
+              <a:t>RTT (</a:t>
             </a:r>
             <a:r>
               <a:rPr lang="ru-RU" b="1" dirty="0" err="1"/>
-              <a:t>Layer</a:t>
+              <a:t>Round</a:t>
             </a:r>
             <a:r>
               <a:rPr lang="ru-RU" b="1" dirty="0"/>
-              <a:t> 2)</a:t>
+              <a:t> </a:t>
+            </a:r>
+            <a:r>
+              <a:rPr lang="ru-RU" b="1" dirty="0" err="1"/>
+              <a:t>Trip</a:t>
+            </a:r>
+            <a:r>
+              <a:rPr lang="ru-RU" b="1" dirty="0"/>
+              <a:t> </a:t>
+            </a:r>
+            <a:r>
+              <a:rPr lang="ru-RU" b="1" dirty="0" err="1"/>
+              <a:t>Time</a:t>
+            </a:r>
+            <a:r>
+              <a:rPr lang="ru-RU" b="1" dirty="0"/>
+              <a:t>):</a:t>
             </a:r>
             <a:r>
               <a:rPr lang="ru-RU" dirty="0"/>
-              <a:t> →→ ???</a:t>
-            </a:r>
-          </a:p>
-          <a:p>
+              <a:t> время полного оборота пакета (туда и обратно).</a:t>
+            </a:r>
+          </a:p>
+          <a:p>
+            <a:r>
+              <a:rPr lang="ru-RU" b="1" dirty="0" err="1"/>
+              <a:t>Джиттер</a:t>
+            </a:r>
             <a:r>
               <a:rPr lang="ru-RU" b="1" dirty="0"/>
-              <a:t>Физический уровень (</a:t>
+              <a:t> (</a:t>
             </a:r>
             <a:r>
               <a:rPr lang="ru-RU" b="1" dirty="0" err="1"/>
-              <a:t>Layer</a:t>
+              <a:t>Jitter</a:t>
             </a:r>
             <a:r>
               <a:rPr lang="ru-RU" b="1" dirty="0"/>
-              <a:t> 1)</a:t>
+              <a:t>):</a:t>
             </a:r>
             <a:r>
               <a:rPr lang="ru-RU" dirty="0"/>
-              <a:t> →→ ???</a:t>
-            </a:r>
-          </a:p>
-          <a:p>
-            <a:pPr marL="0" indent="0">
-              <a:buNone/>
-            </a:pPr>
-            <a:r>
-              <a:rPr lang="ru-RU" i="1" dirty="0"/>
-              <a:t>(Варианты: Бит, Сегмент, Кадр/Фрейм, Пакет)</a:t>
-            </a:r>
+              <a:t> вариация (колебание) задержки пакетов в потоке относительно друг друга.</a:t>
+            </a:r>
+          </a:p>
+          <a:p>
             <a:endParaRPr lang="ru-RU" dirty="0"/>
           </a:p>
         </p:txBody>
@@ -13296,7 +13380,7 @@
     </p:spTree>
     <p:extLst>
       <p:ext uri="{BB962C8B-B14F-4D97-AF65-F5344CB8AC3E}">
-        <p14:creationId xmlns:p14="http://schemas.microsoft.com/office/powerpoint/2010/main" val="3149630925"/>
+        <p14:creationId xmlns:p14="http://schemas.microsoft.com/office/powerpoint/2010/main" val="883577798"/>
       </p:ext>
     </p:extLst>
   </p:cSld>
@@ -13341,25 +13425,23 @@
           <a:lstStyle/>
           <a:p>
             <a:r>
+              <a:rPr lang="ru-RU" b="1" dirty="0"/>
+              <a:t>«Путь конверта» (Инкапсуляция)</a:t>
+            </a:r>
+            <a:br>
+              <a:rPr lang="ru-RU" b="1" dirty="0"/>
+            </a:br>
+            <a:r>
+              <a:rPr lang="ru-RU" i="1" dirty="0"/>
+              <a:t>Формат: расставьте шаги в правильном порядке от отправки до получения.</a:t>
+            </a:r>
+            <a:r>
               <a:rPr lang="ru-RU" dirty="0"/>
-              <a:t>Разделите сущности на </a:t>
-            </a:r>
-            <a:r>
-              <a:rPr lang="ru-RU" b="1" dirty="0"/>
-              <a:t>«С установлением соединения»</a:t>
-            </a:r>
-            <a:r>
+              <a:t/>
+            </a:r>
+            <a:br>
               <a:rPr lang="ru-RU" dirty="0"/>
-              <a:t> и </a:t>
-            </a:r>
-            <a:r>
-              <a:rPr lang="ru-RU" b="1" dirty="0"/>
-              <a:t>«Без установления соединения»</a:t>
-            </a:r>
-            <a:r>
-              <a:rPr lang="ru-RU" dirty="0"/>
-              <a:t>:</a:t>
-            </a:r>
+            </a:br>
             <a:endParaRPr lang="ru-RU" dirty="0"/>
           </a:p>
         </p:txBody>
@@ -13376,38 +13458,109 @@
         </p:nvSpPr>
         <p:spPr/>
         <p:txBody>
-          <a:bodyPr/>
+          <a:bodyPr>
+            <a:normAutofit fontScale="92500" lnSpcReduction="20000"/>
+          </a:bodyPr>
           <a:lstStyle/>
           <a:p>
             <a:r>
+              <a:rPr lang="ru-RU" b="1" dirty="0"/>
+              <a:t>А)</a:t>
+            </a:r>
+            <a:r>
               <a:rPr lang="ru-RU" dirty="0"/>
-              <a:t>Телефонный звонок другу.</a:t>
-            </a:r>
-          </a:p>
-          <a:p>
+              <a:t> Канальный уровень добавляет заголовок и </a:t>
+            </a:r>
+            <a:r>
+              <a:rPr lang="ru-RU" dirty="0" err="1"/>
+              <a:t>концевик</a:t>
+            </a:r>
             <a:r>
               <a:rPr lang="ru-RU" dirty="0"/>
-              <a:t>Бумажное письмо в почтовом конверте.</a:t>
-            </a:r>
-          </a:p>
-          <a:p>
+              <a:t> (трейлер), формируя </a:t>
+            </a:r>
+            <a:r>
+              <a:rPr lang="ru-RU" i="1" dirty="0"/>
+              <a:t>кадр</a:t>
+            </a:r>
             <a:r>
               <a:rPr lang="ru-RU" dirty="0"/>
-              <a:t>Протокол TCP.</a:t>
-            </a:r>
-          </a:p>
-          <a:p>
+              <a:t>.</a:t>
+            </a:r>
+          </a:p>
+          <a:p>
+            <a:r>
+              <a:rPr lang="ru-RU" b="1" dirty="0"/>
+              <a:t>Б)</a:t>
+            </a:r>
             <a:r>
               <a:rPr lang="ru-RU" dirty="0"/>
-              <a:t>Протокол UDP.</a:t>
-            </a:r>
+              <a:t> Физический уровень передаёт </a:t>
+            </a:r>
+            <a:r>
+              <a:rPr lang="ru-RU" i="1" dirty="0"/>
+              <a:t>сырые биты</a:t>
+            </a:r>
+            <a:r>
+              <a:rPr lang="ru-RU" dirty="0"/>
+              <a:t> по кабелю / радиоканалу.</a:t>
+            </a:r>
+          </a:p>
+          <a:p>
+            <a:r>
+              <a:rPr lang="ru-RU" b="1" dirty="0"/>
+              <a:t>В)</a:t>
+            </a:r>
+            <a:r>
+              <a:rPr lang="ru-RU" dirty="0"/>
+              <a:t> Сетевой уровень разбивает данные на </a:t>
+            </a:r>
+            <a:r>
+              <a:rPr lang="ru-RU" i="1" dirty="0"/>
+              <a:t>пакеты</a:t>
+            </a:r>
+            <a:r>
+              <a:rPr lang="ru-RU" dirty="0"/>
+              <a:t> и добавляет заголовок маршрутизации.</a:t>
+            </a:r>
+          </a:p>
+          <a:p>
+            <a:r>
+              <a:rPr lang="ru-RU" b="1" dirty="0"/>
+              <a:t>Г)</a:t>
+            </a:r>
+            <a:r>
+              <a:rPr lang="ru-RU" dirty="0"/>
+              <a:t> Прикладной уровень генерирует исходное сообщение M</a:t>
+            </a:r>
+            <a:r>
+              <a:rPr lang="ru-RU" i="1" dirty="0"/>
+              <a:t>M</a:t>
+            </a:r>
+            <a:r>
+              <a:rPr lang="ru-RU" dirty="0"/>
+              <a:t>.</a:t>
+            </a:r>
+          </a:p>
+          <a:p>
+            <a:r>
+              <a:rPr lang="ru-RU" b="1" dirty="0"/>
+              <a:t>Д)</a:t>
+            </a:r>
+            <a:r>
+              <a:rPr lang="ru-RU" dirty="0"/>
+              <a:t> Транспортный уровень добавляет свой заголовок (управляющую информацию и адреса портов).</a:t>
+            </a:r>
+          </a:p>
+          <a:p>
+            <a:endParaRPr lang="ru-RU" dirty="0"/>
           </a:p>
         </p:txBody>
       </p:sp>
     </p:spTree>
     <p:extLst>
       <p:ext uri="{BB962C8B-B14F-4D97-AF65-F5344CB8AC3E}">
-        <p14:creationId xmlns:p14="http://schemas.microsoft.com/office/powerpoint/2010/main" val="3797661691"/>
+        <p14:creationId xmlns:p14="http://schemas.microsoft.com/office/powerpoint/2010/main" val="597210264"/>
       </p:ext>
     </p:extLst>
   </p:cSld>
@@ -13446,18 +13599,15 @@
         </p:nvSpPr>
         <p:spPr/>
         <p:txBody>
-          <a:bodyPr/>
+          <a:bodyPr>
+            <a:normAutofit fontScale="90000"/>
+          </a:bodyPr>
           <a:lstStyle/>
           <a:p>
             <a:r>
-              <a:rPr lang="af-ZA" b="1" dirty="0"/>
-              <a:t>Bandwidth vs </a:t>
-            </a:r>
-            <a:r>
-              <a:rPr lang="af-ZA" b="1" dirty="0" smtClean="0"/>
-              <a:t>Throughput</a:t>
-            </a:r>
-            <a:endParaRPr lang="ru-RU" dirty="0"/>
+              <a:rPr lang="ru-RU" dirty="0"/>
+              <a:t>Как официально называется «порция данных» на каждом из уровней? Соедините пары:</a:t>
+            </a:r>
           </a:p>
         </p:txBody>
       </p:sp>
@@ -13476,67 +13626,93 @@
           <a:bodyPr/>
           <a:lstStyle/>
           <a:p>
+            <a:r>
+              <a:rPr lang="ru-RU" b="1" dirty="0"/>
+              <a:t>Транспортный уровень (</a:t>
+            </a:r>
+            <a:r>
+              <a:rPr lang="ru-RU" b="1" dirty="0" err="1"/>
+              <a:t>Layer</a:t>
+            </a:r>
+            <a:r>
+              <a:rPr lang="ru-RU" b="1" dirty="0"/>
+              <a:t> 4)</a:t>
+            </a:r>
+            <a:r>
+              <a:rPr lang="ru-RU" dirty="0"/>
+              <a:t> →→ ???</a:t>
+            </a:r>
+          </a:p>
+          <a:p>
+            <a:r>
+              <a:rPr lang="ru-RU" b="1" dirty="0"/>
+              <a:t>Сетевой уровень (</a:t>
+            </a:r>
+            <a:r>
+              <a:rPr lang="ru-RU" b="1" dirty="0" err="1"/>
+              <a:t>Layer</a:t>
+            </a:r>
+            <a:r>
+              <a:rPr lang="ru-RU" b="1" dirty="0"/>
+              <a:t> 3)</a:t>
+            </a:r>
+            <a:r>
+              <a:rPr lang="ru-RU" dirty="0"/>
+              <a:t> →→ ???</a:t>
+            </a:r>
+          </a:p>
+          <a:p>
+            <a:r>
+              <a:rPr lang="ru-RU" b="1" dirty="0"/>
+              <a:t>Канальный уровень (</a:t>
+            </a:r>
+            <a:r>
+              <a:rPr lang="ru-RU" b="1" dirty="0" err="1"/>
+              <a:t>Layer</a:t>
+            </a:r>
+            <a:r>
+              <a:rPr lang="ru-RU" b="1" dirty="0"/>
+              <a:t> 2)</a:t>
+            </a:r>
+            <a:r>
+              <a:rPr lang="ru-RU" dirty="0"/>
+              <a:t> →→ ???</a:t>
+            </a:r>
+          </a:p>
+          <a:p>
+            <a:r>
+              <a:rPr lang="ru-RU" b="1" dirty="0"/>
+              <a:t>Физический уровень (</a:t>
+            </a:r>
+            <a:r>
+              <a:rPr lang="ru-RU" b="1" dirty="0" err="1"/>
+              <a:t>Layer</a:t>
+            </a:r>
+            <a:r>
+              <a:rPr lang="ru-RU" b="1" dirty="0"/>
+              <a:t> 1)</a:t>
+            </a:r>
+            <a:r>
+              <a:rPr lang="ru-RU" dirty="0"/>
+              <a:t> →→ ???</a:t>
+            </a:r>
+          </a:p>
+          <a:p>
             <a:pPr marL="0" indent="0">
               <a:buNone/>
             </a:pPr>
             <a:r>
               <a:rPr lang="ru-RU" i="1" dirty="0"/>
-              <a:t>«Тариф вашего домашнего интернета — </a:t>
-            </a:r>
-            <a:r>
-              <a:rPr lang="ru-RU" b="1" i="1" dirty="0"/>
-              <a:t>500 Мбит/с</a:t>
-            </a:r>
-            <a:r>
-              <a:rPr lang="ru-RU" i="1" dirty="0"/>
-              <a:t>. Однако при скачивании игры реальная средняя скорость загрузки составила </a:t>
-            </a:r>
-            <a:r>
-              <a:rPr lang="ru-RU" b="1" i="1" dirty="0"/>
-              <a:t>320 Мбит/с</a:t>
-            </a:r>
-            <a:r>
-              <a:rPr lang="ru-RU" i="1" dirty="0" smtClean="0"/>
-              <a:t>».</a:t>
-            </a:r>
-            <a:endParaRPr lang="en-US" i="1" dirty="0" smtClean="0"/>
-          </a:p>
-          <a:p>
-            <a:pPr marL="0" indent="0">
-              <a:buNone/>
-            </a:pPr>
-            <a:r>
-              <a:rPr lang="ru-RU" b="1" dirty="0"/>
-              <a:t>Вопрос:</a:t>
-            </a:r>
-            <a:r>
-              <a:rPr lang="ru-RU" dirty="0"/>
-              <a:t> Какое из этих двух чисел является </a:t>
-            </a:r>
-            <a:r>
-              <a:rPr lang="ru-RU" b="1" dirty="0" err="1"/>
-              <a:t>Bandwidth</a:t>
-            </a:r>
-            <a:r>
-              <a:rPr lang="ru-RU" dirty="0"/>
-              <a:t> (пропускной способностью канала), а какое — </a:t>
-            </a:r>
-            <a:r>
-              <a:rPr lang="ru-RU" b="1" dirty="0" err="1"/>
-              <a:t>Throughput</a:t>
-            </a:r>
-            <a:r>
-              <a:rPr lang="ru-RU" dirty="0"/>
-              <a:t> (реальной пропускной способностью)?</a:t>
-            </a:r>
-            <a:endParaRPr lang="en-US" i="1" dirty="0"/>
+              <a:t>(Варианты: Бит, Сегмент, Кадр/Фрейм, Пакет)</a:t>
+            </a:r>
+            <a:endParaRPr lang="ru-RU" dirty="0"/>
           </a:p>
         </p:txBody>
       </p:sp>
     </p:spTree>
     <p:extLst>
       <p:ext uri="{BB962C8B-B14F-4D97-AF65-F5344CB8AC3E}">
-        <p14:creationId xmlns:p14="http://schemas.microsoft.com/office/powerpoint/2010/main" val="3784396190"/>
+        <p14:creationId xmlns:p14="http://schemas.microsoft.com/office/powerpoint/2010/main" val="3149630925"/>
       </p:ext>
     </p:extLst>
   </p:cSld>
@@ -13575,6 +13751,245 @@
         </p:nvSpPr>
         <p:spPr/>
         <p:txBody>
+          <a:bodyPr>
+            <a:normAutofit fontScale="90000"/>
+          </a:bodyPr>
+          <a:lstStyle/>
+          <a:p>
+            <a:r>
+              <a:rPr lang="ru-RU" dirty="0"/>
+              <a:t>Разделите сущности на </a:t>
+            </a:r>
+            <a:r>
+              <a:rPr lang="ru-RU" b="1" dirty="0"/>
+              <a:t>«С установлением соединения»</a:t>
+            </a:r>
+            <a:r>
+              <a:rPr lang="ru-RU" dirty="0"/>
+              <a:t> и </a:t>
+            </a:r>
+            <a:r>
+              <a:rPr lang="ru-RU" b="1" dirty="0"/>
+              <a:t>«Без установления соединения»</a:t>
+            </a:r>
+            <a:r>
+              <a:rPr lang="ru-RU" dirty="0"/>
+              <a:t>:</a:t>
+            </a:r>
+          </a:p>
+        </p:txBody>
+      </p:sp>
+      <p:sp>
+        <p:nvSpPr>
+          <p:cNvPr id="3" name="Объект 2"/>
+          <p:cNvSpPr>
+            <a:spLocks noGrp="1"/>
+          </p:cNvSpPr>
+          <p:nvPr>
+            <p:ph idx="1"/>
+          </p:nvPr>
+        </p:nvSpPr>
+        <p:spPr/>
+        <p:txBody>
+          <a:bodyPr/>
+          <a:lstStyle/>
+          <a:p>
+            <a:r>
+              <a:rPr lang="ru-RU" dirty="0"/>
+              <a:t>Телефонный звонок другу.</a:t>
+            </a:r>
+          </a:p>
+          <a:p>
+            <a:r>
+              <a:rPr lang="ru-RU" dirty="0"/>
+              <a:t>Бумажное письмо в почтовом конверте.</a:t>
+            </a:r>
+          </a:p>
+          <a:p>
+            <a:r>
+              <a:rPr lang="ru-RU" dirty="0"/>
+              <a:t>Протокол TCP.</a:t>
+            </a:r>
+          </a:p>
+          <a:p>
+            <a:r>
+              <a:rPr lang="ru-RU" dirty="0"/>
+              <a:t>Протокол UDP.</a:t>
+            </a:r>
+          </a:p>
+        </p:txBody>
+      </p:sp>
+    </p:spTree>
+    <p:extLst>
+      <p:ext uri="{BB962C8B-B14F-4D97-AF65-F5344CB8AC3E}">
+        <p14:creationId xmlns:p14="http://schemas.microsoft.com/office/powerpoint/2010/main" val="3797661691"/>
+      </p:ext>
+    </p:extLst>
+  </p:cSld>
+  <p:clrMapOvr>
+    <a:masterClrMapping/>
+  </p:clrMapOvr>
+</p:sld>
+</file>
+
+<file path=ppt/slides/slide18.xml><?xml version="1.0" encoding="utf-8"?>
+<p:sld xmlns:a="http://schemas.openxmlformats.org/drawingml/2006/main" xmlns:r="http://schemas.openxmlformats.org/officeDocument/2006/relationships" xmlns:p="http://schemas.openxmlformats.org/presentationml/2006/main">
+  <p:cSld>
+    <p:spTree>
+      <p:nvGrpSpPr>
+        <p:cNvPr id="1" name=""/>
+        <p:cNvGrpSpPr/>
+        <p:nvPr/>
+      </p:nvGrpSpPr>
+      <p:grpSpPr>
+        <a:xfrm>
+          <a:off x="0" y="0"/>
+          <a:ext cx="0" cy="0"/>
+          <a:chOff x="0" y="0"/>
+          <a:chExt cx="0" cy="0"/>
+        </a:xfrm>
+      </p:grpSpPr>
+      <p:sp>
+        <p:nvSpPr>
+          <p:cNvPr id="2" name="Заголовок 1"/>
+          <p:cNvSpPr>
+            <a:spLocks noGrp="1"/>
+          </p:cNvSpPr>
+          <p:nvPr>
+            <p:ph type="title"/>
+          </p:nvPr>
+        </p:nvSpPr>
+        <p:spPr/>
+        <p:txBody>
+          <a:bodyPr/>
+          <a:lstStyle/>
+          <a:p>
+            <a:r>
+              <a:rPr lang="af-ZA" b="1" dirty="0"/>
+              <a:t>Bandwidth vs </a:t>
+            </a:r>
+            <a:r>
+              <a:rPr lang="af-ZA" b="1" dirty="0" smtClean="0"/>
+              <a:t>Throughput</a:t>
+            </a:r>
+            <a:endParaRPr lang="ru-RU" dirty="0"/>
+          </a:p>
+        </p:txBody>
+      </p:sp>
+      <p:sp>
+        <p:nvSpPr>
+          <p:cNvPr id="3" name="Объект 2"/>
+          <p:cNvSpPr>
+            <a:spLocks noGrp="1"/>
+          </p:cNvSpPr>
+          <p:nvPr>
+            <p:ph idx="1"/>
+          </p:nvPr>
+        </p:nvSpPr>
+        <p:spPr/>
+        <p:txBody>
+          <a:bodyPr/>
+          <a:lstStyle/>
+          <a:p>
+            <a:pPr marL="0" indent="0">
+              <a:buNone/>
+            </a:pPr>
+            <a:r>
+              <a:rPr lang="ru-RU" i="1" dirty="0"/>
+              <a:t>«Тариф вашего домашнего интернета — </a:t>
+            </a:r>
+            <a:r>
+              <a:rPr lang="ru-RU" b="1" i="1" dirty="0"/>
+              <a:t>500 Мбит/с</a:t>
+            </a:r>
+            <a:r>
+              <a:rPr lang="ru-RU" i="1" dirty="0"/>
+              <a:t>. Однако при скачивании игры реальная средняя скорость загрузки составила </a:t>
+            </a:r>
+            <a:r>
+              <a:rPr lang="ru-RU" b="1" i="1" dirty="0"/>
+              <a:t>320 Мбит/с</a:t>
+            </a:r>
+            <a:r>
+              <a:rPr lang="ru-RU" i="1" dirty="0" smtClean="0"/>
+              <a:t>».</a:t>
+            </a:r>
+            <a:endParaRPr lang="en-US" i="1" dirty="0" smtClean="0"/>
+          </a:p>
+          <a:p>
+            <a:pPr marL="0" indent="0">
+              <a:buNone/>
+            </a:pPr>
+            <a:r>
+              <a:rPr lang="ru-RU" b="1" dirty="0"/>
+              <a:t>Вопрос:</a:t>
+            </a:r>
+            <a:r>
+              <a:rPr lang="ru-RU" dirty="0"/>
+              <a:t> Какое из этих двух чисел является </a:t>
+            </a:r>
+            <a:r>
+              <a:rPr lang="ru-RU" b="1" dirty="0" err="1"/>
+              <a:t>Bandwidth</a:t>
+            </a:r>
+            <a:r>
+              <a:rPr lang="ru-RU" dirty="0"/>
+              <a:t> (пропускной способностью канала), а какое — </a:t>
+            </a:r>
+            <a:r>
+              <a:rPr lang="ru-RU" b="1" dirty="0" err="1"/>
+              <a:t>Throughput</a:t>
+            </a:r>
+            <a:r>
+              <a:rPr lang="ru-RU" dirty="0"/>
+              <a:t> (реальной пропускной способностью)?</a:t>
+            </a:r>
+            <a:endParaRPr lang="en-US" i="1" dirty="0"/>
+          </a:p>
+        </p:txBody>
+      </p:sp>
+    </p:spTree>
+    <p:extLst>
+      <p:ext uri="{BB962C8B-B14F-4D97-AF65-F5344CB8AC3E}">
+        <p14:creationId xmlns:p14="http://schemas.microsoft.com/office/powerpoint/2010/main" val="3784396190"/>
+      </p:ext>
+    </p:extLst>
+  </p:cSld>
+  <p:clrMapOvr>
+    <a:masterClrMapping/>
+  </p:clrMapOvr>
+</p:sld>
+</file>
+
+<file path=ppt/slides/slide19.xml><?xml version="1.0" encoding="utf-8"?>
+<p:sld xmlns:a="http://schemas.openxmlformats.org/drawingml/2006/main" xmlns:r="http://schemas.openxmlformats.org/officeDocument/2006/relationships" xmlns:p="http://schemas.openxmlformats.org/presentationml/2006/main">
+  <p:cSld>
+    <p:spTree>
+      <p:nvGrpSpPr>
+        <p:cNvPr id="1" name=""/>
+        <p:cNvGrpSpPr/>
+        <p:nvPr/>
+      </p:nvGrpSpPr>
+      <p:grpSpPr>
+        <a:xfrm>
+          <a:off x="0" y="0"/>
+          <a:ext cx="0" cy="0"/>
+          <a:chOff x="0" y="0"/>
+          <a:chExt cx="0" cy="0"/>
+        </a:xfrm>
+      </p:grpSpPr>
+      <p:sp>
+        <p:nvSpPr>
+          <p:cNvPr id="2" name="Заголовок 1"/>
+          <p:cNvSpPr>
+            <a:spLocks noGrp="1"/>
+          </p:cNvSpPr>
+          <p:nvPr>
+            <p:ph type="title"/>
+          </p:nvPr>
+        </p:nvSpPr>
+        <p:spPr/>
+        <p:txBody>
           <a:bodyPr/>
           <a:lstStyle/>
           <a:p>
@@ -13759,7 +14174,189 @@
 </p:sld>
 </file>
 
-<file path=ppt/slides/slide18.xml><?xml version="1.0" encoding="utf-8"?>
+<file path=ppt/slides/slide2.xml><?xml version="1.0" encoding="utf-8"?>
+<p:sld xmlns:a="http://schemas.openxmlformats.org/drawingml/2006/main" xmlns:r="http://schemas.openxmlformats.org/officeDocument/2006/relationships" xmlns:p="http://schemas.openxmlformats.org/presentationml/2006/main">
+  <p:cSld>
+    <p:spTree>
+      <p:nvGrpSpPr>
+        <p:cNvPr id="1" name=""/>
+        <p:cNvGrpSpPr/>
+        <p:nvPr/>
+      </p:nvGrpSpPr>
+      <p:grpSpPr>
+        <a:xfrm>
+          <a:off x="0" y="0"/>
+          <a:ext cx="0" cy="0"/>
+          <a:chOff x="0" y="0"/>
+          <a:chExt cx="0" cy="0"/>
+        </a:xfrm>
+      </p:grpSpPr>
+      <p:sp>
+        <p:nvSpPr>
+          <p:cNvPr id="2" name="Заголовок 1"/>
+          <p:cNvSpPr>
+            <a:spLocks noGrp="1"/>
+          </p:cNvSpPr>
+          <p:nvPr>
+            <p:ph type="title"/>
+          </p:nvPr>
+        </p:nvSpPr>
+        <p:spPr/>
+        <p:txBody>
+          <a:bodyPr/>
+          <a:lstStyle/>
+          <a:p>
+            <a:r>
+              <a:rPr lang="ru-RU" dirty="0"/>
+              <a:t>Архитектурные принципы проектирования сетей</a:t>
+            </a:r>
+          </a:p>
+        </p:txBody>
+      </p:sp>
+      <p:sp>
+        <p:nvSpPr>
+          <p:cNvPr id="3" name="Объект 2"/>
+          <p:cNvSpPr>
+            <a:spLocks noGrp="1"/>
+          </p:cNvSpPr>
+          <p:nvPr>
+            <p:ph idx="1"/>
+          </p:nvPr>
+        </p:nvSpPr>
+        <p:spPr/>
+        <p:txBody>
+          <a:bodyPr>
+            <a:normAutofit fontScale="85000" lnSpcReduction="20000"/>
+          </a:bodyPr>
+          <a:lstStyle/>
+          <a:p>
+            <a:r>
+              <a:rPr lang="ru-RU" b="1" dirty="0"/>
+              <a:t>Цель декомпозиции:</a:t>
+            </a:r>
+            <a:r>
+              <a:rPr lang="ru-RU" dirty="0"/>
+              <a:t> упрощение проектирования сложных распределённых систем.</a:t>
+            </a:r>
+          </a:p>
+          <a:p>
+            <a:r>
+              <a:rPr lang="ru-RU" b="1" dirty="0"/>
+              <a:t>Принцип «Разделяй и властвуй»:</a:t>
+            </a:r>
+            <a:endParaRPr lang="ru-RU" dirty="0"/>
+          </a:p>
+          <a:p>
+            <a:pPr lvl="1"/>
+            <a:r>
+              <a:rPr lang="ru-RU" dirty="0"/>
+              <a:t>Разбиение сетевого взаимодействия на автономные уровни (слои).</a:t>
+            </a:r>
+          </a:p>
+          <a:p>
+            <a:r>
+              <a:rPr lang="ru-RU" b="1" dirty="0"/>
+              <a:t>Принцип абстракции:</a:t>
+            </a:r>
+            <a:endParaRPr lang="ru-RU" dirty="0"/>
+          </a:p>
+          <a:p>
+            <a:pPr lvl="1"/>
+            <a:r>
+              <a:rPr lang="ru-RU" dirty="0"/>
+              <a:t>Каждый уровень решает конкретную задачу.</a:t>
+            </a:r>
+          </a:p>
+          <a:p>
+            <a:pPr lvl="1"/>
+            <a:r>
+              <a:rPr lang="ru-RU" dirty="0"/>
+              <a:t>Внутреннее устройство скрыто за внешним интерфейсом.</a:t>
+            </a:r>
+          </a:p>
+          <a:p>
+            <a:r>
+              <a:rPr lang="ru-RU" b="1" dirty="0"/>
+              <a:t>Иерархическая организация:</a:t>
+            </a:r>
+            <a:endParaRPr lang="ru-RU" dirty="0"/>
+          </a:p>
+          <a:p>
+            <a:pPr lvl="1"/>
+            <a:r>
+              <a:rPr lang="ru-RU" dirty="0"/>
+              <a:t>Уровень </a:t>
+            </a:r>
+            <a:r>
+              <a:rPr lang="ru-RU" i="1" dirty="0" smtClean="0"/>
+              <a:t>N</a:t>
+            </a:r>
+            <a:r>
+              <a:rPr lang="ru-RU" dirty="0"/>
+              <a:t> предоставляет сервисы вышестоящему уровню </a:t>
+            </a:r>
+            <a:r>
+              <a:rPr lang="ru-RU" i="1" dirty="0" smtClean="0"/>
+              <a:t>N</a:t>
+            </a:r>
+            <a:r>
+              <a:rPr lang="ru-RU" dirty="0" smtClean="0"/>
+              <a:t>+1</a:t>
+            </a:r>
+            <a:r>
+              <a:rPr lang="ru-RU" dirty="0"/>
+              <a:t>.</a:t>
+            </a:r>
+          </a:p>
+          <a:p>
+            <a:pPr lvl="1"/>
+            <a:r>
+              <a:rPr lang="ru-RU" dirty="0"/>
+              <a:t>Уровень </a:t>
+            </a:r>
+            <a:r>
+              <a:rPr lang="ru-RU" i="1" dirty="0" smtClean="0"/>
+              <a:t>N</a:t>
+            </a:r>
+            <a:r>
+              <a:rPr lang="ru-RU" dirty="0"/>
+              <a:t> использует сервисы нижестоящего уровня </a:t>
+            </a:r>
+            <a:r>
+              <a:rPr lang="ru-RU" i="1" dirty="0" smtClean="0"/>
+              <a:t>N</a:t>
+            </a:r>
+            <a:r>
+              <a:rPr lang="ru-RU" dirty="0"/>
+              <a:t>−1.</a:t>
+            </a:r>
+          </a:p>
+          <a:p>
+            <a:endParaRPr lang="ru-RU" dirty="0"/>
+          </a:p>
+        </p:txBody>
+      </p:sp>
+    </p:spTree>
+    <p:extLst>
+      <p:ext uri="{BB962C8B-B14F-4D97-AF65-F5344CB8AC3E}">
+        <p14:creationId xmlns:p14="http://schemas.microsoft.com/office/powerpoint/2010/main" val="3722643710"/>
+      </p:ext>
+    </p:extLst>
+  </p:cSld>
+  <p:clrMapOvr>
+    <a:masterClrMapping/>
+  </p:clrMapOvr>
+  <p:timing>
+    <p:tnLst>
+      <p:par>
+        <p:cTn id="1" dur="indefinite" restart="never" nodeType="tmRoot"/>
+      </p:par>
+    </p:tnLst>
+  </p:timing>
+</p:sld>
+</file>
+
+<file path=ppt/slides/slide20.xml><?xml version="1.0" encoding="utf-8"?>
 <p:sld xmlns:a="http://schemas.openxmlformats.org/drawingml/2006/main" xmlns:r="http://schemas.openxmlformats.org/officeDocument/2006/relationships" xmlns:p="http://schemas.openxmlformats.org/presentationml/2006/main">
   <p:cSld>
     <p:spTree>
@@ -14669,7 +15266,7 @@
 </p:sld>
 </file>
 
-<file path=ppt/slides/slide19.xml><?xml version="1.0" encoding="utf-8"?>
+<file path=ppt/slides/slide21.xml><?xml version="1.0" encoding="utf-8"?>
 <p:sld xmlns:a="http://schemas.openxmlformats.org/drawingml/2006/main" xmlns:r="http://schemas.openxmlformats.org/officeDocument/2006/relationships" xmlns:p="http://schemas.openxmlformats.org/presentationml/2006/main">
   <p:cSld>
     <p:spTree>
@@ -15549,188 +16146,6 @@
 </p:sld>
 </file>
 
-<file path=ppt/slides/slide2.xml><?xml version="1.0" encoding="utf-8"?>
-<p:sld xmlns:a="http://schemas.openxmlformats.org/drawingml/2006/main" xmlns:r="http://schemas.openxmlformats.org/officeDocument/2006/relationships" xmlns:p="http://schemas.openxmlformats.org/presentationml/2006/main">
-  <p:cSld>
-    <p:spTree>
-      <p:nvGrpSpPr>
-        <p:cNvPr id="1" name=""/>
-        <p:cNvGrpSpPr/>
-        <p:nvPr/>
-      </p:nvGrpSpPr>
-      <p:grpSpPr>
-        <a:xfrm>
-          <a:off x="0" y="0"/>
-          <a:ext cx="0" cy="0"/>
-          <a:chOff x="0" y="0"/>
-          <a:chExt cx="0" cy="0"/>
-        </a:xfrm>
-      </p:grpSpPr>
-      <p:sp>
-        <p:nvSpPr>
-          <p:cNvPr id="2" name="Заголовок 1"/>
-          <p:cNvSpPr>
-            <a:spLocks noGrp="1"/>
-          </p:cNvSpPr>
-          <p:nvPr>
-            <p:ph type="title"/>
-          </p:nvPr>
-        </p:nvSpPr>
-        <p:spPr/>
-        <p:txBody>
-          <a:bodyPr/>
-          <a:lstStyle/>
-          <a:p>
-            <a:r>
-              <a:rPr lang="ru-RU" dirty="0"/>
-              <a:t>Архитектурные принципы проектирования сетей</a:t>
-            </a:r>
-          </a:p>
-        </p:txBody>
-      </p:sp>
-      <p:sp>
-        <p:nvSpPr>
-          <p:cNvPr id="3" name="Объект 2"/>
-          <p:cNvSpPr>
-            <a:spLocks noGrp="1"/>
-          </p:cNvSpPr>
-          <p:nvPr>
-            <p:ph idx="1"/>
-          </p:nvPr>
-        </p:nvSpPr>
-        <p:spPr/>
-        <p:txBody>
-          <a:bodyPr>
-            <a:normAutofit fontScale="85000" lnSpcReduction="20000"/>
-          </a:bodyPr>
-          <a:lstStyle/>
-          <a:p>
-            <a:r>
-              <a:rPr lang="ru-RU" b="1" dirty="0"/>
-              <a:t>Цель декомпозиции:</a:t>
-            </a:r>
-            <a:r>
-              <a:rPr lang="ru-RU" dirty="0"/>
-              <a:t> упрощение проектирования сложных распределённых систем.</a:t>
-            </a:r>
-          </a:p>
-          <a:p>
-            <a:r>
-              <a:rPr lang="ru-RU" b="1" dirty="0"/>
-              <a:t>Принцип «Разделяй и властвуй»:</a:t>
-            </a:r>
-            <a:endParaRPr lang="ru-RU" dirty="0"/>
-          </a:p>
-          <a:p>
-            <a:pPr lvl="1"/>
-            <a:r>
-              <a:rPr lang="ru-RU" dirty="0"/>
-              <a:t>Разбиение сетевого взаимодействия на автономные уровни (слои).</a:t>
-            </a:r>
-          </a:p>
-          <a:p>
-            <a:r>
-              <a:rPr lang="ru-RU" b="1" dirty="0"/>
-              <a:t>Принцип абстракции:</a:t>
-            </a:r>
-            <a:endParaRPr lang="ru-RU" dirty="0"/>
-          </a:p>
-          <a:p>
-            <a:pPr lvl="1"/>
-            <a:r>
-              <a:rPr lang="ru-RU" dirty="0"/>
-              <a:t>Каждый уровень решает конкретную задачу.</a:t>
-            </a:r>
-          </a:p>
-          <a:p>
-            <a:pPr lvl="1"/>
-            <a:r>
-              <a:rPr lang="ru-RU" dirty="0"/>
-              <a:t>Внутреннее устройство скрыто за внешним интерфейсом.</a:t>
-            </a:r>
-          </a:p>
-          <a:p>
-            <a:r>
-              <a:rPr lang="ru-RU" b="1" dirty="0"/>
-              <a:t>Иерархическая организация:</a:t>
-            </a:r>
-            <a:endParaRPr lang="ru-RU" dirty="0"/>
-          </a:p>
-          <a:p>
-            <a:pPr lvl="1"/>
-            <a:r>
-              <a:rPr lang="ru-RU" dirty="0"/>
-              <a:t>Уровень N</a:t>
-            </a:r>
-            <a:r>
-              <a:rPr lang="ru-RU" i="1" dirty="0"/>
-              <a:t>N</a:t>
-            </a:r>
-            <a:r>
-              <a:rPr lang="ru-RU" dirty="0"/>
-              <a:t> предоставляет сервисы вышестоящему уровню </a:t>
-            </a:r>
-            <a:r>
-              <a:rPr lang="ru-RU" i="1" dirty="0" smtClean="0"/>
-              <a:t>N</a:t>
-            </a:r>
-            <a:r>
-              <a:rPr lang="ru-RU" dirty="0" smtClean="0"/>
-              <a:t>+1</a:t>
-            </a:r>
-            <a:r>
-              <a:rPr lang="ru-RU" dirty="0"/>
-              <a:t>.</a:t>
-            </a:r>
-          </a:p>
-          <a:p>
-            <a:pPr lvl="1"/>
-            <a:r>
-              <a:rPr lang="ru-RU" dirty="0"/>
-              <a:t>Уровень N</a:t>
-            </a:r>
-            <a:r>
-              <a:rPr lang="ru-RU" i="1" dirty="0"/>
-              <a:t>N</a:t>
-            </a:r>
-            <a:r>
-              <a:rPr lang="ru-RU" dirty="0"/>
-              <a:t> использует сервисы нижестоящего уровня </a:t>
-            </a:r>
-            <a:r>
-              <a:rPr lang="ru-RU" i="1" dirty="0" smtClean="0"/>
-              <a:t>N</a:t>
-            </a:r>
-            <a:r>
-              <a:rPr lang="ru-RU" dirty="0"/>
-              <a:t>−1.</a:t>
-            </a:r>
-          </a:p>
-          <a:p>
-            <a:endParaRPr lang="ru-RU" dirty="0"/>
-          </a:p>
-        </p:txBody>
-      </p:sp>
-    </p:spTree>
-    <p:extLst>
-      <p:ext uri="{BB962C8B-B14F-4D97-AF65-F5344CB8AC3E}">
-        <p14:creationId xmlns:p14="http://schemas.microsoft.com/office/powerpoint/2010/main" val="3722643710"/>
-      </p:ext>
-    </p:extLst>
-  </p:cSld>
-  <p:clrMapOvr>
-    <a:masterClrMapping/>
-  </p:clrMapOvr>
-  <p:timing>
-    <p:tnLst>
-      <p:par>
-        <p:cTn id="1" dur="indefinite" restart="never" nodeType="tmRoot"/>
-      </p:par>
-    </p:tnLst>
-  </p:timing>
-</p:sld>
-</file>
-
 <file path=ppt/slides/slide3.xml><?xml version="1.0" encoding="utf-8"?>
 <p:sld xmlns:a="http://schemas.openxmlformats.org/drawingml/2006/main" xmlns:r="http://schemas.openxmlformats.org/officeDocument/2006/relationships" xmlns:p="http://schemas.openxmlformats.org/presentationml/2006/main">
   <p:cSld>
@@ -15758,171 +16173,59 @@
             <p:ph type="title"/>
           </p:nvPr>
         </p:nvSpPr>
-        <p:spPr/>
+        <p:spPr>
+          <a:xfrm>
+            <a:off x="1141413" y="181790"/>
+            <a:ext cx="9905998" cy="1478570"/>
+          </a:xfrm>
+        </p:spPr>
         <p:txBody>
           <a:bodyPr/>
           <a:lstStyle/>
           <a:p>
             <a:r>
               <a:rPr lang="ru-RU" dirty="0"/>
-              <a:t>Протоколы, интерфейсы и стек</a:t>
+              <a:t>Архитектурные принципы проектирования сетей</a:t>
             </a:r>
           </a:p>
         </p:txBody>
       </p:sp>
-      <p:sp>
-        <p:nvSpPr>
-          <p:cNvPr id="3" name="Объект 2"/>
-          <p:cNvSpPr>
-            <a:spLocks noGrp="1"/>
-          </p:cNvSpPr>
+      <p:pic>
+        <p:nvPicPr>
+          <p:cNvPr id="4" name="Объект 3"/>
+          <p:cNvPicPr>
+            <a:picLocks noGrp="1" noChangeAspect="1"/>
+          </p:cNvPicPr>
           <p:nvPr>
             <p:ph idx="1"/>
           </p:nvPr>
-        </p:nvSpPr>
-        <p:spPr/>
-        <p:txBody>
-          <a:bodyPr>
-            <a:normAutofit fontScale="92500" lnSpcReduction="20000"/>
-          </a:bodyPr>
-          <a:lstStyle/>
-          <a:p>
-            <a:r>
-              <a:rPr lang="ru-RU" b="1" dirty="0"/>
-              <a:t>Сетевой протокол:</a:t>
-            </a:r>
-            <a:r>
-              <a:rPr lang="ru-RU" dirty="0"/>
-              <a:t> правила и форматы горизонтального взаимодействия (Уровень </a:t>
-            </a:r>
-            <a:r>
-              <a:rPr lang="ru-RU" i="1" dirty="0" smtClean="0"/>
-              <a:t>N</a:t>
-            </a:r>
-            <a:r>
-              <a:rPr lang="ru-RU" dirty="0"/>
-              <a:t> машины А </a:t>
-            </a:r>
-            <a:r>
-              <a:rPr lang="ru-RU" dirty="0" smtClean="0"/>
-              <a:t>↔</a:t>
-            </a:r>
-            <a:r>
-              <a:rPr lang="ru-RU" dirty="0"/>
-              <a:t> Уровень </a:t>
-            </a:r>
-            <a:r>
-              <a:rPr lang="ru-RU" i="1" dirty="0" smtClean="0"/>
-              <a:t>N</a:t>
-            </a:r>
-            <a:r>
-              <a:rPr lang="ru-RU" dirty="0"/>
-              <a:t> машины Б).</a:t>
-            </a:r>
-          </a:p>
-          <a:p>
-            <a:r>
-              <a:rPr lang="ru-RU" b="1" dirty="0"/>
-              <a:t>Межуровневый интерфейс:</a:t>
-            </a:r>
-            <a:r>
-              <a:rPr lang="ru-RU" dirty="0"/>
-              <a:t> набор операций для вертикального взаимодействия смежных слоёв внутри одной машины.</a:t>
-            </a:r>
-          </a:p>
-          <a:p>
-            <a:r>
-              <a:rPr lang="ru-RU" b="1" dirty="0"/>
-              <a:t>Стек протоколов:</a:t>
-            </a:r>
-            <a:r>
-              <a:rPr lang="ru-RU" dirty="0"/>
-              <a:t> совокупность протоколов всех уровней, используемая на хосте.</a:t>
-            </a:r>
-          </a:p>
-          <a:p>
-            <a:r>
-              <a:rPr lang="ru-RU" b="1" dirty="0"/>
-              <a:t>Два класса сервисов:</a:t>
-            </a:r>
-            <a:endParaRPr lang="ru-RU" dirty="0"/>
-          </a:p>
-          <a:p>
-            <a:pPr lvl="1"/>
-            <a:r>
-              <a:rPr lang="ru-RU" i="1" dirty="0" err="1"/>
-              <a:t>Connection-Oriented</a:t>
-            </a:r>
-            <a:r>
-              <a:rPr lang="ru-RU" i="1" dirty="0"/>
-              <a:t> (с установлением соединения):</a:t>
-            </a:r>
-            <a:r>
-              <a:rPr lang="ru-RU" dirty="0"/>
-              <a:t> </a:t>
-            </a:r>
-            <a:r>
-              <a:rPr lang="ru-RU" dirty="0" err="1"/>
-              <a:t>handshake</a:t>
-            </a:r>
-            <a:r>
-              <a:rPr lang="ru-RU" dirty="0"/>
-              <a:t> </a:t>
-            </a:r>
-            <a:r>
-              <a:rPr lang="ru-RU" dirty="0" smtClean="0"/>
-              <a:t>→</a:t>
-            </a:r>
-            <a:r>
-              <a:rPr lang="ru-RU" dirty="0"/>
-              <a:t> передача </a:t>
-            </a:r>
-            <a:r>
-              <a:rPr lang="ru-RU" dirty="0" smtClean="0"/>
-              <a:t>→</a:t>
-            </a:r>
-            <a:r>
-              <a:rPr lang="ru-RU" dirty="0"/>
-              <a:t> разрыв.</a:t>
-            </a:r>
-          </a:p>
-          <a:p>
-            <a:pPr lvl="1"/>
-            <a:r>
-              <a:rPr lang="ru-RU" i="1" dirty="0" err="1"/>
-              <a:t>Connectionless</a:t>
-            </a:r>
-            <a:r>
-              <a:rPr lang="ru-RU" i="1" dirty="0"/>
-              <a:t> (без соединения):</a:t>
-            </a:r>
-            <a:r>
-              <a:rPr lang="ru-RU" dirty="0"/>
-              <a:t> независимая доставка дейтаграмм.</a:t>
-            </a:r>
-          </a:p>
-          <a:p>
-            <a:endParaRPr lang="ru-RU" dirty="0"/>
-          </a:p>
-        </p:txBody>
-      </p:sp>
+        </p:nvPicPr>
+        <p:blipFill>
+          <a:blip r:embed="rId2"/>
+          <a:stretch>
+            <a:fillRect/>
+          </a:stretch>
+        </p:blipFill>
+        <p:spPr>
+          <a:xfrm>
+            <a:off x="2905723" y="1471052"/>
+            <a:ext cx="6377377" cy="5066224"/>
+          </a:xfrm>
+          <a:prstGeom prst="rect">
+            <a:avLst/>
+          </a:prstGeom>
+        </p:spPr>
+      </p:pic>
     </p:spTree>
     <p:extLst>
       <p:ext uri="{BB962C8B-B14F-4D97-AF65-F5344CB8AC3E}">
-        <p14:creationId xmlns:p14="http://schemas.microsoft.com/office/powerpoint/2010/main" val="2996263056"/>
+        <p14:creationId xmlns:p14="http://schemas.microsoft.com/office/powerpoint/2010/main" val="1132240783"/>
       </p:ext>
     </p:extLst>
   </p:cSld>
   <p:clrMapOvr>
     <a:masterClrMapping/>
   </p:clrMapOvr>
-  <p:timing>
-    <p:tnLst>
-      <p:par>
-        <p:cTn id="1" dur="indefinite" restart="never" nodeType="tmRoot"/>
-      </p:par>
-    </p:tnLst>
-  </p:timing>
 </p:sld>
 </file>
 
@@ -15955,6 +16258,279 @@
         </p:nvSpPr>
         <p:spPr/>
         <p:txBody>
+          <a:bodyPr/>
+          <a:lstStyle/>
+          <a:p>
+            <a:r>
+              <a:rPr lang="ru-RU" dirty="0"/>
+              <a:t>Архитектурные принципы проектирования сетей</a:t>
+            </a:r>
+          </a:p>
+        </p:txBody>
+      </p:sp>
+      <p:pic>
+        <p:nvPicPr>
+          <p:cNvPr id="4" name="Объект 3"/>
+          <p:cNvPicPr>
+            <a:picLocks noGrp="1" noChangeAspect="1"/>
+          </p:cNvPicPr>
+          <p:nvPr>
+            <p:ph idx="1"/>
+          </p:nvPr>
+        </p:nvPicPr>
+        <p:blipFill>
+          <a:blip r:embed="rId2"/>
+          <a:stretch>
+            <a:fillRect/>
+          </a:stretch>
+        </p:blipFill>
+        <p:spPr>
+          <a:xfrm>
+            <a:off x="2264196" y="1951630"/>
+            <a:ext cx="7660432" cy="4567051"/>
+          </a:xfrm>
+          <a:prstGeom prst="rect">
+            <a:avLst/>
+          </a:prstGeom>
+        </p:spPr>
+      </p:pic>
+    </p:spTree>
+    <p:extLst>
+      <p:ext uri="{BB962C8B-B14F-4D97-AF65-F5344CB8AC3E}">
+        <p14:creationId xmlns:p14="http://schemas.microsoft.com/office/powerpoint/2010/main" val="3009912845"/>
+      </p:ext>
+    </p:extLst>
+  </p:cSld>
+  <p:clrMapOvr>
+    <a:masterClrMapping/>
+  </p:clrMapOvr>
+</p:sld>
+</file>
+
+<file path=ppt/slides/slide5.xml><?xml version="1.0" encoding="utf-8"?>
+<p:sld xmlns:a="http://schemas.openxmlformats.org/drawingml/2006/main" xmlns:r="http://schemas.openxmlformats.org/officeDocument/2006/relationships" xmlns:p="http://schemas.openxmlformats.org/presentationml/2006/main">
+  <p:cSld>
+    <p:spTree>
+      <p:nvGrpSpPr>
+        <p:cNvPr id="1" name=""/>
+        <p:cNvGrpSpPr/>
+        <p:nvPr/>
+      </p:nvGrpSpPr>
+      <p:grpSpPr>
+        <a:xfrm>
+          <a:off x="0" y="0"/>
+          <a:ext cx="0" cy="0"/>
+          <a:chOff x="0" y="0"/>
+          <a:chExt cx="0" cy="0"/>
+        </a:xfrm>
+      </p:grpSpPr>
+      <p:sp>
+        <p:nvSpPr>
+          <p:cNvPr id="2" name="Заголовок 1"/>
+          <p:cNvSpPr>
+            <a:spLocks noGrp="1"/>
+          </p:cNvSpPr>
+          <p:nvPr>
+            <p:ph type="title"/>
+          </p:nvPr>
+        </p:nvSpPr>
+        <p:spPr/>
+        <p:txBody>
+          <a:bodyPr/>
+          <a:lstStyle/>
+          <a:p>
+            <a:r>
+              <a:rPr lang="ru-RU" dirty="0"/>
+              <a:t>Протоколы, интерфейсы и стек</a:t>
+            </a:r>
+          </a:p>
+        </p:txBody>
+      </p:sp>
+      <p:sp>
+        <p:nvSpPr>
+          <p:cNvPr id="3" name="Объект 2"/>
+          <p:cNvSpPr>
+            <a:spLocks noGrp="1"/>
+          </p:cNvSpPr>
+          <p:nvPr>
+            <p:ph idx="1"/>
+          </p:nvPr>
+        </p:nvSpPr>
+        <p:spPr/>
+        <p:txBody>
+          <a:bodyPr>
+            <a:normAutofit fontScale="92500" lnSpcReduction="20000"/>
+          </a:bodyPr>
+          <a:lstStyle/>
+          <a:p>
+            <a:r>
+              <a:rPr lang="ru-RU" b="1" dirty="0"/>
+              <a:t>Сетевой протокол:</a:t>
+            </a:r>
+            <a:r>
+              <a:rPr lang="ru-RU" dirty="0"/>
+              <a:t> правила и форматы горизонтального взаимодействия (Уровень </a:t>
+            </a:r>
+            <a:r>
+              <a:rPr lang="ru-RU" i="1" dirty="0" smtClean="0"/>
+              <a:t>N</a:t>
+            </a:r>
+            <a:r>
+              <a:rPr lang="ru-RU" dirty="0"/>
+              <a:t> машины А </a:t>
+            </a:r>
+            <a:r>
+              <a:rPr lang="ru-RU" dirty="0" smtClean="0"/>
+              <a:t>↔</a:t>
+            </a:r>
+            <a:r>
+              <a:rPr lang="ru-RU" dirty="0"/>
+              <a:t> Уровень </a:t>
+            </a:r>
+            <a:r>
+              <a:rPr lang="ru-RU" i="1" dirty="0" smtClean="0"/>
+              <a:t>N</a:t>
+            </a:r>
+            <a:r>
+              <a:rPr lang="ru-RU" dirty="0"/>
+              <a:t> машины Б).</a:t>
+            </a:r>
+          </a:p>
+          <a:p>
+            <a:r>
+              <a:rPr lang="ru-RU" b="1" dirty="0"/>
+              <a:t>Межуровневый интерфейс:</a:t>
+            </a:r>
+            <a:r>
+              <a:rPr lang="ru-RU" dirty="0"/>
+              <a:t> набор операций для вертикального взаимодействия смежных слоёв внутри одной машины.</a:t>
+            </a:r>
+          </a:p>
+          <a:p>
+            <a:r>
+              <a:rPr lang="ru-RU" b="1" dirty="0"/>
+              <a:t>Стек протоколов:</a:t>
+            </a:r>
+            <a:r>
+              <a:rPr lang="ru-RU" dirty="0"/>
+              <a:t> совокупность протоколов всех уровней, используемая на хосте.</a:t>
+            </a:r>
+          </a:p>
+          <a:p>
+            <a:r>
+              <a:rPr lang="ru-RU" b="1" dirty="0"/>
+              <a:t>Два класса сервисов:</a:t>
+            </a:r>
+            <a:endParaRPr lang="ru-RU" dirty="0"/>
+          </a:p>
+          <a:p>
+            <a:pPr lvl="1"/>
+            <a:r>
+              <a:rPr lang="ru-RU" i="1" dirty="0" err="1"/>
+              <a:t>Connection-Oriented</a:t>
+            </a:r>
+            <a:r>
+              <a:rPr lang="ru-RU" i="1" dirty="0"/>
+              <a:t> (с установлением соединения):</a:t>
+            </a:r>
+            <a:r>
+              <a:rPr lang="ru-RU" dirty="0"/>
+              <a:t> </a:t>
+            </a:r>
+            <a:r>
+              <a:rPr lang="ru-RU" dirty="0" err="1"/>
+              <a:t>handshake</a:t>
+            </a:r>
+            <a:r>
+              <a:rPr lang="ru-RU" dirty="0"/>
+              <a:t> </a:t>
+            </a:r>
+            <a:r>
+              <a:rPr lang="ru-RU" dirty="0" smtClean="0"/>
+              <a:t>→</a:t>
+            </a:r>
+            <a:r>
+              <a:rPr lang="ru-RU" dirty="0"/>
+              <a:t> передача </a:t>
+            </a:r>
+            <a:r>
+              <a:rPr lang="ru-RU" dirty="0" smtClean="0"/>
+              <a:t>→</a:t>
+            </a:r>
+            <a:r>
+              <a:rPr lang="ru-RU" dirty="0"/>
+              <a:t> разрыв.</a:t>
+            </a:r>
+          </a:p>
+          <a:p>
+            <a:pPr lvl="1"/>
+            <a:r>
+              <a:rPr lang="ru-RU" i="1" dirty="0" err="1"/>
+              <a:t>Connectionless</a:t>
+            </a:r>
+            <a:r>
+              <a:rPr lang="ru-RU" i="1" dirty="0"/>
+              <a:t> (без соединения):</a:t>
+            </a:r>
+            <a:r>
+              <a:rPr lang="ru-RU" dirty="0"/>
+              <a:t> независимая доставка дейтаграмм.</a:t>
+            </a:r>
+          </a:p>
+          <a:p>
+            <a:endParaRPr lang="ru-RU" dirty="0"/>
+          </a:p>
+        </p:txBody>
+      </p:sp>
+    </p:spTree>
+    <p:extLst>
+      <p:ext uri="{BB962C8B-B14F-4D97-AF65-F5344CB8AC3E}">
+        <p14:creationId xmlns:p14="http://schemas.microsoft.com/office/powerpoint/2010/main" val="2996263056"/>
+      </p:ext>
+    </p:extLst>
+  </p:cSld>
+  <p:clrMapOvr>
+    <a:masterClrMapping/>
+  </p:clrMapOvr>
+  <p:timing>
+    <p:tnLst>
+      <p:par>
+        <p:cTn id="1" dur="indefinite" restart="never" nodeType="tmRoot"/>
+      </p:par>
+    </p:tnLst>
+  </p:timing>
+</p:sld>
+</file>
+
+<file path=ppt/slides/slide6.xml><?xml version="1.0" encoding="utf-8"?>
+<p:sld xmlns:a="http://schemas.openxmlformats.org/drawingml/2006/main" xmlns:r="http://schemas.openxmlformats.org/officeDocument/2006/relationships" xmlns:p="http://schemas.openxmlformats.org/presentationml/2006/main">
+  <p:cSld>
+    <p:spTree>
+      <p:nvGrpSpPr>
+        <p:cNvPr id="1" name=""/>
+        <p:cNvGrpSpPr/>
+        <p:nvPr/>
+      </p:nvGrpSpPr>
+      <p:grpSpPr>
+        <a:xfrm>
+          <a:off x="0" y="0"/>
+          <a:ext cx="0" cy="0"/>
+          <a:chOff x="0" y="0"/>
+          <a:chExt cx="0" cy="0"/>
+        </a:xfrm>
+      </p:grpSpPr>
+      <p:sp>
+        <p:nvSpPr>
+          <p:cNvPr id="2" name="Заголовок 1"/>
+          <p:cNvSpPr>
+            <a:spLocks noGrp="1"/>
+          </p:cNvSpPr>
+          <p:nvPr>
+            <p:ph type="title"/>
+          </p:nvPr>
+        </p:nvSpPr>
+        <p:spPr/>
+        <p:txBody>
           <a:bodyPr>
             <a:normAutofit/>
           </a:bodyPr>
@@ -16106,7 +16682,7 @@
 </p:sld>
 </file>
 
-<file path=ppt/slides/slide5.xml><?xml version="1.0" encoding="utf-8"?>
+<file path=ppt/slides/slide7.xml><?xml version="1.0" encoding="utf-8"?>
 <p:sld xmlns:a="http://schemas.openxmlformats.org/drawingml/2006/main" xmlns:r="http://schemas.openxmlformats.org/officeDocument/2006/relationships" xmlns:p="http://schemas.openxmlformats.org/presentationml/2006/main">
   <p:cSld>
     <p:spTree>
@@ -16271,7 +16847,7 @@
 </p:sld>
 </file>
 
-<file path=ppt/slides/slide6.xml><?xml version="1.0" encoding="utf-8"?>
+<file path=ppt/slides/slide8.xml><?xml version="1.0" encoding="utf-8"?>
 <p:sld xmlns:a="http://schemas.openxmlformats.org/drawingml/2006/main" xmlns:r="http://schemas.openxmlformats.org/officeDocument/2006/relationships" xmlns:p="http://schemas.openxmlformats.org/presentationml/2006/main">
   <p:cSld>
     <p:spTree>
@@ -17567,7 +18143,7 @@
 </p:sld>
 </file>
 
-<file path=ppt/slides/slide7.xml><?xml version="1.0" encoding="utf-8"?>
+<file path=ppt/slides/slide9.xml><?xml version="1.0" encoding="utf-8"?>
 <p:sld xmlns:a="http://schemas.openxmlformats.org/drawingml/2006/main" xmlns:r="http://schemas.openxmlformats.org/officeDocument/2006/relationships" xmlns:p="http://schemas.openxmlformats.org/presentationml/2006/main">
   <p:cSld>
     <p:spTree>
@@ -17820,421 +18396,6 @@
       </p:par>
     </p:tnLst>
   </p:timing>
-</p:sld>
-</file>
-
-<file path=ppt/slides/slide8.xml><?xml version="1.0" encoding="utf-8"?>
-<p:sld xmlns:a="http://schemas.openxmlformats.org/drawingml/2006/main" xmlns:r="http://schemas.openxmlformats.org/officeDocument/2006/relationships" xmlns:p="http://schemas.openxmlformats.org/presentationml/2006/main">
-  <p:cSld>
-    <p:spTree>
-      <p:nvGrpSpPr>
-        <p:cNvPr id="1" name=""/>
-        <p:cNvGrpSpPr/>
-        <p:nvPr/>
-      </p:nvGrpSpPr>
-      <p:grpSpPr>
-        <a:xfrm>
-          <a:off x="0" y="0"/>
-          <a:ext cx="0" cy="0"/>
-          <a:chOff x="0" y="0"/>
-          <a:chExt cx="0" cy="0"/>
-        </a:xfrm>
-      </p:grpSpPr>
-      <p:sp>
-        <p:nvSpPr>
-          <p:cNvPr id="2" name="Заголовок 1"/>
-          <p:cNvSpPr>
-            <a:spLocks noGrp="1"/>
-          </p:cNvSpPr>
-          <p:nvPr>
-            <p:ph type="title"/>
-          </p:nvPr>
-        </p:nvSpPr>
-        <p:spPr/>
-        <p:txBody>
-          <a:bodyPr/>
-          <a:lstStyle/>
-          <a:p>
-            <a:r>
-              <a:rPr lang="ru-RU" dirty="0"/>
-              <a:t>Модель TCP/IP в сравнении с моделью OSI</a:t>
-            </a:r>
-          </a:p>
-        </p:txBody>
-      </p:sp>
-      <p:sp>
-        <p:nvSpPr>
-          <p:cNvPr id="3" name="Объект 2"/>
-          <p:cNvSpPr>
-            <a:spLocks noGrp="1"/>
-          </p:cNvSpPr>
-          <p:nvPr>
-            <p:ph idx="1"/>
-          </p:nvPr>
-        </p:nvSpPr>
-        <p:spPr>
-          <a:xfrm>
-            <a:off x="309562" y="1828004"/>
-            <a:ext cx="5342731" cy="4741863"/>
-          </a:xfrm>
-        </p:spPr>
-        <p:txBody>
-          <a:bodyPr>
-            <a:normAutofit fontScale="92500" lnSpcReduction="20000"/>
-          </a:bodyPr>
-          <a:lstStyle/>
-          <a:p>
-            <a:r>
-              <a:rPr lang="ru-RU" b="1" dirty="0"/>
-              <a:t>Сравнение моделей:</a:t>
-            </a:r>
-            <a:endParaRPr lang="ru-RU" dirty="0"/>
-          </a:p>
-          <a:p>
-            <a:pPr lvl="1"/>
-            <a:r>
-              <a:rPr lang="ru-RU" dirty="0"/>
-              <a:t>Прикладной уровень </a:t>
-            </a:r>
-            <a:r>
-              <a:rPr lang="af-ZA" dirty="0"/>
-              <a:t>TCP/IP </a:t>
-            </a:r>
-            <a:r>
-              <a:rPr lang="af-ZA" dirty="0" smtClean="0"/>
-              <a:t>≈</a:t>
-            </a:r>
-            <a:r>
-              <a:rPr lang="af-ZA" dirty="0"/>
-              <a:t> </a:t>
-            </a:r>
-            <a:r>
-              <a:rPr lang="ru-RU" dirty="0"/>
-              <a:t>Уровни 5, 6, 7 модели </a:t>
-            </a:r>
-            <a:r>
-              <a:rPr lang="af-ZA" dirty="0"/>
-              <a:t>OSI.</a:t>
-            </a:r>
-          </a:p>
-          <a:p>
-            <a:pPr lvl="1"/>
-            <a:r>
-              <a:rPr lang="ru-RU" dirty="0"/>
-              <a:t>Транспортный уровень </a:t>
-            </a:r>
-            <a:r>
-              <a:rPr lang="af-ZA" dirty="0"/>
-              <a:t>TCP/IP </a:t>
-            </a:r>
-            <a:r>
-              <a:rPr lang="af-ZA" dirty="0" smtClean="0"/>
-              <a:t>≈</a:t>
-            </a:r>
-            <a:r>
-              <a:rPr lang="af-ZA" dirty="0"/>
-              <a:t> </a:t>
-            </a:r>
-            <a:r>
-              <a:rPr lang="ru-RU" dirty="0"/>
-              <a:t>Уровень 4 </a:t>
-            </a:r>
-            <a:r>
-              <a:rPr lang="af-ZA" dirty="0"/>
-              <a:t>OSI (TCP, UDP).</a:t>
-            </a:r>
-          </a:p>
-          <a:p>
-            <a:pPr lvl="1"/>
-            <a:r>
-              <a:rPr lang="ru-RU" dirty="0"/>
-              <a:t>Межсетевой уровень (</a:t>
-            </a:r>
-            <a:r>
-              <a:rPr lang="af-ZA" dirty="0"/>
-              <a:t>Internet) </a:t>
-            </a:r>
-            <a:r>
-              <a:rPr lang="af-ZA" dirty="0" smtClean="0"/>
-              <a:t>≈</a:t>
-            </a:r>
-            <a:r>
-              <a:rPr lang="af-ZA" dirty="0"/>
-              <a:t> </a:t>
-            </a:r>
-            <a:r>
-              <a:rPr lang="ru-RU" dirty="0"/>
-              <a:t>Уровень 3 </a:t>
-            </a:r>
-            <a:r>
-              <a:rPr lang="af-ZA" dirty="0"/>
-              <a:t>OSI (IP, ICMP).</a:t>
-            </a:r>
-          </a:p>
-          <a:p>
-            <a:pPr lvl="1"/>
-            <a:r>
-              <a:rPr lang="ru-RU" dirty="0"/>
-              <a:t>Уровень сетевого доступа </a:t>
-            </a:r>
-            <a:r>
-              <a:rPr lang="ru-RU" dirty="0" smtClean="0"/>
-              <a:t>≈</a:t>
-            </a:r>
-            <a:r>
-              <a:rPr lang="ru-RU" dirty="0"/>
-              <a:t> Уровни 1, 2 </a:t>
-            </a:r>
-            <a:r>
-              <a:rPr lang="af-ZA" dirty="0"/>
-              <a:t>OSI (Ethernet, Wi-Fi, PPP).</a:t>
-            </a:r>
-          </a:p>
-          <a:p>
-            <a:r>
-              <a:rPr lang="ru-RU" b="1" dirty="0"/>
-              <a:t>Ключевой вывод:</a:t>
-            </a:r>
-            <a:r>
-              <a:rPr lang="ru-RU" dirty="0"/>
-              <a:t> </a:t>
-            </a:r>
-            <a:r>
-              <a:rPr lang="af-ZA" dirty="0"/>
-              <a:t>OSI — </a:t>
-            </a:r>
-            <a:r>
-              <a:rPr lang="ru-RU" dirty="0"/>
-              <a:t>концептуальный эталон; </a:t>
-            </a:r>
-            <a:r>
-              <a:rPr lang="af-ZA" dirty="0"/>
-              <a:t>TCP/IP — </a:t>
-            </a:r>
-            <a:r>
-              <a:rPr lang="ru-RU" dirty="0"/>
-              <a:t>практическая реализация современного Интернета.</a:t>
-            </a:r>
-          </a:p>
-          <a:p>
-            <a:pPr marL="0" indent="0">
-              <a:buNone/>
-            </a:pPr>
-            <a:endParaRPr lang="ru-RU" dirty="0"/>
-          </a:p>
-        </p:txBody>
-      </p:sp>
-      <p:pic>
-        <p:nvPicPr>
-          <p:cNvPr id="2050" name="Picture 2" descr="Open Systems Interconnection Model (OSI Model)"/>
-          <p:cNvPicPr>
-            <a:picLocks noChangeAspect="1" noChangeArrowheads="1"/>
-          </p:cNvPicPr>
-          <p:nvPr/>
-        </p:nvPicPr>
-        <p:blipFill>
-          <a:blip r:embed="rId2">
-            <a:extLst>
-              <a:ext uri="{28A0092B-C50C-407E-A947-70E740481C1C}">
-                <a14:useLocalDpi xmlns:a14="http://schemas.microsoft.com/office/drawing/2010/main" val="0"/>
-              </a:ext>
-            </a:extLst>
-          </a:blip>
-          <a:srcRect/>
-          <a:stretch>
-            <a:fillRect/>
-          </a:stretch>
-        </p:blipFill>
-        <p:spPr bwMode="auto">
-          <a:xfrm>
-            <a:off x="5817393" y="2641599"/>
-            <a:ext cx="6229350" cy="3114675"/>
-          </a:xfrm>
-          <a:prstGeom prst="rect">
-            <a:avLst/>
-          </a:prstGeom>
-          <a:noFill/>
-          <a:extLst>
-            <a:ext uri="{909E8E84-426E-40DD-AFC4-6F175D3DCCD1}">
-              <a14:hiddenFill xmlns:a14="http://schemas.microsoft.com/office/drawing/2010/main">
-                <a:solidFill>
-                  <a:srgbClr val="FFFFFF"/>
-                </a:solidFill>
-              </a14:hiddenFill>
-            </a:ext>
-          </a:extLst>
-        </p:spPr>
-      </p:pic>
-    </p:spTree>
-    <p:extLst>
-      <p:ext uri="{BB962C8B-B14F-4D97-AF65-F5344CB8AC3E}">
-        <p14:creationId xmlns:p14="http://schemas.microsoft.com/office/powerpoint/2010/main" val="4207400647"/>
-      </p:ext>
-    </p:extLst>
-  </p:cSld>
-  <p:clrMapOvr>
-    <a:masterClrMapping/>
-  </p:clrMapOvr>
-  <p:timing>
-    <p:tnLst>
-      <p:par>
-        <p:cTn id="1" dur="indefinite" restart="never" nodeType="tmRoot"/>
-      </p:par>
-    </p:tnLst>
-  </p:timing>
-</p:sld>
-</file>
-
-<file path=ppt/slides/slide9.xml><?xml version="1.0" encoding="utf-8"?>
-<p:sld xmlns:a="http://schemas.openxmlformats.org/drawingml/2006/main" xmlns:r="http://schemas.openxmlformats.org/officeDocument/2006/relationships" xmlns:p="http://schemas.openxmlformats.org/presentationml/2006/main">
-  <p:cSld>
-    <p:spTree>
-      <p:nvGrpSpPr>
-        <p:cNvPr id="1" name=""/>
-        <p:cNvGrpSpPr/>
-        <p:nvPr/>
-      </p:nvGrpSpPr>
-      <p:grpSpPr>
-        <a:xfrm>
-          <a:off x="0" y="0"/>
-          <a:ext cx="0" cy="0"/>
-          <a:chOff x="0" y="0"/>
-          <a:chExt cx="0" cy="0"/>
-        </a:xfrm>
-      </p:grpSpPr>
-      <p:sp>
-        <p:nvSpPr>
-          <p:cNvPr id="3" name="Объект 2"/>
-          <p:cNvSpPr>
-            <a:spLocks noGrp="1"/>
-          </p:cNvSpPr>
-          <p:nvPr>
-            <p:ph idx="1"/>
-          </p:nvPr>
-        </p:nvSpPr>
-        <p:spPr>
-          <a:xfrm>
-            <a:off x="1141412" y="1690687"/>
-            <a:ext cx="9905999" cy="3541714"/>
-          </a:xfrm>
-        </p:spPr>
-        <p:txBody>
-          <a:bodyPr>
-            <a:normAutofit lnSpcReduction="10000"/>
-          </a:bodyPr>
-          <a:lstStyle/>
-          <a:p>
-            <a:r>
-              <a:rPr lang="ru-RU" b="1" dirty="0"/>
-              <a:t>Уровень сетевого доступа (</a:t>
-            </a:r>
-            <a:r>
-              <a:rPr lang="af-ZA" b="1" dirty="0"/>
-              <a:t>Network Access):</a:t>
-            </a:r>
-            <a:r>
-              <a:rPr lang="af-ZA" dirty="0"/>
-              <a:t> </a:t>
-            </a:r>
-            <a:r>
-              <a:rPr lang="ru-RU" dirty="0"/>
-              <a:t>объединяет физический и канальный уровни (</a:t>
-            </a:r>
-            <a:r>
-              <a:rPr lang="af-ZA" dirty="0"/>
-              <a:t>Ethernet, Wi-Fi).</a:t>
-            </a:r>
-          </a:p>
-          <a:p>
-            <a:r>
-              <a:rPr lang="ru-RU" b="1" dirty="0"/>
-              <a:t>Межсетевой уровень (</a:t>
-            </a:r>
-            <a:r>
-              <a:rPr lang="af-ZA" b="1" dirty="0"/>
-              <a:t>Internet):</a:t>
-            </a:r>
-            <a:r>
-              <a:rPr lang="af-ZA" dirty="0"/>
-              <a:t> </a:t>
-            </a:r>
-            <a:r>
-              <a:rPr lang="ru-RU" dirty="0"/>
-              <a:t>адресация и маршрутизация (</a:t>
-            </a:r>
-            <a:r>
-              <a:rPr lang="af-ZA" dirty="0"/>
-              <a:t>IP, ICMP).</a:t>
-            </a:r>
-          </a:p>
-          <a:p>
-            <a:r>
-              <a:rPr lang="ru-RU" b="1" dirty="0"/>
-              <a:t>Транспортный уровень (</a:t>
-            </a:r>
-            <a:r>
-              <a:rPr lang="af-ZA" b="1" dirty="0"/>
-              <a:t>Transport):</a:t>
-            </a:r>
-            <a:r>
-              <a:rPr lang="af-ZA" dirty="0"/>
-              <a:t> TCP (</a:t>
-            </a:r>
-            <a:r>
-              <a:rPr lang="ru-RU" dirty="0"/>
-              <a:t>надёжный, потоковый, с соединением), </a:t>
-            </a:r>
-            <a:r>
-              <a:rPr lang="af-ZA" dirty="0"/>
-              <a:t>UDP (</a:t>
-            </a:r>
-            <a:r>
-              <a:rPr lang="ru-RU" dirty="0"/>
-              <a:t>ненадёжный, </a:t>
-            </a:r>
-            <a:r>
-              <a:rPr lang="ru-RU" dirty="0" err="1"/>
-              <a:t>дейтаграммный</a:t>
-            </a:r>
-            <a:r>
-              <a:rPr lang="ru-RU" dirty="0"/>
-              <a:t>, без соединения).</a:t>
-            </a:r>
-          </a:p>
-          <a:p>
-            <a:r>
-              <a:rPr lang="ru-RU" b="1" dirty="0"/>
-              <a:t>Прикладной уровень (</a:t>
-            </a:r>
-            <a:r>
-              <a:rPr lang="af-ZA" b="1" dirty="0"/>
-              <a:t>Application):</a:t>
-            </a:r>
-            <a:r>
-              <a:rPr lang="af-ZA" dirty="0"/>
-              <a:t> </a:t>
-            </a:r>
-            <a:r>
-              <a:rPr lang="ru-RU" dirty="0"/>
-              <a:t>объединяет прикладной, представительский и сеансовый уровни </a:t>
-            </a:r>
-            <a:r>
-              <a:rPr lang="af-ZA" dirty="0"/>
-              <a:t>OSI (HTTP, SMTP, SSH, DNS).</a:t>
-            </a:r>
-          </a:p>
-        </p:txBody>
-      </p:sp>
-    </p:spTree>
-    <p:extLst>
-      <p:ext uri="{BB962C8B-B14F-4D97-AF65-F5344CB8AC3E}">
-        <p14:creationId xmlns:p14="http://schemas.microsoft.com/office/powerpoint/2010/main" val="3195823794"/>
-      </p:ext>
-    </p:extLst>
-  </p:cSld>
-  <p:clrMapOvr>
-    <a:masterClrMapping/>
-  </p:clrMapOvr>
 </p:sld>
 </file>
 

--- a/1.3 Architecture/1.3 Architecture.pptx
+++ b/1.3 Architecture/1.3 Architecture.pptx
@@ -17,15 +17,17 @@
     <p:sldId id="261" r:id="rId11"/>
     <p:sldId id="265" r:id="rId12"/>
     <p:sldId id="262" r:id="rId13"/>
-    <p:sldId id="266" r:id="rId14"/>
-    <p:sldId id="267" r:id="rId15"/>
-    <p:sldId id="268" r:id="rId16"/>
-    <p:sldId id="269" r:id="rId17"/>
-    <p:sldId id="270" r:id="rId18"/>
-    <p:sldId id="271" r:id="rId19"/>
-    <p:sldId id="272" r:id="rId20"/>
-    <p:sldId id="273" r:id="rId21"/>
-    <p:sldId id="274" r:id="rId22"/>
+    <p:sldId id="278" r:id="rId14"/>
+    <p:sldId id="266" r:id="rId15"/>
+    <p:sldId id="277" r:id="rId16"/>
+    <p:sldId id="267" r:id="rId17"/>
+    <p:sldId id="268" r:id="rId18"/>
+    <p:sldId id="269" r:id="rId19"/>
+    <p:sldId id="270" r:id="rId20"/>
+    <p:sldId id="271" r:id="rId21"/>
+    <p:sldId id="272" r:id="rId22"/>
+    <p:sldId id="273" r:id="rId23"/>
+    <p:sldId id="274" r:id="rId24"/>
   </p:sldIdLst>
   <p:sldSz cx="12192000" cy="6858000"/>
   <p:notesSz cx="6858000" cy="9144000"/>
@@ -189,7 +191,7 @@
           <a:noFill/>
           <a:extLst>
             <a:ext uri="{909E8E84-426E-40dd-AFC4-6F175D3DCCD1}">
-              <a14:hiddenFill xmlns:a14="http://schemas.microsoft.com/office/drawing/2010/main" xmlns="">
+              <a14:hiddenFill xmlns="" xmlns:a14="http://schemas.microsoft.com/office/drawing/2010/main">
                 <a:solidFill>
                   <a:srgbClr val="FFFFFF"/>
                 </a:solidFill>
@@ -248,7 +250,7 @@
             </a:ln>
             <a:extLst>
               <a:ext uri="{91240B29-F687-4f45-9708-019B960494DF}">
-                <a14:hiddenLine xmlns:a14="http://schemas.microsoft.com/office/drawing/2010/main" xmlns="" w="9525">
+                <a14:hiddenLine xmlns="" xmlns:a14="http://schemas.microsoft.com/office/drawing/2010/main" w="9525">
                   <a:solidFill>
                     <a:srgbClr val="000000"/>
                   </a:solidFill>
@@ -338,7 +340,7 @@
             </a:ln>
             <a:extLst>
               <a:ext uri="{91240B29-F687-4f45-9708-019B960494DF}">
-                <a14:hiddenLine xmlns:a14="http://schemas.microsoft.com/office/drawing/2010/main" xmlns="" w="9525">
+                <a14:hiddenLine xmlns="" xmlns:a14="http://schemas.microsoft.com/office/drawing/2010/main" w="9525">
                   <a:solidFill>
                     <a:srgbClr val="000000"/>
                   </a:solidFill>
@@ -428,7 +430,7 @@
             </a:ln>
             <a:extLst>
               <a:ext uri="{91240B29-F687-4f45-9708-019B960494DF}">
-                <a14:hiddenLine xmlns:a14="http://schemas.microsoft.com/office/drawing/2010/main" xmlns="" w="9525">
+                <a14:hiddenLine xmlns="" xmlns:a14="http://schemas.microsoft.com/office/drawing/2010/main" w="9525">
                   <a:solidFill>
                     <a:srgbClr val="000000"/>
                   </a:solidFill>
@@ -462,7 +464,7 @@
             </a:ln>
             <a:extLst>
               <a:ext uri="{91240B29-F687-4f45-9708-019B960494DF}">
-                <a14:hiddenLine xmlns:a14="http://schemas.microsoft.com/office/drawing/2010/main" xmlns="" w="9525">
+                <a14:hiddenLine xmlns="" xmlns:a14="http://schemas.microsoft.com/office/drawing/2010/main" w="9525">
                   <a:solidFill>
                     <a:srgbClr val="000000"/>
                   </a:solidFill>
@@ -552,7 +554,7 @@
             </a:ln>
             <a:extLst>
               <a:ext uri="{91240B29-F687-4f45-9708-019B960494DF}">
-                <a14:hiddenLine xmlns:a14="http://schemas.microsoft.com/office/drawing/2010/main" xmlns="" w="9525">
+                <a14:hiddenLine xmlns="" xmlns:a14="http://schemas.microsoft.com/office/drawing/2010/main" w="9525">
                   <a:solidFill>
                     <a:srgbClr val="000000"/>
                   </a:solidFill>
@@ -614,7 +616,7 @@
             </a:ln>
             <a:extLst>
               <a:ext uri="{91240B29-F687-4f45-9708-019B960494DF}">
-                <a14:hiddenLine xmlns:a14="http://schemas.microsoft.com/office/drawing/2010/main" xmlns="" w="9525">
+                <a14:hiddenLine xmlns="" xmlns:a14="http://schemas.microsoft.com/office/drawing/2010/main" w="9525">
                   <a:solidFill>
                     <a:srgbClr val="000000"/>
                   </a:solidFill>
@@ -676,7 +678,7 @@
             </a:ln>
             <a:extLst>
               <a:ext uri="{91240B29-F687-4f45-9708-019B960494DF}">
-                <a14:hiddenLine xmlns:a14="http://schemas.microsoft.com/office/drawing/2010/main" xmlns="" w="9525">
+                <a14:hiddenLine xmlns="" xmlns:a14="http://schemas.microsoft.com/office/drawing/2010/main" w="9525">
                   <a:solidFill>
                     <a:srgbClr val="000000"/>
                   </a:solidFill>
@@ -766,7 +768,7 @@
             </a:ln>
             <a:extLst>
               <a:ext uri="{91240B29-F687-4f45-9708-019B960494DF}">
-                <a14:hiddenLine xmlns:a14="http://schemas.microsoft.com/office/drawing/2010/main" xmlns="" w="9525">
+                <a14:hiddenLine xmlns="" xmlns:a14="http://schemas.microsoft.com/office/drawing/2010/main" w="9525">
                   <a:solidFill>
                     <a:srgbClr val="000000"/>
                   </a:solidFill>
@@ -828,7 +830,7 @@
             </a:ln>
             <a:extLst>
               <a:ext uri="{91240B29-F687-4f45-9708-019B960494DF}">
-                <a14:hiddenLine xmlns:a14="http://schemas.microsoft.com/office/drawing/2010/main" xmlns="" w="9525">
+                <a14:hiddenLine xmlns="" xmlns:a14="http://schemas.microsoft.com/office/drawing/2010/main" w="9525">
                   <a:solidFill>
                     <a:srgbClr val="000000"/>
                   </a:solidFill>
@@ -890,7 +892,7 @@
             </a:ln>
             <a:extLst>
               <a:ext uri="{91240B29-F687-4f45-9708-019B960494DF}">
-                <a14:hiddenLine xmlns:a14="http://schemas.microsoft.com/office/drawing/2010/main" xmlns="" w="9525">
+                <a14:hiddenLine xmlns="" xmlns:a14="http://schemas.microsoft.com/office/drawing/2010/main" w="9525">
                   <a:solidFill>
                     <a:srgbClr val="000000"/>
                   </a:solidFill>
@@ -980,7 +982,7 @@
             </a:ln>
             <a:extLst>
               <a:ext uri="{91240B29-F687-4f45-9708-019B960494DF}">
-                <a14:hiddenLine xmlns:a14="http://schemas.microsoft.com/office/drawing/2010/main" xmlns="" w="9525">
+                <a14:hiddenLine xmlns="" xmlns:a14="http://schemas.microsoft.com/office/drawing/2010/main" w="9525">
                   <a:solidFill>
                     <a:srgbClr val="000000"/>
                   </a:solidFill>
@@ -1070,7 +1072,7 @@
             </a:ln>
             <a:extLst>
               <a:ext uri="{91240B29-F687-4f45-9708-019B960494DF}">
-                <a14:hiddenLine xmlns:a14="http://schemas.microsoft.com/office/drawing/2010/main" xmlns="" w="9525">
+                <a14:hiddenLine xmlns="" xmlns:a14="http://schemas.microsoft.com/office/drawing/2010/main" w="9525">
                   <a:solidFill>
                     <a:srgbClr val="000000"/>
                   </a:solidFill>
@@ -1132,7 +1134,7 @@
             </a:ln>
             <a:extLst>
               <a:ext uri="{91240B29-F687-4f45-9708-019B960494DF}">
-                <a14:hiddenLine xmlns:a14="http://schemas.microsoft.com/office/drawing/2010/main" xmlns="" w="9525">
+                <a14:hiddenLine xmlns="" xmlns:a14="http://schemas.microsoft.com/office/drawing/2010/main" w="9525">
                   <a:solidFill>
                     <a:srgbClr val="000000"/>
                   </a:solidFill>
@@ -1242,7 +1244,7 @@
             </a:ln>
             <a:extLst>
               <a:ext uri="{91240B29-F687-4f45-9708-019B960494DF}">
-                <a14:hiddenLine xmlns:a14="http://schemas.microsoft.com/office/drawing/2010/main" xmlns="" w="9525">
+                <a14:hiddenLine xmlns="" xmlns:a14="http://schemas.microsoft.com/office/drawing/2010/main" w="9525">
                   <a:solidFill>
                     <a:srgbClr val="000000"/>
                   </a:solidFill>
@@ -1304,7 +1306,7 @@
             </a:ln>
             <a:extLst>
               <a:ext uri="{91240B29-F687-4f45-9708-019B960494DF}">
-                <a14:hiddenLine xmlns:a14="http://schemas.microsoft.com/office/drawing/2010/main" xmlns="" w="9525">
+                <a14:hiddenLine xmlns="" xmlns:a14="http://schemas.microsoft.com/office/drawing/2010/main" w="9525">
                   <a:solidFill>
                     <a:srgbClr val="000000"/>
                   </a:solidFill>
@@ -1394,7 +1396,7 @@
             </a:ln>
             <a:extLst>
               <a:ext uri="{91240B29-F687-4f45-9708-019B960494DF}">
-                <a14:hiddenLine xmlns:a14="http://schemas.microsoft.com/office/drawing/2010/main" xmlns="" w="9525">
+                <a14:hiddenLine xmlns="" xmlns:a14="http://schemas.microsoft.com/office/drawing/2010/main" w="9525">
                   <a:solidFill>
                     <a:srgbClr val="000000"/>
                   </a:solidFill>
@@ -1484,7 +1486,7 @@
             </a:ln>
             <a:extLst>
               <a:ext uri="{91240B29-F687-4f45-9708-019B960494DF}">
-                <a14:hiddenLine xmlns:a14="http://schemas.microsoft.com/office/drawing/2010/main" xmlns="" w="9525">
+                <a14:hiddenLine xmlns="" xmlns:a14="http://schemas.microsoft.com/office/drawing/2010/main" w="9525">
                   <a:solidFill>
                     <a:srgbClr val="000000"/>
                   </a:solidFill>
@@ -1546,7 +1548,7 @@
             </a:ln>
             <a:extLst>
               <a:ext uri="{91240B29-F687-4f45-9708-019B960494DF}">
-                <a14:hiddenLine xmlns:a14="http://schemas.microsoft.com/office/drawing/2010/main" xmlns="" w="9525">
+                <a14:hiddenLine xmlns="" xmlns:a14="http://schemas.microsoft.com/office/drawing/2010/main" w="9525">
                   <a:solidFill>
                     <a:srgbClr val="000000"/>
                   </a:solidFill>
@@ -1636,7 +1638,7 @@
             </a:ln>
             <a:extLst>
               <a:ext uri="{91240B29-F687-4f45-9708-019B960494DF}">
-                <a14:hiddenLine xmlns:a14="http://schemas.microsoft.com/office/drawing/2010/main" xmlns="" w="9525">
+                <a14:hiddenLine xmlns="" xmlns:a14="http://schemas.microsoft.com/office/drawing/2010/main" w="9525">
                   <a:solidFill>
                     <a:srgbClr val="000000"/>
                   </a:solidFill>
@@ -1726,7 +1728,7 @@
             </a:ln>
             <a:extLst>
               <a:ext uri="{91240B29-F687-4f45-9708-019B960494DF}">
-                <a14:hiddenLine xmlns:a14="http://schemas.microsoft.com/office/drawing/2010/main" xmlns="" w="9525">
+                <a14:hiddenLine xmlns="" xmlns:a14="http://schemas.microsoft.com/office/drawing/2010/main" w="9525">
                   <a:solidFill>
                     <a:srgbClr val="000000"/>
                   </a:solidFill>
@@ -1782,7 +1784,7 @@
             </a:ln>
             <a:extLst>
               <a:ext uri="{91240B29-F687-4f45-9708-019B960494DF}">
-                <a14:hiddenLine xmlns:a14="http://schemas.microsoft.com/office/drawing/2010/main" xmlns="" w="9525">
+                <a14:hiddenLine xmlns="" xmlns:a14="http://schemas.microsoft.com/office/drawing/2010/main" w="9525">
                   <a:solidFill>
                     <a:srgbClr val="000000"/>
                   </a:solidFill>
@@ -1872,7 +1874,7 @@
             </a:ln>
             <a:extLst>
               <a:ext uri="{91240B29-F687-4f45-9708-019B960494DF}">
-                <a14:hiddenLine xmlns:a14="http://schemas.microsoft.com/office/drawing/2010/main" xmlns="" w="9525">
+                <a14:hiddenLine xmlns="" xmlns:a14="http://schemas.microsoft.com/office/drawing/2010/main" w="9525">
                   <a:solidFill>
                     <a:srgbClr val="000000"/>
                   </a:solidFill>
@@ -1928,7 +1930,7 @@
             </a:ln>
             <a:extLst>
               <a:ext uri="{91240B29-F687-4f45-9708-019B960494DF}">
-                <a14:hiddenLine xmlns:a14="http://schemas.microsoft.com/office/drawing/2010/main" xmlns="" w="9525">
+                <a14:hiddenLine xmlns="" xmlns:a14="http://schemas.microsoft.com/office/drawing/2010/main" w="9525">
                   <a:solidFill>
                     <a:srgbClr val="000000"/>
                   </a:solidFill>
@@ -2018,7 +2020,7 @@
             </a:ln>
             <a:extLst>
               <a:ext uri="{91240B29-F687-4f45-9708-019B960494DF}">
-                <a14:hiddenLine xmlns:a14="http://schemas.microsoft.com/office/drawing/2010/main" xmlns="" w="9525">
+                <a14:hiddenLine xmlns="" xmlns:a14="http://schemas.microsoft.com/office/drawing/2010/main" w="9525">
                   <a:solidFill>
                     <a:srgbClr val="000000"/>
                   </a:solidFill>
@@ -2086,7 +2088,7 @@
             </a:ln>
             <a:extLst>
               <a:ext uri="{91240B29-F687-4f45-9708-019B960494DF}">
-                <a14:hiddenLine xmlns:a14="http://schemas.microsoft.com/office/drawing/2010/main" xmlns="" w="9525">
+                <a14:hiddenLine xmlns="" xmlns:a14="http://schemas.microsoft.com/office/drawing/2010/main" w="9525">
                   <a:solidFill>
                     <a:srgbClr val="000000"/>
                   </a:solidFill>
@@ -2176,7 +2178,7 @@
             </a:ln>
             <a:extLst>
               <a:ext uri="{91240B29-F687-4f45-9708-019B960494DF}">
-                <a14:hiddenLine xmlns:a14="http://schemas.microsoft.com/office/drawing/2010/main" xmlns="" w="9525">
+                <a14:hiddenLine xmlns="" xmlns:a14="http://schemas.microsoft.com/office/drawing/2010/main" w="9525">
                   <a:solidFill>
                     <a:srgbClr val="000000"/>
                   </a:solidFill>
@@ -2244,7 +2246,7 @@
             </a:ln>
             <a:extLst>
               <a:ext uri="{91240B29-F687-4f45-9708-019B960494DF}">
-                <a14:hiddenLine xmlns:a14="http://schemas.microsoft.com/office/drawing/2010/main" xmlns="" w="9525">
+                <a14:hiddenLine xmlns="" xmlns:a14="http://schemas.microsoft.com/office/drawing/2010/main" w="9525">
                   <a:solidFill>
                     <a:srgbClr val="000000"/>
                   </a:solidFill>
@@ -2334,7 +2336,7 @@
             </a:ln>
             <a:extLst>
               <a:ext uri="{91240B29-F687-4f45-9708-019B960494DF}">
-                <a14:hiddenLine xmlns:a14="http://schemas.microsoft.com/office/drawing/2010/main" xmlns="" w="9525">
+                <a14:hiddenLine xmlns="" xmlns:a14="http://schemas.microsoft.com/office/drawing/2010/main" w="9525">
                   <a:solidFill>
                     <a:srgbClr val="000000"/>
                   </a:solidFill>
@@ -2368,7 +2370,7 @@
             </a:ln>
             <a:extLst>
               <a:ext uri="{91240B29-F687-4f45-9708-019B960494DF}">
-                <a14:hiddenLine xmlns:a14="http://schemas.microsoft.com/office/drawing/2010/main" xmlns="" w="9525">
+                <a14:hiddenLine xmlns="" xmlns:a14="http://schemas.microsoft.com/office/drawing/2010/main" w="9525">
                   <a:solidFill>
                     <a:srgbClr val="000000"/>
                   </a:solidFill>
@@ -2458,7 +2460,7 @@
             </a:ln>
             <a:extLst>
               <a:ext uri="{91240B29-F687-4f45-9708-019B960494DF}">
-                <a14:hiddenLine xmlns:a14="http://schemas.microsoft.com/office/drawing/2010/main" xmlns="" w="9525">
+                <a14:hiddenLine xmlns="" xmlns:a14="http://schemas.microsoft.com/office/drawing/2010/main" w="9525">
                   <a:solidFill>
                     <a:srgbClr val="000000"/>
                   </a:solidFill>
@@ -2520,7 +2522,7 @@
             </a:ln>
             <a:extLst>
               <a:ext uri="{91240B29-F687-4f45-9708-019B960494DF}">
-                <a14:hiddenLine xmlns:a14="http://schemas.microsoft.com/office/drawing/2010/main" xmlns="" w="9525">
+                <a14:hiddenLine xmlns="" xmlns:a14="http://schemas.microsoft.com/office/drawing/2010/main" w="9525">
                   <a:solidFill>
                     <a:srgbClr val="000000"/>
                   </a:solidFill>
@@ -2582,7 +2584,7 @@
             </a:ln>
             <a:extLst>
               <a:ext uri="{91240B29-F687-4f45-9708-019B960494DF}">
-                <a14:hiddenLine xmlns:a14="http://schemas.microsoft.com/office/drawing/2010/main" xmlns="" w="9525">
+                <a14:hiddenLine xmlns="" xmlns:a14="http://schemas.microsoft.com/office/drawing/2010/main" w="9525">
                   <a:solidFill>
                     <a:srgbClr val="000000"/>
                   </a:solidFill>
@@ -2672,7 +2674,7 @@
             </a:ln>
             <a:extLst>
               <a:ext uri="{91240B29-F687-4f45-9708-019B960494DF}">
-                <a14:hiddenLine xmlns:a14="http://schemas.microsoft.com/office/drawing/2010/main" xmlns="" w="9525">
+                <a14:hiddenLine xmlns="" xmlns:a14="http://schemas.microsoft.com/office/drawing/2010/main" w="9525">
                   <a:solidFill>
                     <a:srgbClr val="000000"/>
                   </a:solidFill>
@@ -2740,7 +2742,7 @@
             </a:ln>
             <a:extLst>
               <a:ext uri="{91240B29-F687-4f45-9708-019B960494DF}">
-                <a14:hiddenLine xmlns:a14="http://schemas.microsoft.com/office/drawing/2010/main" xmlns="" w="9525">
+                <a14:hiddenLine xmlns="" xmlns:a14="http://schemas.microsoft.com/office/drawing/2010/main" w="9525">
                   <a:solidFill>
                     <a:srgbClr val="000000"/>
                   </a:solidFill>
@@ -2802,7 +2804,7 @@
             </a:ln>
             <a:extLst>
               <a:ext uri="{91240B29-F687-4f45-9708-019B960494DF}">
-                <a14:hiddenLine xmlns:a14="http://schemas.microsoft.com/office/drawing/2010/main" xmlns="" w="9525">
+                <a14:hiddenLine xmlns="" xmlns:a14="http://schemas.microsoft.com/office/drawing/2010/main" w="9525">
                   <a:solidFill>
                     <a:srgbClr val="000000"/>
                   </a:solidFill>
@@ -2892,7 +2894,7 @@
             </a:ln>
             <a:extLst>
               <a:ext uri="{91240B29-F687-4f45-9708-019B960494DF}">
-                <a14:hiddenLine xmlns:a14="http://schemas.microsoft.com/office/drawing/2010/main" xmlns="" w="9525">
+                <a14:hiddenLine xmlns="" xmlns:a14="http://schemas.microsoft.com/office/drawing/2010/main" w="9525">
                   <a:solidFill>
                     <a:srgbClr val="000000"/>
                   </a:solidFill>
@@ -2954,7 +2956,7 @@
             </a:ln>
             <a:extLst>
               <a:ext uri="{91240B29-F687-4f45-9708-019B960494DF}">
-                <a14:hiddenLine xmlns:a14="http://schemas.microsoft.com/office/drawing/2010/main" xmlns="" w="9525">
+                <a14:hiddenLine xmlns="" xmlns:a14="http://schemas.microsoft.com/office/drawing/2010/main" w="9525">
                   <a:solidFill>
                     <a:srgbClr val="000000"/>
                   </a:solidFill>
@@ -3044,7 +3046,7 @@
             </a:ln>
             <a:extLst>
               <a:ext uri="{91240B29-F687-4f45-9708-019B960494DF}">
-                <a14:hiddenLine xmlns:a14="http://schemas.microsoft.com/office/drawing/2010/main" xmlns="" w="9525">
+                <a14:hiddenLine xmlns="" xmlns:a14="http://schemas.microsoft.com/office/drawing/2010/main" w="9525">
                   <a:solidFill>
                     <a:srgbClr val="000000"/>
                   </a:solidFill>
@@ -3106,7 +3108,7 @@
             </a:ln>
             <a:extLst>
               <a:ext uri="{91240B29-F687-4f45-9708-019B960494DF}">
-                <a14:hiddenLine xmlns:a14="http://schemas.microsoft.com/office/drawing/2010/main" xmlns="" w="9525">
+                <a14:hiddenLine xmlns="" xmlns:a14="http://schemas.microsoft.com/office/drawing/2010/main" w="9525">
                   <a:solidFill>
                     <a:srgbClr val="000000"/>
                   </a:solidFill>
@@ -3196,7 +3198,7 @@
             </a:ln>
             <a:extLst>
               <a:ext uri="{91240B29-F687-4f45-9708-019B960494DF}">
-                <a14:hiddenLine xmlns:a14="http://schemas.microsoft.com/office/drawing/2010/main" xmlns="" w="9525">
+                <a14:hiddenLine xmlns="" xmlns:a14="http://schemas.microsoft.com/office/drawing/2010/main" w="9525">
                   <a:solidFill>
                     <a:srgbClr val="000000"/>
                   </a:solidFill>
@@ -3230,7 +3232,7 @@
             </a:ln>
             <a:extLst>
               <a:ext uri="{91240B29-F687-4f45-9708-019B960494DF}">
-                <a14:hiddenLine xmlns:a14="http://schemas.microsoft.com/office/drawing/2010/main" xmlns="" w="9525">
+                <a14:hiddenLine xmlns="" xmlns:a14="http://schemas.microsoft.com/office/drawing/2010/main" w="9525">
                   <a:solidFill>
                     <a:srgbClr val="000000"/>
                   </a:solidFill>
@@ -3295,7 +3297,7 @@
             </a:ln>
             <a:extLst>
               <a:ext uri="{91240B29-F687-4f45-9708-019B960494DF}">
-                <a14:hiddenLine xmlns:a14="http://schemas.microsoft.com/office/drawing/2010/main" xmlns="" w="9525">
+                <a14:hiddenLine xmlns="" xmlns:a14="http://schemas.microsoft.com/office/drawing/2010/main" w="9525">
                   <a:solidFill>
                     <a:srgbClr val="000000"/>
                   </a:solidFill>
@@ -3385,7 +3387,7 @@
             </a:ln>
             <a:extLst>
               <a:ext uri="{91240B29-F687-4f45-9708-019B960494DF}">
-                <a14:hiddenLine xmlns:a14="http://schemas.microsoft.com/office/drawing/2010/main" xmlns="" w="9525">
+                <a14:hiddenLine xmlns="" xmlns:a14="http://schemas.microsoft.com/office/drawing/2010/main" w="9525">
                   <a:solidFill>
                     <a:srgbClr val="000000"/>
                   </a:solidFill>
@@ -3447,7 +3449,7 @@
             </a:ln>
             <a:extLst>
               <a:ext uri="{91240B29-F687-4f45-9708-019B960494DF}">
-                <a14:hiddenLine xmlns:a14="http://schemas.microsoft.com/office/drawing/2010/main" xmlns="" w="9525">
+                <a14:hiddenLine xmlns="" xmlns:a14="http://schemas.microsoft.com/office/drawing/2010/main" w="9525">
                   <a:solidFill>
                     <a:srgbClr val="000000"/>
                   </a:solidFill>
@@ -3537,7 +3539,7 @@
             </a:ln>
             <a:extLst>
               <a:ext uri="{91240B29-F687-4f45-9708-019B960494DF}">
-                <a14:hiddenLine xmlns:a14="http://schemas.microsoft.com/office/drawing/2010/main" xmlns="" w="9525">
+                <a14:hiddenLine xmlns="" xmlns:a14="http://schemas.microsoft.com/office/drawing/2010/main" w="9525">
                   <a:solidFill>
                     <a:srgbClr val="000000"/>
                   </a:solidFill>
@@ -3627,7 +3629,7 @@
             </a:ln>
             <a:extLst>
               <a:ext uri="{91240B29-F687-4f45-9708-019B960494DF}">
-                <a14:hiddenLine xmlns:a14="http://schemas.microsoft.com/office/drawing/2010/main" xmlns="" w="9525">
+                <a14:hiddenLine xmlns="" xmlns:a14="http://schemas.microsoft.com/office/drawing/2010/main" w="9525">
                   <a:solidFill>
                     <a:srgbClr val="000000"/>
                   </a:solidFill>
@@ -3692,7 +3694,7 @@
             </a:ln>
             <a:extLst>
               <a:ext uri="{91240B29-F687-4f45-9708-019B960494DF}">
-                <a14:hiddenLine xmlns:a14="http://schemas.microsoft.com/office/drawing/2010/main" xmlns="" w="9525">
+                <a14:hiddenLine xmlns="" xmlns:a14="http://schemas.microsoft.com/office/drawing/2010/main" w="9525">
                   <a:solidFill>
                     <a:srgbClr val="000000"/>
                   </a:solidFill>
@@ -3754,7 +3756,7 @@
             </a:ln>
             <a:extLst>
               <a:ext uri="{91240B29-F687-4f45-9708-019B960494DF}">
-                <a14:hiddenLine xmlns:a14="http://schemas.microsoft.com/office/drawing/2010/main" xmlns="" w="9525">
+                <a14:hiddenLine xmlns="" xmlns:a14="http://schemas.microsoft.com/office/drawing/2010/main" w="9525">
                   <a:solidFill>
                     <a:srgbClr val="000000"/>
                   </a:solidFill>
@@ -3844,7 +3846,7 @@
             </a:ln>
             <a:extLst>
               <a:ext uri="{91240B29-F687-4f45-9708-019B960494DF}">
-                <a14:hiddenLine xmlns:a14="http://schemas.microsoft.com/office/drawing/2010/main" xmlns="" w="9525">
+                <a14:hiddenLine xmlns="" xmlns:a14="http://schemas.microsoft.com/office/drawing/2010/main" w="9525">
                   <a:solidFill>
                     <a:srgbClr val="000000"/>
                   </a:solidFill>
@@ -3934,7 +3936,7 @@
             </a:ln>
             <a:extLst>
               <a:ext uri="{91240B29-F687-4f45-9708-019B960494DF}">
-                <a14:hiddenLine xmlns:a14="http://schemas.microsoft.com/office/drawing/2010/main" xmlns="" w="9525">
+                <a14:hiddenLine xmlns="" xmlns:a14="http://schemas.microsoft.com/office/drawing/2010/main" w="9525">
                   <a:solidFill>
                     <a:srgbClr val="000000"/>
                   </a:solidFill>
@@ -3996,7 +3998,7 @@
             </a:ln>
             <a:extLst>
               <a:ext uri="{91240B29-F687-4f45-9708-019B960494DF}">
-                <a14:hiddenLine xmlns:a14="http://schemas.microsoft.com/office/drawing/2010/main" xmlns="" w="9525">
+                <a14:hiddenLine xmlns="" xmlns:a14="http://schemas.microsoft.com/office/drawing/2010/main" w="9525">
                   <a:solidFill>
                     <a:srgbClr val="000000"/>
                   </a:solidFill>
@@ -4116,7 +4118,7 @@
             </a:ln>
             <a:extLst>
               <a:ext uri="{91240B29-F687-4f45-9708-019B960494DF}">
-                <a14:hiddenLine xmlns:a14="http://schemas.microsoft.com/office/drawing/2010/main" xmlns="" w="9525">
+                <a14:hiddenLine xmlns="" xmlns:a14="http://schemas.microsoft.com/office/drawing/2010/main" w="9525">
                   <a:solidFill>
                     <a:srgbClr val="000000"/>
                   </a:solidFill>
@@ -4184,7 +4186,7 @@
             </a:ln>
             <a:extLst>
               <a:ext uri="{91240B29-F687-4f45-9708-019B960494DF}">
-                <a14:hiddenLine xmlns:a14="http://schemas.microsoft.com/office/drawing/2010/main" xmlns="" w="9525">
+                <a14:hiddenLine xmlns="" xmlns:a14="http://schemas.microsoft.com/office/drawing/2010/main" w="9525">
                   <a:solidFill>
                     <a:srgbClr val="000000"/>
                   </a:solidFill>
@@ -4274,7 +4276,7 @@
             </a:ln>
             <a:extLst>
               <a:ext uri="{91240B29-F687-4f45-9708-019B960494DF}">
-                <a14:hiddenLine xmlns:a14="http://schemas.microsoft.com/office/drawing/2010/main" xmlns="" w="9525">
+                <a14:hiddenLine xmlns="" xmlns:a14="http://schemas.microsoft.com/office/drawing/2010/main" w="9525">
                   <a:solidFill>
                     <a:srgbClr val="000000"/>
                   </a:solidFill>
@@ -4414,7 +4416,7 @@
           <a:p>
             <a:fld id="{6AC27FFC-58F7-4A0B-910F-2453E6738501}" type="datetimeFigureOut">
               <a:rPr lang="ru-RU" smtClean="0"/>
-              <a:t>31.08.2026</a:t>
+              <a:t>01.09.2026</a:t>
             </a:fld>
             <a:endParaRPr lang="ru-RU"/>
           </a:p>
@@ -4681,7 +4683,7 @@
           <a:p>
             <a:fld id="{6AC27FFC-58F7-4A0B-910F-2453E6738501}" type="datetimeFigureOut">
               <a:rPr lang="ru-RU" smtClean="0"/>
-              <a:t>31.08.2026</a:t>
+              <a:t>01.09.2026</a:t>
             </a:fld>
             <a:endParaRPr lang="ru-RU"/>
           </a:p>
@@ -4877,7 +4879,7 @@
           <a:p>
             <a:fld id="{6AC27FFC-58F7-4A0B-910F-2453E6738501}" type="datetimeFigureOut">
               <a:rPr lang="ru-RU" smtClean="0"/>
-              <a:t>31.08.2026</a:t>
+              <a:t>01.09.2026</a:t>
             </a:fld>
             <a:endParaRPr lang="ru-RU"/>
           </a:p>
@@ -5140,7 +5142,7 @@
           <a:p>
             <a:fld id="{6AC27FFC-58F7-4A0B-910F-2453E6738501}" type="datetimeFigureOut">
               <a:rPr lang="ru-RU" smtClean="0"/>
-              <a:t>31.08.2026</a:t>
+              <a:t>01.09.2026</a:t>
             </a:fld>
             <a:endParaRPr lang="ru-RU"/>
           </a:p>
@@ -5574,7 +5576,7 @@
           <a:p>
             <a:fld id="{6AC27FFC-58F7-4A0B-910F-2453E6738501}" type="datetimeFigureOut">
               <a:rPr lang="ru-RU" smtClean="0"/>
-              <a:t>31.08.2026</a:t>
+              <a:t>01.09.2026</a:t>
             </a:fld>
             <a:endParaRPr lang="ru-RU"/>
           </a:p>
@@ -6120,7 +6122,7 @@
           <a:p>
             <a:fld id="{6AC27FFC-58F7-4A0B-910F-2453E6738501}" type="datetimeFigureOut">
               <a:rPr lang="ru-RU" smtClean="0"/>
-              <a:t>31.08.2026</a:t>
+              <a:t>01.09.2026</a:t>
             </a:fld>
             <a:endParaRPr lang="ru-RU"/>
           </a:p>
@@ -6840,7 +6842,7 @@
           <a:p>
             <a:fld id="{6AC27FFC-58F7-4A0B-910F-2453E6738501}" type="datetimeFigureOut">
               <a:rPr lang="ru-RU" smtClean="0"/>
-              <a:t>31.08.2026</a:t>
+              <a:t>01.09.2026</a:t>
             </a:fld>
             <a:endParaRPr lang="ru-RU"/>
           </a:p>
@@ -7010,7 +7012,7 @@
           <a:p>
             <a:fld id="{6AC27FFC-58F7-4A0B-910F-2453E6738501}" type="datetimeFigureOut">
               <a:rPr lang="ru-RU" smtClean="0"/>
-              <a:t>31.08.2026</a:t>
+              <a:t>01.09.2026</a:t>
             </a:fld>
             <a:endParaRPr lang="ru-RU"/>
           </a:p>
@@ -7190,7 +7192,7 @@
           <a:p>
             <a:fld id="{6AC27FFC-58F7-4A0B-910F-2453E6738501}" type="datetimeFigureOut">
               <a:rPr lang="ru-RU" smtClean="0"/>
-              <a:t>31.08.2026</a:t>
+              <a:t>01.09.2026</a:t>
             </a:fld>
             <a:endParaRPr lang="ru-RU"/>
           </a:p>
@@ -7360,7 +7362,7 @@
           <a:p>
             <a:fld id="{6AC27FFC-58F7-4A0B-910F-2453E6738501}" type="datetimeFigureOut">
               <a:rPr lang="ru-RU" smtClean="0"/>
-              <a:t>31.08.2026</a:t>
+              <a:t>01.09.2026</a:t>
             </a:fld>
             <a:endParaRPr lang="ru-RU"/>
           </a:p>
@@ -7610,7 +7612,7 @@
           <a:p>
             <a:fld id="{6AC27FFC-58F7-4A0B-910F-2453E6738501}" type="datetimeFigureOut">
               <a:rPr lang="ru-RU" smtClean="0"/>
-              <a:t>31.08.2026</a:t>
+              <a:t>01.09.2026</a:t>
             </a:fld>
             <a:endParaRPr lang="ru-RU"/>
           </a:p>
@@ -7842,7 +7844,7 @@
           <a:p>
             <a:fld id="{6AC27FFC-58F7-4A0B-910F-2453E6738501}" type="datetimeFigureOut">
               <a:rPr lang="ru-RU" smtClean="0"/>
-              <a:t>31.08.2026</a:t>
+              <a:t>01.09.2026</a:t>
             </a:fld>
             <a:endParaRPr lang="ru-RU"/>
           </a:p>
@@ -8223,7 +8225,7 @@
           <a:p>
             <a:fld id="{6AC27FFC-58F7-4A0B-910F-2453E6738501}" type="datetimeFigureOut">
               <a:rPr lang="ru-RU" smtClean="0"/>
-              <a:t>31.08.2026</a:t>
+              <a:t>01.09.2026</a:t>
             </a:fld>
             <a:endParaRPr lang="ru-RU"/>
           </a:p>
@@ -8341,7 +8343,7 @@
           <a:p>
             <a:fld id="{6AC27FFC-58F7-4A0B-910F-2453E6738501}" type="datetimeFigureOut">
               <a:rPr lang="ru-RU" smtClean="0"/>
-              <a:t>31.08.2026</a:t>
+              <a:t>01.09.2026</a:t>
             </a:fld>
             <a:endParaRPr lang="ru-RU"/>
           </a:p>
@@ -8436,7 +8438,7 @@
           <a:p>
             <a:fld id="{6AC27FFC-58F7-4A0B-910F-2453E6738501}" type="datetimeFigureOut">
               <a:rPr lang="ru-RU" smtClean="0"/>
-              <a:t>31.08.2026</a:t>
+              <a:t>01.09.2026</a:t>
             </a:fld>
             <a:endParaRPr lang="ru-RU"/>
           </a:p>
@@ -8685,7 +8687,7 @@
           <a:p>
             <a:fld id="{6AC27FFC-58F7-4A0B-910F-2453E6738501}" type="datetimeFigureOut">
               <a:rPr lang="ru-RU" smtClean="0"/>
-              <a:t>31.08.2026</a:t>
+              <a:t>01.09.2026</a:t>
             </a:fld>
             <a:endParaRPr lang="ru-RU"/>
           </a:p>
@@ -8965,7 +8967,7 @@
           <a:p>
             <a:fld id="{6AC27FFC-58F7-4A0B-910F-2453E6738501}" type="datetimeFigureOut">
               <a:rPr lang="ru-RU" smtClean="0"/>
-              <a:t>31.08.2026</a:t>
+              <a:t>01.09.2026</a:t>
             </a:fld>
             <a:endParaRPr lang="ru-RU"/>
           </a:p>
@@ -9088,7 +9090,7 @@
           <a:noFill/>
           <a:extLst>
             <a:ext uri="{909E8E84-426E-40dd-AFC4-6F175D3DCCD1}">
-              <a14:hiddenFill xmlns:a14="http://schemas.microsoft.com/office/drawing/2010/main" xmlns="">
+              <a14:hiddenFill xmlns="" xmlns:a14="http://schemas.microsoft.com/office/drawing/2010/main">
                 <a:solidFill>
                   <a:srgbClr val="FFFFFF"/>
                 </a:solidFill>
@@ -9162,7 +9164,7 @@
               </a:ln>
               <a:extLst>
                 <a:ext uri="{91240B29-F687-4f45-9708-019B960494DF}">
-                  <a14:hiddenLine xmlns:a14="http://schemas.microsoft.com/office/drawing/2010/main" xmlns="" w="9525">
+                  <a14:hiddenLine xmlns="" xmlns:a14="http://schemas.microsoft.com/office/drawing/2010/main" w="9525">
                     <a:solidFill>
                       <a:srgbClr val="000000"/>
                     </a:solidFill>
@@ -9252,7 +9254,7 @@
               </a:ln>
               <a:extLst>
                 <a:ext uri="{91240B29-F687-4f45-9708-019B960494DF}">
-                  <a14:hiddenLine xmlns:a14="http://schemas.microsoft.com/office/drawing/2010/main" xmlns="" w="9525">
+                  <a14:hiddenLine xmlns="" xmlns:a14="http://schemas.microsoft.com/office/drawing/2010/main" w="9525">
                     <a:solidFill>
                       <a:srgbClr val="000000"/>
                     </a:solidFill>
@@ -9342,7 +9344,7 @@
               </a:ln>
               <a:extLst>
                 <a:ext uri="{91240B29-F687-4f45-9708-019B960494DF}">
-                  <a14:hiddenLine xmlns:a14="http://schemas.microsoft.com/office/drawing/2010/main" xmlns="" w="9525">
+                  <a14:hiddenLine xmlns="" xmlns:a14="http://schemas.microsoft.com/office/drawing/2010/main" w="9525">
                     <a:solidFill>
                       <a:srgbClr val="000000"/>
                     </a:solidFill>
@@ -9404,7 +9406,7 @@
               </a:ln>
               <a:extLst>
                 <a:ext uri="{91240B29-F687-4f45-9708-019B960494DF}">
-                  <a14:hiddenLine xmlns:a14="http://schemas.microsoft.com/office/drawing/2010/main" xmlns="" w="9525">
+                  <a14:hiddenLine xmlns="" xmlns:a14="http://schemas.microsoft.com/office/drawing/2010/main" w="9525">
                     <a:solidFill>
                       <a:srgbClr val="000000"/>
                     </a:solidFill>
@@ -9494,7 +9496,7 @@
               </a:ln>
               <a:extLst>
                 <a:ext uri="{91240B29-F687-4f45-9708-019B960494DF}">
-                  <a14:hiddenLine xmlns:a14="http://schemas.microsoft.com/office/drawing/2010/main" xmlns="" w="9525">
+                  <a14:hiddenLine xmlns="" xmlns:a14="http://schemas.microsoft.com/office/drawing/2010/main" w="9525">
                     <a:solidFill>
                       <a:srgbClr val="000000"/>
                     </a:solidFill>
@@ -9556,7 +9558,7 @@
               </a:ln>
               <a:extLst>
                 <a:ext uri="{91240B29-F687-4f45-9708-019B960494DF}">
-                  <a14:hiddenLine xmlns:a14="http://schemas.microsoft.com/office/drawing/2010/main" xmlns="" w="9525">
+                  <a14:hiddenLine xmlns="" xmlns:a14="http://schemas.microsoft.com/office/drawing/2010/main" w="9525">
                     <a:solidFill>
                       <a:srgbClr val="000000"/>
                     </a:solidFill>
@@ -9618,7 +9620,7 @@
               </a:ln>
               <a:extLst>
                 <a:ext uri="{91240B29-F687-4f45-9708-019B960494DF}">
-                  <a14:hiddenLine xmlns:a14="http://schemas.microsoft.com/office/drawing/2010/main" xmlns="" w="9525">
+                  <a14:hiddenLine xmlns="" xmlns:a14="http://schemas.microsoft.com/office/drawing/2010/main" w="9525">
                     <a:solidFill>
                       <a:srgbClr val="000000"/>
                     </a:solidFill>
@@ -9708,7 +9710,7 @@
               </a:ln>
               <a:extLst>
                 <a:ext uri="{91240B29-F687-4f45-9708-019B960494DF}">
-                  <a14:hiddenLine xmlns:a14="http://schemas.microsoft.com/office/drawing/2010/main" xmlns="" w="9525">
+                  <a14:hiddenLine xmlns="" xmlns:a14="http://schemas.microsoft.com/office/drawing/2010/main" w="9525">
                     <a:solidFill>
                       <a:srgbClr val="000000"/>
                     </a:solidFill>
@@ -9798,7 +9800,7 @@
               </a:ln>
               <a:extLst>
                 <a:ext uri="{91240B29-F687-4f45-9708-019B960494DF}">
-                  <a14:hiddenLine xmlns:a14="http://schemas.microsoft.com/office/drawing/2010/main" xmlns="" w="9525">
+                  <a14:hiddenLine xmlns="" xmlns:a14="http://schemas.microsoft.com/office/drawing/2010/main" w="9525">
                     <a:solidFill>
                       <a:srgbClr val="000000"/>
                     </a:solidFill>
@@ -9860,7 +9862,7 @@
               </a:ln>
               <a:extLst>
                 <a:ext uri="{91240B29-F687-4f45-9708-019B960494DF}">
-                  <a14:hiddenLine xmlns:a14="http://schemas.microsoft.com/office/drawing/2010/main" xmlns="" w="9525">
+                  <a14:hiddenLine xmlns="" xmlns:a14="http://schemas.microsoft.com/office/drawing/2010/main" w="9525">
                     <a:solidFill>
                       <a:srgbClr val="000000"/>
                     </a:solidFill>
@@ -9970,7 +9972,7 @@
               </a:ln>
               <a:extLst>
                 <a:ext uri="{91240B29-F687-4f45-9708-019B960494DF}">
-                  <a14:hiddenLine xmlns:a14="http://schemas.microsoft.com/office/drawing/2010/main" xmlns="" w="9525">
+                  <a14:hiddenLine xmlns="" xmlns:a14="http://schemas.microsoft.com/office/drawing/2010/main" w="9525">
                     <a:solidFill>
                       <a:srgbClr val="000000"/>
                     </a:solidFill>
@@ -10054,7 +10056,7 @@
               </a:ln>
               <a:extLst>
                 <a:ext uri="{91240B29-F687-4f45-9708-019B960494DF}">
-                  <a14:hiddenLine xmlns:a14="http://schemas.microsoft.com/office/drawing/2010/main" xmlns="" w="9525">
+                  <a14:hiddenLine xmlns="" xmlns:a14="http://schemas.microsoft.com/office/drawing/2010/main" w="9525">
                     <a:solidFill>
                       <a:srgbClr val="000000"/>
                     </a:solidFill>
@@ -10116,7 +10118,7 @@
               </a:ln>
               <a:extLst>
                 <a:ext uri="{91240B29-F687-4f45-9708-019B960494DF}">
-                  <a14:hiddenLine xmlns:a14="http://schemas.microsoft.com/office/drawing/2010/main" xmlns="" w="9525">
+                  <a14:hiddenLine xmlns="" xmlns:a14="http://schemas.microsoft.com/office/drawing/2010/main" w="9525">
                     <a:solidFill>
                       <a:srgbClr val="000000"/>
                     </a:solidFill>
@@ -10178,7 +10180,7 @@
               </a:ln>
               <a:extLst>
                 <a:ext uri="{91240B29-F687-4f45-9708-019B960494DF}">
-                  <a14:hiddenLine xmlns:a14="http://schemas.microsoft.com/office/drawing/2010/main" xmlns="" w="9525">
+                  <a14:hiddenLine xmlns="" xmlns:a14="http://schemas.microsoft.com/office/drawing/2010/main" w="9525">
                     <a:solidFill>
                       <a:srgbClr val="000000"/>
                     </a:solidFill>
@@ -10268,7 +10270,7 @@
               </a:ln>
               <a:extLst>
                 <a:ext uri="{91240B29-F687-4f45-9708-019B960494DF}">
-                  <a14:hiddenLine xmlns:a14="http://schemas.microsoft.com/office/drawing/2010/main" xmlns="" w="9525">
+                  <a14:hiddenLine xmlns="" xmlns:a14="http://schemas.microsoft.com/office/drawing/2010/main" w="9525">
                     <a:solidFill>
                       <a:srgbClr val="000000"/>
                     </a:solidFill>
@@ -10302,7 +10304,7 @@
               </a:ln>
               <a:extLst>
                 <a:ext uri="{91240B29-F687-4f45-9708-019B960494DF}">
-                  <a14:hiddenLine xmlns:a14="http://schemas.microsoft.com/office/drawing/2010/main" xmlns="" w="9525">
+                  <a14:hiddenLine xmlns="" xmlns:a14="http://schemas.microsoft.com/office/drawing/2010/main" w="9525">
                     <a:solidFill>
                       <a:srgbClr val="000000"/>
                     </a:solidFill>
@@ -10367,7 +10369,7 @@
               </a:ln>
               <a:extLst>
                 <a:ext uri="{91240B29-F687-4f45-9708-019B960494DF}">
-                  <a14:hiddenLine xmlns:a14="http://schemas.microsoft.com/office/drawing/2010/main" xmlns="" w="9525">
+                  <a14:hiddenLine xmlns="" xmlns:a14="http://schemas.microsoft.com/office/drawing/2010/main" w="9525">
                     <a:solidFill>
                       <a:srgbClr val="000000"/>
                     </a:solidFill>
@@ -10457,7 +10459,7 @@
               </a:ln>
               <a:extLst>
                 <a:ext uri="{91240B29-F687-4f45-9708-019B960494DF}">
-                  <a14:hiddenLine xmlns:a14="http://schemas.microsoft.com/office/drawing/2010/main" xmlns="" w="9525">
+                  <a14:hiddenLine xmlns="" xmlns:a14="http://schemas.microsoft.com/office/drawing/2010/main" w="9525">
                     <a:solidFill>
                       <a:srgbClr val="000000"/>
                     </a:solidFill>
@@ -10519,7 +10521,7 @@
               </a:ln>
               <a:extLst>
                 <a:ext uri="{91240B29-F687-4f45-9708-019B960494DF}">
-                  <a14:hiddenLine xmlns:a14="http://schemas.microsoft.com/office/drawing/2010/main" xmlns="" w="9525">
+                  <a14:hiddenLine xmlns="" xmlns:a14="http://schemas.microsoft.com/office/drawing/2010/main" w="9525">
                     <a:solidFill>
                       <a:srgbClr val="000000"/>
                     </a:solidFill>
@@ -10609,7 +10611,7 @@
               </a:ln>
               <a:extLst>
                 <a:ext uri="{91240B29-F687-4f45-9708-019B960494DF}">
-                  <a14:hiddenLine xmlns:a14="http://schemas.microsoft.com/office/drawing/2010/main" xmlns="" w="9525">
+                  <a14:hiddenLine xmlns="" xmlns:a14="http://schemas.microsoft.com/office/drawing/2010/main" w="9525">
                     <a:solidFill>
                       <a:srgbClr val="000000"/>
                     </a:solidFill>
@@ -10674,7 +10676,7 @@
               </a:ln>
               <a:extLst>
                 <a:ext uri="{91240B29-F687-4f45-9708-019B960494DF}">
-                  <a14:hiddenLine xmlns:a14="http://schemas.microsoft.com/office/drawing/2010/main" xmlns="" w="9525">
+                  <a14:hiddenLine xmlns="" xmlns:a14="http://schemas.microsoft.com/office/drawing/2010/main" w="9525">
                     <a:solidFill>
                       <a:srgbClr val="000000"/>
                     </a:solidFill>
@@ -10736,7 +10738,7 @@
               </a:ln>
               <a:extLst>
                 <a:ext uri="{91240B29-F687-4f45-9708-019B960494DF}">
-                  <a14:hiddenLine xmlns:a14="http://schemas.microsoft.com/office/drawing/2010/main" xmlns="" w="9525">
+                  <a14:hiddenLine xmlns="" xmlns:a14="http://schemas.microsoft.com/office/drawing/2010/main" w="9525">
                     <a:solidFill>
                       <a:srgbClr val="000000"/>
                     </a:solidFill>
@@ -10826,7 +10828,7 @@
               </a:ln>
               <a:extLst>
                 <a:ext uri="{91240B29-F687-4f45-9708-019B960494DF}">
-                  <a14:hiddenLine xmlns:a14="http://schemas.microsoft.com/office/drawing/2010/main" xmlns="" w="9525">
+                  <a14:hiddenLine xmlns="" xmlns:a14="http://schemas.microsoft.com/office/drawing/2010/main" w="9525">
                     <a:solidFill>
                       <a:srgbClr val="000000"/>
                     </a:solidFill>
@@ -10916,7 +10918,7 @@
               </a:ln>
               <a:extLst>
                 <a:ext uri="{91240B29-F687-4f45-9708-019B960494DF}">
-                  <a14:hiddenLine xmlns:a14="http://schemas.microsoft.com/office/drawing/2010/main" xmlns="" w="9525">
+                  <a14:hiddenLine xmlns="" xmlns:a14="http://schemas.microsoft.com/office/drawing/2010/main" w="9525">
                     <a:solidFill>
                       <a:srgbClr val="000000"/>
                     </a:solidFill>
@@ -10981,7 +10983,7 @@
               </a:ln>
               <a:extLst>
                 <a:ext uri="{91240B29-F687-4f45-9708-019B960494DF}">
-                  <a14:hiddenLine xmlns:a14="http://schemas.microsoft.com/office/drawing/2010/main" xmlns="" w="9525">
+                  <a14:hiddenLine xmlns="" xmlns:a14="http://schemas.microsoft.com/office/drawing/2010/main" w="9525">
                     <a:solidFill>
                       <a:srgbClr val="000000"/>
                     </a:solidFill>
@@ -11101,7 +11103,7 @@
               </a:ln>
               <a:extLst>
                 <a:ext uri="{91240B29-F687-4f45-9708-019B960494DF}">
-                  <a14:hiddenLine xmlns:a14="http://schemas.microsoft.com/office/drawing/2010/main" xmlns="" w="9525">
+                  <a14:hiddenLine xmlns="" xmlns:a14="http://schemas.microsoft.com/office/drawing/2010/main" w="9525">
                     <a:solidFill>
                       <a:srgbClr val="000000"/>
                     </a:solidFill>
@@ -11182,7 +11184,7 @@
               </a:ln>
               <a:extLst>
                 <a:ext uri="{91240B29-F687-4f45-9708-019B960494DF}">
-                  <a14:hiddenLine xmlns:a14="http://schemas.microsoft.com/office/drawing/2010/main" xmlns="" w="9525">
+                  <a14:hiddenLine xmlns="" xmlns:a14="http://schemas.microsoft.com/office/drawing/2010/main" w="9525">
                     <a:solidFill>
                       <a:srgbClr val="000000"/>
                     </a:solidFill>
@@ -11297,7 +11299,7 @@
               </a:ln>
               <a:extLst>
                 <a:ext uri="{91240B29-F687-4f45-9708-019B960494DF}">
-                  <a14:hiddenLine xmlns:a14="http://schemas.microsoft.com/office/drawing/2010/main" xmlns="" w="9525">
+                  <a14:hiddenLine xmlns="" xmlns:a14="http://schemas.microsoft.com/office/drawing/2010/main" w="9525">
                     <a:solidFill>
                       <a:srgbClr val="000000"/>
                     </a:solidFill>
@@ -11387,7 +11389,7 @@
               </a:ln>
               <a:extLst>
                 <a:ext uri="{91240B29-F687-4f45-9708-019B960494DF}">
-                  <a14:hiddenLine xmlns:a14="http://schemas.microsoft.com/office/drawing/2010/main" xmlns="" w="9525">
+                  <a14:hiddenLine xmlns="" xmlns:a14="http://schemas.microsoft.com/office/drawing/2010/main" w="9525">
                     <a:solidFill>
                       <a:srgbClr val="000000"/>
                     </a:solidFill>
@@ -11452,7 +11454,7 @@
               </a:ln>
               <a:extLst>
                 <a:ext uri="{91240B29-F687-4f45-9708-019B960494DF}">
-                  <a14:hiddenLine xmlns:a14="http://schemas.microsoft.com/office/drawing/2010/main" xmlns="" w="9525">
+                  <a14:hiddenLine xmlns="" xmlns:a14="http://schemas.microsoft.com/office/drawing/2010/main" w="9525">
                     <a:solidFill>
                       <a:srgbClr val="000000"/>
                     </a:solidFill>
@@ -11542,7 +11544,7 @@
               </a:ln>
               <a:extLst>
                 <a:ext uri="{91240B29-F687-4f45-9708-019B960494DF}">
-                  <a14:hiddenLine xmlns:a14="http://schemas.microsoft.com/office/drawing/2010/main" xmlns="" w="9525">
+                  <a14:hiddenLine xmlns="" xmlns:a14="http://schemas.microsoft.com/office/drawing/2010/main" w="9525">
                     <a:solidFill>
                       <a:srgbClr val="000000"/>
                     </a:solidFill>
@@ -11610,7 +11612,7 @@
               </a:ln>
               <a:extLst>
                 <a:ext uri="{91240B29-F687-4f45-9708-019B960494DF}">
-                  <a14:hiddenLine xmlns:a14="http://schemas.microsoft.com/office/drawing/2010/main" xmlns="" w="9525">
+                  <a14:hiddenLine xmlns="" xmlns:a14="http://schemas.microsoft.com/office/drawing/2010/main" w="9525">
                     <a:solidFill>
                       <a:srgbClr val="000000"/>
                     </a:solidFill>
@@ -11700,7 +11702,7 @@
               </a:ln>
               <a:extLst>
                 <a:ext uri="{91240B29-F687-4f45-9708-019B960494DF}">
-                  <a14:hiddenLine xmlns:a14="http://schemas.microsoft.com/office/drawing/2010/main" xmlns="" w="9525">
+                  <a14:hiddenLine xmlns="" xmlns:a14="http://schemas.microsoft.com/office/drawing/2010/main" w="9525">
                     <a:solidFill>
                       <a:srgbClr val="000000"/>
                     </a:solidFill>
@@ -11768,7 +11770,7 @@
               </a:ln>
               <a:extLst>
                 <a:ext uri="{91240B29-F687-4f45-9708-019B960494DF}">
-                  <a14:hiddenLine xmlns:a14="http://schemas.microsoft.com/office/drawing/2010/main" xmlns="" w="9525">
+                  <a14:hiddenLine xmlns="" xmlns:a14="http://schemas.microsoft.com/office/drawing/2010/main" w="9525">
                     <a:solidFill>
                       <a:srgbClr val="000000"/>
                     </a:solidFill>
@@ -11858,7 +11860,7 @@
               </a:ln>
               <a:extLst>
                 <a:ext uri="{91240B29-F687-4f45-9708-019B960494DF}">
-                  <a14:hiddenLine xmlns:a14="http://schemas.microsoft.com/office/drawing/2010/main" xmlns="" w="9525">
+                  <a14:hiddenLine xmlns="" xmlns:a14="http://schemas.microsoft.com/office/drawing/2010/main" w="9525">
                     <a:solidFill>
                       <a:srgbClr val="000000"/>
                     </a:solidFill>
@@ -11892,7 +11894,7 @@
               </a:ln>
               <a:extLst>
                 <a:ext uri="{91240B29-F687-4f45-9708-019B960494DF}">
-                  <a14:hiddenLine xmlns:a14="http://schemas.microsoft.com/office/drawing/2010/main" xmlns="" w="9525">
+                  <a14:hiddenLine xmlns="" xmlns:a14="http://schemas.microsoft.com/office/drawing/2010/main" w="9525">
                     <a:solidFill>
                       <a:srgbClr val="000000"/>
                     </a:solidFill>
@@ -12032,7 +12034,7 @@
           <a:p>
             <a:fld id="{6AC27FFC-58F7-4A0B-910F-2453E6738501}" type="datetimeFigureOut">
               <a:rPr lang="ru-RU" smtClean="0"/>
-              <a:t>31.08.2026</a:t>
+              <a:t>01.09.2026</a:t>
             </a:fld>
             <a:endParaRPr lang="ru-RU"/>
           </a:p>
@@ -13074,151 +13076,84 @@
         </p:nvSpPr>
         <p:spPr/>
         <p:txBody>
-          <a:bodyPr>
-            <a:normAutofit/>
-          </a:bodyPr>
+          <a:bodyPr/>
           <a:lstStyle/>
           <a:p>
             <a:r>
-              <a:rPr lang="ru-RU" b="1" dirty="0"/>
-              <a:t>Производительность сети: </a:t>
+              <a:rPr lang="ru-RU" dirty="0" smtClean="0"/>
+              <a:t>Разница между </a:t>
+            </a:r>
+            <a:r>
+              <a:rPr lang="ru-RU" b="1" dirty="0" err="1" smtClean="0"/>
+              <a:t>Bandwidth</a:t>
+            </a:r>
+            <a:r>
+              <a:rPr lang="ru-RU" b="1" dirty="0" smtClean="0"/>
+              <a:t> </a:t>
+            </a:r>
+            <a:r>
+              <a:rPr lang="ru-RU" dirty="0" smtClean="0"/>
+              <a:t>и </a:t>
             </a:r>
             <a:r>
               <a:rPr lang="ru-RU" b="1" dirty="0" err="1"/>
-              <a:t>Временны́е</a:t>
-            </a:r>
-            <a:r>
-              <a:rPr lang="ru-RU" b="1" dirty="0"/>
+              <a:t>Throughput</a:t>
+            </a:r>
+            <a:r>
+              <a:rPr lang="ru-RU" dirty="0" smtClean="0"/>
               <a:t> </a:t>
-            </a:r>
-            <a:r>
-              <a:rPr lang="ru-RU" b="1" dirty="0" smtClean="0"/>
-              <a:t>характеристики</a:t>
             </a:r>
             <a:endParaRPr lang="ru-RU" dirty="0"/>
           </a:p>
         </p:txBody>
       </p:sp>
-      <p:sp>
-        <p:nvSpPr>
-          <p:cNvPr id="3" name="Объект 2"/>
-          <p:cNvSpPr>
-            <a:spLocks noGrp="1"/>
-          </p:cNvSpPr>
+      <p:pic>
+        <p:nvPicPr>
+          <p:cNvPr id="1026" name="Picture 2" descr="Bandwidth, Latency and Throughput | NetworkAcademy.IO"/>
+          <p:cNvPicPr>
+            <a:picLocks noGrp="1" noChangeAspect="1" noChangeArrowheads="1"/>
+          </p:cNvPicPr>
           <p:nvPr>
             <p:ph idx="1"/>
           </p:nvPr>
-        </p:nvSpPr>
-        <p:spPr/>
-        <p:txBody>
-          <a:bodyPr/>
-          <a:lstStyle/>
-          <a:p>
-            <a:r>
-              <a:rPr lang="ru-RU" b="1" dirty="0" err="1"/>
-              <a:t>Latency</a:t>
-            </a:r>
-            <a:r>
-              <a:rPr lang="ru-RU" b="1" dirty="0"/>
-              <a:t> / </a:t>
-            </a:r>
-            <a:r>
-              <a:rPr lang="ru-RU" b="1" dirty="0" err="1"/>
-              <a:t>Delay</a:t>
-            </a:r>
-            <a:r>
-              <a:rPr lang="ru-RU" b="1" dirty="0"/>
-              <a:t> (Задержка):</a:t>
-            </a:r>
-            <a:r>
-              <a:rPr lang="ru-RU" dirty="0"/>
-              <a:t> время перемещения пакета от источника к приёмнику (</a:t>
-            </a:r>
-            <a:r>
-              <a:rPr lang="ru-RU" dirty="0" err="1"/>
-              <a:t>мс</a:t>
-            </a:r>
-            <a:r>
-              <a:rPr lang="ru-RU" dirty="0"/>
-              <a:t>).</a:t>
-            </a:r>
-          </a:p>
-          <a:p>
-            <a:r>
-              <a:rPr lang="ru-RU" b="1" dirty="0"/>
-              <a:t>RTT (</a:t>
-            </a:r>
-            <a:r>
-              <a:rPr lang="ru-RU" b="1" dirty="0" err="1"/>
-              <a:t>Round-Trip</a:t>
-            </a:r>
-            <a:r>
-              <a:rPr lang="ru-RU" b="1" dirty="0"/>
-              <a:t> </a:t>
-            </a:r>
-            <a:r>
-              <a:rPr lang="ru-RU" b="1" dirty="0" err="1"/>
-              <a:t>Time</a:t>
-            </a:r>
-            <a:r>
-              <a:rPr lang="ru-RU" b="1" dirty="0"/>
-              <a:t>):</a:t>
-            </a:r>
-            <a:r>
-              <a:rPr lang="ru-RU" dirty="0"/>
-              <a:t> суммарное время доставки пакета до цели и возврата ответа обратно.</a:t>
-            </a:r>
-          </a:p>
-          <a:p>
-            <a:r>
-              <a:rPr lang="ru-RU" b="1" dirty="0" err="1"/>
-              <a:t>Jitter</a:t>
-            </a:r>
-            <a:r>
-              <a:rPr lang="ru-RU" b="1" dirty="0"/>
-              <a:t> (</a:t>
-            </a:r>
-            <a:r>
-              <a:rPr lang="ru-RU" b="1" dirty="0" err="1"/>
-              <a:t>Джиттер</a:t>
-            </a:r>
-            <a:r>
-              <a:rPr lang="ru-RU" b="1" dirty="0"/>
-              <a:t>):</a:t>
-            </a:r>
-            <a:endParaRPr lang="ru-RU" dirty="0"/>
-          </a:p>
-          <a:p>
-            <a:pPr lvl="1"/>
-            <a:r>
-              <a:rPr lang="ru-RU" dirty="0"/>
-              <a:t>Колебание задержки последовательно идущих пакетов.</a:t>
-            </a:r>
-          </a:p>
-          <a:p>
-            <a:pPr lvl="1"/>
-            <a:r>
-              <a:rPr lang="ru-RU" dirty="0"/>
-              <a:t>Критически важен для потокового медиа (видеосвязь, </a:t>
-            </a:r>
-            <a:r>
-              <a:rPr lang="ru-RU" dirty="0" err="1"/>
-              <a:t>VoIP</a:t>
-            </a:r>
-            <a:r>
-              <a:rPr lang="ru-RU" dirty="0"/>
-              <a:t>, онлайн-игры).</a:t>
-            </a:r>
-          </a:p>
-          <a:p>
-            <a:endParaRPr lang="ru-RU" dirty="0"/>
-          </a:p>
-        </p:txBody>
-      </p:sp>
+        </p:nvPicPr>
+        <p:blipFill>
+          <a:blip r:embed="rId2">
+            <a:extLst>
+              <a:ext uri="{28A0092B-C50C-407E-A947-70E740481C1C}">
+                <a14:useLocalDpi xmlns:a14="http://schemas.microsoft.com/office/drawing/2010/main" val="0"/>
+              </a:ext>
+            </a:extLst>
+          </a:blip>
+          <a:srcRect/>
+          <a:stretch>
+            <a:fillRect/>
+          </a:stretch>
+        </p:blipFill>
+        <p:spPr bwMode="auto">
+          <a:xfrm>
+            <a:off x="2490361" y="2097088"/>
+            <a:ext cx="7208101" cy="4314884"/>
+          </a:xfrm>
+          <a:prstGeom prst="rect">
+            <a:avLst/>
+          </a:prstGeom>
+          <a:noFill/>
+          <a:extLst>
+            <a:ext uri="{909E8E84-426E-40DD-AFC4-6F175D3DCCD1}">
+              <a14:hiddenFill xmlns:a14="http://schemas.microsoft.com/office/drawing/2010/main">
+                <a:solidFill>
+                  <a:srgbClr val="FFFFFF"/>
+                </a:solidFill>
+              </a14:hiddenFill>
+            </a:ext>
+          </a:extLst>
+        </p:spPr>
+      </p:pic>
     </p:spTree>
     <p:extLst>
       <p:ext uri="{BB962C8B-B14F-4D97-AF65-F5344CB8AC3E}">
-        <p14:creationId xmlns:p14="http://schemas.microsoft.com/office/powerpoint/2010/main" val="1538228521"/>
+        <p14:creationId xmlns:p14="http://schemas.microsoft.com/office/powerpoint/2010/main" val="308909663"/>
       </p:ext>
     </p:extLst>
   </p:cSld>
@@ -13247,6 +13182,43 @@
       </p:grpSpPr>
       <p:sp>
         <p:nvSpPr>
+          <p:cNvPr id="2" name="Заголовок 1"/>
+          <p:cNvSpPr>
+            <a:spLocks noGrp="1"/>
+          </p:cNvSpPr>
+          <p:nvPr>
+            <p:ph type="title"/>
+          </p:nvPr>
+        </p:nvSpPr>
+        <p:spPr/>
+        <p:txBody>
+          <a:bodyPr>
+            <a:normAutofit/>
+          </a:bodyPr>
+          <a:lstStyle/>
+          <a:p>
+            <a:r>
+              <a:rPr lang="ru-RU" b="1" dirty="0"/>
+              <a:t>Производительность сети: </a:t>
+            </a:r>
+            <a:r>
+              <a:rPr lang="ru-RU" b="1" dirty="0" err="1"/>
+              <a:t>Временны́е</a:t>
+            </a:r>
+            <a:r>
+              <a:rPr lang="ru-RU" b="1" dirty="0"/>
+              <a:t> </a:t>
+            </a:r>
+            <a:r>
+              <a:rPr lang="ru-RU" b="1" dirty="0" smtClean="0"/>
+              <a:t>характеристики</a:t>
+            </a:r>
+            <a:endParaRPr lang="ru-RU" dirty="0"/>
+          </a:p>
+        </p:txBody>
+      </p:sp>
+      <p:sp>
+        <p:nvSpPr>
           <p:cNvPr id="3" name="Объект 2"/>
           <p:cNvSpPr>
             <a:spLocks noGrp="1"/>
@@ -13255,45 +13227,10 @@
             <p:ph idx="1"/>
           </p:nvPr>
         </p:nvSpPr>
-        <p:spPr>
-          <a:xfrm>
-            <a:off x="1014412" y="865186"/>
-            <a:ext cx="10339388" cy="5357813"/>
-          </a:xfrm>
-        </p:spPr>
+        <p:spPr/>
         <p:txBody>
-          <a:bodyPr>
-            <a:normAutofit lnSpcReduction="10000"/>
-          </a:bodyPr>
+          <a:bodyPr/>
           <a:lstStyle/>
-          <a:p>
-            <a:r>
-              <a:rPr lang="ru-RU" b="1" dirty="0" err="1"/>
-              <a:t>Bandwidth</a:t>
-            </a:r>
-            <a:r>
-              <a:rPr lang="ru-RU" b="1" dirty="0"/>
-              <a:t> (Ширина канала / теоретическая пропускная способность):</a:t>
-            </a:r>
-            <a:r>
-              <a:rPr lang="ru-RU" dirty="0"/>
-              <a:t> максимальный теоретический объём данных, который среда может пропустить за единицу времени (бит/с).</a:t>
-            </a:r>
-          </a:p>
-          <a:p>
-            <a:r>
-              <a:rPr lang="ru-RU" b="1" dirty="0" err="1"/>
-              <a:t>Throughput</a:t>
-            </a:r>
-            <a:r>
-              <a:rPr lang="ru-RU" b="1" dirty="0"/>
-              <a:t> (Реальная пропускная способность):</a:t>
-            </a:r>
-            <a:r>
-              <a:rPr lang="ru-RU" dirty="0"/>
-              <a:t> фактическая скорость успешной передачи данных с учётом накладных расходов, задержек и ошибок.</a:t>
-            </a:r>
-          </a:p>
           <a:p>
             <a:r>
               <a:rPr lang="ru-RU" b="1" dirty="0" err="1"/>
@@ -13313,7 +13250,15 @@
             </a:r>
             <a:r>
               <a:rPr lang="ru-RU" dirty="0"/>
-              <a:t> время доставки данных от отправителя к получателю.</a:t>
+              <a:t> время перемещения пакета от источника к приёмнику (</a:t>
+            </a:r>
+            <a:r>
+              <a:rPr lang="ru-RU" dirty="0" err="1"/>
+              <a:t>мс</a:t>
+            </a:r>
+            <a:r>
+              <a:rPr lang="ru-RU" dirty="0"/>
+              <a:t>).</a:t>
             </a:r>
           </a:p>
           <a:p>
@@ -13323,7 +13268,7 @@
             </a:r>
             <a:r>
               <a:rPr lang="ru-RU" b="1" dirty="0" err="1"/>
-              <a:t>Round</a:t>
+              <a:t>Round-Trip</a:t>
             </a:r>
             <a:r>
               <a:rPr lang="ru-RU" b="1" dirty="0"/>
@@ -13331,14 +13276,6 @@
             </a:r>
             <a:r>
               <a:rPr lang="ru-RU" b="1" dirty="0" err="1"/>
-              <a:t>Trip</a:t>
-            </a:r>
-            <a:r>
-              <a:rPr lang="ru-RU" b="1" dirty="0"/>
-              <a:t> </a:t>
-            </a:r>
-            <a:r>
-              <a:rPr lang="ru-RU" b="1" dirty="0" err="1"/>
               <a:t>Time</a:t>
             </a:r>
             <a:r>
@@ -13347,29 +13284,48 @@
             </a:r>
             <a:r>
               <a:rPr lang="ru-RU" dirty="0"/>
-              <a:t> время полного оборота пакета (туда и обратно).</a:t>
-            </a:r>
-          </a:p>
-          <a:p>
+              <a:t> суммарное время доставки пакета до цели и возврата ответа обратно.</a:t>
+            </a:r>
+          </a:p>
+          <a:p>
+            <a:r>
+              <a:rPr lang="ru-RU" b="1" dirty="0" err="1"/>
+              <a:t>Jitter</a:t>
+            </a:r>
+            <a:r>
+              <a:rPr lang="ru-RU" b="1" dirty="0"/>
+              <a:t> (</a:t>
+            </a:r>
             <a:r>
               <a:rPr lang="ru-RU" b="1" dirty="0" err="1"/>
               <a:t>Джиттер</a:t>
             </a:r>
             <a:r>
               <a:rPr lang="ru-RU" b="1" dirty="0"/>
-              <a:t> (</a:t>
-            </a:r>
-            <a:r>
-              <a:rPr lang="ru-RU" b="1" dirty="0" err="1"/>
-              <a:t>Jitter</a:t>
-            </a:r>
-            <a:r>
-              <a:rPr lang="ru-RU" b="1" dirty="0"/>
               <a:t>):</a:t>
             </a:r>
+            <a:endParaRPr lang="ru-RU" dirty="0"/>
+          </a:p>
+          <a:p>
+            <a:pPr lvl="1"/>
             <a:r>
               <a:rPr lang="ru-RU" dirty="0"/>
-              <a:t> вариация (колебание) задержки пакетов в потоке относительно друг друга.</a:t>
+              <a:t>Колебание задержки последовательно идущих пакетов.</a:t>
+            </a:r>
+          </a:p>
+          <a:p>
+            <a:pPr lvl="1"/>
+            <a:r>
+              <a:rPr lang="ru-RU" dirty="0"/>
+              <a:t>Критически важен для потокового медиа (видеосвязь, </a:t>
+            </a:r>
+            <a:r>
+              <a:rPr lang="ru-RU" dirty="0" err="1"/>
+              <a:t>VoIP</a:t>
+            </a:r>
+            <a:r>
+              <a:rPr lang="ru-RU" dirty="0"/>
+              <a:t>, онлайн-игры).</a:t>
             </a:r>
           </a:p>
           <a:p>
@@ -13380,7 +13336,7 @@
     </p:spTree>
     <p:extLst>
       <p:ext uri="{BB962C8B-B14F-4D97-AF65-F5344CB8AC3E}">
-        <p14:creationId xmlns:p14="http://schemas.microsoft.com/office/powerpoint/2010/main" val="883577798"/>
+        <p14:creationId xmlns:p14="http://schemas.microsoft.com/office/powerpoint/2010/main" val="1538228521"/>
       </p:ext>
     </p:extLst>
   </p:cSld>
@@ -13419,29 +13375,13 @@
         </p:nvSpPr>
         <p:spPr/>
         <p:txBody>
-          <a:bodyPr>
-            <a:normAutofit fontScale="90000"/>
-          </a:bodyPr>
+          <a:bodyPr/>
           <a:lstStyle/>
           <a:p>
             <a:r>
-              <a:rPr lang="ru-RU" b="1" dirty="0"/>
-              <a:t>«Путь конверта» (Инкапсуляция)</a:t>
-            </a:r>
-            <a:br>
-              <a:rPr lang="ru-RU" b="1" dirty="0"/>
-            </a:br>
-            <a:r>
-              <a:rPr lang="ru-RU" i="1" dirty="0"/>
-              <a:t>Формат: расставьте шаги в правильном порядке от отправки до получения.</a:t>
-            </a:r>
-            <a:r>
-              <a:rPr lang="ru-RU" dirty="0"/>
-              <a:t/>
-            </a:r>
-            <a:br>
-              <a:rPr lang="ru-RU" dirty="0"/>
-            </a:br>
+              <a:rPr lang="ru-RU" dirty="0" smtClean="0"/>
+              <a:t>Составляющие задержки</a:t>
+            </a:r>
             <a:endParaRPr lang="ru-RU" dirty="0"/>
           </a:p>
         </p:txBody>
@@ -13456,103 +13396,137 @@
             <p:ph idx="1"/>
           </p:nvPr>
         </p:nvSpPr>
-        <p:spPr/>
+        <p:spPr>
+          <a:xfrm>
+            <a:off x="1141412" y="1924334"/>
+            <a:ext cx="9905999" cy="4776717"/>
+          </a:xfrm>
+        </p:spPr>
         <p:txBody>
           <a:bodyPr>
-            <a:normAutofit fontScale="92500" lnSpcReduction="20000"/>
+            <a:normAutofit fontScale="92500"/>
           </a:bodyPr>
           <a:lstStyle/>
           <a:p>
             <a:r>
-              <a:rPr lang="ru-RU" b="1" dirty="0"/>
-              <a:t>А)</a:t>
+              <a:rPr lang="ru-RU" dirty="0" smtClean="0"/>
+              <a:t>Задержка </a:t>
             </a:r>
             <a:r>
               <a:rPr lang="ru-RU" dirty="0"/>
-              <a:t> Канальный уровень добавляет заголовок и </a:t>
+              <a:t>передачи (</a:t>
             </a:r>
             <a:r>
               <a:rPr lang="ru-RU" dirty="0" err="1"/>
-              <a:t>концевик</a:t>
+              <a:t>Transmission</a:t>
             </a:r>
             <a:r>
               <a:rPr lang="ru-RU" dirty="0"/>
-              <a:t> (трейлер), формируя </a:t>
-            </a:r>
-            <a:r>
-              <a:rPr lang="ru-RU" i="1" dirty="0"/>
-              <a:t>кадр</a:t>
+              <a:t> </a:t>
+            </a:r>
+            <a:r>
+              <a:rPr lang="ru-RU" dirty="0" err="1"/>
+              <a:t>Delay</a:t>
             </a:r>
             <a:r>
               <a:rPr lang="ru-RU" dirty="0"/>
+              <a:t>): время, нужное узлу, чтобы «вытолкнуть» все биты пакета в кабель (зависит от пропускной способности).</a:t>
+            </a:r>
+          </a:p>
+          <a:p>
+            <a:r>
+              <a:rPr lang="ru-RU" dirty="0" smtClean="0"/>
+              <a:t>Задержка </a:t>
+            </a:r>
+            <a:r>
+              <a:rPr lang="ru-RU" dirty="0"/>
+              <a:t>распространения (</a:t>
+            </a:r>
+            <a:r>
+              <a:rPr lang="ru-RU" dirty="0" err="1"/>
+              <a:t>Propagation</a:t>
+            </a:r>
+            <a:r>
+              <a:rPr lang="ru-RU" dirty="0"/>
+              <a:t> </a:t>
+            </a:r>
+            <a:r>
+              <a:rPr lang="ru-RU" dirty="0" err="1"/>
+              <a:t>Delay</a:t>
+            </a:r>
+            <a:r>
+              <a:rPr lang="ru-RU" dirty="0"/>
+              <a:t>): время пути сигнала по физической среде со скоростью света (~200 000 км/с в оптоволокне) (зависит только от расстояния).</a:t>
+            </a:r>
+          </a:p>
+          <a:p>
+            <a:r>
+              <a:rPr lang="ru-RU" dirty="0" smtClean="0"/>
+              <a:t>Задержка </a:t>
+            </a:r>
+            <a:r>
+              <a:rPr lang="ru-RU" dirty="0"/>
+              <a:t>обработки (</a:t>
+            </a:r>
+            <a:r>
+              <a:rPr lang="ru-RU" dirty="0" err="1"/>
+              <a:t>Processing</a:t>
+            </a:r>
+            <a:r>
+              <a:rPr lang="ru-RU" dirty="0"/>
+              <a:t> </a:t>
+            </a:r>
+            <a:r>
+              <a:rPr lang="ru-RU" dirty="0" err="1"/>
+              <a:t>Delay</a:t>
+            </a:r>
+            <a:r>
+              <a:rPr lang="ru-RU" dirty="0"/>
+              <a:t>): время на чтение заголовков и проверку контрольной суммы маршрутизатором.</a:t>
+            </a:r>
+          </a:p>
+          <a:p>
+            <a:r>
+              <a:rPr lang="ru-RU" dirty="0" smtClean="0"/>
+              <a:t>Задержка </a:t>
+            </a:r>
+            <a:r>
+              <a:rPr lang="ru-RU" dirty="0"/>
+              <a:t>в очереди (</a:t>
+            </a:r>
+            <a:r>
+              <a:rPr lang="ru-RU" dirty="0" err="1"/>
+              <a:t>Queuing</a:t>
+            </a:r>
+            <a:r>
+              <a:rPr lang="ru-RU" dirty="0"/>
+              <a:t> </a:t>
+            </a:r>
+            <a:r>
+              <a:rPr lang="ru-RU" dirty="0" err="1"/>
+              <a:t>Delay</a:t>
+            </a:r>
+            <a:r>
+              <a:rPr lang="ru-RU" dirty="0"/>
+              <a:t>): время ожидания в буфере маршрутизатора</a:t>
+            </a:r>
+            <a:r>
+              <a:rPr lang="ru-RU" dirty="0" smtClean="0"/>
               <a:t>.</a:t>
             </a:r>
-          </a:p>
-          <a:p>
-            <a:r>
-              <a:rPr lang="ru-RU" b="1" dirty="0"/>
-              <a:t>Б)</a:t>
-            </a:r>
             <a:r>
               <a:rPr lang="ru-RU" dirty="0"/>
-              <a:t> Физический уровень передаёт </a:t>
-            </a:r>
-            <a:r>
-              <a:rPr lang="ru-RU" i="1" dirty="0"/>
-              <a:t>сырые биты</a:t>
-            </a:r>
-            <a:r>
+              <a:t/>
+            </a:r>
+            <a:br>
               <a:rPr lang="ru-RU" dirty="0"/>
-              <a:t> по кабелю / радиоканалу.</a:t>
-            </a:r>
-          </a:p>
-          <a:p>
-            <a:r>
-              <a:rPr lang="ru-RU" b="1" dirty="0"/>
-              <a:t>В)</a:t>
-            </a:r>
-            <a:r>
-              <a:rPr lang="ru-RU" dirty="0"/>
-              <a:t> Сетевой уровень разбивает данные на </a:t>
-            </a:r>
-            <a:r>
-              <a:rPr lang="ru-RU" i="1" dirty="0"/>
-              <a:t>пакеты</a:t>
-            </a:r>
-            <a:r>
-              <a:rPr lang="ru-RU" dirty="0"/>
-              <a:t> и добавляет заголовок маршрутизации.</a:t>
-            </a:r>
-          </a:p>
-          <a:p>
-            <a:r>
-              <a:rPr lang="ru-RU" b="1" dirty="0"/>
-              <a:t>Г)</a:t>
-            </a:r>
-            <a:r>
-              <a:rPr lang="ru-RU" dirty="0"/>
-              <a:t> Прикладной уровень генерирует исходное сообщение M</a:t>
-            </a:r>
-            <a:r>
-              <a:rPr lang="ru-RU" i="1" dirty="0"/>
-              <a:t>M</a:t>
-            </a:r>
-            <a:r>
-              <a:rPr lang="ru-RU" dirty="0"/>
-              <a:t>.</a:t>
-            </a:r>
-          </a:p>
-          <a:p>
-            <a:r>
-              <a:rPr lang="ru-RU" b="1" dirty="0"/>
-              <a:t>Д)</a:t>
-            </a:r>
-            <a:r>
-              <a:rPr lang="ru-RU" dirty="0"/>
-              <a:t> Транспортный уровень добавляет свой заголовок (управляющую информацию и адреса портов).</a:t>
-            </a:r>
-          </a:p>
-          <a:p>
+            </a:br>
+            <a:endParaRPr lang="ru-RU" dirty="0"/>
+          </a:p>
+          <a:p>
+            <a:pPr marL="0" indent="0">
+              <a:buNone/>
+            </a:pPr>
             <a:endParaRPr lang="ru-RU" dirty="0"/>
           </a:p>
         </p:txBody>
@@ -13560,7 +13534,7 @@
     </p:spTree>
     <p:extLst>
       <p:ext uri="{BB962C8B-B14F-4D97-AF65-F5344CB8AC3E}">
-        <p14:creationId xmlns:p14="http://schemas.microsoft.com/office/powerpoint/2010/main" val="597210264"/>
+        <p14:creationId xmlns:p14="http://schemas.microsoft.com/office/powerpoint/2010/main" val="3716292497"/>
       </p:ext>
     </p:extLst>
   </p:cSld>
@@ -13589,30 +13563,6 @@
       </p:grpSpPr>
       <p:sp>
         <p:nvSpPr>
-          <p:cNvPr id="2" name="Заголовок 1"/>
-          <p:cNvSpPr>
-            <a:spLocks noGrp="1"/>
-          </p:cNvSpPr>
-          <p:nvPr>
-            <p:ph type="title"/>
-          </p:nvPr>
-        </p:nvSpPr>
-        <p:spPr/>
-        <p:txBody>
-          <a:bodyPr>
-            <a:normAutofit fontScale="90000"/>
-          </a:bodyPr>
-          <a:lstStyle/>
-          <a:p>
-            <a:r>
-              <a:rPr lang="ru-RU" dirty="0"/>
-              <a:t>Как официально называется «порция данных» на каждом из уровней? Соедините пары:</a:t>
-            </a:r>
-          </a:p>
-        </p:txBody>
-      </p:sp>
-      <p:sp>
-        <p:nvSpPr>
           <p:cNvPr id="3" name="Объект 2"/>
           <p:cNvSpPr>
             <a:spLocks noGrp="1"/>
@@ -13621,90 +13571,124 @@
             <p:ph idx="1"/>
           </p:nvPr>
         </p:nvSpPr>
-        <p:spPr/>
+        <p:spPr>
+          <a:xfrm>
+            <a:off x="1014412" y="865186"/>
+            <a:ext cx="10339388" cy="5357813"/>
+          </a:xfrm>
+        </p:spPr>
         <p:txBody>
-          <a:bodyPr/>
+          <a:bodyPr>
+            <a:normAutofit lnSpcReduction="10000"/>
+          </a:bodyPr>
           <a:lstStyle/>
           <a:p>
             <a:r>
+              <a:rPr lang="ru-RU" b="1" dirty="0" err="1"/>
+              <a:t>Bandwidth</a:t>
+            </a:r>
+            <a:r>
               <a:rPr lang="ru-RU" b="1" dirty="0"/>
-              <a:t>Транспортный уровень (</a:t>
-            </a:r>
+              <a:t> (Ширина канала / теоретическая пропускная способность):</a:t>
+            </a:r>
+            <a:r>
+              <a:rPr lang="ru-RU" dirty="0"/>
+              <a:t> максимальный теоретический объём данных, который среда может пропустить за единицу времени (бит/с).</a:t>
+            </a:r>
+          </a:p>
+          <a:p>
             <a:r>
               <a:rPr lang="ru-RU" b="1" dirty="0" err="1"/>
-              <a:t>Layer</a:t>
+              <a:t>Throughput</a:t>
             </a:r>
             <a:r>
               <a:rPr lang="ru-RU" b="1" dirty="0"/>
-              <a:t> 4)</a:t>
+              <a:t> (Реальная пропускная способность):</a:t>
             </a:r>
             <a:r>
               <a:rPr lang="ru-RU" dirty="0"/>
-              <a:t> →→ ???</a:t>
-            </a:r>
-          </a:p>
-          <a:p>
+              <a:t> фактическая скорость успешной передачи данных с учётом накладных расходов, задержек и ошибок.</a:t>
+            </a:r>
+          </a:p>
+          <a:p>
+            <a:r>
+              <a:rPr lang="ru-RU" b="1" dirty="0" err="1"/>
+              <a:t>Latency</a:t>
+            </a:r>
             <a:r>
               <a:rPr lang="ru-RU" b="1" dirty="0"/>
-              <a:t>Сетевой уровень (</a:t>
+              <a:t> / </a:t>
             </a:r>
             <a:r>
               <a:rPr lang="ru-RU" b="1" dirty="0" err="1"/>
-              <a:t>Layer</a:t>
+              <a:t>Delay</a:t>
             </a:r>
             <a:r>
               <a:rPr lang="ru-RU" b="1" dirty="0"/>
-              <a:t> 3)</a:t>
+              <a:t> (Задержка):</a:t>
             </a:r>
             <a:r>
               <a:rPr lang="ru-RU" dirty="0"/>
-              <a:t> →→ ???</a:t>
+              <a:t> время доставки данных от отправителя к получателю.</a:t>
             </a:r>
           </a:p>
           <a:p>
             <a:r>
               <a:rPr lang="ru-RU" b="1" dirty="0"/>
-              <a:t>Канальный уровень (</a:t>
+              <a:t>RTT (</a:t>
             </a:r>
             <a:r>
               <a:rPr lang="ru-RU" b="1" dirty="0" err="1"/>
-              <a:t>Layer</a:t>
+              <a:t>Round</a:t>
             </a:r>
             <a:r>
               <a:rPr lang="ru-RU" b="1" dirty="0"/>
-              <a:t> 2)</a:t>
+              <a:t> </a:t>
+            </a:r>
+            <a:r>
+              <a:rPr lang="ru-RU" b="1" dirty="0" err="1"/>
+              <a:t>Trip</a:t>
+            </a:r>
+            <a:r>
+              <a:rPr lang="ru-RU" b="1" dirty="0"/>
+              <a:t> </a:t>
+            </a:r>
+            <a:r>
+              <a:rPr lang="ru-RU" b="1" dirty="0" err="1"/>
+              <a:t>Time</a:t>
+            </a:r>
+            <a:r>
+              <a:rPr lang="ru-RU" b="1" dirty="0"/>
+              <a:t>):</a:t>
             </a:r>
             <a:r>
               <a:rPr lang="ru-RU" dirty="0"/>
-              <a:t> →→ ???</a:t>
-            </a:r>
-          </a:p>
-          <a:p>
+              <a:t> время полного оборота пакета (туда и обратно).</a:t>
+            </a:r>
+          </a:p>
+          <a:p>
+            <a:r>
+              <a:rPr lang="ru-RU" b="1" dirty="0" err="1"/>
+              <a:t>Джиттер</a:t>
+            </a:r>
             <a:r>
               <a:rPr lang="ru-RU" b="1" dirty="0"/>
-              <a:t>Физический уровень (</a:t>
+              <a:t> (</a:t>
             </a:r>
             <a:r>
               <a:rPr lang="ru-RU" b="1" dirty="0" err="1"/>
-              <a:t>Layer</a:t>
+              <a:t>Jitter</a:t>
             </a:r>
             <a:r>
               <a:rPr lang="ru-RU" b="1" dirty="0"/>
-              <a:t> 1)</a:t>
+              <a:t>):</a:t>
             </a:r>
             <a:r>
               <a:rPr lang="ru-RU" dirty="0"/>
-              <a:t> →→ ???</a:t>
-            </a:r>
-          </a:p>
-          <a:p>
-            <a:pPr marL="0" indent="0">
-              <a:buNone/>
-            </a:pPr>
-            <a:r>
-              <a:rPr lang="ru-RU" i="1" dirty="0"/>
-              <a:t>(Варианты: Бит, Сегмент, Кадр/Фрейм, Пакет)</a:t>
-            </a:r>
+              <a:t> вариация (колебание) задержки пакетов в потоке относительно друг друга.</a:t>
+            </a:r>
+          </a:p>
+          <a:p>
             <a:endParaRPr lang="ru-RU" dirty="0"/>
           </a:p>
         </p:txBody>
@@ -13712,7 +13696,7 @@
     </p:spTree>
     <p:extLst>
       <p:ext uri="{BB962C8B-B14F-4D97-AF65-F5344CB8AC3E}">
-        <p14:creationId xmlns:p14="http://schemas.microsoft.com/office/powerpoint/2010/main" val="3149630925"/>
+        <p14:creationId xmlns:p14="http://schemas.microsoft.com/office/powerpoint/2010/main" val="883577798"/>
       </p:ext>
     </p:extLst>
   </p:cSld>
@@ -13757,25 +13741,24 @@
           <a:lstStyle/>
           <a:p>
             <a:r>
+              <a:rPr lang="ru-RU" b="1" dirty="0"/>
+              <a:t>«Путь конверта» (Инкапсуляция)</a:t>
+            </a:r>
+            <a:br>
+              <a:rPr lang="ru-RU" b="1" dirty="0"/>
+            </a:br>
+            <a:r>
+              <a:rPr lang="ru-RU" i="1" dirty="0"/>
+              <a:t>Формат: расставьте шаги в правильном порядке от отправки до получения.</a:t>
+            </a:r>
+            <a:r>
               <a:rPr lang="ru-RU" dirty="0"/>
-              <a:t>Разделите сущности на </a:t>
-            </a:r>
-            <a:r>
-              <a:rPr lang="ru-RU" b="1" dirty="0"/>
-              <a:t>«С установлением соединения»</a:t>
-            </a:r>
-            <a:r>
+              <a:t/>
+            </a:r>
+            <a:br>
               <a:rPr lang="ru-RU" dirty="0"/>
-              <a:t> и </a:t>
-            </a:r>
-            <a:r>
-              <a:rPr lang="ru-RU" b="1" dirty="0"/>
-              <a:t>«Без установления соединения»</a:t>
-            </a:r>
-            <a:r>
-              <a:rPr lang="ru-RU" dirty="0"/>
-              <a:t>:</a:t>
-            </a:r>
+            </a:br>
+            <a:endParaRPr lang="ru-RU" dirty="0"/>
           </a:p>
         </p:txBody>
       </p:sp>
@@ -13791,38 +13774,113 @@
         </p:nvSpPr>
         <p:spPr/>
         <p:txBody>
-          <a:bodyPr/>
+          <a:bodyPr>
+            <a:normAutofit fontScale="92500" lnSpcReduction="20000"/>
+          </a:bodyPr>
           <a:lstStyle/>
           <a:p>
             <a:r>
+              <a:rPr lang="ru-RU" b="1" dirty="0"/>
+              <a:t>А)</a:t>
+            </a:r>
+            <a:r>
               <a:rPr lang="ru-RU" dirty="0"/>
-              <a:t>Телефонный звонок другу.</a:t>
-            </a:r>
-          </a:p>
-          <a:p>
+              <a:t> Канальный уровень добавляет заголовок и </a:t>
+            </a:r>
+            <a:r>
+              <a:rPr lang="ru-RU" dirty="0" err="1"/>
+              <a:t>концевик</a:t>
+            </a:r>
             <a:r>
               <a:rPr lang="ru-RU" dirty="0"/>
-              <a:t>Бумажное письмо в почтовом конверте.</a:t>
-            </a:r>
-          </a:p>
-          <a:p>
+              <a:t> (трейлер), формируя </a:t>
+            </a:r>
+            <a:r>
+              <a:rPr lang="ru-RU" i="1" dirty="0"/>
+              <a:t>кадр</a:t>
+            </a:r>
             <a:r>
               <a:rPr lang="ru-RU" dirty="0"/>
-              <a:t>Протокол TCP.</a:t>
-            </a:r>
-          </a:p>
-          <a:p>
+              <a:t>.</a:t>
+            </a:r>
+          </a:p>
+          <a:p>
+            <a:r>
+              <a:rPr lang="ru-RU" b="1" dirty="0"/>
+              <a:t>Б)</a:t>
+            </a:r>
             <a:r>
               <a:rPr lang="ru-RU" dirty="0"/>
-              <a:t>Протокол UDP.</a:t>
-            </a:r>
+              <a:t> Физический уровень передаёт </a:t>
+            </a:r>
+            <a:r>
+              <a:rPr lang="ru-RU" i="1" dirty="0"/>
+              <a:t>сырые биты</a:t>
+            </a:r>
+            <a:r>
+              <a:rPr lang="ru-RU" dirty="0"/>
+              <a:t> по кабелю / радиоканалу.</a:t>
+            </a:r>
+          </a:p>
+          <a:p>
+            <a:r>
+              <a:rPr lang="ru-RU" b="1" dirty="0"/>
+              <a:t>В)</a:t>
+            </a:r>
+            <a:r>
+              <a:rPr lang="ru-RU" dirty="0"/>
+              <a:t> Сетевой уровень разбивает данные на </a:t>
+            </a:r>
+            <a:r>
+              <a:rPr lang="ru-RU" i="1" dirty="0"/>
+              <a:t>пакеты</a:t>
+            </a:r>
+            <a:r>
+              <a:rPr lang="ru-RU" dirty="0"/>
+              <a:t> и добавляет заголовок маршрутизации.</a:t>
+            </a:r>
+          </a:p>
+          <a:p>
+            <a:r>
+              <a:rPr lang="ru-RU" b="1" dirty="0"/>
+              <a:t>Г)</a:t>
+            </a:r>
+            <a:r>
+              <a:rPr lang="ru-RU" dirty="0"/>
+              <a:t> Прикладной уровень генерирует исходное сообщение</a:t>
+            </a:r>
+            <a:r>
+              <a:rPr lang="ru-RU"/>
+              <a:t> </a:t>
+            </a:r>
+            <a:r>
+              <a:rPr lang="ru-RU" i="1" smtClean="0"/>
+              <a:t>M</a:t>
+            </a:r>
+            <a:r>
+              <a:rPr lang="ru-RU" dirty="0"/>
+              <a:t>.</a:t>
+            </a:r>
+          </a:p>
+          <a:p>
+            <a:r>
+              <a:rPr lang="ru-RU" b="1" dirty="0"/>
+              <a:t>Д)</a:t>
+            </a:r>
+            <a:r>
+              <a:rPr lang="ru-RU" dirty="0"/>
+              <a:t> Транспортный уровень добавляет свой заголовок (управляющую информацию и адреса портов).</a:t>
+            </a:r>
+          </a:p>
+          <a:p>
+            <a:endParaRPr lang="ru-RU" dirty="0"/>
           </a:p>
         </p:txBody>
       </p:sp>
     </p:spTree>
     <p:extLst>
       <p:ext uri="{BB962C8B-B14F-4D97-AF65-F5344CB8AC3E}">
-        <p14:creationId xmlns:p14="http://schemas.microsoft.com/office/powerpoint/2010/main" val="3797661691"/>
+        <p14:creationId xmlns:p14="http://schemas.microsoft.com/office/powerpoint/2010/main" val="597210264"/>
       </p:ext>
     </p:extLst>
   </p:cSld>
@@ -13861,18 +13919,15 @@
         </p:nvSpPr>
         <p:spPr/>
         <p:txBody>
-          <a:bodyPr/>
+          <a:bodyPr>
+            <a:normAutofit fontScale="90000"/>
+          </a:bodyPr>
           <a:lstStyle/>
           <a:p>
             <a:r>
-              <a:rPr lang="af-ZA" b="1" dirty="0"/>
-              <a:t>Bandwidth vs </a:t>
-            </a:r>
-            <a:r>
-              <a:rPr lang="af-ZA" b="1" dirty="0" smtClean="0"/>
-              <a:t>Throughput</a:t>
-            </a:r>
-            <a:endParaRPr lang="ru-RU" dirty="0"/>
+              <a:rPr lang="ru-RU" dirty="0"/>
+              <a:t>Как официально называется «порция данных» на каждом из уровней? Соедините пары:</a:t>
+            </a:r>
           </a:p>
         </p:txBody>
       </p:sp>
@@ -13891,67 +13946,93 @@
           <a:bodyPr/>
           <a:lstStyle/>
           <a:p>
+            <a:r>
+              <a:rPr lang="ru-RU" b="1" dirty="0"/>
+              <a:t>Транспортный уровень (</a:t>
+            </a:r>
+            <a:r>
+              <a:rPr lang="ru-RU" b="1" dirty="0" err="1"/>
+              <a:t>Layer</a:t>
+            </a:r>
+            <a:r>
+              <a:rPr lang="ru-RU" b="1" dirty="0"/>
+              <a:t> 4)</a:t>
+            </a:r>
+            <a:r>
+              <a:rPr lang="ru-RU" dirty="0"/>
+              <a:t> →→ ???</a:t>
+            </a:r>
+          </a:p>
+          <a:p>
+            <a:r>
+              <a:rPr lang="ru-RU" b="1" dirty="0"/>
+              <a:t>Сетевой уровень (</a:t>
+            </a:r>
+            <a:r>
+              <a:rPr lang="ru-RU" b="1" dirty="0" err="1"/>
+              <a:t>Layer</a:t>
+            </a:r>
+            <a:r>
+              <a:rPr lang="ru-RU" b="1" dirty="0"/>
+              <a:t> 3)</a:t>
+            </a:r>
+            <a:r>
+              <a:rPr lang="ru-RU" dirty="0"/>
+              <a:t> →→ ???</a:t>
+            </a:r>
+          </a:p>
+          <a:p>
+            <a:r>
+              <a:rPr lang="ru-RU" b="1" dirty="0"/>
+              <a:t>Канальный уровень (</a:t>
+            </a:r>
+            <a:r>
+              <a:rPr lang="ru-RU" b="1" dirty="0" err="1"/>
+              <a:t>Layer</a:t>
+            </a:r>
+            <a:r>
+              <a:rPr lang="ru-RU" b="1" dirty="0"/>
+              <a:t> 2)</a:t>
+            </a:r>
+            <a:r>
+              <a:rPr lang="ru-RU" dirty="0"/>
+              <a:t> →→ ???</a:t>
+            </a:r>
+          </a:p>
+          <a:p>
+            <a:r>
+              <a:rPr lang="ru-RU" b="1" dirty="0"/>
+              <a:t>Физический уровень (</a:t>
+            </a:r>
+            <a:r>
+              <a:rPr lang="ru-RU" b="1" dirty="0" err="1"/>
+              <a:t>Layer</a:t>
+            </a:r>
+            <a:r>
+              <a:rPr lang="ru-RU" b="1" dirty="0"/>
+              <a:t> 1)</a:t>
+            </a:r>
+            <a:r>
+              <a:rPr lang="ru-RU" dirty="0"/>
+              <a:t> →→ ???</a:t>
+            </a:r>
+          </a:p>
+          <a:p>
             <a:pPr marL="0" indent="0">
               <a:buNone/>
             </a:pPr>
             <a:r>
               <a:rPr lang="ru-RU" i="1" dirty="0"/>
-              <a:t>«Тариф вашего домашнего интернета — </a:t>
-            </a:r>
-            <a:r>
-              <a:rPr lang="ru-RU" b="1" i="1" dirty="0"/>
-              <a:t>500 Мбит/с</a:t>
-            </a:r>
-            <a:r>
-              <a:rPr lang="ru-RU" i="1" dirty="0"/>
-              <a:t>. Однако при скачивании игры реальная средняя скорость загрузки составила </a:t>
-            </a:r>
-            <a:r>
-              <a:rPr lang="ru-RU" b="1" i="1" dirty="0"/>
-              <a:t>320 Мбит/с</a:t>
-            </a:r>
-            <a:r>
-              <a:rPr lang="ru-RU" i="1" dirty="0" smtClean="0"/>
-              <a:t>».</a:t>
-            </a:r>
-            <a:endParaRPr lang="en-US" i="1" dirty="0" smtClean="0"/>
-          </a:p>
-          <a:p>
-            <a:pPr marL="0" indent="0">
-              <a:buNone/>
-            </a:pPr>
-            <a:r>
-              <a:rPr lang="ru-RU" b="1" dirty="0"/>
-              <a:t>Вопрос:</a:t>
-            </a:r>
-            <a:r>
-              <a:rPr lang="ru-RU" dirty="0"/>
-              <a:t> Какое из этих двух чисел является </a:t>
-            </a:r>
-            <a:r>
-              <a:rPr lang="ru-RU" b="1" dirty="0" err="1"/>
-              <a:t>Bandwidth</a:t>
-            </a:r>
-            <a:r>
-              <a:rPr lang="ru-RU" dirty="0"/>
-              <a:t> (пропускной способностью канала), а какое — </a:t>
-            </a:r>
-            <a:r>
-              <a:rPr lang="ru-RU" b="1" dirty="0" err="1"/>
-              <a:t>Throughput</a:t>
-            </a:r>
-            <a:r>
-              <a:rPr lang="ru-RU" dirty="0"/>
-              <a:t> (реальной пропускной способностью)?</a:t>
-            </a:r>
-            <a:endParaRPr lang="en-US" i="1" dirty="0"/>
+              <a:t>(Варианты: Бит, Сегмент, Кадр/Фрейм, Пакет)</a:t>
+            </a:r>
+            <a:endParaRPr lang="ru-RU" dirty="0"/>
           </a:p>
         </p:txBody>
       </p:sp>
     </p:spTree>
     <p:extLst>
       <p:ext uri="{BB962C8B-B14F-4D97-AF65-F5344CB8AC3E}">
-        <p14:creationId xmlns:p14="http://schemas.microsoft.com/office/powerpoint/2010/main" val="3784396190"/>
+        <p14:creationId xmlns:p14="http://schemas.microsoft.com/office/powerpoint/2010/main" val="3149630925"/>
       </p:ext>
     </p:extLst>
   </p:cSld>
@@ -13990,14 +14071,31 @@
         </p:nvSpPr>
         <p:spPr/>
         <p:txBody>
-          <a:bodyPr/>
+          <a:bodyPr>
+            <a:normAutofit fontScale="90000"/>
+          </a:bodyPr>
           <a:lstStyle/>
           <a:p>
             <a:r>
+              <a:rPr lang="ru-RU" dirty="0"/>
+              <a:t>Разделите сущности на </a:t>
+            </a:r>
+            <a:r>
               <a:rPr lang="ru-RU" b="1" dirty="0"/>
-              <a:t>Какая сетевая характеристика вызывает эту проблему?</a:t>
-            </a:r>
-            <a:endParaRPr lang="ru-RU" dirty="0"/>
+              <a:t>«С установлением соединения»</a:t>
+            </a:r>
+            <a:r>
+              <a:rPr lang="ru-RU" dirty="0"/>
+              <a:t> и </a:t>
+            </a:r>
+            <a:r>
+              <a:rPr lang="ru-RU" b="1" dirty="0"/>
+              <a:t>«Без установления соединения»</a:t>
+            </a:r>
+            <a:r>
+              <a:rPr lang="ru-RU" dirty="0"/>
+              <a:t>:</a:t>
+            </a:r>
           </a:p>
         </p:txBody>
       </p:sp>
@@ -14011,160 +14109,40 @@
             <p:ph idx="1"/>
           </p:nvPr>
         </p:nvSpPr>
-        <p:spPr>
-          <a:xfrm>
-            <a:off x="1141412" y="2249486"/>
-            <a:ext cx="9905999" cy="3975467"/>
-          </a:xfrm>
-        </p:spPr>
+        <p:spPr/>
         <p:txBody>
-          <a:bodyPr>
-            <a:normAutofit lnSpcReduction="10000"/>
-          </a:bodyPr>
+          <a:bodyPr/>
           <a:lstStyle/>
           <a:p>
-            <a:pPr marL="0" indent="0">
-              <a:buNone/>
-            </a:pPr>
             <a:r>
               <a:rPr lang="ru-RU" dirty="0"/>
-              <a:t>Во время </a:t>
-            </a:r>
-            <a:r>
-              <a:rPr lang="ru-RU" dirty="0" err="1"/>
-              <a:t>видеозвонка</a:t>
-            </a:r>
+              <a:t>Телефонный звонок другу.</a:t>
+            </a:r>
+          </a:p>
+          <a:p>
             <a:r>
               <a:rPr lang="ru-RU" dirty="0"/>
-              <a:t> собеседник слышит ваш голос то с ускорением, то с паузами («заикание»), хотя средняя задержка не превышает 40 </a:t>
-            </a:r>
-            <a:r>
-              <a:rPr lang="ru-RU" dirty="0" err="1"/>
-              <a:t>мс</a:t>
-            </a:r>
+              <a:t>Бумажное письмо в почтовом конверте.</a:t>
+            </a:r>
+          </a:p>
+          <a:p>
             <a:r>
               <a:rPr lang="ru-RU" dirty="0"/>
-              <a:t>. Пакеты отправлялись стабильно каждые 30 </a:t>
-            </a:r>
-            <a:r>
-              <a:rPr lang="ru-RU" dirty="0" err="1"/>
-              <a:t>мс</a:t>
-            </a:r>
+              <a:t>Протокол TCP.</a:t>
+            </a:r>
+          </a:p>
+          <a:p>
             <a:r>
               <a:rPr lang="ru-RU" dirty="0"/>
-              <a:t>, но доходили с интервалами: </a:t>
-            </a:r>
-            <a:r>
-              <a:rPr lang="ru-RU" b="1" dirty="0"/>
-              <a:t>30 </a:t>
-            </a:r>
-            <a:r>
-              <a:rPr lang="ru-RU" b="1" dirty="0" err="1"/>
-              <a:t>мс</a:t>
-            </a:r>
-            <a:r>
-              <a:rPr lang="ru-RU" b="1" dirty="0"/>
-              <a:t> →→ 95 </a:t>
-            </a:r>
-            <a:r>
-              <a:rPr lang="ru-RU" b="1" dirty="0" err="1"/>
-              <a:t>мс</a:t>
-            </a:r>
-            <a:r>
-              <a:rPr lang="ru-RU" b="1" dirty="0"/>
-              <a:t> →→ 15 </a:t>
-            </a:r>
-            <a:r>
-              <a:rPr lang="ru-RU" b="1" dirty="0" err="1"/>
-              <a:t>мс</a:t>
-            </a:r>
-            <a:r>
-              <a:rPr lang="ru-RU" b="1" dirty="0"/>
-              <a:t> →→ 120 </a:t>
-            </a:r>
-            <a:r>
-              <a:rPr lang="ru-RU" b="1" dirty="0" err="1"/>
-              <a:t>мс</a:t>
-            </a:r>
-            <a:r>
-              <a:rPr lang="ru-RU" dirty="0" smtClean="0"/>
-              <a:t>.</a:t>
-            </a:r>
-            <a:endParaRPr lang="en-US" dirty="0" smtClean="0"/>
-          </a:p>
-          <a:p>
-            <a:r>
-              <a:rPr lang="ru-RU" b="1" dirty="0"/>
-              <a:t>А)</a:t>
-            </a:r>
-            <a:r>
-              <a:rPr lang="ru-RU" dirty="0"/>
-              <a:t> Слишком низкий RTT</a:t>
-            </a:r>
-          </a:p>
-          <a:p>
-            <a:r>
-              <a:rPr lang="ru-RU" b="1" dirty="0"/>
-              <a:t>Б)</a:t>
-            </a:r>
-            <a:r>
-              <a:rPr lang="ru-RU" dirty="0"/>
-              <a:t> Высокий </a:t>
-            </a:r>
-            <a:r>
-              <a:rPr lang="ru-RU" dirty="0" err="1"/>
-              <a:t>джиттер</a:t>
-            </a:r>
-            <a:r>
-              <a:rPr lang="ru-RU" dirty="0"/>
-              <a:t> (</a:t>
-            </a:r>
-            <a:r>
-              <a:rPr lang="ru-RU" dirty="0" err="1"/>
-              <a:t>Jitter</a:t>
-            </a:r>
-            <a:r>
-              <a:rPr lang="ru-RU" dirty="0"/>
-              <a:t>)</a:t>
-            </a:r>
-          </a:p>
-          <a:p>
-            <a:r>
-              <a:rPr lang="ru-RU" b="1" dirty="0"/>
-              <a:t>В)</a:t>
-            </a:r>
-            <a:r>
-              <a:rPr lang="ru-RU" dirty="0"/>
-              <a:t> Неправильная </a:t>
-            </a:r>
-            <a:r>
-              <a:rPr lang="ru-RU" dirty="0" err="1"/>
-              <a:t>декапсуляция</a:t>
-            </a:r>
-            <a:endParaRPr lang="ru-RU" dirty="0"/>
-          </a:p>
-          <a:p>
-            <a:r>
-              <a:rPr lang="ru-RU" b="1" dirty="0"/>
-              <a:t>Г)</a:t>
-            </a:r>
-            <a:r>
-              <a:rPr lang="ru-RU" dirty="0"/>
-              <a:t> Переход с модели OSI на TCP/IP</a:t>
-            </a:r>
-          </a:p>
-          <a:p>
-            <a:pPr marL="0" indent="0">
-              <a:buNone/>
-            </a:pPr>
-            <a:endParaRPr lang="en-US" dirty="0"/>
+              <a:t>Протокол UDP.</a:t>
+            </a:r>
           </a:p>
         </p:txBody>
       </p:sp>
     </p:spTree>
     <p:extLst>
       <p:ext uri="{BB962C8B-B14F-4D97-AF65-F5344CB8AC3E}">
-        <p14:creationId xmlns:p14="http://schemas.microsoft.com/office/powerpoint/2010/main" val="2529589641"/>
+        <p14:creationId xmlns:p14="http://schemas.microsoft.com/office/powerpoint/2010/main" val="3797661691"/>
       </p:ext>
     </p:extLst>
   </p:cSld>
@@ -14357,6 +14335,348 @@
 </file>
 
 <file path=ppt/slides/slide20.xml><?xml version="1.0" encoding="utf-8"?>
+<p:sld xmlns:a="http://schemas.openxmlformats.org/drawingml/2006/main" xmlns:r="http://schemas.openxmlformats.org/officeDocument/2006/relationships" xmlns:p="http://schemas.openxmlformats.org/presentationml/2006/main">
+  <p:cSld>
+    <p:spTree>
+      <p:nvGrpSpPr>
+        <p:cNvPr id="1" name=""/>
+        <p:cNvGrpSpPr/>
+        <p:nvPr/>
+      </p:nvGrpSpPr>
+      <p:grpSpPr>
+        <a:xfrm>
+          <a:off x="0" y="0"/>
+          <a:ext cx="0" cy="0"/>
+          <a:chOff x="0" y="0"/>
+          <a:chExt cx="0" cy="0"/>
+        </a:xfrm>
+      </p:grpSpPr>
+      <p:sp>
+        <p:nvSpPr>
+          <p:cNvPr id="2" name="Заголовок 1"/>
+          <p:cNvSpPr>
+            <a:spLocks noGrp="1"/>
+          </p:cNvSpPr>
+          <p:nvPr>
+            <p:ph type="title"/>
+          </p:nvPr>
+        </p:nvSpPr>
+        <p:spPr/>
+        <p:txBody>
+          <a:bodyPr/>
+          <a:lstStyle/>
+          <a:p>
+            <a:r>
+              <a:rPr lang="af-ZA" b="1" dirty="0"/>
+              <a:t>Bandwidth vs </a:t>
+            </a:r>
+            <a:r>
+              <a:rPr lang="af-ZA" b="1" dirty="0" smtClean="0"/>
+              <a:t>Throughput</a:t>
+            </a:r>
+            <a:endParaRPr lang="ru-RU" dirty="0"/>
+          </a:p>
+        </p:txBody>
+      </p:sp>
+      <p:sp>
+        <p:nvSpPr>
+          <p:cNvPr id="3" name="Объект 2"/>
+          <p:cNvSpPr>
+            <a:spLocks noGrp="1"/>
+          </p:cNvSpPr>
+          <p:nvPr>
+            <p:ph idx="1"/>
+          </p:nvPr>
+        </p:nvSpPr>
+        <p:spPr/>
+        <p:txBody>
+          <a:bodyPr/>
+          <a:lstStyle/>
+          <a:p>
+            <a:pPr marL="0" indent="0">
+              <a:buNone/>
+            </a:pPr>
+            <a:r>
+              <a:rPr lang="ru-RU" i="1" dirty="0"/>
+              <a:t>«Тариф вашего домашнего интернета — </a:t>
+            </a:r>
+            <a:r>
+              <a:rPr lang="ru-RU" b="1" i="1" dirty="0"/>
+              <a:t>500 Мбит/с</a:t>
+            </a:r>
+            <a:r>
+              <a:rPr lang="ru-RU" i="1" dirty="0"/>
+              <a:t>. Однако при скачивании игры реальная средняя скорость загрузки составила </a:t>
+            </a:r>
+            <a:r>
+              <a:rPr lang="ru-RU" b="1" i="1" dirty="0"/>
+              <a:t>320 Мбит/с</a:t>
+            </a:r>
+            <a:r>
+              <a:rPr lang="ru-RU" i="1" dirty="0" smtClean="0"/>
+              <a:t>».</a:t>
+            </a:r>
+            <a:endParaRPr lang="en-US" i="1" dirty="0" smtClean="0"/>
+          </a:p>
+          <a:p>
+            <a:pPr marL="0" indent="0">
+              <a:buNone/>
+            </a:pPr>
+            <a:r>
+              <a:rPr lang="ru-RU" b="1" dirty="0"/>
+              <a:t>Вопрос:</a:t>
+            </a:r>
+            <a:r>
+              <a:rPr lang="ru-RU" dirty="0"/>
+              <a:t> Какое из этих двух чисел является </a:t>
+            </a:r>
+            <a:r>
+              <a:rPr lang="ru-RU" b="1" dirty="0" err="1"/>
+              <a:t>Bandwidth</a:t>
+            </a:r>
+            <a:r>
+              <a:rPr lang="ru-RU" dirty="0"/>
+              <a:t> (пропускной способностью канала), а какое — </a:t>
+            </a:r>
+            <a:r>
+              <a:rPr lang="ru-RU" b="1" dirty="0" err="1"/>
+              <a:t>Throughput</a:t>
+            </a:r>
+            <a:r>
+              <a:rPr lang="ru-RU" dirty="0"/>
+              <a:t> (реальной пропускной способностью)?</a:t>
+            </a:r>
+            <a:endParaRPr lang="en-US" i="1" dirty="0"/>
+          </a:p>
+        </p:txBody>
+      </p:sp>
+    </p:spTree>
+    <p:extLst>
+      <p:ext uri="{BB962C8B-B14F-4D97-AF65-F5344CB8AC3E}">
+        <p14:creationId xmlns:p14="http://schemas.microsoft.com/office/powerpoint/2010/main" val="3784396190"/>
+      </p:ext>
+    </p:extLst>
+  </p:cSld>
+  <p:clrMapOvr>
+    <a:masterClrMapping/>
+  </p:clrMapOvr>
+</p:sld>
+</file>
+
+<file path=ppt/slides/slide21.xml><?xml version="1.0" encoding="utf-8"?>
+<p:sld xmlns:a="http://schemas.openxmlformats.org/drawingml/2006/main" xmlns:r="http://schemas.openxmlformats.org/officeDocument/2006/relationships" xmlns:p="http://schemas.openxmlformats.org/presentationml/2006/main">
+  <p:cSld>
+    <p:spTree>
+      <p:nvGrpSpPr>
+        <p:cNvPr id="1" name=""/>
+        <p:cNvGrpSpPr/>
+        <p:nvPr/>
+      </p:nvGrpSpPr>
+      <p:grpSpPr>
+        <a:xfrm>
+          <a:off x="0" y="0"/>
+          <a:ext cx="0" cy="0"/>
+          <a:chOff x="0" y="0"/>
+          <a:chExt cx="0" cy="0"/>
+        </a:xfrm>
+      </p:grpSpPr>
+      <p:sp>
+        <p:nvSpPr>
+          <p:cNvPr id="2" name="Заголовок 1"/>
+          <p:cNvSpPr>
+            <a:spLocks noGrp="1"/>
+          </p:cNvSpPr>
+          <p:nvPr>
+            <p:ph type="title"/>
+          </p:nvPr>
+        </p:nvSpPr>
+        <p:spPr/>
+        <p:txBody>
+          <a:bodyPr/>
+          <a:lstStyle/>
+          <a:p>
+            <a:r>
+              <a:rPr lang="ru-RU" b="1" dirty="0"/>
+              <a:t>Какая сетевая характеристика вызывает эту проблему?</a:t>
+            </a:r>
+            <a:endParaRPr lang="ru-RU" dirty="0"/>
+          </a:p>
+        </p:txBody>
+      </p:sp>
+      <p:sp>
+        <p:nvSpPr>
+          <p:cNvPr id="3" name="Объект 2"/>
+          <p:cNvSpPr>
+            <a:spLocks noGrp="1"/>
+          </p:cNvSpPr>
+          <p:nvPr>
+            <p:ph idx="1"/>
+          </p:nvPr>
+        </p:nvSpPr>
+        <p:spPr>
+          <a:xfrm>
+            <a:off x="1141412" y="2249486"/>
+            <a:ext cx="9905999" cy="3975467"/>
+          </a:xfrm>
+        </p:spPr>
+        <p:txBody>
+          <a:bodyPr>
+            <a:normAutofit lnSpcReduction="10000"/>
+          </a:bodyPr>
+          <a:lstStyle/>
+          <a:p>
+            <a:pPr marL="0" indent="0">
+              <a:buNone/>
+            </a:pPr>
+            <a:r>
+              <a:rPr lang="ru-RU" dirty="0"/>
+              <a:t>Во время </a:t>
+            </a:r>
+            <a:r>
+              <a:rPr lang="ru-RU" dirty="0" err="1"/>
+              <a:t>видеозвонка</a:t>
+            </a:r>
+            <a:r>
+              <a:rPr lang="ru-RU" dirty="0"/>
+              <a:t> собеседник слышит ваш голос то с ускорением, то с паузами («заикание»), хотя средняя задержка не превышает 40 </a:t>
+            </a:r>
+            <a:r>
+              <a:rPr lang="ru-RU" dirty="0" err="1"/>
+              <a:t>мс</a:t>
+            </a:r>
+            <a:r>
+              <a:rPr lang="ru-RU" dirty="0"/>
+              <a:t>. Пакеты отправлялись стабильно каждые 30 </a:t>
+            </a:r>
+            <a:r>
+              <a:rPr lang="ru-RU" dirty="0" err="1"/>
+              <a:t>мс</a:t>
+            </a:r>
+            <a:r>
+              <a:rPr lang="ru-RU" dirty="0"/>
+              <a:t>, но доходили с интервалами: </a:t>
+            </a:r>
+            <a:r>
+              <a:rPr lang="ru-RU" b="1" dirty="0"/>
+              <a:t>30 </a:t>
+            </a:r>
+            <a:r>
+              <a:rPr lang="ru-RU" b="1" dirty="0" err="1"/>
+              <a:t>мс</a:t>
+            </a:r>
+            <a:r>
+              <a:rPr lang="ru-RU" b="1" dirty="0"/>
+              <a:t> →→ 95 </a:t>
+            </a:r>
+            <a:r>
+              <a:rPr lang="ru-RU" b="1" dirty="0" err="1"/>
+              <a:t>мс</a:t>
+            </a:r>
+            <a:r>
+              <a:rPr lang="ru-RU" b="1" dirty="0"/>
+              <a:t> →→ 15 </a:t>
+            </a:r>
+            <a:r>
+              <a:rPr lang="ru-RU" b="1" dirty="0" err="1"/>
+              <a:t>мс</a:t>
+            </a:r>
+            <a:r>
+              <a:rPr lang="ru-RU" b="1" dirty="0"/>
+              <a:t> →→ 120 </a:t>
+            </a:r>
+            <a:r>
+              <a:rPr lang="ru-RU" b="1" dirty="0" err="1"/>
+              <a:t>мс</a:t>
+            </a:r>
+            <a:r>
+              <a:rPr lang="ru-RU" dirty="0" smtClean="0"/>
+              <a:t>.</a:t>
+            </a:r>
+            <a:endParaRPr lang="en-US" dirty="0" smtClean="0"/>
+          </a:p>
+          <a:p>
+            <a:r>
+              <a:rPr lang="ru-RU" b="1" dirty="0"/>
+              <a:t>А)</a:t>
+            </a:r>
+            <a:r>
+              <a:rPr lang="ru-RU" dirty="0"/>
+              <a:t> Слишком низкий RTT</a:t>
+            </a:r>
+          </a:p>
+          <a:p>
+            <a:r>
+              <a:rPr lang="ru-RU" b="1" dirty="0"/>
+              <a:t>Б)</a:t>
+            </a:r>
+            <a:r>
+              <a:rPr lang="ru-RU" dirty="0"/>
+              <a:t> Высокий </a:t>
+            </a:r>
+            <a:r>
+              <a:rPr lang="ru-RU" dirty="0" err="1"/>
+              <a:t>джиттер</a:t>
+            </a:r>
+            <a:r>
+              <a:rPr lang="ru-RU" dirty="0"/>
+              <a:t> (</a:t>
+            </a:r>
+            <a:r>
+              <a:rPr lang="ru-RU" dirty="0" err="1"/>
+              <a:t>Jitter</a:t>
+            </a:r>
+            <a:r>
+              <a:rPr lang="ru-RU" dirty="0"/>
+              <a:t>)</a:t>
+            </a:r>
+          </a:p>
+          <a:p>
+            <a:r>
+              <a:rPr lang="ru-RU" b="1" dirty="0"/>
+              <a:t>В)</a:t>
+            </a:r>
+            <a:r>
+              <a:rPr lang="ru-RU" dirty="0"/>
+              <a:t> Неправильная </a:t>
+            </a:r>
+            <a:r>
+              <a:rPr lang="ru-RU" dirty="0" err="1"/>
+              <a:t>декапсуляция</a:t>
+            </a:r>
+            <a:endParaRPr lang="ru-RU" dirty="0"/>
+          </a:p>
+          <a:p>
+            <a:r>
+              <a:rPr lang="ru-RU" b="1" dirty="0"/>
+              <a:t>Г)</a:t>
+            </a:r>
+            <a:r>
+              <a:rPr lang="ru-RU" dirty="0"/>
+              <a:t> Переход с модели OSI на TCP/IP</a:t>
+            </a:r>
+          </a:p>
+          <a:p>
+            <a:pPr marL="0" indent="0">
+              <a:buNone/>
+            </a:pPr>
+            <a:endParaRPr lang="en-US" dirty="0"/>
+          </a:p>
+        </p:txBody>
+      </p:sp>
+    </p:spTree>
+    <p:extLst>
+      <p:ext uri="{BB962C8B-B14F-4D97-AF65-F5344CB8AC3E}">
+        <p14:creationId xmlns:p14="http://schemas.microsoft.com/office/powerpoint/2010/main" val="2529589641"/>
+      </p:ext>
+    </p:extLst>
+  </p:cSld>
+  <p:clrMapOvr>
+    <a:masterClrMapping/>
+  </p:clrMapOvr>
+</p:sld>
+</file>
+
+<file path=ppt/slides/slide22.xml><?xml version="1.0" encoding="utf-8"?>
 <p:sld xmlns:a="http://schemas.openxmlformats.org/drawingml/2006/main" xmlns:r="http://schemas.openxmlformats.org/officeDocument/2006/relationships" xmlns:p="http://schemas.openxmlformats.org/presentationml/2006/main">
   <p:cSld>
     <p:spTree>
@@ -15266,7 +15586,7 @@
 </p:sld>
 </file>
 
-<file path=ppt/slides/slide21.xml><?xml version="1.0" encoding="utf-8"?>
+<file path=ppt/slides/slide23.xml><?xml version="1.0" encoding="utf-8"?>
 <p:sld xmlns:a="http://schemas.openxmlformats.org/drawingml/2006/main" xmlns:r="http://schemas.openxmlformats.org/officeDocument/2006/relationships" xmlns:p="http://schemas.openxmlformats.org/presentationml/2006/main">
   <p:cSld>
     <p:spTree>

--- a/1.3 Architecture/1.3 Architecture.pptx
+++ b/1.3 Architecture/1.3 Architecture.pptx
@@ -12,20 +12,24 @@
     <p:sldId id="258" r:id="rId6"/>
     <p:sldId id="259" r:id="rId7"/>
     <p:sldId id="263" r:id="rId8"/>
-    <p:sldId id="260" r:id="rId9"/>
-    <p:sldId id="264" r:id="rId10"/>
-    <p:sldId id="261" r:id="rId11"/>
-    <p:sldId id="265" r:id="rId12"/>
-    <p:sldId id="262" r:id="rId13"/>
-    <p:sldId id="266" r:id="rId14"/>
-    <p:sldId id="267" r:id="rId15"/>
-    <p:sldId id="268" r:id="rId16"/>
-    <p:sldId id="269" r:id="rId17"/>
-    <p:sldId id="270" r:id="rId18"/>
-    <p:sldId id="271" r:id="rId19"/>
-    <p:sldId id="272" r:id="rId20"/>
-    <p:sldId id="273" r:id="rId21"/>
-    <p:sldId id="274" r:id="rId22"/>
+    <p:sldId id="277" r:id="rId9"/>
+    <p:sldId id="260" r:id="rId10"/>
+    <p:sldId id="264" r:id="rId11"/>
+    <p:sldId id="261" r:id="rId12"/>
+    <p:sldId id="265" r:id="rId13"/>
+    <p:sldId id="278" r:id="rId14"/>
+    <p:sldId id="262" r:id="rId15"/>
+    <p:sldId id="279" r:id="rId16"/>
+    <p:sldId id="266" r:id="rId17"/>
+    <p:sldId id="280" r:id="rId18"/>
+    <p:sldId id="267" r:id="rId19"/>
+    <p:sldId id="268" r:id="rId20"/>
+    <p:sldId id="269" r:id="rId21"/>
+    <p:sldId id="270" r:id="rId22"/>
+    <p:sldId id="271" r:id="rId23"/>
+    <p:sldId id="272" r:id="rId24"/>
+    <p:sldId id="273" r:id="rId25"/>
+    <p:sldId id="274" r:id="rId26"/>
   </p:sldIdLst>
   <p:sldSz cx="12192000" cy="6858000"/>
   <p:notesSz cx="6858000" cy="9144000"/>
@@ -189,7 +193,7 @@
           <a:noFill/>
           <a:extLst>
             <a:ext uri="{909E8E84-426E-40dd-AFC4-6F175D3DCCD1}">
-              <a14:hiddenFill xmlns:a14="http://schemas.microsoft.com/office/drawing/2010/main" xmlns="">
+              <a14:hiddenFill xmlns="" xmlns:a14="http://schemas.microsoft.com/office/drawing/2010/main">
                 <a:solidFill>
                   <a:srgbClr val="FFFFFF"/>
                 </a:solidFill>
@@ -248,7 +252,7 @@
             </a:ln>
             <a:extLst>
               <a:ext uri="{91240B29-F687-4f45-9708-019B960494DF}">
-                <a14:hiddenLine xmlns:a14="http://schemas.microsoft.com/office/drawing/2010/main" xmlns="" w="9525">
+                <a14:hiddenLine xmlns="" xmlns:a14="http://schemas.microsoft.com/office/drawing/2010/main" w="9525">
                   <a:solidFill>
                     <a:srgbClr val="000000"/>
                   </a:solidFill>
@@ -338,7 +342,7 @@
             </a:ln>
             <a:extLst>
               <a:ext uri="{91240B29-F687-4f45-9708-019B960494DF}">
-                <a14:hiddenLine xmlns:a14="http://schemas.microsoft.com/office/drawing/2010/main" xmlns="" w="9525">
+                <a14:hiddenLine xmlns="" xmlns:a14="http://schemas.microsoft.com/office/drawing/2010/main" w="9525">
                   <a:solidFill>
                     <a:srgbClr val="000000"/>
                   </a:solidFill>
@@ -428,7 +432,7 @@
             </a:ln>
             <a:extLst>
               <a:ext uri="{91240B29-F687-4f45-9708-019B960494DF}">
-                <a14:hiddenLine xmlns:a14="http://schemas.microsoft.com/office/drawing/2010/main" xmlns="" w="9525">
+                <a14:hiddenLine xmlns="" xmlns:a14="http://schemas.microsoft.com/office/drawing/2010/main" w="9525">
                   <a:solidFill>
                     <a:srgbClr val="000000"/>
                   </a:solidFill>
@@ -462,7 +466,7 @@
             </a:ln>
             <a:extLst>
               <a:ext uri="{91240B29-F687-4f45-9708-019B960494DF}">
-                <a14:hiddenLine xmlns:a14="http://schemas.microsoft.com/office/drawing/2010/main" xmlns="" w="9525">
+                <a14:hiddenLine xmlns="" xmlns:a14="http://schemas.microsoft.com/office/drawing/2010/main" w="9525">
                   <a:solidFill>
                     <a:srgbClr val="000000"/>
                   </a:solidFill>
@@ -552,7 +556,7 @@
             </a:ln>
             <a:extLst>
               <a:ext uri="{91240B29-F687-4f45-9708-019B960494DF}">
-                <a14:hiddenLine xmlns:a14="http://schemas.microsoft.com/office/drawing/2010/main" xmlns="" w="9525">
+                <a14:hiddenLine xmlns="" xmlns:a14="http://schemas.microsoft.com/office/drawing/2010/main" w="9525">
                   <a:solidFill>
                     <a:srgbClr val="000000"/>
                   </a:solidFill>
@@ -614,7 +618,7 @@
             </a:ln>
             <a:extLst>
               <a:ext uri="{91240B29-F687-4f45-9708-019B960494DF}">
-                <a14:hiddenLine xmlns:a14="http://schemas.microsoft.com/office/drawing/2010/main" xmlns="" w="9525">
+                <a14:hiddenLine xmlns="" xmlns:a14="http://schemas.microsoft.com/office/drawing/2010/main" w="9525">
                   <a:solidFill>
                     <a:srgbClr val="000000"/>
                   </a:solidFill>
@@ -676,7 +680,7 @@
             </a:ln>
             <a:extLst>
               <a:ext uri="{91240B29-F687-4f45-9708-019B960494DF}">
-                <a14:hiddenLine xmlns:a14="http://schemas.microsoft.com/office/drawing/2010/main" xmlns="" w="9525">
+                <a14:hiddenLine xmlns="" xmlns:a14="http://schemas.microsoft.com/office/drawing/2010/main" w="9525">
                   <a:solidFill>
                     <a:srgbClr val="000000"/>
                   </a:solidFill>
@@ -766,7 +770,7 @@
             </a:ln>
             <a:extLst>
               <a:ext uri="{91240B29-F687-4f45-9708-019B960494DF}">
-                <a14:hiddenLine xmlns:a14="http://schemas.microsoft.com/office/drawing/2010/main" xmlns="" w="9525">
+                <a14:hiddenLine xmlns="" xmlns:a14="http://schemas.microsoft.com/office/drawing/2010/main" w="9525">
                   <a:solidFill>
                     <a:srgbClr val="000000"/>
                   </a:solidFill>
@@ -828,7 +832,7 @@
             </a:ln>
             <a:extLst>
               <a:ext uri="{91240B29-F687-4f45-9708-019B960494DF}">
-                <a14:hiddenLine xmlns:a14="http://schemas.microsoft.com/office/drawing/2010/main" xmlns="" w="9525">
+                <a14:hiddenLine xmlns="" xmlns:a14="http://schemas.microsoft.com/office/drawing/2010/main" w="9525">
                   <a:solidFill>
                     <a:srgbClr val="000000"/>
                   </a:solidFill>
@@ -890,7 +894,7 @@
             </a:ln>
             <a:extLst>
               <a:ext uri="{91240B29-F687-4f45-9708-019B960494DF}">
-                <a14:hiddenLine xmlns:a14="http://schemas.microsoft.com/office/drawing/2010/main" xmlns="" w="9525">
+                <a14:hiddenLine xmlns="" xmlns:a14="http://schemas.microsoft.com/office/drawing/2010/main" w="9525">
                   <a:solidFill>
                     <a:srgbClr val="000000"/>
                   </a:solidFill>
@@ -980,7 +984,7 @@
             </a:ln>
             <a:extLst>
               <a:ext uri="{91240B29-F687-4f45-9708-019B960494DF}">
-                <a14:hiddenLine xmlns:a14="http://schemas.microsoft.com/office/drawing/2010/main" xmlns="" w="9525">
+                <a14:hiddenLine xmlns="" xmlns:a14="http://schemas.microsoft.com/office/drawing/2010/main" w="9525">
                   <a:solidFill>
                     <a:srgbClr val="000000"/>
                   </a:solidFill>
@@ -1070,7 +1074,7 @@
             </a:ln>
             <a:extLst>
               <a:ext uri="{91240B29-F687-4f45-9708-019B960494DF}">
-                <a14:hiddenLine xmlns:a14="http://schemas.microsoft.com/office/drawing/2010/main" xmlns="" w="9525">
+                <a14:hiddenLine xmlns="" xmlns:a14="http://schemas.microsoft.com/office/drawing/2010/main" w="9525">
                   <a:solidFill>
                     <a:srgbClr val="000000"/>
                   </a:solidFill>
@@ -1132,7 +1136,7 @@
             </a:ln>
             <a:extLst>
               <a:ext uri="{91240B29-F687-4f45-9708-019B960494DF}">
-                <a14:hiddenLine xmlns:a14="http://schemas.microsoft.com/office/drawing/2010/main" xmlns="" w="9525">
+                <a14:hiddenLine xmlns="" xmlns:a14="http://schemas.microsoft.com/office/drawing/2010/main" w="9525">
                   <a:solidFill>
                     <a:srgbClr val="000000"/>
                   </a:solidFill>
@@ -1242,7 +1246,7 @@
             </a:ln>
             <a:extLst>
               <a:ext uri="{91240B29-F687-4f45-9708-019B960494DF}">
-                <a14:hiddenLine xmlns:a14="http://schemas.microsoft.com/office/drawing/2010/main" xmlns="" w="9525">
+                <a14:hiddenLine xmlns="" xmlns:a14="http://schemas.microsoft.com/office/drawing/2010/main" w="9525">
                   <a:solidFill>
                     <a:srgbClr val="000000"/>
                   </a:solidFill>
@@ -1304,7 +1308,7 @@
             </a:ln>
             <a:extLst>
               <a:ext uri="{91240B29-F687-4f45-9708-019B960494DF}">
-                <a14:hiddenLine xmlns:a14="http://schemas.microsoft.com/office/drawing/2010/main" xmlns="" w="9525">
+                <a14:hiddenLine xmlns="" xmlns:a14="http://schemas.microsoft.com/office/drawing/2010/main" w="9525">
                   <a:solidFill>
                     <a:srgbClr val="000000"/>
                   </a:solidFill>
@@ -1394,7 +1398,7 @@
             </a:ln>
             <a:extLst>
               <a:ext uri="{91240B29-F687-4f45-9708-019B960494DF}">
-                <a14:hiddenLine xmlns:a14="http://schemas.microsoft.com/office/drawing/2010/main" xmlns="" w="9525">
+                <a14:hiddenLine xmlns="" xmlns:a14="http://schemas.microsoft.com/office/drawing/2010/main" w="9525">
                   <a:solidFill>
                     <a:srgbClr val="000000"/>
                   </a:solidFill>
@@ -1484,7 +1488,7 @@
             </a:ln>
             <a:extLst>
               <a:ext uri="{91240B29-F687-4f45-9708-019B960494DF}">
-                <a14:hiddenLine xmlns:a14="http://schemas.microsoft.com/office/drawing/2010/main" xmlns="" w="9525">
+                <a14:hiddenLine xmlns="" xmlns:a14="http://schemas.microsoft.com/office/drawing/2010/main" w="9525">
                   <a:solidFill>
                     <a:srgbClr val="000000"/>
                   </a:solidFill>
@@ -1546,7 +1550,7 @@
             </a:ln>
             <a:extLst>
               <a:ext uri="{91240B29-F687-4f45-9708-019B960494DF}">
-                <a14:hiddenLine xmlns:a14="http://schemas.microsoft.com/office/drawing/2010/main" xmlns="" w="9525">
+                <a14:hiddenLine xmlns="" xmlns:a14="http://schemas.microsoft.com/office/drawing/2010/main" w="9525">
                   <a:solidFill>
                     <a:srgbClr val="000000"/>
                   </a:solidFill>
@@ -1636,7 +1640,7 @@
             </a:ln>
             <a:extLst>
               <a:ext uri="{91240B29-F687-4f45-9708-019B960494DF}">
-                <a14:hiddenLine xmlns:a14="http://schemas.microsoft.com/office/drawing/2010/main" xmlns="" w="9525">
+                <a14:hiddenLine xmlns="" xmlns:a14="http://schemas.microsoft.com/office/drawing/2010/main" w="9525">
                   <a:solidFill>
                     <a:srgbClr val="000000"/>
                   </a:solidFill>
@@ -1726,7 +1730,7 @@
             </a:ln>
             <a:extLst>
               <a:ext uri="{91240B29-F687-4f45-9708-019B960494DF}">
-                <a14:hiddenLine xmlns:a14="http://schemas.microsoft.com/office/drawing/2010/main" xmlns="" w="9525">
+                <a14:hiddenLine xmlns="" xmlns:a14="http://schemas.microsoft.com/office/drawing/2010/main" w="9525">
                   <a:solidFill>
                     <a:srgbClr val="000000"/>
                   </a:solidFill>
@@ -1782,7 +1786,7 @@
             </a:ln>
             <a:extLst>
               <a:ext uri="{91240B29-F687-4f45-9708-019B960494DF}">
-                <a14:hiddenLine xmlns:a14="http://schemas.microsoft.com/office/drawing/2010/main" xmlns="" w="9525">
+                <a14:hiddenLine xmlns="" xmlns:a14="http://schemas.microsoft.com/office/drawing/2010/main" w="9525">
                   <a:solidFill>
                     <a:srgbClr val="000000"/>
                   </a:solidFill>
@@ -1872,7 +1876,7 @@
             </a:ln>
             <a:extLst>
               <a:ext uri="{91240B29-F687-4f45-9708-019B960494DF}">
-                <a14:hiddenLine xmlns:a14="http://schemas.microsoft.com/office/drawing/2010/main" xmlns="" w="9525">
+                <a14:hiddenLine xmlns="" xmlns:a14="http://schemas.microsoft.com/office/drawing/2010/main" w="9525">
                   <a:solidFill>
                     <a:srgbClr val="000000"/>
                   </a:solidFill>
@@ -1928,7 +1932,7 @@
             </a:ln>
             <a:extLst>
               <a:ext uri="{91240B29-F687-4f45-9708-019B960494DF}">
-                <a14:hiddenLine xmlns:a14="http://schemas.microsoft.com/office/drawing/2010/main" xmlns="" w="9525">
+                <a14:hiddenLine xmlns="" xmlns:a14="http://schemas.microsoft.com/office/drawing/2010/main" w="9525">
                   <a:solidFill>
                     <a:srgbClr val="000000"/>
                   </a:solidFill>
@@ -2018,7 +2022,7 @@
             </a:ln>
             <a:extLst>
               <a:ext uri="{91240B29-F687-4f45-9708-019B960494DF}">
-                <a14:hiddenLine xmlns:a14="http://schemas.microsoft.com/office/drawing/2010/main" xmlns="" w="9525">
+                <a14:hiddenLine xmlns="" xmlns:a14="http://schemas.microsoft.com/office/drawing/2010/main" w="9525">
                   <a:solidFill>
                     <a:srgbClr val="000000"/>
                   </a:solidFill>
@@ -2086,7 +2090,7 @@
             </a:ln>
             <a:extLst>
               <a:ext uri="{91240B29-F687-4f45-9708-019B960494DF}">
-                <a14:hiddenLine xmlns:a14="http://schemas.microsoft.com/office/drawing/2010/main" xmlns="" w="9525">
+                <a14:hiddenLine xmlns="" xmlns:a14="http://schemas.microsoft.com/office/drawing/2010/main" w="9525">
                   <a:solidFill>
                     <a:srgbClr val="000000"/>
                   </a:solidFill>
@@ -2176,7 +2180,7 @@
             </a:ln>
             <a:extLst>
               <a:ext uri="{91240B29-F687-4f45-9708-019B960494DF}">
-                <a14:hiddenLine xmlns:a14="http://schemas.microsoft.com/office/drawing/2010/main" xmlns="" w="9525">
+                <a14:hiddenLine xmlns="" xmlns:a14="http://schemas.microsoft.com/office/drawing/2010/main" w="9525">
                   <a:solidFill>
                     <a:srgbClr val="000000"/>
                   </a:solidFill>
@@ -2244,7 +2248,7 @@
             </a:ln>
             <a:extLst>
               <a:ext uri="{91240B29-F687-4f45-9708-019B960494DF}">
-                <a14:hiddenLine xmlns:a14="http://schemas.microsoft.com/office/drawing/2010/main" xmlns="" w="9525">
+                <a14:hiddenLine xmlns="" xmlns:a14="http://schemas.microsoft.com/office/drawing/2010/main" w="9525">
                   <a:solidFill>
                     <a:srgbClr val="000000"/>
                   </a:solidFill>
@@ -2334,7 +2338,7 @@
             </a:ln>
             <a:extLst>
               <a:ext uri="{91240B29-F687-4f45-9708-019B960494DF}">
-                <a14:hiddenLine xmlns:a14="http://schemas.microsoft.com/office/drawing/2010/main" xmlns="" w="9525">
+                <a14:hiddenLine xmlns="" xmlns:a14="http://schemas.microsoft.com/office/drawing/2010/main" w="9525">
                   <a:solidFill>
                     <a:srgbClr val="000000"/>
                   </a:solidFill>
@@ -2368,7 +2372,7 @@
             </a:ln>
             <a:extLst>
               <a:ext uri="{91240B29-F687-4f45-9708-019B960494DF}">
-                <a14:hiddenLine xmlns:a14="http://schemas.microsoft.com/office/drawing/2010/main" xmlns="" w="9525">
+                <a14:hiddenLine xmlns="" xmlns:a14="http://schemas.microsoft.com/office/drawing/2010/main" w="9525">
                   <a:solidFill>
                     <a:srgbClr val="000000"/>
                   </a:solidFill>
@@ -2458,7 +2462,7 @@
             </a:ln>
             <a:extLst>
               <a:ext uri="{91240B29-F687-4f45-9708-019B960494DF}">
-                <a14:hiddenLine xmlns:a14="http://schemas.microsoft.com/office/drawing/2010/main" xmlns="" w="9525">
+                <a14:hiddenLine xmlns="" xmlns:a14="http://schemas.microsoft.com/office/drawing/2010/main" w="9525">
                   <a:solidFill>
                     <a:srgbClr val="000000"/>
                   </a:solidFill>
@@ -2520,7 +2524,7 @@
             </a:ln>
             <a:extLst>
               <a:ext uri="{91240B29-F687-4f45-9708-019B960494DF}">
-                <a14:hiddenLine xmlns:a14="http://schemas.microsoft.com/office/drawing/2010/main" xmlns="" w="9525">
+                <a14:hiddenLine xmlns="" xmlns:a14="http://schemas.microsoft.com/office/drawing/2010/main" w="9525">
                   <a:solidFill>
                     <a:srgbClr val="000000"/>
                   </a:solidFill>
@@ -2582,7 +2586,7 @@
             </a:ln>
             <a:extLst>
               <a:ext uri="{91240B29-F687-4f45-9708-019B960494DF}">
-                <a14:hiddenLine xmlns:a14="http://schemas.microsoft.com/office/drawing/2010/main" xmlns="" w="9525">
+                <a14:hiddenLine xmlns="" xmlns:a14="http://schemas.microsoft.com/office/drawing/2010/main" w="9525">
                   <a:solidFill>
                     <a:srgbClr val="000000"/>
                   </a:solidFill>
@@ -2672,7 +2676,7 @@
             </a:ln>
             <a:extLst>
               <a:ext uri="{91240B29-F687-4f45-9708-019B960494DF}">
-                <a14:hiddenLine xmlns:a14="http://schemas.microsoft.com/office/drawing/2010/main" xmlns="" w="9525">
+                <a14:hiddenLine xmlns="" xmlns:a14="http://schemas.microsoft.com/office/drawing/2010/main" w="9525">
                   <a:solidFill>
                     <a:srgbClr val="000000"/>
                   </a:solidFill>
@@ -2740,7 +2744,7 @@
             </a:ln>
             <a:extLst>
               <a:ext uri="{91240B29-F687-4f45-9708-019B960494DF}">
-                <a14:hiddenLine xmlns:a14="http://schemas.microsoft.com/office/drawing/2010/main" xmlns="" w="9525">
+                <a14:hiddenLine xmlns="" xmlns:a14="http://schemas.microsoft.com/office/drawing/2010/main" w="9525">
                   <a:solidFill>
                     <a:srgbClr val="000000"/>
                   </a:solidFill>
@@ -2802,7 +2806,7 @@
             </a:ln>
             <a:extLst>
               <a:ext uri="{91240B29-F687-4f45-9708-019B960494DF}">
-                <a14:hiddenLine xmlns:a14="http://schemas.microsoft.com/office/drawing/2010/main" xmlns="" w="9525">
+                <a14:hiddenLine xmlns="" xmlns:a14="http://schemas.microsoft.com/office/drawing/2010/main" w="9525">
                   <a:solidFill>
                     <a:srgbClr val="000000"/>
                   </a:solidFill>
@@ -2892,7 +2896,7 @@
             </a:ln>
             <a:extLst>
               <a:ext uri="{91240B29-F687-4f45-9708-019B960494DF}">
-                <a14:hiddenLine xmlns:a14="http://schemas.microsoft.com/office/drawing/2010/main" xmlns="" w="9525">
+                <a14:hiddenLine xmlns="" xmlns:a14="http://schemas.microsoft.com/office/drawing/2010/main" w="9525">
                   <a:solidFill>
                     <a:srgbClr val="000000"/>
                   </a:solidFill>
@@ -2954,7 +2958,7 @@
             </a:ln>
             <a:extLst>
               <a:ext uri="{91240B29-F687-4f45-9708-019B960494DF}">
-                <a14:hiddenLine xmlns:a14="http://schemas.microsoft.com/office/drawing/2010/main" xmlns="" w="9525">
+                <a14:hiddenLine xmlns="" xmlns:a14="http://schemas.microsoft.com/office/drawing/2010/main" w="9525">
                   <a:solidFill>
                     <a:srgbClr val="000000"/>
                   </a:solidFill>
@@ -3044,7 +3048,7 @@
             </a:ln>
             <a:extLst>
               <a:ext uri="{91240B29-F687-4f45-9708-019B960494DF}">
-                <a14:hiddenLine xmlns:a14="http://schemas.microsoft.com/office/drawing/2010/main" xmlns="" w="9525">
+                <a14:hiddenLine xmlns="" xmlns:a14="http://schemas.microsoft.com/office/drawing/2010/main" w="9525">
                   <a:solidFill>
                     <a:srgbClr val="000000"/>
                   </a:solidFill>
@@ -3106,7 +3110,7 @@
             </a:ln>
             <a:extLst>
               <a:ext uri="{91240B29-F687-4f45-9708-019B960494DF}">
-                <a14:hiddenLine xmlns:a14="http://schemas.microsoft.com/office/drawing/2010/main" xmlns="" w="9525">
+                <a14:hiddenLine xmlns="" xmlns:a14="http://schemas.microsoft.com/office/drawing/2010/main" w="9525">
                   <a:solidFill>
                     <a:srgbClr val="000000"/>
                   </a:solidFill>
@@ -3196,7 +3200,7 @@
             </a:ln>
             <a:extLst>
               <a:ext uri="{91240B29-F687-4f45-9708-019B960494DF}">
-                <a14:hiddenLine xmlns:a14="http://schemas.microsoft.com/office/drawing/2010/main" xmlns="" w="9525">
+                <a14:hiddenLine xmlns="" xmlns:a14="http://schemas.microsoft.com/office/drawing/2010/main" w="9525">
                   <a:solidFill>
                     <a:srgbClr val="000000"/>
                   </a:solidFill>
@@ -3230,7 +3234,7 @@
             </a:ln>
             <a:extLst>
               <a:ext uri="{91240B29-F687-4f45-9708-019B960494DF}">
-                <a14:hiddenLine xmlns:a14="http://schemas.microsoft.com/office/drawing/2010/main" xmlns="" w="9525">
+                <a14:hiddenLine xmlns="" xmlns:a14="http://schemas.microsoft.com/office/drawing/2010/main" w="9525">
                   <a:solidFill>
                     <a:srgbClr val="000000"/>
                   </a:solidFill>
@@ -3295,7 +3299,7 @@
             </a:ln>
             <a:extLst>
               <a:ext uri="{91240B29-F687-4f45-9708-019B960494DF}">
-                <a14:hiddenLine xmlns:a14="http://schemas.microsoft.com/office/drawing/2010/main" xmlns="" w="9525">
+                <a14:hiddenLine xmlns="" xmlns:a14="http://schemas.microsoft.com/office/drawing/2010/main" w="9525">
                   <a:solidFill>
                     <a:srgbClr val="000000"/>
                   </a:solidFill>
@@ -3385,7 +3389,7 @@
             </a:ln>
             <a:extLst>
               <a:ext uri="{91240B29-F687-4f45-9708-019B960494DF}">
-                <a14:hiddenLine xmlns:a14="http://schemas.microsoft.com/office/drawing/2010/main" xmlns="" w="9525">
+                <a14:hiddenLine xmlns="" xmlns:a14="http://schemas.microsoft.com/office/drawing/2010/main" w="9525">
                   <a:solidFill>
                     <a:srgbClr val="000000"/>
                   </a:solidFill>
@@ -3447,7 +3451,7 @@
             </a:ln>
             <a:extLst>
               <a:ext uri="{91240B29-F687-4f45-9708-019B960494DF}">
-                <a14:hiddenLine xmlns:a14="http://schemas.microsoft.com/office/drawing/2010/main" xmlns="" w="9525">
+                <a14:hiddenLine xmlns="" xmlns:a14="http://schemas.microsoft.com/office/drawing/2010/main" w="9525">
                   <a:solidFill>
                     <a:srgbClr val="000000"/>
                   </a:solidFill>
@@ -3537,7 +3541,7 @@
             </a:ln>
             <a:extLst>
               <a:ext uri="{91240B29-F687-4f45-9708-019B960494DF}">
-                <a14:hiddenLine xmlns:a14="http://schemas.microsoft.com/office/drawing/2010/main" xmlns="" w="9525">
+                <a14:hiddenLine xmlns="" xmlns:a14="http://schemas.microsoft.com/office/drawing/2010/main" w="9525">
                   <a:solidFill>
                     <a:srgbClr val="000000"/>
                   </a:solidFill>
@@ -3627,7 +3631,7 @@
             </a:ln>
             <a:extLst>
               <a:ext uri="{91240B29-F687-4f45-9708-019B960494DF}">
-                <a14:hiddenLine xmlns:a14="http://schemas.microsoft.com/office/drawing/2010/main" xmlns="" w="9525">
+                <a14:hiddenLine xmlns="" xmlns:a14="http://schemas.microsoft.com/office/drawing/2010/main" w="9525">
                   <a:solidFill>
                     <a:srgbClr val="000000"/>
                   </a:solidFill>
@@ -3692,7 +3696,7 @@
             </a:ln>
             <a:extLst>
               <a:ext uri="{91240B29-F687-4f45-9708-019B960494DF}">
-                <a14:hiddenLine xmlns:a14="http://schemas.microsoft.com/office/drawing/2010/main" xmlns="" w="9525">
+                <a14:hiddenLine xmlns="" xmlns:a14="http://schemas.microsoft.com/office/drawing/2010/main" w="9525">
                   <a:solidFill>
                     <a:srgbClr val="000000"/>
                   </a:solidFill>
@@ -3754,7 +3758,7 @@
             </a:ln>
             <a:extLst>
               <a:ext uri="{91240B29-F687-4f45-9708-019B960494DF}">
-                <a14:hiddenLine xmlns:a14="http://schemas.microsoft.com/office/drawing/2010/main" xmlns="" w="9525">
+                <a14:hiddenLine xmlns="" xmlns:a14="http://schemas.microsoft.com/office/drawing/2010/main" w="9525">
                   <a:solidFill>
                     <a:srgbClr val="000000"/>
                   </a:solidFill>
@@ -3844,7 +3848,7 @@
             </a:ln>
             <a:extLst>
               <a:ext uri="{91240B29-F687-4f45-9708-019B960494DF}">
-                <a14:hiddenLine xmlns:a14="http://schemas.microsoft.com/office/drawing/2010/main" xmlns="" w="9525">
+                <a14:hiddenLine xmlns="" xmlns:a14="http://schemas.microsoft.com/office/drawing/2010/main" w="9525">
                   <a:solidFill>
                     <a:srgbClr val="000000"/>
                   </a:solidFill>
@@ -3934,7 +3938,7 @@
             </a:ln>
             <a:extLst>
               <a:ext uri="{91240B29-F687-4f45-9708-019B960494DF}">
-                <a14:hiddenLine xmlns:a14="http://schemas.microsoft.com/office/drawing/2010/main" xmlns="" w="9525">
+                <a14:hiddenLine xmlns="" xmlns:a14="http://schemas.microsoft.com/office/drawing/2010/main" w="9525">
                   <a:solidFill>
                     <a:srgbClr val="000000"/>
                   </a:solidFill>
@@ -3996,7 +4000,7 @@
             </a:ln>
             <a:extLst>
               <a:ext uri="{91240B29-F687-4f45-9708-019B960494DF}">
-                <a14:hiddenLine xmlns:a14="http://schemas.microsoft.com/office/drawing/2010/main" xmlns="" w="9525">
+                <a14:hiddenLine xmlns="" xmlns:a14="http://schemas.microsoft.com/office/drawing/2010/main" w="9525">
                   <a:solidFill>
                     <a:srgbClr val="000000"/>
                   </a:solidFill>
@@ -4116,7 +4120,7 @@
             </a:ln>
             <a:extLst>
               <a:ext uri="{91240B29-F687-4f45-9708-019B960494DF}">
-                <a14:hiddenLine xmlns:a14="http://schemas.microsoft.com/office/drawing/2010/main" xmlns="" w="9525">
+                <a14:hiddenLine xmlns="" xmlns:a14="http://schemas.microsoft.com/office/drawing/2010/main" w="9525">
                   <a:solidFill>
                     <a:srgbClr val="000000"/>
                   </a:solidFill>
@@ -4184,7 +4188,7 @@
             </a:ln>
             <a:extLst>
               <a:ext uri="{91240B29-F687-4f45-9708-019B960494DF}">
-                <a14:hiddenLine xmlns:a14="http://schemas.microsoft.com/office/drawing/2010/main" xmlns="" w="9525">
+                <a14:hiddenLine xmlns="" xmlns:a14="http://schemas.microsoft.com/office/drawing/2010/main" w="9525">
                   <a:solidFill>
                     <a:srgbClr val="000000"/>
                   </a:solidFill>
@@ -4274,7 +4278,7 @@
             </a:ln>
             <a:extLst>
               <a:ext uri="{91240B29-F687-4f45-9708-019B960494DF}">
-                <a14:hiddenLine xmlns:a14="http://schemas.microsoft.com/office/drawing/2010/main" xmlns="" w="9525">
+                <a14:hiddenLine xmlns="" xmlns:a14="http://schemas.microsoft.com/office/drawing/2010/main" w="9525">
                   <a:solidFill>
                     <a:srgbClr val="000000"/>
                   </a:solidFill>
@@ -4414,7 +4418,7 @@
           <a:p>
             <a:fld id="{6AC27FFC-58F7-4A0B-910F-2453E6738501}" type="datetimeFigureOut">
               <a:rPr lang="ru-RU" smtClean="0"/>
-              <a:t>31.08.2026</a:t>
+              <a:t>02.09.2026</a:t>
             </a:fld>
             <a:endParaRPr lang="ru-RU"/>
           </a:p>
@@ -4681,7 +4685,7 @@
           <a:p>
             <a:fld id="{6AC27FFC-58F7-4A0B-910F-2453E6738501}" type="datetimeFigureOut">
               <a:rPr lang="ru-RU" smtClean="0"/>
-              <a:t>31.08.2026</a:t>
+              <a:t>02.09.2026</a:t>
             </a:fld>
             <a:endParaRPr lang="ru-RU"/>
           </a:p>
@@ -4877,7 +4881,7 @@
           <a:p>
             <a:fld id="{6AC27FFC-58F7-4A0B-910F-2453E6738501}" type="datetimeFigureOut">
               <a:rPr lang="ru-RU" smtClean="0"/>
-              <a:t>31.08.2026</a:t>
+              <a:t>02.09.2026</a:t>
             </a:fld>
             <a:endParaRPr lang="ru-RU"/>
           </a:p>
@@ -5140,7 +5144,7 @@
           <a:p>
             <a:fld id="{6AC27FFC-58F7-4A0B-910F-2453E6738501}" type="datetimeFigureOut">
               <a:rPr lang="ru-RU" smtClean="0"/>
-              <a:t>31.08.2026</a:t>
+              <a:t>02.09.2026</a:t>
             </a:fld>
             <a:endParaRPr lang="ru-RU"/>
           </a:p>
@@ -5574,7 +5578,7 @@
           <a:p>
             <a:fld id="{6AC27FFC-58F7-4A0B-910F-2453E6738501}" type="datetimeFigureOut">
               <a:rPr lang="ru-RU" smtClean="0"/>
-              <a:t>31.08.2026</a:t>
+              <a:t>02.09.2026</a:t>
             </a:fld>
             <a:endParaRPr lang="ru-RU"/>
           </a:p>
@@ -6120,7 +6124,7 @@
           <a:p>
             <a:fld id="{6AC27FFC-58F7-4A0B-910F-2453E6738501}" type="datetimeFigureOut">
               <a:rPr lang="ru-RU" smtClean="0"/>
-              <a:t>31.08.2026</a:t>
+              <a:t>02.09.2026</a:t>
             </a:fld>
             <a:endParaRPr lang="ru-RU"/>
           </a:p>
@@ -6840,7 +6844,7 @@
           <a:p>
             <a:fld id="{6AC27FFC-58F7-4A0B-910F-2453E6738501}" type="datetimeFigureOut">
               <a:rPr lang="ru-RU" smtClean="0"/>
-              <a:t>31.08.2026</a:t>
+              <a:t>02.09.2026</a:t>
             </a:fld>
             <a:endParaRPr lang="ru-RU"/>
           </a:p>
@@ -7010,7 +7014,7 @@
           <a:p>
             <a:fld id="{6AC27FFC-58F7-4A0B-910F-2453E6738501}" type="datetimeFigureOut">
               <a:rPr lang="ru-RU" smtClean="0"/>
-              <a:t>31.08.2026</a:t>
+              <a:t>02.09.2026</a:t>
             </a:fld>
             <a:endParaRPr lang="ru-RU"/>
           </a:p>
@@ -7190,7 +7194,7 @@
           <a:p>
             <a:fld id="{6AC27FFC-58F7-4A0B-910F-2453E6738501}" type="datetimeFigureOut">
               <a:rPr lang="ru-RU" smtClean="0"/>
-              <a:t>31.08.2026</a:t>
+              <a:t>02.09.2026</a:t>
             </a:fld>
             <a:endParaRPr lang="ru-RU"/>
           </a:p>
@@ -7360,7 +7364,7 @@
           <a:p>
             <a:fld id="{6AC27FFC-58F7-4A0B-910F-2453E6738501}" type="datetimeFigureOut">
               <a:rPr lang="ru-RU" smtClean="0"/>
-              <a:t>31.08.2026</a:t>
+              <a:t>02.09.2026</a:t>
             </a:fld>
             <a:endParaRPr lang="ru-RU"/>
           </a:p>
@@ -7610,7 +7614,7 @@
           <a:p>
             <a:fld id="{6AC27FFC-58F7-4A0B-910F-2453E6738501}" type="datetimeFigureOut">
               <a:rPr lang="ru-RU" smtClean="0"/>
-              <a:t>31.08.2026</a:t>
+              <a:t>02.09.2026</a:t>
             </a:fld>
             <a:endParaRPr lang="ru-RU"/>
           </a:p>
@@ -7842,7 +7846,7 @@
           <a:p>
             <a:fld id="{6AC27FFC-58F7-4A0B-910F-2453E6738501}" type="datetimeFigureOut">
               <a:rPr lang="ru-RU" smtClean="0"/>
-              <a:t>31.08.2026</a:t>
+              <a:t>02.09.2026</a:t>
             </a:fld>
             <a:endParaRPr lang="ru-RU"/>
           </a:p>
@@ -8223,7 +8227,7 @@
           <a:p>
             <a:fld id="{6AC27FFC-58F7-4A0B-910F-2453E6738501}" type="datetimeFigureOut">
               <a:rPr lang="ru-RU" smtClean="0"/>
-              <a:t>31.08.2026</a:t>
+              <a:t>02.09.2026</a:t>
             </a:fld>
             <a:endParaRPr lang="ru-RU"/>
           </a:p>
@@ -8341,7 +8345,7 @@
           <a:p>
             <a:fld id="{6AC27FFC-58F7-4A0B-910F-2453E6738501}" type="datetimeFigureOut">
               <a:rPr lang="ru-RU" smtClean="0"/>
-              <a:t>31.08.2026</a:t>
+              <a:t>02.09.2026</a:t>
             </a:fld>
             <a:endParaRPr lang="ru-RU"/>
           </a:p>
@@ -8436,7 +8440,7 @@
           <a:p>
             <a:fld id="{6AC27FFC-58F7-4A0B-910F-2453E6738501}" type="datetimeFigureOut">
               <a:rPr lang="ru-RU" smtClean="0"/>
-              <a:t>31.08.2026</a:t>
+              <a:t>02.09.2026</a:t>
             </a:fld>
             <a:endParaRPr lang="ru-RU"/>
           </a:p>
@@ -8685,7 +8689,7 @@
           <a:p>
             <a:fld id="{6AC27FFC-58F7-4A0B-910F-2453E6738501}" type="datetimeFigureOut">
               <a:rPr lang="ru-RU" smtClean="0"/>
-              <a:t>31.08.2026</a:t>
+              <a:t>02.09.2026</a:t>
             </a:fld>
             <a:endParaRPr lang="ru-RU"/>
           </a:p>
@@ -8965,7 +8969,7 @@
           <a:p>
             <a:fld id="{6AC27FFC-58F7-4A0B-910F-2453E6738501}" type="datetimeFigureOut">
               <a:rPr lang="ru-RU" smtClean="0"/>
-              <a:t>31.08.2026</a:t>
+              <a:t>02.09.2026</a:t>
             </a:fld>
             <a:endParaRPr lang="ru-RU"/>
           </a:p>
@@ -9088,7 +9092,7 @@
           <a:noFill/>
           <a:extLst>
             <a:ext uri="{909E8E84-426E-40dd-AFC4-6F175D3DCCD1}">
-              <a14:hiddenFill xmlns:a14="http://schemas.microsoft.com/office/drawing/2010/main" xmlns="">
+              <a14:hiddenFill xmlns="" xmlns:a14="http://schemas.microsoft.com/office/drawing/2010/main">
                 <a:solidFill>
                   <a:srgbClr val="FFFFFF"/>
                 </a:solidFill>
@@ -9162,7 +9166,7 @@
               </a:ln>
               <a:extLst>
                 <a:ext uri="{91240B29-F687-4f45-9708-019B960494DF}">
-                  <a14:hiddenLine xmlns:a14="http://schemas.microsoft.com/office/drawing/2010/main" xmlns="" w="9525">
+                  <a14:hiddenLine xmlns="" xmlns:a14="http://schemas.microsoft.com/office/drawing/2010/main" w="9525">
                     <a:solidFill>
                       <a:srgbClr val="000000"/>
                     </a:solidFill>
@@ -9252,7 +9256,7 @@
               </a:ln>
               <a:extLst>
                 <a:ext uri="{91240B29-F687-4f45-9708-019B960494DF}">
-                  <a14:hiddenLine xmlns:a14="http://schemas.microsoft.com/office/drawing/2010/main" xmlns="" w="9525">
+                  <a14:hiddenLine xmlns="" xmlns:a14="http://schemas.microsoft.com/office/drawing/2010/main" w="9525">
                     <a:solidFill>
                       <a:srgbClr val="000000"/>
                     </a:solidFill>
@@ -9342,7 +9346,7 @@
               </a:ln>
               <a:extLst>
                 <a:ext uri="{91240B29-F687-4f45-9708-019B960494DF}">
-                  <a14:hiddenLine xmlns:a14="http://schemas.microsoft.com/office/drawing/2010/main" xmlns="" w="9525">
+                  <a14:hiddenLine xmlns="" xmlns:a14="http://schemas.microsoft.com/office/drawing/2010/main" w="9525">
                     <a:solidFill>
                       <a:srgbClr val="000000"/>
                     </a:solidFill>
@@ -9404,7 +9408,7 @@
               </a:ln>
               <a:extLst>
                 <a:ext uri="{91240B29-F687-4f45-9708-019B960494DF}">
-                  <a14:hiddenLine xmlns:a14="http://schemas.microsoft.com/office/drawing/2010/main" xmlns="" w="9525">
+                  <a14:hiddenLine xmlns="" xmlns:a14="http://schemas.microsoft.com/office/drawing/2010/main" w="9525">
                     <a:solidFill>
                       <a:srgbClr val="000000"/>
                     </a:solidFill>
@@ -9494,7 +9498,7 @@
               </a:ln>
               <a:extLst>
                 <a:ext uri="{91240B29-F687-4f45-9708-019B960494DF}">
-                  <a14:hiddenLine xmlns:a14="http://schemas.microsoft.com/office/drawing/2010/main" xmlns="" w="9525">
+                  <a14:hiddenLine xmlns="" xmlns:a14="http://schemas.microsoft.com/office/drawing/2010/main" w="9525">
                     <a:solidFill>
                       <a:srgbClr val="000000"/>
                     </a:solidFill>
@@ -9556,7 +9560,7 @@
               </a:ln>
               <a:extLst>
                 <a:ext uri="{91240B29-F687-4f45-9708-019B960494DF}">
-                  <a14:hiddenLine xmlns:a14="http://schemas.microsoft.com/office/drawing/2010/main" xmlns="" w="9525">
+                  <a14:hiddenLine xmlns="" xmlns:a14="http://schemas.microsoft.com/office/drawing/2010/main" w="9525">
                     <a:solidFill>
                       <a:srgbClr val="000000"/>
                     </a:solidFill>
@@ -9618,7 +9622,7 @@
               </a:ln>
               <a:extLst>
                 <a:ext uri="{91240B29-F687-4f45-9708-019B960494DF}">
-                  <a14:hiddenLine xmlns:a14="http://schemas.microsoft.com/office/drawing/2010/main" xmlns="" w="9525">
+                  <a14:hiddenLine xmlns="" xmlns:a14="http://schemas.microsoft.com/office/drawing/2010/main" w="9525">
                     <a:solidFill>
                       <a:srgbClr val="000000"/>
                     </a:solidFill>
@@ -9708,7 +9712,7 @@
               </a:ln>
               <a:extLst>
                 <a:ext uri="{91240B29-F687-4f45-9708-019B960494DF}">
-                  <a14:hiddenLine xmlns:a14="http://schemas.microsoft.com/office/drawing/2010/main" xmlns="" w="9525">
+                  <a14:hiddenLine xmlns="" xmlns:a14="http://schemas.microsoft.com/office/drawing/2010/main" w="9525">
                     <a:solidFill>
                       <a:srgbClr val="000000"/>
                     </a:solidFill>
@@ -9798,7 +9802,7 @@
               </a:ln>
               <a:extLst>
                 <a:ext uri="{91240B29-F687-4f45-9708-019B960494DF}">
-                  <a14:hiddenLine xmlns:a14="http://schemas.microsoft.com/office/drawing/2010/main" xmlns="" w="9525">
+                  <a14:hiddenLine xmlns="" xmlns:a14="http://schemas.microsoft.com/office/drawing/2010/main" w="9525">
                     <a:solidFill>
                       <a:srgbClr val="000000"/>
                     </a:solidFill>
@@ -9860,7 +9864,7 @@
               </a:ln>
               <a:extLst>
                 <a:ext uri="{91240B29-F687-4f45-9708-019B960494DF}">
-                  <a14:hiddenLine xmlns:a14="http://schemas.microsoft.com/office/drawing/2010/main" xmlns="" w="9525">
+                  <a14:hiddenLine xmlns="" xmlns:a14="http://schemas.microsoft.com/office/drawing/2010/main" w="9525">
                     <a:solidFill>
                       <a:srgbClr val="000000"/>
                     </a:solidFill>
@@ -9970,7 +9974,7 @@
               </a:ln>
               <a:extLst>
                 <a:ext uri="{91240B29-F687-4f45-9708-019B960494DF}">
-                  <a14:hiddenLine xmlns:a14="http://schemas.microsoft.com/office/drawing/2010/main" xmlns="" w="9525">
+                  <a14:hiddenLine xmlns="" xmlns:a14="http://schemas.microsoft.com/office/drawing/2010/main" w="9525">
                     <a:solidFill>
                       <a:srgbClr val="000000"/>
                     </a:solidFill>
@@ -10054,7 +10058,7 @@
               </a:ln>
               <a:extLst>
                 <a:ext uri="{91240B29-F687-4f45-9708-019B960494DF}">
-                  <a14:hiddenLine xmlns:a14="http://schemas.microsoft.com/office/drawing/2010/main" xmlns="" w="9525">
+                  <a14:hiddenLine xmlns="" xmlns:a14="http://schemas.microsoft.com/office/drawing/2010/main" w="9525">
                     <a:solidFill>
                       <a:srgbClr val="000000"/>
                     </a:solidFill>
@@ -10116,7 +10120,7 @@
               </a:ln>
               <a:extLst>
                 <a:ext uri="{91240B29-F687-4f45-9708-019B960494DF}">
-                  <a14:hiddenLine xmlns:a14="http://schemas.microsoft.com/office/drawing/2010/main" xmlns="" w="9525">
+                  <a14:hiddenLine xmlns="" xmlns:a14="http://schemas.microsoft.com/office/drawing/2010/main" w="9525">
                     <a:solidFill>
                       <a:srgbClr val="000000"/>
                     </a:solidFill>
@@ -10178,7 +10182,7 @@
               </a:ln>
               <a:extLst>
                 <a:ext uri="{91240B29-F687-4f45-9708-019B960494DF}">
-                  <a14:hiddenLine xmlns:a14="http://schemas.microsoft.com/office/drawing/2010/main" xmlns="" w="9525">
+                  <a14:hiddenLine xmlns="" xmlns:a14="http://schemas.microsoft.com/office/drawing/2010/main" w="9525">
                     <a:solidFill>
                       <a:srgbClr val="000000"/>
                     </a:solidFill>
@@ -10268,7 +10272,7 @@
               </a:ln>
               <a:extLst>
                 <a:ext uri="{91240B29-F687-4f45-9708-019B960494DF}">
-                  <a14:hiddenLine xmlns:a14="http://schemas.microsoft.com/office/drawing/2010/main" xmlns="" w="9525">
+                  <a14:hiddenLine xmlns="" xmlns:a14="http://schemas.microsoft.com/office/drawing/2010/main" w="9525">
                     <a:solidFill>
                       <a:srgbClr val="000000"/>
                     </a:solidFill>
@@ -10302,7 +10306,7 @@
               </a:ln>
               <a:extLst>
                 <a:ext uri="{91240B29-F687-4f45-9708-019B960494DF}">
-                  <a14:hiddenLine xmlns:a14="http://schemas.microsoft.com/office/drawing/2010/main" xmlns="" w="9525">
+                  <a14:hiddenLine xmlns="" xmlns:a14="http://schemas.microsoft.com/office/drawing/2010/main" w="9525">
                     <a:solidFill>
                       <a:srgbClr val="000000"/>
                     </a:solidFill>
@@ -10367,7 +10371,7 @@
               </a:ln>
               <a:extLst>
                 <a:ext uri="{91240B29-F687-4f45-9708-019B960494DF}">
-                  <a14:hiddenLine xmlns:a14="http://schemas.microsoft.com/office/drawing/2010/main" xmlns="" w="9525">
+                  <a14:hiddenLine xmlns="" xmlns:a14="http://schemas.microsoft.com/office/drawing/2010/main" w="9525">
                     <a:solidFill>
                       <a:srgbClr val="000000"/>
                     </a:solidFill>
@@ -10457,7 +10461,7 @@
               </a:ln>
               <a:extLst>
                 <a:ext uri="{91240B29-F687-4f45-9708-019B960494DF}">
-                  <a14:hiddenLine xmlns:a14="http://schemas.microsoft.com/office/drawing/2010/main" xmlns="" w="9525">
+                  <a14:hiddenLine xmlns="" xmlns:a14="http://schemas.microsoft.com/office/drawing/2010/main" w="9525">
                     <a:solidFill>
                       <a:srgbClr val="000000"/>
                     </a:solidFill>
@@ -10519,7 +10523,7 @@
               </a:ln>
               <a:extLst>
                 <a:ext uri="{91240B29-F687-4f45-9708-019B960494DF}">
-                  <a14:hiddenLine xmlns:a14="http://schemas.microsoft.com/office/drawing/2010/main" xmlns="" w="9525">
+                  <a14:hiddenLine xmlns="" xmlns:a14="http://schemas.microsoft.com/office/drawing/2010/main" w="9525">
                     <a:solidFill>
                       <a:srgbClr val="000000"/>
                     </a:solidFill>
@@ -10609,7 +10613,7 @@
               </a:ln>
               <a:extLst>
                 <a:ext uri="{91240B29-F687-4f45-9708-019B960494DF}">
-                  <a14:hiddenLine xmlns:a14="http://schemas.microsoft.com/office/drawing/2010/main" xmlns="" w="9525">
+                  <a14:hiddenLine xmlns="" xmlns:a14="http://schemas.microsoft.com/office/drawing/2010/main" w="9525">
                     <a:solidFill>
                       <a:srgbClr val="000000"/>
                     </a:solidFill>
@@ -10674,7 +10678,7 @@
               </a:ln>
               <a:extLst>
                 <a:ext uri="{91240B29-F687-4f45-9708-019B960494DF}">
-                  <a14:hiddenLine xmlns:a14="http://schemas.microsoft.com/office/drawing/2010/main" xmlns="" w="9525">
+                  <a14:hiddenLine xmlns="" xmlns:a14="http://schemas.microsoft.com/office/drawing/2010/main" w="9525">
                     <a:solidFill>
                       <a:srgbClr val="000000"/>
                     </a:solidFill>
@@ -10736,7 +10740,7 @@
               </a:ln>
               <a:extLst>
                 <a:ext uri="{91240B29-F687-4f45-9708-019B960494DF}">
-                  <a14:hiddenLine xmlns:a14="http://schemas.microsoft.com/office/drawing/2010/main" xmlns="" w="9525">
+                  <a14:hiddenLine xmlns="" xmlns:a14="http://schemas.microsoft.com/office/drawing/2010/main" w="9525">
                     <a:solidFill>
                       <a:srgbClr val="000000"/>
                     </a:solidFill>
@@ -10826,7 +10830,7 @@
               </a:ln>
               <a:extLst>
                 <a:ext uri="{91240B29-F687-4f45-9708-019B960494DF}">
-                  <a14:hiddenLine xmlns:a14="http://schemas.microsoft.com/office/drawing/2010/main" xmlns="" w="9525">
+                  <a14:hiddenLine xmlns="" xmlns:a14="http://schemas.microsoft.com/office/drawing/2010/main" w="9525">
                     <a:solidFill>
                       <a:srgbClr val="000000"/>
                     </a:solidFill>
@@ -10916,7 +10920,7 @@
               </a:ln>
               <a:extLst>
                 <a:ext uri="{91240B29-F687-4f45-9708-019B960494DF}">
-                  <a14:hiddenLine xmlns:a14="http://schemas.microsoft.com/office/drawing/2010/main" xmlns="" w="9525">
+                  <a14:hiddenLine xmlns="" xmlns:a14="http://schemas.microsoft.com/office/drawing/2010/main" w="9525">
                     <a:solidFill>
                       <a:srgbClr val="000000"/>
                     </a:solidFill>
@@ -10981,7 +10985,7 @@
               </a:ln>
               <a:extLst>
                 <a:ext uri="{91240B29-F687-4f45-9708-019B960494DF}">
-                  <a14:hiddenLine xmlns:a14="http://schemas.microsoft.com/office/drawing/2010/main" xmlns="" w="9525">
+                  <a14:hiddenLine xmlns="" xmlns:a14="http://schemas.microsoft.com/office/drawing/2010/main" w="9525">
                     <a:solidFill>
                       <a:srgbClr val="000000"/>
                     </a:solidFill>
@@ -11101,7 +11105,7 @@
               </a:ln>
               <a:extLst>
                 <a:ext uri="{91240B29-F687-4f45-9708-019B960494DF}">
-                  <a14:hiddenLine xmlns:a14="http://schemas.microsoft.com/office/drawing/2010/main" xmlns="" w="9525">
+                  <a14:hiddenLine xmlns="" xmlns:a14="http://schemas.microsoft.com/office/drawing/2010/main" w="9525">
                     <a:solidFill>
                       <a:srgbClr val="000000"/>
                     </a:solidFill>
@@ -11182,7 +11186,7 @@
               </a:ln>
               <a:extLst>
                 <a:ext uri="{91240B29-F687-4f45-9708-019B960494DF}">
-                  <a14:hiddenLine xmlns:a14="http://schemas.microsoft.com/office/drawing/2010/main" xmlns="" w="9525">
+                  <a14:hiddenLine xmlns="" xmlns:a14="http://schemas.microsoft.com/office/drawing/2010/main" w="9525">
                     <a:solidFill>
                       <a:srgbClr val="000000"/>
                     </a:solidFill>
@@ -11297,7 +11301,7 @@
               </a:ln>
               <a:extLst>
                 <a:ext uri="{91240B29-F687-4f45-9708-019B960494DF}">
-                  <a14:hiddenLine xmlns:a14="http://schemas.microsoft.com/office/drawing/2010/main" xmlns="" w="9525">
+                  <a14:hiddenLine xmlns="" xmlns:a14="http://schemas.microsoft.com/office/drawing/2010/main" w="9525">
                     <a:solidFill>
                       <a:srgbClr val="000000"/>
                     </a:solidFill>
@@ -11387,7 +11391,7 @@
               </a:ln>
               <a:extLst>
                 <a:ext uri="{91240B29-F687-4f45-9708-019B960494DF}">
-                  <a14:hiddenLine xmlns:a14="http://schemas.microsoft.com/office/drawing/2010/main" xmlns="" w="9525">
+                  <a14:hiddenLine xmlns="" xmlns:a14="http://schemas.microsoft.com/office/drawing/2010/main" w="9525">
                     <a:solidFill>
                       <a:srgbClr val="000000"/>
                     </a:solidFill>
@@ -11452,7 +11456,7 @@
               </a:ln>
               <a:extLst>
                 <a:ext uri="{91240B29-F687-4f45-9708-019B960494DF}">
-                  <a14:hiddenLine xmlns:a14="http://schemas.microsoft.com/office/drawing/2010/main" xmlns="" w="9525">
+                  <a14:hiddenLine xmlns="" xmlns:a14="http://schemas.microsoft.com/office/drawing/2010/main" w="9525">
                     <a:solidFill>
                       <a:srgbClr val="000000"/>
                     </a:solidFill>
@@ -11542,7 +11546,7 @@
               </a:ln>
               <a:extLst>
                 <a:ext uri="{91240B29-F687-4f45-9708-019B960494DF}">
-                  <a14:hiddenLine xmlns:a14="http://schemas.microsoft.com/office/drawing/2010/main" xmlns="" w="9525">
+                  <a14:hiddenLine xmlns="" xmlns:a14="http://schemas.microsoft.com/office/drawing/2010/main" w="9525">
                     <a:solidFill>
                       <a:srgbClr val="000000"/>
                     </a:solidFill>
@@ -11610,7 +11614,7 @@
               </a:ln>
               <a:extLst>
                 <a:ext uri="{91240B29-F687-4f45-9708-019B960494DF}">
-                  <a14:hiddenLine xmlns:a14="http://schemas.microsoft.com/office/drawing/2010/main" xmlns="" w="9525">
+                  <a14:hiddenLine xmlns="" xmlns:a14="http://schemas.microsoft.com/office/drawing/2010/main" w="9525">
                     <a:solidFill>
                       <a:srgbClr val="000000"/>
                     </a:solidFill>
@@ -11700,7 +11704,7 @@
               </a:ln>
               <a:extLst>
                 <a:ext uri="{91240B29-F687-4f45-9708-019B960494DF}">
-                  <a14:hiddenLine xmlns:a14="http://schemas.microsoft.com/office/drawing/2010/main" xmlns="" w="9525">
+                  <a14:hiddenLine xmlns="" xmlns:a14="http://schemas.microsoft.com/office/drawing/2010/main" w="9525">
                     <a:solidFill>
                       <a:srgbClr val="000000"/>
                     </a:solidFill>
@@ -11768,7 +11772,7 @@
               </a:ln>
               <a:extLst>
                 <a:ext uri="{91240B29-F687-4f45-9708-019B960494DF}">
-                  <a14:hiddenLine xmlns:a14="http://schemas.microsoft.com/office/drawing/2010/main" xmlns="" w="9525">
+                  <a14:hiddenLine xmlns="" xmlns:a14="http://schemas.microsoft.com/office/drawing/2010/main" w="9525">
                     <a:solidFill>
                       <a:srgbClr val="000000"/>
                     </a:solidFill>
@@ -11858,7 +11862,7 @@
               </a:ln>
               <a:extLst>
                 <a:ext uri="{91240B29-F687-4f45-9708-019B960494DF}">
-                  <a14:hiddenLine xmlns:a14="http://schemas.microsoft.com/office/drawing/2010/main" xmlns="" w="9525">
+                  <a14:hiddenLine xmlns="" xmlns:a14="http://schemas.microsoft.com/office/drawing/2010/main" w="9525">
                     <a:solidFill>
                       <a:srgbClr val="000000"/>
                     </a:solidFill>
@@ -11892,7 +11896,7 @@
               </a:ln>
               <a:extLst>
                 <a:ext uri="{91240B29-F687-4f45-9708-019B960494DF}">
-                  <a14:hiddenLine xmlns:a14="http://schemas.microsoft.com/office/drawing/2010/main" xmlns="" w="9525">
+                  <a14:hiddenLine xmlns="" xmlns:a14="http://schemas.microsoft.com/office/drawing/2010/main" w="9525">
                     <a:solidFill>
                       <a:srgbClr val="000000"/>
                     </a:solidFill>
@@ -12032,7 +12036,7 @@
           <a:p>
             <a:fld id="{6AC27FFC-58F7-4A0B-910F-2453E6738501}" type="datetimeFigureOut">
               <a:rPr lang="ru-RU" smtClean="0"/>
-              <a:t>31.08.2026</a:t>
+              <a:t>02.09.2026</a:t>
             </a:fld>
             <a:endParaRPr lang="ru-RU"/>
           </a:p>
@@ -12519,6 +12523,262 @@
       </p:grpSpPr>
       <p:sp>
         <p:nvSpPr>
+          <p:cNvPr id="3" name="Объект 2"/>
+          <p:cNvSpPr>
+            <a:spLocks noGrp="1"/>
+          </p:cNvSpPr>
+          <p:nvPr>
+            <p:ph idx="1"/>
+          </p:nvPr>
+        </p:nvSpPr>
+        <p:spPr>
+          <a:xfrm>
+            <a:off x="976312" y="357186"/>
+            <a:ext cx="10821988" cy="6157913"/>
+          </a:xfrm>
+        </p:spPr>
+        <p:txBody>
+          <a:bodyPr>
+            <a:normAutofit fontScale="92500"/>
+          </a:bodyPr>
+          <a:lstStyle/>
+          <a:p>
+            <a:r>
+              <a:rPr lang="ru-RU" b="1" dirty="0"/>
+              <a:t>Физический (</a:t>
+            </a:r>
+            <a:r>
+              <a:rPr lang="ru-RU" b="1" dirty="0" err="1"/>
+              <a:t>Physical</a:t>
+            </a:r>
+            <a:r>
+              <a:rPr lang="ru-RU" b="1" dirty="0"/>
+              <a:t>):</a:t>
+            </a:r>
+            <a:r>
+              <a:rPr lang="ru-RU" dirty="0"/>
+              <a:t> передача неструктурированного потока сырых бит по среде.</a:t>
+            </a:r>
+          </a:p>
+          <a:p>
+            <a:r>
+              <a:rPr lang="ru-RU" b="1" dirty="0"/>
+              <a:t>Канальный (</a:t>
+            </a:r>
+            <a:r>
+              <a:rPr lang="ru-RU" b="1" dirty="0" err="1"/>
+              <a:t>Data</a:t>
+            </a:r>
+            <a:r>
+              <a:rPr lang="ru-RU" b="1" dirty="0"/>
+              <a:t> </a:t>
+            </a:r>
+            <a:r>
+              <a:rPr lang="ru-RU" b="1" dirty="0" err="1"/>
+              <a:t>Link</a:t>
+            </a:r>
+            <a:r>
+              <a:rPr lang="ru-RU" b="1" dirty="0"/>
+              <a:t>):</a:t>
+            </a:r>
+            <a:r>
+              <a:rPr lang="ru-RU" dirty="0"/>
+              <a:t> передача </a:t>
+            </a:r>
+            <a:r>
+              <a:rPr lang="ru-RU" b="1" dirty="0"/>
+              <a:t>кадров (</a:t>
+            </a:r>
+            <a:r>
+              <a:rPr lang="ru-RU" b="1" dirty="0" err="1"/>
+              <a:t>frames</a:t>
+            </a:r>
+            <a:r>
+              <a:rPr lang="ru-RU" b="1" dirty="0"/>
+              <a:t>)</a:t>
+            </a:r>
+            <a:r>
+              <a:rPr lang="ru-RU" dirty="0"/>
+              <a:t> в пределах одного сегмента сети, обнаружение ошибок, MAC-адресация.</a:t>
+            </a:r>
+          </a:p>
+          <a:p>
+            <a:r>
+              <a:rPr lang="ru-RU" b="1" dirty="0"/>
+              <a:t>Сетевой (</a:t>
+            </a:r>
+            <a:r>
+              <a:rPr lang="ru-RU" b="1" dirty="0" err="1"/>
+              <a:t>Network</a:t>
+            </a:r>
+            <a:r>
+              <a:rPr lang="ru-RU" b="1" dirty="0"/>
+              <a:t>):</a:t>
+            </a:r>
+            <a:r>
+              <a:rPr lang="ru-RU" dirty="0"/>
+              <a:t> сквозная маршрутизация </a:t>
+            </a:r>
+            <a:r>
+              <a:rPr lang="ru-RU" b="1" dirty="0"/>
+              <a:t>пакетов (</a:t>
+            </a:r>
+            <a:r>
+              <a:rPr lang="ru-RU" b="1" dirty="0" err="1"/>
+              <a:t>packets</a:t>
+            </a:r>
+            <a:r>
+              <a:rPr lang="ru-RU" b="1" dirty="0"/>
+              <a:t>)</a:t>
+            </a:r>
+            <a:r>
+              <a:rPr lang="ru-RU" dirty="0"/>
+              <a:t> между сетями, логическая адресация (IP).</a:t>
+            </a:r>
+          </a:p>
+          <a:p>
+            <a:r>
+              <a:rPr lang="ru-RU" b="1" dirty="0"/>
+              <a:t>Транспортный (</a:t>
+            </a:r>
+            <a:r>
+              <a:rPr lang="ru-RU" b="1" dirty="0" err="1"/>
+              <a:t>Transport</a:t>
+            </a:r>
+            <a:r>
+              <a:rPr lang="ru-RU" b="1" dirty="0"/>
+              <a:t>):</a:t>
+            </a:r>
+            <a:r>
+              <a:rPr lang="ru-RU" dirty="0"/>
+              <a:t> передача </a:t>
+            </a:r>
+            <a:r>
+              <a:rPr lang="ru-RU" b="1" dirty="0"/>
+              <a:t>сегментов (</a:t>
+            </a:r>
+            <a:r>
+              <a:rPr lang="ru-RU" b="1" dirty="0" err="1"/>
+              <a:t>segments</a:t>
+            </a:r>
+            <a:r>
+              <a:rPr lang="ru-RU" b="1" dirty="0"/>
+              <a:t>) / дейтаграмм</a:t>
+            </a:r>
+            <a:r>
+              <a:rPr lang="ru-RU" dirty="0"/>
+              <a:t> между процессами хостов (</a:t>
+            </a:r>
+            <a:r>
+              <a:rPr lang="ru-RU" dirty="0" err="1"/>
+              <a:t>end-to-end</a:t>
+            </a:r>
+            <a:r>
+              <a:rPr lang="ru-RU" dirty="0"/>
+              <a:t>).</a:t>
+            </a:r>
+          </a:p>
+          <a:p>
+            <a:r>
+              <a:rPr lang="ru-RU" b="1" dirty="0"/>
+              <a:t>Сеансовый (</a:t>
+            </a:r>
+            <a:r>
+              <a:rPr lang="ru-RU" b="1" dirty="0" err="1"/>
+              <a:t>Session</a:t>
+            </a:r>
+            <a:r>
+              <a:rPr lang="ru-RU" b="1" dirty="0"/>
+              <a:t>):</a:t>
+            </a:r>
+            <a:r>
+              <a:rPr lang="ru-RU" dirty="0"/>
+              <a:t> управление сессиями и диалогами между приложениями.</a:t>
+            </a:r>
+          </a:p>
+          <a:p>
+            <a:r>
+              <a:rPr lang="ru-RU" b="1" dirty="0"/>
+              <a:t>Уровень представления (</a:t>
+            </a:r>
+            <a:r>
+              <a:rPr lang="ru-RU" b="1" dirty="0" err="1"/>
+              <a:t>Presentation</a:t>
+            </a:r>
+            <a:r>
+              <a:rPr lang="ru-RU" b="1" dirty="0"/>
+              <a:t>):</a:t>
+            </a:r>
+            <a:r>
+              <a:rPr lang="ru-RU" dirty="0"/>
+              <a:t> кодирование, сжатие, шифрование и форматирование данных.</a:t>
+            </a:r>
+          </a:p>
+          <a:p>
+            <a:r>
+              <a:rPr lang="ru-RU" b="1" dirty="0"/>
+              <a:t>Прикладной (</a:t>
+            </a:r>
+            <a:r>
+              <a:rPr lang="ru-RU" b="1" dirty="0" err="1"/>
+              <a:t>Application</a:t>
+            </a:r>
+            <a:r>
+              <a:rPr lang="ru-RU" b="1" dirty="0"/>
+              <a:t>):</a:t>
+            </a:r>
+            <a:r>
+              <a:rPr lang="ru-RU" dirty="0"/>
+              <a:t> интерфейс взаимодействия пользовательских программ с сетью (HTTP, FTP, DNS).</a:t>
+            </a:r>
+          </a:p>
+          <a:p>
+            <a:pPr marL="0" indent="0">
+              <a:buNone/>
+            </a:pPr>
+            <a:endParaRPr lang="ru-RU" dirty="0"/>
+          </a:p>
+        </p:txBody>
+      </p:sp>
+    </p:spTree>
+    <p:extLst>
+      <p:ext uri="{BB962C8B-B14F-4D97-AF65-F5344CB8AC3E}">
+        <p14:creationId xmlns:p14="http://schemas.microsoft.com/office/powerpoint/2010/main" val="3241851205"/>
+      </p:ext>
+    </p:extLst>
+  </p:cSld>
+  <p:clrMapOvr>
+    <a:masterClrMapping/>
+  </p:clrMapOvr>
+  <p:timing>
+    <p:tnLst>
+      <p:par>
+        <p:cTn id="1" dur="indefinite" restart="never" nodeType="tmRoot"/>
+      </p:par>
+    </p:tnLst>
+  </p:timing>
+</p:sld>
+</file>
+
+<file path=ppt/slides/slide11.xml><?xml version="1.0" encoding="utf-8"?>
+<p:sld xmlns:a="http://schemas.openxmlformats.org/drawingml/2006/main" xmlns:r="http://schemas.openxmlformats.org/officeDocument/2006/relationships" xmlns:p="http://schemas.openxmlformats.org/presentationml/2006/main">
+  <p:cSld>
+    <p:spTree>
+      <p:nvGrpSpPr>
+        <p:cNvPr id="1" name=""/>
+        <p:cNvGrpSpPr/>
+        <p:nvPr/>
+      </p:nvGrpSpPr>
+      <p:grpSpPr>
+        <a:xfrm>
+          <a:off x="0" y="0"/>
+          <a:ext cx="0" cy="0"/>
+          <a:chOff x="0" y="0"/>
+          <a:chExt cx="0" cy="0"/>
+        </a:xfrm>
+      </p:grpSpPr>
+      <p:sp>
+        <p:nvSpPr>
           <p:cNvPr id="2" name="Заголовок 1"/>
           <p:cNvSpPr>
             <a:spLocks noGrp="1"/>
@@ -12762,7 +13022,7 @@
 </p:sld>
 </file>
 
-<file path=ppt/slides/slide11.xml><?xml version="1.0" encoding="utf-8"?>
+<file path=ppt/slides/slide12.xml><?xml version="1.0" encoding="utf-8"?>
 <p:sld xmlns:a="http://schemas.openxmlformats.org/drawingml/2006/main" xmlns:r="http://schemas.openxmlformats.org/officeDocument/2006/relationships" xmlns:p="http://schemas.openxmlformats.org/presentationml/2006/main">
   <p:cSld>
     <p:spTree>
@@ -12906,136 +13166,6 @@
     <p:extLst>
       <p:ext uri="{BB962C8B-B14F-4D97-AF65-F5344CB8AC3E}">
         <p14:creationId xmlns:p14="http://schemas.microsoft.com/office/powerpoint/2010/main" val="3195823794"/>
-      </p:ext>
-    </p:extLst>
-  </p:cSld>
-  <p:clrMapOvr>
-    <a:masterClrMapping/>
-  </p:clrMapOvr>
-</p:sld>
-</file>
-
-<file path=ppt/slides/slide12.xml><?xml version="1.0" encoding="utf-8"?>
-<p:sld xmlns:a="http://schemas.openxmlformats.org/drawingml/2006/main" xmlns:r="http://schemas.openxmlformats.org/officeDocument/2006/relationships" xmlns:p="http://schemas.openxmlformats.org/presentationml/2006/main">
-  <p:cSld>
-    <p:spTree>
-      <p:nvGrpSpPr>
-        <p:cNvPr id="1" name=""/>
-        <p:cNvGrpSpPr/>
-        <p:nvPr/>
-      </p:nvGrpSpPr>
-      <p:grpSpPr>
-        <a:xfrm>
-          <a:off x="0" y="0"/>
-          <a:ext cx="0" cy="0"/>
-          <a:chOff x="0" y="0"/>
-          <a:chExt cx="0" cy="0"/>
-        </a:xfrm>
-      </p:grpSpPr>
-      <p:sp>
-        <p:nvSpPr>
-          <p:cNvPr id="2" name="Заголовок 1"/>
-          <p:cNvSpPr>
-            <a:spLocks noGrp="1"/>
-          </p:cNvSpPr>
-          <p:nvPr>
-            <p:ph type="title"/>
-          </p:nvPr>
-        </p:nvSpPr>
-        <p:spPr/>
-        <p:txBody>
-          <a:bodyPr>
-            <a:normAutofit/>
-          </a:bodyPr>
-          <a:lstStyle/>
-          <a:p>
-            <a:r>
-              <a:rPr lang="ru-RU" b="1" dirty="0"/>
-              <a:t>Производительность сети: Скорость </a:t>
-            </a:r>
-            <a:r>
-              <a:rPr lang="ru-RU" b="1" dirty="0" smtClean="0"/>
-              <a:t>передачи</a:t>
-            </a:r>
-            <a:endParaRPr lang="ru-RU" dirty="0"/>
-          </a:p>
-        </p:txBody>
-      </p:sp>
-      <p:sp>
-        <p:nvSpPr>
-          <p:cNvPr id="3" name="Объект 2"/>
-          <p:cNvSpPr>
-            <a:spLocks noGrp="1"/>
-          </p:cNvSpPr>
-          <p:nvPr>
-            <p:ph idx="1"/>
-          </p:nvPr>
-        </p:nvSpPr>
-        <p:spPr/>
-        <p:txBody>
-          <a:bodyPr>
-            <a:normAutofit lnSpcReduction="10000"/>
-          </a:bodyPr>
-          <a:lstStyle/>
-          <a:p>
-            <a:r>
-              <a:rPr lang="ru-RU" b="1" dirty="0" err="1"/>
-              <a:t>Bandwidth</a:t>
-            </a:r>
-            <a:r>
-              <a:rPr lang="ru-RU" b="1" dirty="0"/>
-              <a:t> (Ширина пропускания):</a:t>
-            </a:r>
-            <a:endParaRPr lang="ru-RU" dirty="0"/>
-          </a:p>
-          <a:p>
-            <a:pPr lvl="1"/>
-            <a:r>
-              <a:rPr lang="ru-RU" dirty="0"/>
-              <a:t>Теоретический предел среды передачи (бит/с).</a:t>
-            </a:r>
-          </a:p>
-          <a:p>
-            <a:pPr lvl="1"/>
-            <a:r>
-              <a:rPr lang="ru-RU" dirty="0"/>
-              <a:t>Соотношение: 1 Гбит/с=1000 Мбит/с=106 Кбит/с=109 бит/с1 Гбит/с=1000 Мбит/с=106 Кбит/с=109 бит/с.</a:t>
-            </a:r>
-          </a:p>
-          <a:p>
-            <a:r>
-              <a:rPr lang="ru-RU" b="1" dirty="0" err="1"/>
-              <a:t>Throughput</a:t>
-            </a:r>
-            <a:r>
-              <a:rPr lang="ru-RU" b="1" dirty="0"/>
-              <a:t> (Полезная / реальная пропускная способность):</a:t>
-            </a:r>
-            <a:endParaRPr lang="ru-RU" dirty="0"/>
-          </a:p>
-          <a:p>
-            <a:pPr lvl="1"/>
-            <a:r>
-              <a:rPr lang="ru-RU" dirty="0"/>
-              <a:t>Объём полезных данных, доставленных в единицу времени.</a:t>
-            </a:r>
-          </a:p>
-          <a:p>
-            <a:pPr lvl="1"/>
-            <a:r>
-              <a:rPr lang="ru-RU" dirty="0"/>
-              <a:t>Всегда меньше ширины канала из-за служебных заголовков, коллизий и задержек.</a:t>
-            </a:r>
-          </a:p>
-          <a:p>
-            <a:endParaRPr lang="ru-RU" dirty="0"/>
-          </a:p>
-        </p:txBody>
-      </p:sp>
-    </p:spTree>
-    <p:extLst>
-      <p:ext uri="{BB962C8B-B14F-4D97-AF65-F5344CB8AC3E}">
-        <p14:creationId xmlns:p14="http://schemas.microsoft.com/office/powerpoint/2010/main" val="4246593416"/>
       </p:ext>
     </p:extLst>
   </p:cSld>
@@ -13074,151 +13204,64 @@
         </p:nvSpPr>
         <p:spPr/>
         <p:txBody>
-          <a:bodyPr>
-            <a:normAutofit/>
-          </a:bodyPr>
+          <a:bodyPr/>
           <a:lstStyle/>
           <a:p>
             <a:r>
-              <a:rPr lang="ru-RU" b="1" dirty="0"/>
-              <a:t>Производительность сети: </a:t>
-            </a:r>
-            <a:r>
-              <a:rPr lang="ru-RU" b="1" dirty="0" err="1"/>
-              <a:t>Временны́е</a:t>
-            </a:r>
-            <a:r>
-              <a:rPr lang="ru-RU" b="1" dirty="0"/>
-              <a:t> </a:t>
-            </a:r>
-            <a:r>
-              <a:rPr lang="ru-RU" b="1" dirty="0" smtClean="0"/>
-              <a:t>характеристики</a:t>
+              <a:rPr lang="ru-RU" dirty="0" smtClean="0"/>
+              <a:t>Стек протоколов</a:t>
             </a:r>
             <a:endParaRPr lang="ru-RU" dirty="0"/>
           </a:p>
         </p:txBody>
       </p:sp>
-      <p:sp>
-        <p:nvSpPr>
-          <p:cNvPr id="3" name="Объект 2"/>
-          <p:cNvSpPr>
-            <a:spLocks noGrp="1"/>
-          </p:cNvSpPr>
+      <p:pic>
+        <p:nvPicPr>
+          <p:cNvPr id="3074" name="Picture 2" descr="Стандартные стеки коммуникационных протоколов"/>
+          <p:cNvPicPr>
+            <a:picLocks noGrp="1" noChangeAspect="1" noChangeArrowheads="1"/>
+          </p:cNvPicPr>
           <p:nvPr>
             <p:ph idx="1"/>
           </p:nvPr>
-        </p:nvSpPr>
-        <p:spPr/>
-        <p:txBody>
-          <a:bodyPr/>
-          <a:lstStyle/>
-          <a:p>
-            <a:r>
-              <a:rPr lang="ru-RU" b="1" dirty="0" err="1"/>
-              <a:t>Latency</a:t>
-            </a:r>
-            <a:r>
-              <a:rPr lang="ru-RU" b="1" dirty="0"/>
-              <a:t> / </a:t>
-            </a:r>
-            <a:r>
-              <a:rPr lang="ru-RU" b="1" dirty="0" err="1"/>
-              <a:t>Delay</a:t>
-            </a:r>
-            <a:r>
-              <a:rPr lang="ru-RU" b="1" dirty="0"/>
-              <a:t> (Задержка):</a:t>
-            </a:r>
-            <a:r>
-              <a:rPr lang="ru-RU" dirty="0"/>
-              <a:t> время перемещения пакета от источника к приёмнику (</a:t>
-            </a:r>
-            <a:r>
-              <a:rPr lang="ru-RU" dirty="0" err="1"/>
-              <a:t>мс</a:t>
-            </a:r>
-            <a:r>
-              <a:rPr lang="ru-RU" dirty="0"/>
-              <a:t>).</a:t>
-            </a:r>
-          </a:p>
-          <a:p>
-            <a:r>
-              <a:rPr lang="ru-RU" b="1" dirty="0"/>
-              <a:t>RTT (</a:t>
-            </a:r>
-            <a:r>
-              <a:rPr lang="ru-RU" b="1" dirty="0" err="1"/>
-              <a:t>Round-Trip</a:t>
-            </a:r>
-            <a:r>
-              <a:rPr lang="ru-RU" b="1" dirty="0"/>
-              <a:t> </a:t>
-            </a:r>
-            <a:r>
-              <a:rPr lang="ru-RU" b="1" dirty="0" err="1"/>
-              <a:t>Time</a:t>
-            </a:r>
-            <a:r>
-              <a:rPr lang="ru-RU" b="1" dirty="0"/>
-              <a:t>):</a:t>
-            </a:r>
-            <a:r>
-              <a:rPr lang="ru-RU" dirty="0"/>
-              <a:t> суммарное время доставки пакета до цели и возврата ответа обратно.</a:t>
-            </a:r>
-          </a:p>
-          <a:p>
-            <a:r>
-              <a:rPr lang="ru-RU" b="1" dirty="0" err="1"/>
-              <a:t>Jitter</a:t>
-            </a:r>
-            <a:r>
-              <a:rPr lang="ru-RU" b="1" dirty="0"/>
-              <a:t> (</a:t>
-            </a:r>
-            <a:r>
-              <a:rPr lang="ru-RU" b="1" dirty="0" err="1"/>
-              <a:t>Джиттер</a:t>
-            </a:r>
-            <a:r>
-              <a:rPr lang="ru-RU" b="1" dirty="0"/>
-              <a:t>):</a:t>
-            </a:r>
-            <a:endParaRPr lang="ru-RU" dirty="0"/>
-          </a:p>
-          <a:p>
-            <a:pPr lvl="1"/>
-            <a:r>
-              <a:rPr lang="ru-RU" dirty="0"/>
-              <a:t>Колебание задержки последовательно идущих пакетов.</a:t>
-            </a:r>
-          </a:p>
-          <a:p>
-            <a:pPr lvl="1"/>
-            <a:r>
-              <a:rPr lang="ru-RU" dirty="0"/>
-              <a:t>Критически важен для потокового медиа (видеосвязь, </a:t>
-            </a:r>
-            <a:r>
-              <a:rPr lang="ru-RU" dirty="0" err="1"/>
-              <a:t>VoIP</a:t>
-            </a:r>
-            <a:r>
-              <a:rPr lang="ru-RU" dirty="0"/>
-              <a:t>, онлайн-игры).</a:t>
-            </a:r>
-          </a:p>
-          <a:p>
-            <a:endParaRPr lang="ru-RU" dirty="0"/>
-          </a:p>
-        </p:txBody>
-      </p:sp>
+        </p:nvPicPr>
+        <p:blipFill>
+          <a:blip r:embed="rId2">
+            <a:extLst>
+              <a:ext uri="{28A0092B-C50C-407E-A947-70E740481C1C}">
+                <a14:useLocalDpi xmlns:a14="http://schemas.microsoft.com/office/drawing/2010/main" val="0"/>
+              </a:ext>
+            </a:extLst>
+          </a:blip>
+          <a:srcRect/>
+          <a:stretch>
+            <a:fillRect/>
+          </a:stretch>
+        </p:blipFill>
+        <p:spPr bwMode="auto">
+          <a:xfrm>
+            <a:off x="2207204" y="1873575"/>
+            <a:ext cx="7774415" cy="4627628"/>
+          </a:xfrm>
+          <a:prstGeom prst="rect">
+            <a:avLst/>
+          </a:prstGeom>
+          <a:noFill/>
+          <a:extLst>
+            <a:ext uri="{909E8E84-426E-40DD-AFC4-6F175D3DCCD1}">
+              <a14:hiddenFill xmlns:a14="http://schemas.microsoft.com/office/drawing/2010/main">
+                <a:solidFill>
+                  <a:srgbClr val="FFFFFF"/>
+                </a:solidFill>
+              </a14:hiddenFill>
+            </a:ext>
+          </a:extLst>
+        </p:spPr>
+      </p:pic>
     </p:spTree>
     <p:extLst>
       <p:ext uri="{BB962C8B-B14F-4D97-AF65-F5344CB8AC3E}">
-        <p14:creationId xmlns:p14="http://schemas.microsoft.com/office/powerpoint/2010/main" val="1538228521"/>
+        <p14:creationId xmlns:p14="http://schemas.microsoft.com/office/powerpoint/2010/main" val="2957024104"/>
       </p:ext>
     </p:extLst>
   </p:cSld>
@@ -13247,6 +13290,35 @@
       </p:grpSpPr>
       <p:sp>
         <p:nvSpPr>
+          <p:cNvPr id="2" name="Заголовок 1"/>
+          <p:cNvSpPr>
+            <a:spLocks noGrp="1"/>
+          </p:cNvSpPr>
+          <p:nvPr>
+            <p:ph type="title"/>
+          </p:nvPr>
+        </p:nvSpPr>
+        <p:spPr/>
+        <p:txBody>
+          <a:bodyPr>
+            <a:normAutofit/>
+          </a:bodyPr>
+          <a:lstStyle/>
+          <a:p>
+            <a:r>
+              <a:rPr lang="ru-RU" b="1" dirty="0"/>
+              <a:t>Производительность сети: Скорость </a:t>
+            </a:r>
+            <a:r>
+              <a:rPr lang="ru-RU" b="1" dirty="0" smtClean="0"/>
+              <a:t>передачи</a:t>
+            </a:r>
+            <a:endParaRPr lang="ru-RU" dirty="0"/>
+          </a:p>
+        </p:txBody>
+      </p:sp>
+      <p:sp>
+        <p:nvSpPr>
           <p:cNvPr id="3" name="Объект 2"/>
           <p:cNvSpPr>
             <a:spLocks noGrp="1"/>
@@ -13255,12 +13327,7 @@
             <p:ph idx="1"/>
           </p:nvPr>
         </p:nvSpPr>
-        <p:spPr>
-          <a:xfrm>
-            <a:off x="1014412" y="865186"/>
-            <a:ext cx="10339388" cy="5357813"/>
-          </a:xfrm>
-        </p:spPr>
+        <p:spPr/>
         <p:txBody>
           <a:bodyPr>
             <a:normAutofit lnSpcReduction="10000"/>
@@ -13273,11 +13340,22 @@
             </a:r>
             <a:r>
               <a:rPr lang="ru-RU" b="1" dirty="0"/>
-              <a:t> (Ширина канала / теоретическая пропускная способность):</a:t>
-            </a:r>
+              <a:t> (Ширина пропускания):</a:t>
+            </a:r>
+            <a:endParaRPr lang="ru-RU" dirty="0"/>
+          </a:p>
+          <a:p>
+            <a:pPr lvl="1"/>
             <a:r>
               <a:rPr lang="ru-RU" dirty="0"/>
-              <a:t> максимальный теоретический объём данных, который среда может пропустить за единицу времени (бит/с).</a:t>
+              <a:t>Теоретический предел среды передачи (бит/с).</a:t>
+            </a:r>
+          </a:p>
+          <a:p>
+            <a:pPr lvl="1"/>
+            <a:r>
+              <a:rPr lang="ru-RU" dirty="0"/>
+              <a:t>Соотношение: 1 Гбит/с=1000 Мбит/с=106 Кбит/с=109 бит/с1 Гбит/с=1000 Мбит/с=106 Кбит/с=109 бит/с.</a:t>
             </a:r>
           </a:p>
           <a:p>
@@ -13287,89 +13365,22 @@
             </a:r>
             <a:r>
               <a:rPr lang="ru-RU" b="1" dirty="0"/>
-              <a:t> (Реальная пропускная способность):</a:t>
-            </a:r>
+              <a:t> (Полезная / реальная пропускная способность):</a:t>
+            </a:r>
+            <a:endParaRPr lang="ru-RU" dirty="0"/>
+          </a:p>
+          <a:p>
+            <a:pPr lvl="1"/>
             <a:r>
               <a:rPr lang="ru-RU" dirty="0"/>
-              <a:t> фактическая скорость успешной передачи данных с учётом накладных расходов, задержек и ошибок.</a:t>
-            </a:r>
-          </a:p>
-          <a:p>
-            <a:r>
-              <a:rPr lang="ru-RU" b="1" dirty="0" err="1"/>
-              <a:t>Latency</a:t>
-            </a:r>
-            <a:r>
-              <a:rPr lang="ru-RU" b="1" dirty="0"/>
-              <a:t> / </a:t>
-            </a:r>
-            <a:r>
-              <a:rPr lang="ru-RU" b="1" dirty="0" err="1"/>
-              <a:t>Delay</a:t>
-            </a:r>
-            <a:r>
-              <a:rPr lang="ru-RU" b="1" dirty="0"/>
-              <a:t> (Задержка):</a:t>
-            </a:r>
+              <a:t>Объём полезных данных, доставленных в единицу времени.</a:t>
+            </a:r>
+          </a:p>
+          <a:p>
+            <a:pPr lvl="1"/>
             <a:r>
               <a:rPr lang="ru-RU" dirty="0"/>
-              <a:t> время доставки данных от отправителя к получателю.</a:t>
-            </a:r>
-          </a:p>
-          <a:p>
-            <a:r>
-              <a:rPr lang="ru-RU" b="1" dirty="0"/>
-              <a:t>RTT (</a:t>
-            </a:r>
-            <a:r>
-              <a:rPr lang="ru-RU" b="1" dirty="0" err="1"/>
-              <a:t>Round</a:t>
-            </a:r>
-            <a:r>
-              <a:rPr lang="ru-RU" b="1" dirty="0"/>
-              <a:t> </a:t>
-            </a:r>
-            <a:r>
-              <a:rPr lang="ru-RU" b="1" dirty="0" err="1"/>
-              <a:t>Trip</a:t>
-            </a:r>
-            <a:r>
-              <a:rPr lang="ru-RU" b="1" dirty="0"/>
-              <a:t> </a:t>
-            </a:r>
-            <a:r>
-              <a:rPr lang="ru-RU" b="1" dirty="0" err="1"/>
-              <a:t>Time</a:t>
-            </a:r>
-            <a:r>
-              <a:rPr lang="ru-RU" b="1" dirty="0"/>
-              <a:t>):</a:t>
-            </a:r>
-            <a:r>
-              <a:rPr lang="ru-RU" dirty="0"/>
-              <a:t> время полного оборота пакета (туда и обратно).</a:t>
-            </a:r>
-          </a:p>
-          <a:p>
-            <a:r>
-              <a:rPr lang="ru-RU" b="1" dirty="0" err="1"/>
-              <a:t>Джиттер</a:t>
-            </a:r>
-            <a:r>
-              <a:rPr lang="ru-RU" b="1" dirty="0"/>
-              <a:t> (</a:t>
-            </a:r>
-            <a:r>
-              <a:rPr lang="ru-RU" b="1" dirty="0" err="1"/>
-              <a:t>Jitter</a:t>
-            </a:r>
-            <a:r>
-              <a:rPr lang="ru-RU" b="1" dirty="0"/>
-              <a:t>):</a:t>
-            </a:r>
-            <a:r>
-              <a:rPr lang="ru-RU" dirty="0"/>
-              <a:t> вариация (колебание) задержки пакетов в потоке относительно друг друга.</a:t>
+              <a:t>Всегда меньше ширины канала из-за служебных заголовков, коллизий и задержек.</a:t>
             </a:r>
           </a:p>
           <a:p>
@@ -13380,7 +13391,7 @@
     </p:spTree>
     <p:extLst>
       <p:ext uri="{BB962C8B-B14F-4D97-AF65-F5344CB8AC3E}">
-        <p14:creationId xmlns:p14="http://schemas.microsoft.com/office/powerpoint/2010/main" val="883577798"/>
+        <p14:creationId xmlns:p14="http://schemas.microsoft.com/office/powerpoint/2010/main" val="4246593416"/>
       </p:ext>
     </p:extLst>
   </p:cSld>
@@ -13419,148 +13430,84 @@
         </p:nvSpPr>
         <p:spPr/>
         <p:txBody>
-          <a:bodyPr>
-            <a:normAutofit fontScale="90000"/>
-          </a:bodyPr>
+          <a:bodyPr/>
           <a:lstStyle/>
           <a:p>
             <a:r>
-              <a:rPr lang="ru-RU" b="1" dirty="0"/>
-              <a:t>«Путь конверта» (Инкапсуляция)</a:t>
-            </a:r>
-            <a:br>
-              <a:rPr lang="ru-RU" b="1" dirty="0"/>
-            </a:br>
-            <a:r>
-              <a:rPr lang="ru-RU" i="1" dirty="0"/>
-              <a:t>Формат: расставьте шаги в правильном порядке от отправки до получения.</a:t>
-            </a:r>
-            <a:r>
-              <a:rPr lang="ru-RU" dirty="0"/>
-              <a:t/>
-            </a:r>
-            <a:br>
-              <a:rPr lang="ru-RU" dirty="0"/>
-            </a:br>
+              <a:rPr lang="ru-RU" dirty="0" smtClean="0"/>
+              <a:t>Разница между </a:t>
+            </a:r>
+            <a:r>
+              <a:rPr lang="ru-RU" b="1" dirty="0" err="1" smtClean="0"/>
+              <a:t>Bandwidth</a:t>
+            </a:r>
+            <a:r>
+              <a:rPr lang="ru-RU" b="1" dirty="0" smtClean="0"/>
+              <a:t> </a:t>
+            </a:r>
+            <a:r>
+              <a:rPr lang="ru-RU" dirty="0" smtClean="0"/>
+              <a:t>и </a:t>
+            </a:r>
+            <a:r>
+              <a:rPr lang="ru-RU" b="1" dirty="0" err="1"/>
+              <a:t>Throughput</a:t>
+            </a:r>
+            <a:r>
+              <a:rPr lang="ru-RU" dirty="0" smtClean="0"/>
+              <a:t> </a:t>
+            </a:r>
             <a:endParaRPr lang="ru-RU" dirty="0"/>
           </a:p>
         </p:txBody>
       </p:sp>
-      <p:sp>
-        <p:nvSpPr>
-          <p:cNvPr id="3" name="Объект 2"/>
-          <p:cNvSpPr>
-            <a:spLocks noGrp="1"/>
-          </p:cNvSpPr>
+      <p:pic>
+        <p:nvPicPr>
+          <p:cNvPr id="1026" name="Picture 2" descr="Bandwidth, Latency and Throughput | NetworkAcademy.IO"/>
+          <p:cNvPicPr>
+            <a:picLocks noGrp="1" noChangeAspect="1" noChangeArrowheads="1"/>
+          </p:cNvPicPr>
           <p:nvPr>
             <p:ph idx="1"/>
           </p:nvPr>
-        </p:nvSpPr>
-        <p:spPr/>
-        <p:txBody>
-          <a:bodyPr>
-            <a:normAutofit fontScale="92500" lnSpcReduction="20000"/>
-          </a:bodyPr>
-          <a:lstStyle/>
-          <a:p>
-            <a:r>
-              <a:rPr lang="ru-RU" b="1" dirty="0"/>
-              <a:t>А)</a:t>
-            </a:r>
-            <a:r>
-              <a:rPr lang="ru-RU" dirty="0"/>
-              <a:t> Канальный уровень добавляет заголовок и </a:t>
-            </a:r>
-            <a:r>
-              <a:rPr lang="ru-RU" dirty="0" err="1"/>
-              <a:t>концевик</a:t>
-            </a:r>
-            <a:r>
-              <a:rPr lang="ru-RU" dirty="0"/>
-              <a:t> (трейлер), формируя </a:t>
-            </a:r>
-            <a:r>
-              <a:rPr lang="ru-RU" i="1" dirty="0"/>
-              <a:t>кадр</a:t>
-            </a:r>
-            <a:r>
-              <a:rPr lang="ru-RU" dirty="0"/>
-              <a:t>.</a:t>
-            </a:r>
-          </a:p>
-          <a:p>
-            <a:r>
-              <a:rPr lang="ru-RU" b="1" dirty="0"/>
-              <a:t>Б)</a:t>
-            </a:r>
-            <a:r>
-              <a:rPr lang="ru-RU" dirty="0"/>
-              <a:t> Физический уровень передаёт </a:t>
-            </a:r>
-            <a:r>
-              <a:rPr lang="ru-RU" i="1" dirty="0"/>
-              <a:t>сырые биты</a:t>
-            </a:r>
-            <a:r>
-              <a:rPr lang="ru-RU" dirty="0"/>
-              <a:t> по кабелю / радиоканалу.</a:t>
-            </a:r>
-          </a:p>
-          <a:p>
-            <a:r>
-              <a:rPr lang="ru-RU" b="1" dirty="0"/>
-              <a:t>В)</a:t>
-            </a:r>
-            <a:r>
-              <a:rPr lang="ru-RU" dirty="0"/>
-              <a:t> Сетевой уровень разбивает данные на </a:t>
-            </a:r>
-            <a:r>
-              <a:rPr lang="ru-RU" i="1" dirty="0"/>
-              <a:t>пакеты</a:t>
-            </a:r>
-            <a:r>
-              <a:rPr lang="ru-RU" dirty="0"/>
-              <a:t> и добавляет заголовок маршрутизации.</a:t>
-            </a:r>
-          </a:p>
-          <a:p>
-            <a:r>
-              <a:rPr lang="ru-RU" b="1" dirty="0"/>
-              <a:t>Г)</a:t>
-            </a:r>
-            <a:r>
-              <a:rPr lang="ru-RU" dirty="0"/>
-              <a:t> Прикладной уровень генерирует исходное сообщение M</a:t>
-            </a:r>
-            <a:r>
-              <a:rPr lang="ru-RU" i="1" dirty="0"/>
-              <a:t>M</a:t>
-            </a:r>
-            <a:r>
-              <a:rPr lang="ru-RU" dirty="0"/>
-              <a:t>.</a:t>
-            </a:r>
-          </a:p>
-          <a:p>
-            <a:r>
-              <a:rPr lang="ru-RU" b="1" dirty="0"/>
-              <a:t>Д)</a:t>
-            </a:r>
-            <a:r>
-              <a:rPr lang="ru-RU" dirty="0"/>
-              <a:t> Транспортный уровень добавляет свой заголовок (управляющую информацию и адреса портов).</a:t>
-            </a:r>
-          </a:p>
-          <a:p>
-            <a:endParaRPr lang="ru-RU" dirty="0"/>
-          </a:p>
-        </p:txBody>
-      </p:sp>
+        </p:nvPicPr>
+        <p:blipFill>
+          <a:blip r:embed="rId2">
+            <a:extLst>
+              <a:ext uri="{28A0092B-C50C-407E-A947-70E740481C1C}">
+                <a14:useLocalDpi xmlns:a14="http://schemas.microsoft.com/office/drawing/2010/main" val="0"/>
+              </a:ext>
+            </a:extLst>
+          </a:blip>
+          <a:srcRect/>
+          <a:stretch>
+            <a:fillRect/>
+          </a:stretch>
+        </p:blipFill>
+        <p:spPr bwMode="auto">
+          <a:xfrm>
+            <a:off x="2490361" y="2097088"/>
+            <a:ext cx="7208101" cy="4314884"/>
+          </a:xfrm>
+          <a:prstGeom prst="rect">
+            <a:avLst/>
+          </a:prstGeom>
+          <a:noFill/>
+          <a:extLst>
+            <a:ext uri="{909E8E84-426E-40DD-AFC4-6F175D3DCCD1}">
+              <a14:hiddenFill xmlns:a14="http://schemas.microsoft.com/office/drawing/2010/main">
+                <a:solidFill>
+                  <a:srgbClr val="FFFFFF"/>
+                </a:solidFill>
+              </a14:hiddenFill>
+            </a:ext>
+          </a:extLst>
+        </p:spPr>
+      </p:pic>
     </p:spTree>
     <p:extLst>
       <p:ext uri="{BB962C8B-B14F-4D97-AF65-F5344CB8AC3E}">
-        <p14:creationId xmlns:p14="http://schemas.microsoft.com/office/powerpoint/2010/main" val="597210264"/>
+        <p14:creationId xmlns:p14="http://schemas.microsoft.com/office/powerpoint/2010/main" val="2045747326"/>
       </p:ext>
     </p:extLst>
   </p:cSld>
@@ -13600,14 +13547,27 @@
         <p:spPr/>
         <p:txBody>
           <a:bodyPr>
-            <a:normAutofit fontScale="90000"/>
+            <a:normAutofit/>
           </a:bodyPr>
           <a:lstStyle/>
           <a:p>
             <a:r>
-              <a:rPr lang="ru-RU" dirty="0"/>
-              <a:t>Как официально называется «порция данных» на каждом из уровней? Соедините пары:</a:t>
-            </a:r>
+              <a:rPr lang="ru-RU" b="1" dirty="0"/>
+              <a:t>Производительность сети: </a:t>
+            </a:r>
+            <a:r>
+              <a:rPr lang="ru-RU" b="1" dirty="0" err="1"/>
+              <a:t>Временны́е</a:t>
+            </a:r>
+            <a:r>
+              <a:rPr lang="ru-RU" b="1" dirty="0"/>
+              <a:t> </a:t>
+            </a:r>
+            <a:r>
+              <a:rPr lang="ru-RU" b="1" dirty="0" smtClean="0"/>
+              <a:t>характеристики</a:t>
+            </a:r>
+            <a:endParaRPr lang="ru-RU" dirty="0"/>
           </a:p>
         </p:txBody>
       </p:sp>
@@ -13627,84 +13587,102 @@
           <a:lstStyle/>
           <a:p>
             <a:r>
+              <a:rPr lang="ru-RU" b="1" dirty="0" err="1"/>
+              <a:t>Latency</a:t>
+            </a:r>
+            <a:r>
               <a:rPr lang="ru-RU" b="1" dirty="0"/>
-              <a:t>Транспортный уровень (</a:t>
+              <a:t> / </a:t>
             </a:r>
             <a:r>
               <a:rPr lang="ru-RU" b="1" dirty="0" err="1"/>
-              <a:t>Layer</a:t>
+              <a:t>Delay</a:t>
             </a:r>
             <a:r>
               <a:rPr lang="ru-RU" b="1" dirty="0"/>
-              <a:t> 4)</a:t>
+              <a:t> (Задержка):</a:t>
             </a:r>
             <a:r>
               <a:rPr lang="ru-RU" dirty="0"/>
-              <a:t> →→ ???</a:t>
+              <a:t> время перемещения пакета от источника к приёмнику (</a:t>
+            </a:r>
+            <a:r>
+              <a:rPr lang="ru-RU" dirty="0" err="1"/>
+              <a:t>мс</a:t>
+            </a:r>
+            <a:r>
+              <a:rPr lang="ru-RU" dirty="0"/>
+              <a:t>).</a:t>
             </a:r>
           </a:p>
           <a:p>
             <a:r>
               <a:rPr lang="ru-RU" b="1" dirty="0"/>
-              <a:t>Сетевой уровень (</a:t>
+              <a:t>RTT (</a:t>
             </a:r>
             <a:r>
               <a:rPr lang="ru-RU" b="1" dirty="0" err="1"/>
-              <a:t>Layer</a:t>
+              <a:t>Round-Trip</a:t>
             </a:r>
             <a:r>
               <a:rPr lang="ru-RU" b="1" dirty="0"/>
-              <a:t> 3)</a:t>
+              <a:t> </a:t>
+            </a:r>
+            <a:r>
+              <a:rPr lang="ru-RU" b="1" dirty="0" err="1"/>
+              <a:t>Time</a:t>
+            </a:r>
+            <a:r>
+              <a:rPr lang="ru-RU" b="1" dirty="0"/>
+              <a:t>):</a:t>
             </a:r>
             <a:r>
               <a:rPr lang="ru-RU" dirty="0"/>
-              <a:t> →→ ???</a:t>
-            </a:r>
-          </a:p>
-          <a:p>
+              <a:t> суммарное время доставки пакета до цели и возврата ответа обратно.</a:t>
+            </a:r>
+          </a:p>
+          <a:p>
+            <a:r>
+              <a:rPr lang="ru-RU" b="1" dirty="0" err="1"/>
+              <a:t>Jitter</a:t>
+            </a:r>
             <a:r>
               <a:rPr lang="ru-RU" b="1" dirty="0"/>
-              <a:t>Канальный уровень (</a:t>
+              <a:t> (</a:t>
             </a:r>
             <a:r>
               <a:rPr lang="ru-RU" b="1" dirty="0" err="1"/>
-              <a:t>Layer</a:t>
+              <a:t>Джиттер</a:t>
             </a:r>
             <a:r>
               <a:rPr lang="ru-RU" b="1" dirty="0"/>
-              <a:t> 2)</a:t>
-            </a:r>
+              <a:t>):</a:t>
+            </a:r>
+            <a:endParaRPr lang="ru-RU" dirty="0"/>
+          </a:p>
+          <a:p>
+            <a:pPr lvl="1"/>
             <a:r>
               <a:rPr lang="ru-RU" dirty="0"/>
-              <a:t> →→ ???</a:t>
-            </a:r>
-          </a:p>
-          <a:p>
-            <a:r>
-              <a:rPr lang="ru-RU" b="1" dirty="0"/>
-              <a:t>Физический уровень (</a:t>
-            </a:r>
-            <a:r>
-              <a:rPr lang="ru-RU" b="1" dirty="0" err="1"/>
-              <a:t>Layer</a:t>
-            </a:r>
-            <a:r>
-              <a:rPr lang="ru-RU" b="1" dirty="0"/>
-              <a:t> 1)</a:t>
-            </a:r>
+              <a:t>Колебание задержки последовательно идущих пакетов.</a:t>
+            </a:r>
+          </a:p>
+          <a:p>
+            <a:pPr lvl="1"/>
             <a:r>
               <a:rPr lang="ru-RU" dirty="0"/>
-              <a:t> →→ ???</a:t>
-            </a:r>
-          </a:p>
-          <a:p>
-            <a:pPr marL="0" indent="0">
-              <a:buNone/>
-            </a:pPr>
-            <a:r>
-              <a:rPr lang="ru-RU" i="1" dirty="0"/>
-              <a:t>(Варианты: Бит, Сегмент, Кадр/Фрейм, Пакет)</a:t>
-            </a:r>
+              <a:t>Критически важен для потокового медиа (видеосвязь, </a:t>
+            </a:r>
+            <a:r>
+              <a:rPr lang="ru-RU" dirty="0" err="1"/>
+              <a:t>VoIP</a:t>
+            </a:r>
+            <a:r>
+              <a:rPr lang="ru-RU" dirty="0"/>
+              <a:t>, онлайн-игры).</a:t>
+            </a:r>
+          </a:p>
+          <a:p>
             <a:endParaRPr lang="ru-RU" dirty="0"/>
           </a:p>
         </p:txBody>
@@ -13712,7 +13690,7 @@
     </p:spTree>
     <p:extLst>
       <p:ext uri="{BB962C8B-B14F-4D97-AF65-F5344CB8AC3E}">
-        <p14:creationId xmlns:p14="http://schemas.microsoft.com/office/powerpoint/2010/main" val="3149630925"/>
+        <p14:creationId xmlns:p14="http://schemas.microsoft.com/office/powerpoint/2010/main" val="1538228521"/>
       </p:ext>
     </p:extLst>
   </p:cSld>
@@ -13751,78 +13729,47 @@
         </p:nvSpPr>
         <p:spPr/>
         <p:txBody>
-          <a:bodyPr>
-            <a:normAutofit fontScale="90000"/>
-          </a:bodyPr>
+          <a:bodyPr/>
           <a:lstStyle/>
           <a:p>
             <a:r>
-              <a:rPr lang="ru-RU" dirty="0"/>
-              <a:t>Разделите сущности на </a:t>
-            </a:r>
-            <a:r>
-              <a:rPr lang="ru-RU" b="1" dirty="0"/>
-              <a:t>«С установлением соединения»</a:t>
-            </a:r>
-            <a:r>
-              <a:rPr lang="ru-RU" dirty="0"/>
-              <a:t> и </a:t>
-            </a:r>
-            <a:r>
-              <a:rPr lang="ru-RU" b="1" dirty="0"/>
-              <a:t>«Без установления соединения»</a:t>
-            </a:r>
-            <a:r>
-              <a:rPr lang="ru-RU" dirty="0"/>
-              <a:t>:</a:t>
-            </a:r>
+              <a:rPr lang="en-US" dirty="0" smtClean="0"/>
+              <a:t>Jitter</a:t>
+            </a:r>
+            <a:endParaRPr lang="ru-RU" dirty="0"/>
           </a:p>
         </p:txBody>
       </p:sp>
-      <p:sp>
-        <p:nvSpPr>
-          <p:cNvPr id="3" name="Объект 2"/>
-          <p:cNvSpPr>
-            <a:spLocks noGrp="1"/>
-          </p:cNvSpPr>
+      <p:pic>
+        <p:nvPicPr>
+          <p:cNvPr id="4" name="Объект 3"/>
+          <p:cNvPicPr>
+            <a:picLocks noGrp="1" noChangeAspect="1"/>
+          </p:cNvPicPr>
           <p:nvPr>
             <p:ph idx="1"/>
           </p:nvPr>
-        </p:nvSpPr>
-        <p:spPr/>
-        <p:txBody>
-          <a:bodyPr/>
-          <a:lstStyle/>
-          <a:p>
-            <a:r>
-              <a:rPr lang="ru-RU" dirty="0"/>
-              <a:t>Телефонный звонок другу.</a:t>
-            </a:r>
-          </a:p>
-          <a:p>
-            <a:r>
-              <a:rPr lang="ru-RU" dirty="0"/>
-              <a:t>Бумажное письмо в почтовом конверте.</a:t>
-            </a:r>
-          </a:p>
-          <a:p>
-            <a:r>
-              <a:rPr lang="ru-RU" dirty="0"/>
-              <a:t>Протокол TCP.</a:t>
-            </a:r>
-          </a:p>
-          <a:p>
-            <a:r>
-              <a:rPr lang="ru-RU" dirty="0"/>
-              <a:t>Протокол UDP.</a:t>
-            </a:r>
-          </a:p>
-        </p:txBody>
-      </p:sp>
+        </p:nvPicPr>
+        <p:blipFill>
+          <a:blip r:embed="rId2"/>
+          <a:stretch>
+            <a:fillRect/>
+          </a:stretch>
+        </p:blipFill>
+        <p:spPr>
+          <a:xfrm>
+            <a:off x="356619" y="3004443"/>
+            <a:ext cx="11475586" cy="1811223"/>
+          </a:xfrm>
+          <a:prstGeom prst="rect">
+            <a:avLst/>
+          </a:prstGeom>
+        </p:spPr>
+      </p:pic>
     </p:spTree>
     <p:extLst>
       <p:ext uri="{BB962C8B-B14F-4D97-AF65-F5344CB8AC3E}">
-        <p14:creationId xmlns:p14="http://schemas.microsoft.com/office/powerpoint/2010/main" val="3797661691"/>
+        <p14:creationId xmlns:p14="http://schemas.microsoft.com/office/powerpoint/2010/main" val="1009789357"/>
       </p:ext>
     </p:extLst>
   </p:cSld>
@@ -13851,33 +13798,6 @@
       </p:grpSpPr>
       <p:sp>
         <p:nvSpPr>
-          <p:cNvPr id="2" name="Заголовок 1"/>
-          <p:cNvSpPr>
-            <a:spLocks noGrp="1"/>
-          </p:cNvSpPr>
-          <p:nvPr>
-            <p:ph type="title"/>
-          </p:nvPr>
-        </p:nvSpPr>
-        <p:spPr/>
-        <p:txBody>
-          <a:bodyPr/>
-          <a:lstStyle/>
-          <a:p>
-            <a:r>
-              <a:rPr lang="af-ZA" b="1" dirty="0"/>
-              <a:t>Bandwidth vs </a:t>
-            </a:r>
-            <a:r>
-              <a:rPr lang="af-ZA" b="1" dirty="0" smtClean="0"/>
-              <a:t>Throughput</a:t>
-            </a:r>
-            <a:endParaRPr lang="ru-RU" dirty="0"/>
-          </a:p>
-        </p:txBody>
-      </p:sp>
-      <p:sp>
-        <p:nvSpPr>
           <p:cNvPr id="3" name="Объект 2"/>
           <p:cNvSpPr>
             <a:spLocks noGrp="1"/>
@@ -13886,72 +13806,132 @@
             <p:ph idx="1"/>
           </p:nvPr>
         </p:nvSpPr>
-        <p:spPr/>
+        <p:spPr>
+          <a:xfrm>
+            <a:off x="1014412" y="865186"/>
+            <a:ext cx="10339388" cy="5357813"/>
+          </a:xfrm>
+        </p:spPr>
         <p:txBody>
-          <a:bodyPr/>
+          <a:bodyPr>
+            <a:normAutofit lnSpcReduction="10000"/>
+          </a:bodyPr>
           <a:lstStyle/>
           <a:p>
-            <a:pPr marL="0" indent="0">
-              <a:buNone/>
-            </a:pPr>
-            <a:r>
-              <a:rPr lang="ru-RU" i="1" dirty="0"/>
-              <a:t>«Тариф вашего домашнего интернета — </a:t>
-            </a:r>
-            <a:r>
-              <a:rPr lang="ru-RU" b="1" i="1" dirty="0"/>
-              <a:t>500 Мбит/с</a:t>
-            </a:r>
-            <a:r>
-              <a:rPr lang="ru-RU" i="1" dirty="0"/>
-              <a:t>. Однако при скачивании игры реальная средняя скорость загрузки составила </a:t>
-            </a:r>
-            <a:r>
-              <a:rPr lang="ru-RU" b="1" i="1" dirty="0"/>
-              <a:t>320 Мбит/с</a:t>
-            </a:r>
-            <a:r>
-              <a:rPr lang="ru-RU" i="1" dirty="0" smtClean="0"/>
-              <a:t>».</a:t>
-            </a:r>
-            <a:endParaRPr lang="en-US" i="1" dirty="0" smtClean="0"/>
-          </a:p>
-          <a:p>
-            <a:pPr marL="0" indent="0">
-              <a:buNone/>
-            </a:pPr>
-            <a:r>
-              <a:rPr lang="ru-RU" b="1" dirty="0"/>
-              <a:t>Вопрос:</a:t>
-            </a:r>
-            <a:r>
-              <a:rPr lang="ru-RU" dirty="0"/>
-              <a:t> Какое из этих двух чисел является </a:t>
-            </a:r>
             <a:r>
               <a:rPr lang="ru-RU" b="1" dirty="0" err="1"/>
               <a:t>Bandwidth</a:t>
             </a:r>
             <a:r>
+              <a:rPr lang="ru-RU" b="1" dirty="0"/>
+              <a:t> (Ширина канала / теоретическая пропускная способность):</a:t>
+            </a:r>
+            <a:r>
               <a:rPr lang="ru-RU" dirty="0"/>
-              <a:t> (пропускной способностью канала), а какое — </a:t>
-            </a:r>
+              <a:t> максимальный теоретический объём данных, который среда может пропустить за единицу времени (бит/с).</a:t>
+            </a:r>
+          </a:p>
+          <a:p>
             <a:r>
               <a:rPr lang="ru-RU" b="1" dirty="0" err="1"/>
               <a:t>Throughput</a:t>
             </a:r>
             <a:r>
+              <a:rPr lang="ru-RU" b="1" dirty="0"/>
+              <a:t> (Реальная пропускная способность):</a:t>
+            </a:r>
+            <a:r>
               <a:rPr lang="ru-RU" dirty="0"/>
-              <a:t> (реальной пропускной способностью)?</a:t>
-            </a:r>
-            <a:endParaRPr lang="en-US" i="1" dirty="0"/>
+              <a:t> фактическая скорость успешной передачи данных с учётом накладных расходов, задержек и ошибок.</a:t>
+            </a:r>
+          </a:p>
+          <a:p>
+            <a:r>
+              <a:rPr lang="ru-RU" b="1" dirty="0" err="1"/>
+              <a:t>Latency</a:t>
+            </a:r>
+            <a:r>
+              <a:rPr lang="ru-RU" b="1" dirty="0"/>
+              <a:t> / </a:t>
+            </a:r>
+            <a:r>
+              <a:rPr lang="ru-RU" b="1" dirty="0" err="1"/>
+              <a:t>Delay</a:t>
+            </a:r>
+            <a:r>
+              <a:rPr lang="ru-RU" b="1" dirty="0"/>
+              <a:t> (Задержка):</a:t>
+            </a:r>
+            <a:r>
+              <a:rPr lang="ru-RU" dirty="0"/>
+              <a:t> время доставки данных от отправителя к получателю.</a:t>
+            </a:r>
+          </a:p>
+          <a:p>
+            <a:r>
+              <a:rPr lang="ru-RU" b="1" dirty="0"/>
+              <a:t>RTT (</a:t>
+            </a:r>
+            <a:r>
+              <a:rPr lang="ru-RU" b="1" dirty="0" err="1"/>
+              <a:t>Round</a:t>
+            </a:r>
+            <a:r>
+              <a:rPr lang="ru-RU" b="1" dirty="0"/>
+              <a:t> </a:t>
+            </a:r>
+            <a:r>
+              <a:rPr lang="ru-RU" b="1" dirty="0" err="1"/>
+              <a:t>Trip</a:t>
+            </a:r>
+            <a:r>
+              <a:rPr lang="ru-RU" b="1" dirty="0"/>
+              <a:t> </a:t>
+            </a:r>
+            <a:r>
+              <a:rPr lang="ru-RU" b="1" dirty="0" err="1"/>
+              <a:t>Time</a:t>
+            </a:r>
+            <a:r>
+              <a:rPr lang="ru-RU" b="1" dirty="0"/>
+              <a:t>):</a:t>
+            </a:r>
+            <a:r>
+              <a:rPr lang="ru-RU" dirty="0"/>
+              <a:t> время полного оборота пакета (туда и обратно).</a:t>
+            </a:r>
+          </a:p>
+          <a:p>
+            <a:r>
+              <a:rPr lang="ru-RU" b="1" dirty="0" err="1"/>
+              <a:t>Джиттер</a:t>
+            </a:r>
+            <a:r>
+              <a:rPr lang="ru-RU" b="1" dirty="0"/>
+              <a:t> (</a:t>
+            </a:r>
+            <a:r>
+              <a:rPr lang="ru-RU" b="1" dirty="0" err="1"/>
+              <a:t>Jitter</a:t>
+            </a:r>
+            <a:r>
+              <a:rPr lang="ru-RU" b="1" dirty="0"/>
+              <a:t>):</a:t>
+            </a:r>
+            <a:r>
+              <a:rPr lang="ru-RU" dirty="0"/>
+              <a:t> вариация (колебание) задержки пакетов в потоке относительно друг друга.</a:t>
+            </a:r>
+          </a:p>
+          <a:p>
+            <a:endParaRPr lang="ru-RU" dirty="0"/>
           </a:p>
         </p:txBody>
       </p:sp>
     </p:spTree>
     <p:extLst>
       <p:ext uri="{BB962C8B-B14F-4D97-AF65-F5344CB8AC3E}">
-        <p14:creationId xmlns:p14="http://schemas.microsoft.com/office/powerpoint/2010/main" val="3784396190"/>
+        <p14:creationId xmlns:p14="http://schemas.microsoft.com/office/powerpoint/2010/main" val="883577798"/>
       </p:ext>
     </p:extLst>
   </p:cSld>
@@ -13990,13 +13970,29 @@
         </p:nvSpPr>
         <p:spPr/>
         <p:txBody>
-          <a:bodyPr/>
+          <a:bodyPr>
+            <a:normAutofit fontScale="90000"/>
+          </a:bodyPr>
           <a:lstStyle/>
           <a:p>
             <a:r>
               <a:rPr lang="ru-RU" b="1" dirty="0"/>
-              <a:t>Какая сетевая характеристика вызывает эту проблему?</a:t>
-            </a:r>
+              <a:t>«Путь конверта» (Инкапсуляция)</a:t>
+            </a:r>
+            <a:br>
+              <a:rPr lang="ru-RU" b="1" dirty="0"/>
+            </a:br>
+            <a:r>
+              <a:rPr lang="ru-RU" i="1" dirty="0"/>
+              <a:t>Формат: расставьте шаги в правильном порядке от отправки до получения.</a:t>
+            </a:r>
+            <a:r>
+              <a:rPr lang="ru-RU" dirty="0"/>
+              <a:t/>
+            </a:r>
+            <a:br>
+              <a:rPr lang="ru-RU" dirty="0"/>
+            </a:br>
             <a:endParaRPr lang="ru-RU" dirty="0"/>
           </a:p>
         </p:txBody>
@@ -14011,95 +14007,36 @@
             <p:ph idx="1"/>
           </p:nvPr>
         </p:nvSpPr>
-        <p:spPr>
-          <a:xfrm>
-            <a:off x="1141412" y="2249486"/>
-            <a:ext cx="9905999" cy="3975467"/>
-          </a:xfrm>
-        </p:spPr>
+        <p:spPr/>
         <p:txBody>
           <a:bodyPr>
-            <a:normAutofit lnSpcReduction="10000"/>
+            <a:normAutofit fontScale="92500" lnSpcReduction="20000"/>
           </a:bodyPr>
           <a:lstStyle/>
           <a:p>
-            <a:pPr marL="0" indent="0">
-              <a:buNone/>
-            </a:pPr>
-            <a:r>
-              <a:rPr lang="ru-RU" dirty="0"/>
-              <a:t>Во время </a:t>
-            </a:r>
-            <a:r>
-              <a:rPr lang="ru-RU" dirty="0" err="1"/>
-              <a:t>видеозвонка</a:t>
-            </a:r>
-            <a:r>
-              <a:rPr lang="ru-RU" dirty="0"/>
-              <a:t> собеседник слышит ваш голос то с ускорением, то с паузами («заикание»), хотя средняя задержка не превышает 40 </a:t>
-            </a:r>
-            <a:r>
-              <a:rPr lang="ru-RU" dirty="0" err="1"/>
-              <a:t>мс</a:t>
-            </a:r>
-            <a:r>
-              <a:rPr lang="ru-RU" dirty="0"/>
-              <a:t>. Пакеты отправлялись стабильно каждые 30 </a:t>
-            </a:r>
-            <a:r>
-              <a:rPr lang="ru-RU" dirty="0" err="1"/>
-              <a:t>мс</a:t>
-            </a:r>
-            <a:r>
-              <a:rPr lang="ru-RU" dirty="0"/>
-              <a:t>, но доходили с интервалами: </a:t>
-            </a:r>
-            <a:r>
-              <a:rPr lang="ru-RU" b="1" dirty="0"/>
-              <a:t>30 </a:t>
-            </a:r>
-            <a:r>
-              <a:rPr lang="ru-RU" b="1" dirty="0" err="1"/>
-              <a:t>мс</a:t>
-            </a:r>
-            <a:r>
-              <a:rPr lang="ru-RU" b="1" dirty="0"/>
-              <a:t> →→ 95 </a:t>
-            </a:r>
-            <a:r>
-              <a:rPr lang="ru-RU" b="1" dirty="0" err="1"/>
-              <a:t>мс</a:t>
-            </a:r>
-            <a:r>
-              <a:rPr lang="ru-RU" b="1" dirty="0"/>
-              <a:t> →→ 15 </a:t>
-            </a:r>
-            <a:r>
-              <a:rPr lang="ru-RU" b="1" dirty="0" err="1"/>
-              <a:t>мс</a:t>
-            </a:r>
-            <a:r>
-              <a:rPr lang="ru-RU" b="1" dirty="0"/>
-              <a:t> →→ 120 </a:t>
-            </a:r>
-            <a:r>
-              <a:rPr lang="ru-RU" b="1" dirty="0" err="1"/>
-              <a:t>мс</a:t>
-            </a:r>
-            <a:r>
-              <a:rPr lang="ru-RU" dirty="0" smtClean="0"/>
-              <a:t>.</a:t>
-            </a:r>
-            <a:endParaRPr lang="en-US" dirty="0" smtClean="0"/>
-          </a:p>
-          <a:p>
             <a:r>
               <a:rPr lang="ru-RU" b="1" dirty="0"/>
               <a:t>А)</a:t>
             </a:r>
             <a:r>
               <a:rPr lang="ru-RU" dirty="0"/>
-              <a:t> Слишком низкий RTT</a:t>
+              <a:t> Канальный уровень добавляет заголовок и </a:t>
+            </a:r>
+            <a:r>
+              <a:rPr lang="ru-RU" dirty="0" err="1"/>
+              <a:t>концевик</a:t>
+            </a:r>
+            <a:r>
+              <a:rPr lang="ru-RU" dirty="0"/>
+              <a:t> (трейлер), формируя </a:t>
+            </a:r>
+            <a:r>
+              <a:rPr lang="ru-RU" i="1" dirty="0"/>
+              <a:t>кадр</a:t>
+            </a:r>
+            <a:r>
+              <a:rPr lang="ru-RU" dirty="0"/>
+              <a:t>.</a:t>
             </a:r>
           </a:p>
           <a:p>
@@ -14109,23 +14046,15 @@
             </a:r>
             <a:r>
               <a:rPr lang="ru-RU" dirty="0"/>
-              <a:t> Высокий </a:t>
-            </a:r>
-            <a:r>
-              <a:rPr lang="ru-RU" dirty="0" err="1"/>
-              <a:t>джиттер</a:t>
+              <a:t> Физический уровень передаёт </a:t>
+            </a:r>
+            <a:r>
+              <a:rPr lang="ru-RU" i="1" dirty="0"/>
+              <a:t>сырые биты</a:t>
             </a:r>
             <a:r>
               <a:rPr lang="ru-RU" dirty="0"/>
-              <a:t> (</a:t>
-            </a:r>
-            <a:r>
-              <a:rPr lang="ru-RU" dirty="0" err="1"/>
-              <a:t>Jitter</a:t>
-            </a:r>
-            <a:r>
-              <a:rPr lang="ru-RU" dirty="0"/>
-              <a:t>)</a:t>
+              <a:t> по кабелю / радиоканалу.</a:t>
             </a:r>
           </a:p>
           <a:p>
@@ -14135,13 +14064,16 @@
             </a:r>
             <a:r>
               <a:rPr lang="ru-RU" dirty="0"/>
-              <a:t> Неправильная </a:t>
-            </a:r>
-            <a:r>
-              <a:rPr lang="ru-RU" dirty="0" err="1"/>
-              <a:t>декапсуляция</a:t>
-            </a:r>
-            <a:endParaRPr lang="ru-RU" dirty="0"/>
+              <a:t> Сетевой уровень разбивает данные на </a:t>
+            </a:r>
+            <a:r>
+              <a:rPr lang="ru-RU" i="1" dirty="0"/>
+              <a:t>пакеты</a:t>
+            </a:r>
+            <a:r>
+              <a:rPr lang="ru-RU" dirty="0"/>
+              <a:t> и добавляет заголовок маршрутизации.</a:t>
+            </a:r>
           </a:p>
           <a:p>
             <a:r>
@@ -14150,21 +14082,36 @@
             </a:r>
             <a:r>
               <a:rPr lang="ru-RU" dirty="0"/>
-              <a:t> Переход с модели OSI на TCP/IP</a:t>
-            </a:r>
-          </a:p>
-          <a:p>
-            <a:pPr marL="0" indent="0">
-              <a:buNone/>
-            </a:pPr>
-            <a:endParaRPr lang="en-US" dirty="0"/>
+              <a:t> Прикладной уровень генерирует исходное сообщение M</a:t>
+            </a:r>
+            <a:r>
+              <a:rPr lang="ru-RU" i="1" dirty="0"/>
+              <a:t>M</a:t>
+            </a:r>
+            <a:r>
+              <a:rPr lang="ru-RU" dirty="0"/>
+              <a:t>.</a:t>
+            </a:r>
+          </a:p>
+          <a:p>
+            <a:r>
+              <a:rPr lang="ru-RU" b="1" dirty="0"/>
+              <a:t>Д)</a:t>
+            </a:r>
+            <a:r>
+              <a:rPr lang="ru-RU" dirty="0"/>
+              <a:t> Транспортный уровень добавляет свой заголовок (управляющую информацию и адреса портов).</a:t>
+            </a:r>
+          </a:p>
+          <a:p>
+            <a:endParaRPr lang="ru-RU" dirty="0"/>
           </a:p>
         </p:txBody>
       </p:sp>
     </p:spTree>
     <p:extLst>
       <p:ext uri="{BB962C8B-B14F-4D97-AF65-F5344CB8AC3E}">
-        <p14:creationId xmlns:p14="http://schemas.microsoft.com/office/powerpoint/2010/main" val="2529589641"/>
+        <p14:creationId xmlns:p14="http://schemas.microsoft.com/office/powerpoint/2010/main" val="597210264"/>
       </p:ext>
     </p:extLst>
   </p:cSld>
@@ -14357,6 +14304,610 @@
 </file>
 
 <file path=ppt/slides/slide20.xml><?xml version="1.0" encoding="utf-8"?>
+<p:sld xmlns:a="http://schemas.openxmlformats.org/drawingml/2006/main" xmlns:r="http://schemas.openxmlformats.org/officeDocument/2006/relationships" xmlns:p="http://schemas.openxmlformats.org/presentationml/2006/main">
+  <p:cSld>
+    <p:spTree>
+      <p:nvGrpSpPr>
+        <p:cNvPr id="1" name=""/>
+        <p:cNvGrpSpPr/>
+        <p:nvPr/>
+      </p:nvGrpSpPr>
+      <p:grpSpPr>
+        <a:xfrm>
+          <a:off x="0" y="0"/>
+          <a:ext cx="0" cy="0"/>
+          <a:chOff x="0" y="0"/>
+          <a:chExt cx="0" cy="0"/>
+        </a:xfrm>
+      </p:grpSpPr>
+      <p:sp>
+        <p:nvSpPr>
+          <p:cNvPr id="2" name="Заголовок 1"/>
+          <p:cNvSpPr>
+            <a:spLocks noGrp="1"/>
+          </p:cNvSpPr>
+          <p:nvPr>
+            <p:ph type="title"/>
+          </p:nvPr>
+        </p:nvSpPr>
+        <p:spPr/>
+        <p:txBody>
+          <a:bodyPr>
+            <a:normAutofit fontScale="90000"/>
+          </a:bodyPr>
+          <a:lstStyle/>
+          <a:p>
+            <a:r>
+              <a:rPr lang="ru-RU" dirty="0"/>
+              <a:t>Как официально называется «порция данных» на каждом из уровней? Соедините пары:</a:t>
+            </a:r>
+          </a:p>
+        </p:txBody>
+      </p:sp>
+      <p:sp>
+        <p:nvSpPr>
+          <p:cNvPr id="3" name="Объект 2"/>
+          <p:cNvSpPr>
+            <a:spLocks noGrp="1"/>
+          </p:cNvSpPr>
+          <p:nvPr>
+            <p:ph idx="1"/>
+          </p:nvPr>
+        </p:nvSpPr>
+        <p:spPr/>
+        <p:txBody>
+          <a:bodyPr/>
+          <a:lstStyle/>
+          <a:p>
+            <a:r>
+              <a:rPr lang="ru-RU" b="1" dirty="0"/>
+              <a:t>Транспортный уровень (</a:t>
+            </a:r>
+            <a:r>
+              <a:rPr lang="ru-RU" b="1" dirty="0" err="1"/>
+              <a:t>Layer</a:t>
+            </a:r>
+            <a:r>
+              <a:rPr lang="ru-RU" b="1" dirty="0"/>
+              <a:t> 4)</a:t>
+            </a:r>
+            <a:r>
+              <a:rPr lang="ru-RU" dirty="0"/>
+              <a:t> →→ ???</a:t>
+            </a:r>
+          </a:p>
+          <a:p>
+            <a:r>
+              <a:rPr lang="ru-RU" b="1" dirty="0"/>
+              <a:t>Сетевой уровень (</a:t>
+            </a:r>
+            <a:r>
+              <a:rPr lang="ru-RU" b="1" dirty="0" err="1"/>
+              <a:t>Layer</a:t>
+            </a:r>
+            <a:r>
+              <a:rPr lang="ru-RU" b="1" dirty="0"/>
+              <a:t> 3)</a:t>
+            </a:r>
+            <a:r>
+              <a:rPr lang="ru-RU" dirty="0"/>
+              <a:t> →→ ???</a:t>
+            </a:r>
+          </a:p>
+          <a:p>
+            <a:r>
+              <a:rPr lang="ru-RU" b="1" dirty="0"/>
+              <a:t>Канальный уровень (</a:t>
+            </a:r>
+            <a:r>
+              <a:rPr lang="ru-RU" b="1" dirty="0" err="1"/>
+              <a:t>Layer</a:t>
+            </a:r>
+            <a:r>
+              <a:rPr lang="ru-RU" b="1" dirty="0"/>
+              <a:t> 2)</a:t>
+            </a:r>
+            <a:r>
+              <a:rPr lang="ru-RU" dirty="0"/>
+              <a:t> →→ ???</a:t>
+            </a:r>
+          </a:p>
+          <a:p>
+            <a:r>
+              <a:rPr lang="ru-RU" b="1" dirty="0"/>
+              <a:t>Физический уровень (</a:t>
+            </a:r>
+            <a:r>
+              <a:rPr lang="ru-RU" b="1" dirty="0" err="1"/>
+              <a:t>Layer</a:t>
+            </a:r>
+            <a:r>
+              <a:rPr lang="ru-RU" b="1" dirty="0"/>
+              <a:t> 1)</a:t>
+            </a:r>
+            <a:r>
+              <a:rPr lang="ru-RU" dirty="0"/>
+              <a:t> →→ ???</a:t>
+            </a:r>
+          </a:p>
+          <a:p>
+            <a:pPr marL="0" indent="0">
+              <a:buNone/>
+            </a:pPr>
+            <a:r>
+              <a:rPr lang="ru-RU" i="1" dirty="0"/>
+              <a:t>(Варианты: Бит, Сегмент, Кадр/Фрейм, Пакет)</a:t>
+            </a:r>
+            <a:endParaRPr lang="ru-RU" dirty="0"/>
+          </a:p>
+        </p:txBody>
+      </p:sp>
+    </p:spTree>
+    <p:extLst>
+      <p:ext uri="{BB962C8B-B14F-4D97-AF65-F5344CB8AC3E}">
+        <p14:creationId xmlns:p14="http://schemas.microsoft.com/office/powerpoint/2010/main" val="3149630925"/>
+      </p:ext>
+    </p:extLst>
+  </p:cSld>
+  <p:clrMapOvr>
+    <a:masterClrMapping/>
+  </p:clrMapOvr>
+</p:sld>
+</file>
+
+<file path=ppt/slides/slide21.xml><?xml version="1.0" encoding="utf-8"?>
+<p:sld xmlns:a="http://schemas.openxmlformats.org/drawingml/2006/main" xmlns:r="http://schemas.openxmlformats.org/officeDocument/2006/relationships" xmlns:p="http://schemas.openxmlformats.org/presentationml/2006/main">
+  <p:cSld>
+    <p:spTree>
+      <p:nvGrpSpPr>
+        <p:cNvPr id="1" name=""/>
+        <p:cNvGrpSpPr/>
+        <p:nvPr/>
+      </p:nvGrpSpPr>
+      <p:grpSpPr>
+        <a:xfrm>
+          <a:off x="0" y="0"/>
+          <a:ext cx="0" cy="0"/>
+          <a:chOff x="0" y="0"/>
+          <a:chExt cx="0" cy="0"/>
+        </a:xfrm>
+      </p:grpSpPr>
+      <p:sp>
+        <p:nvSpPr>
+          <p:cNvPr id="2" name="Заголовок 1"/>
+          <p:cNvSpPr>
+            <a:spLocks noGrp="1"/>
+          </p:cNvSpPr>
+          <p:nvPr>
+            <p:ph type="title"/>
+          </p:nvPr>
+        </p:nvSpPr>
+        <p:spPr/>
+        <p:txBody>
+          <a:bodyPr>
+            <a:normAutofit fontScale="90000"/>
+          </a:bodyPr>
+          <a:lstStyle/>
+          <a:p>
+            <a:r>
+              <a:rPr lang="ru-RU" dirty="0"/>
+              <a:t>Разделите сущности на </a:t>
+            </a:r>
+            <a:r>
+              <a:rPr lang="ru-RU" b="1" dirty="0"/>
+              <a:t>«С установлением соединения»</a:t>
+            </a:r>
+            <a:r>
+              <a:rPr lang="ru-RU" dirty="0"/>
+              <a:t> и </a:t>
+            </a:r>
+            <a:r>
+              <a:rPr lang="ru-RU" b="1" dirty="0"/>
+              <a:t>«Без установления соединения»</a:t>
+            </a:r>
+            <a:r>
+              <a:rPr lang="ru-RU" dirty="0"/>
+              <a:t>:</a:t>
+            </a:r>
+          </a:p>
+        </p:txBody>
+      </p:sp>
+      <p:sp>
+        <p:nvSpPr>
+          <p:cNvPr id="3" name="Объект 2"/>
+          <p:cNvSpPr>
+            <a:spLocks noGrp="1"/>
+          </p:cNvSpPr>
+          <p:nvPr>
+            <p:ph idx="1"/>
+          </p:nvPr>
+        </p:nvSpPr>
+        <p:spPr/>
+        <p:txBody>
+          <a:bodyPr/>
+          <a:lstStyle/>
+          <a:p>
+            <a:r>
+              <a:rPr lang="ru-RU" dirty="0"/>
+              <a:t>Телефонный звонок другу.</a:t>
+            </a:r>
+          </a:p>
+          <a:p>
+            <a:r>
+              <a:rPr lang="ru-RU" dirty="0"/>
+              <a:t>Бумажное письмо в почтовом конверте.</a:t>
+            </a:r>
+          </a:p>
+          <a:p>
+            <a:r>
+              <a:rPr lang="ru-RU" dirty="0"/>
+              <a:t>Протокол TCP.</a:t>
+            </a:r>
+          </a:p>
+          <a:p>
+            <a:r>
+              <a:rPr lang="ru-RU" dirty="0"/>
+              <a:t>Протокол UDP.</a:t>
+            </a:r>
+          </a:p>
+        </p:txBody>
+      </p:sp>
+    </p:spTree>
+    <p:extLst>
+      <p:ext uri="{BB962C8B-B14F-4D97-AF65-F5344CB8AC3E}">
+        <p14:creationId xmlns:p14="http://schemas.microsoft.com/office/powerpoint/2010/main" val="3797661691"/>
+      </p:ext>
+    </p:extLst>
+  </p:cSld>
+  <p:clrMapOvr>
+    <a:masterClrMapping/>
+  </p:clrMapOvr>
+</p:sld>
+</file>
+
+<file path=ppt/slides/slide22.xml><?xml version="1.0" encoding="utf-8"?>
+<p:sld xmlns:a="http://schemas.openxmlformats.org/drawingml/2006/main" xmlns:r="http://schemas.openxmlformats.org/officeDocument/2006/relationships" xmlns:p="http://schemas.openxmlformats.org/presentationml/2006/main">
+  <p:cSld>
+    <p:spTree>
+      <p:nvGrpSpPr>
+        <p:cNvPr id="1" name=""/>
+        <p:cNvGrpSpPr/>
+        <p:nvPr/>
+      </p:nvGrpSpPr>
+      <p:grpSpPr>
+        <a:xfrm>
+          <a:off x="0" y="0"/>
+          <a:ext cx="0" cy="0"/>
+          <a:chOff x="0" y="0"/>
+          <a:chExt cx="0" cy="0"/>
+        </a:xfrm>
+      </p:grpSpPr>
+      <p:sp>
+        <p:nvSpPr>
+          <p:cNvPr id="2" name="Заголовок 1"/>
+          <p:cNvSpPr>
+            <a:spLocks noGrp="1"/>
+          </p:cNvSpPr>
+          <p:nvPr>
+            <p:ph type="title"/>
+          </p:nvPr>
+        </p:nvSpPr>
+        <p:spPr/>
+        <p:txBody>
+          <a:bodyPr/>
+          <a:lstStyle/>
+          <a:p>
+            <a:r>
+              <a:rPr lang="af-ZA" b="1" dirty="0"/>
+              <a:t>Bandwidth vs </a:t>
+            </a:r>
+            <a:r>
+              <a:rPr lang="af-ZA" b="1" dirty="0" smtClean="0"/>
+              <a:t>Throughput</a:t>
+            </a:r>
+            <a:endParaRPr lang="ru-RU" dirty="0"/>
+          </a:p>
+        </p:txBody>
+      </p:sp>
+      <p:sp>
+        <p:nvSpPr>
+          <p:cNvPr id="3" name="Объект 2"/>
+          <p:cNvSpPr>
+            <a:spLocks noGrp="1"/>
+          </p:cNvSpPr>
+          <p:nvPr>
+            <p:ph idx="1"/>
+          </p:nvPr>
+        </p:nvSpPr>
+        <p:spPr/>
+        <p:txBody>
+          <a:bodyPr/>
+          <a:lstStyle/>
+          <a:p>
+            <a:pPr marL="0" indent="0">
+              <a:buNone/>
+            </a:pPr>
+            <a:r>
+              <a:rPr lang="ru-RU" i="1" dirty="0"/>
+              <a:t>«Тариф вашего домашнего интернета — </a:t>
+            </a:r>
+            <a:r>
+              <a:rPr lang="ru-RU" b="1" i="1" dirty="0"/>
+              <a:t>500 Мбит/с</a:t>
+            </a:r>
+            <a:r>
+              <a:rPr lang="ru-RU" i="1" dirty="0"/>
+              <a:t>. Однако при скачивании игры реальная средняя скорость загрузки составила </a:t>
+            </a:r>
+            <a:r>
+              <a:rPr lang="ru-RU" b="1" i="1" dirty="0"/>
+              <a:t>320 Мбит/с</a:t>
+            </a:r>
+            <a:r>
+              <a:rPr lang="ru-RU" i="1" dirty="0" smtClean="0"/>
+              <a:t>».</a:t>
+            </a:r>
+            <a:endParaRPr lang="en-US" i="1" dirty="0" smtClean="0"/>
+          </a:p>
+          <a:p>
+            <a:pPr marL="0" indent="0">
+              <a:buNone/>
+            </a:pPr>
+            <a:r>
+              <a:rPr lang="ru-RU" b="1" dirty="0"/>
+              <a:t>Вопрос:</a:t>
+            </a:r>
+            <a:r>
+              <a:rPr lang="ru-RU" dirty="0"/>
+              <a:t> Какое из этих двух чисел является </a:t>
+            </a:r>
+            <a:r>
+              <a:rPr lang="ru-RU" b="1" dirty="0" err="1"/>
+              <a:t>Bandwidth</a:t>
+            </a:r>
+            <a:r>
+              <a:rPr lang="ru-RU" dirty="0"/>
+              <a:t> (пропускной способностью канала), а какое — </a:t>
+            </a:r>
+            <a:r>
+              <a:rPr lang="ru-RU" b="1" dirty="0" err="1"/>
+              <a:t>Throughput</a:t>
+            </a:r>
+            <a:r>
+              <a:rPr lang="ru-RU" dirty="0"/>
+              <a:t> (реальной пропускной способностью)?</a:t>
+            </a:r>
+            <a:endParaRPr lang="en-US" i="1" dirty="0"/>
+          </a:p>
+        </p:txBody>
+      </p:sp>
+    </p:spTree>
+    <p:extLst>
+      <p:ext uri="{BB962C8B-B14F-4D97-AF65-F5344CB8AC3E}">
+        <p14:creationId xmlns:p14="http://schemas.microsoft.com/office/powerpoint/2010/main" val="3784396190"/>
+      </p:ext>
+    </p:extLst>
+  </p:cSld>
+  <p:clrMapOvr>
+    <a:masterClrMapping/>
+  </p:clrMapOvr>
+</p:sld>
+</file>
+
+<file path=ppt/slides/slide23.xml><?xml version="1.0" encoding="utf-8"?>
+<p:sld xmlns:a="http://schemas.openxmlformats.org/drawingml/2006/main" xmlns:r="http://schemas.openxmlformats.org/officeDocument/2006/relationships" xmlns:p="http://schemas.openxmlformats.org/presentationml/2006/main">
+  <p:cSld>
+    <p:spTree>
+      <p:nvGrpSpPr>
+        <p:cNvPr id="1" name=""/>
+        <p:cNvGrpSpPr/>
+        <p:nvPr/>
+      </p:nvGrpSpPr>
+      <p:grpSpPr>
+        <a:xfrm>
+          <a:off x="0" y="0"/>
+          <a:ext cx="0" cy="0"/>
+          <a:chOff x="0" y="0"/>
+          <a:chExt cx="0" cy="0"/>
+        </a:xfrm>
+      </p:grpSpPr>
+      <p:sp>
+        <p:nvSpPr>
+          <p:cNvPr id="2" name="Заголовок 1"/>
+          <p:cNvSpPr>
+            <a:spLocks noGrp="1"/>
+          </p:cNvSpPr>
+          <p:nvPr>
+            <p:ph type="title"/>
+          </p:nvPr>
+        </p:nvSpPr>
+        <p:spPr/>
+        <p:txBody>
+          <a:bodyPr/>
+          <a:lstStyle/>
+          <a:p>
+            <a:r>
+              <a:rPr lang="ru-RU" b="1" dirty="0"/>
+              <a:t>Какая сетевая характеристика вызывает эту проблему?</a:t>
+            </a:r>
+            <a:endParaRPr lang="ru-RU" dirty="0"/>
+          </a:p>
+        </p:txBody>
+      </p:sp>
+      <p:sp>
+        <p:nvSpPr>
+          <p:cNvPr id="3" name="Объект 2"/>
+          <p:cNvSpPr>
+            <a:spLocks noGrp="1"/>
+          </p:cNvSpPr>
+          <p:nvPr>
+            <p:ph idx="1"/>
+          </p:nvPr>
+        </p:nvSpPr>
+        <p:spPr>
+          <a:xfrm>
+            <a:off x="1141412" y="2249486"/>
+            <a:ext cx="9905999" cy="3975467"/>
+          </a:xfrm>
+        </p:spPr>
+        <p:txBody>
+          <a:bodyPr>
+            <a:normAutofit lnSpcReduction="10000"/>
+          </a:bodyPr>
+          <a:lstStyle/>
+          <a:p>
+            <a:pPr marL="0" indent="0">
+              <a:buNone/>
+            </a:pPr>
+            <a:r>
+              <a:rPr lang="ru-RU" dirty="0"/>
+              <a:t>Во время </a:t>
+            </a:r>
+            <a:r>
+              <a:rPr lang="ru-RU" dirty="0" err="1"/>
+              <a:t>видеозвонка</a:t>
+            </a:r>
+            <a:r>
+              <a:rPr lang="ru-RU" dirty="0"/>
+              <a:t> собеседник слышит ваш голос то с ускорением, то с паузами («заикание»), хотя средняя задержка не превышает 40 </a:t>
+            </a:r>
+            <a:r>
+              <a:rPr lang="ru-RU" dirty="0" err="1"/>
+              <a:t>мс</a:t>
+            </a:r>
+            <a:r>
+              <a:rPr lang="ru-RU" dirty="0"/>
+              <a:t>. Пакеты отправлялись стабильно каждые 30 </a:t>
+            </a:r>
+            <a:r>
+              <a:rPr lang="ru-RU" dirty="0" err="1"/>
+              <a:t>мс</a:t>
+            </a:r>
+            <a:r>
+              <a:rPr lang="ru-RU" dirty="0"/>
+              <a:t>, но доходили с интервалами: </a:t>
+            </a:r>
+            <a:r>
+              <a:rPr lang="ru-RU" b="1" dirty="0"/>
+              <a:t>30 </a:t>
+            </a:r>
+            <a:r>
+              <a:rPr lang="ru-RU" b="1" dirty="0" err="1"/>
+              <a:t>мс</a:t>
+            </a:r>
+            <a:r>
+              <a:rPr lang="ru-RU" b="1" dirty="0"/>
+              <a:t> →→ 95 </a:t>
+            </a:r>
+            <a:r>
+              <a:rPr lang="ru-RU" b="1" dirty="0" err="1"/>
+              <a:t>мс</a:t>
+            </a:r>
+            <a:r>
+              <a:rPr lang="ru-RU" b="1" dirty="0"/>
+              <a:t> →→ 15 </a:t>
+            </a:r>
+            <a:r>
+              <a:rPr lang="ru-RU" b="1" dirty="0" err="1"/>
+              <a:t>мс</a:t>
+            </a:r>
+            <a:r>
+              <a:rPr lang="ru-RU" b="1" dirty="0"/>
+              <a:t> →→ 120 </a:t>
+            </a:r>
+            <a:r>
+              <a:rPr lang="ru-RU" b="1" dirty="0" err="1"/>
+              <a:t>мс</a:t>
+            </a:r>
+            <a:r>
+              <a:rPr lang="ru-RU" dirty="0" smtClean="0"/>
+              <a:t>.</a:t>
+            </a:r>
+            <a:endParaRPr lang="en-US" dirty="0" smtClean="0"/>
+          </a:p>
+          <a:p>
+            <a:r>
+              <a:rPr lang="ru-RU" b="1" dirty="0"/>
+              <a:t>А)</a:t>
+            </a:r>
+            <a:r>
+              <a:rPr lang="ru-RU" dirty="0"/>
+              <a:t> Слишком низкий RTT</a:t>
+            </a:r>
+          </a:p>
+          <a:p>
+            <a:r>
+              <a:rPr lang="ru-RU" b="1" dirty="0"/>
+              <a:t>Б)</a:t>
+            </a:r>
+            <a:r>
+              <a:rPr lang="ru-RU" dirty="0"/>
+              <a:t> Высокий </a:t>
+            </a:r>
+            <a:r>
+              <a:rPr lang="ru-RU" dirty="0" err="1"/>
+              <a:t>джиттер</a:t>
+            </a:r>
+            <a:r>
+              <a:rPr lang="ru-RU" dirty="0"/>
+              <a:t> (</a:t>
+            </a:r>
+            <a:r>
+              <a:rPr lang="ru-RU" dirty="0" err="1"/>
+              <a:t>Jitter</a:t>
+            </a:r>
+            <a:r>
+              <a:rPr lang="ru-RU" dirty="0"/>
+              <a:t>)</a:t>
+            </a:r>
+          </a:p>
+          <a:p>
+            <a:r>
+              <a:rPr lang="ru-RU" b="1" dirty="0"/>
+              <a:t>В)</a:t>
+            </a:r>
+            <a:r>
+              <a:rPr lang="ru-RU" dirty="0"/>
+              <a:t> Неправильная </a:t>
+            </a:r>
+            <a:r>
+              <a:rPr lang="ru-RU" dirty="0" err="1"/>
+              <a:t>декапсуляция</a:t>
+            </a:r>
+            <a:endParaRPr lang="ru-RU" dirty="0"/>
+          </a:p>
+          <a:p>
+            <a:r>
+              <a:rPr lang="ru-RU" b="1" dirty="0"/>
+              <a:t>Г)</a:t>
+            </a:r>
+            <a:r>
+              <a:rPr lang="ru-RU" dirty="0"/>
+              <a:t> Переход с модели OSI на TCP/IP</a:t>
+            </a:r>
+          </a:p>
+          <a:p>
+            <a:pPr marL="0" indent="0">
+              <a:buNone/>
+            </a:pPr>
+            <a:endParaRPr lang="en-US" dirty="0"/>
+          </a:p>
+        </p:txBody>
+      </p:sp>
+    </p:spTree>
+    <p:extLst>
+      <p:ext uri="{BB962C8B-B14F-4D97-AF65-F5344CB8AC3E}">
+        <p14:creationId xmlns:p14="http://schemas.microsoft.com/office/powerpoint/2010/main" val="2529589641"/>
+      </p:ext>
+    </p:extLst>
+  </p:cSld>
+  <p:clrMapOvr>
+    <a:masterClrMapping/>
+  </p:clrMapOvr>
+</p:sld>
+</file>
+
+<file path=ppt/slides/slide24.xml><?xml version="1.0" encoding="utf-8"?>
 <p:sld xmlns:a="http://schemas.openxmlformats.org/drawingml/2006/main" xmlns:r="http://schemas.openxmlformats.org/officeDocument/2006/relationships" xmlns:p="http://schemas.openxmlformats.org/presentationml/2006/main">
   <p:cSld>
     <p:spTree>
@@ -15266,7 +15817,7 @@
 </p:sld>
 </file>
 
-<file path=ppt/slides/slide21.xml><?xml version="1.0" encoding="utf-8"?>
+<file path=ppt/slides/slide25.xml><?xml version="1.0" encoding="utf-8"?>
 <p:sld xmlns:a="http://schemas.openxmlformats.org/drawingml/2006/main" xmlns:r="http://schemas.openxmlformats.org/officeDocument/2006/relationships" xmlns:p="http://schemas.openxmlformats.org/presentationml/2006/main">
   <p:cSld>
     <p:spTree>
@@ -16173,12 +16724,7 @@
             <p:ph type="title"/>
           </p:nvPr>
         </p:nvSpPr>
-        <p:spPr>
-          <a:xfrm>
-            <a:off x="1141413" y="181790"/>
-            <a:ext cx="9905998" cy="1478570"/>
-          </a:xfrm>
-        </p:spPr>
+        <p:spPr/>
         <p:txBody>
           <a:bodyPr/>
           <a:lstStyle/>
@@ -16192,28 +16738,88 @@
       </p:sp>
       <p:pic>
         <p:nvPicPr>
-          <p:cNvPr id="4" name="Объект 3"/>
+          <p:cNvPr id="1026" name="Picture 2" descr="https://studfile.net/html/e3/e3f4/e3f49d9b0529bcde61a57ce5c3f8ec22d955f4950f4526f55e5f2a511743e31d/htmlconvd-2yyuv2e3_html_87b3de651a33ed06.png"/>
           <p:cNvPicPr>
-            <a:picLocks noGrp="1" noChangeAspect="1"/>
+            <a:picLocks noGrp="1" noChangeAspect="1" noChangeArrowheads="1"/>
           </p:cNvPicPr>
           <p:nvPr>
-            <p:ph idx="1"/>
+            <p:ph sz="half" idx="1"/>
           </p:nvPr>
         </p:nvPicPr>
         <p:blipFill>
-          <a:blip r:embed="rId2"/>
+          <a:blip r:embed="rId2">
+            <a:extLst>
+              <a:ext uri="{28A0092B-C50C-407E-A947-70E740481C1C}">
+                <a14:useLocalDpi xmlns:a14="http://schemas.microsoft.com/office/drawing/2010/main" val="0"/>
+              </a:ext>
+            </a:extLst>
+          </a:blip>
+          <a:srcRect/>
           <a:stretch>
             <a:fillRect/>
           </a:stretch>
         </p:blipFill>
-        <p:spPr>
+        <p:spPr bwMode="auto">
           <a:xfrm>
-            <a:off x="2905723" y="1471052"/>
-            <a:ext cx="6377377" cy="5066224"/>
+            <a:off x="1818421" y="1901894"/>
+            <a:ext cx="3748881" cy="4553186"/>
           </a:xfrm>
           <a:prstGeom prst="rect">
             <a:avLst/>
           </a:prstGeom>
+          <a:noFill/>
+          <a:extLst>
+            <a:ext uri="{909E8E84-426E-40DD-AFC4-6F175D3DCCD1}">
+              <a14:hiddenFill xmlns:a14="http://schemas.microsoft.com/office/drawing/2010/main">
+                <a:solidFill>
+                  <a:srgbClr val="FFFFFF"/>
+                </a:solidFill>
+              </a14:hiddenFill>
+            </a:ext>
+          </a:extLst>
+        </p:spPr>
+      </p:pic>
+      <p:pic>
+        <p:nvPicPr>
+          <p:cNvPr id="1028" name="Picture 4" descr="https://studfile.net/html/e3/e3f4/e3f49d9b0529bcde61a57ce5c3f8ec22d955f4950f4526f55e5f2a511743e31d/htmlconvd-2yyuv2e3_html_c0d7e6fc753d1e3d.png"/>
+          <p:cNvPicPr>
+            <a:picLocks noGrp="1" noChangeAspect="1" noChangeArrowheads="1"/>
+          </p:cNvPicPr>
+          <p:nvPr>
+            <p:ph sz="half" idx="2"/>
+          </p:nvPr>
+        </p:nvPicPr>
+        <p:blipFill>
+          <a:blip r:embed="rId3">
+            <a:extLst>
+              <a:ext uri="{28A0092B-C50C-407E-A947-70E740481C1C}">
+                <a14:useLocalDpi xmlns:a14="http://schemas.microsoft.com/office/drawing/2010/main" val="0"/>
+              </a:ext>
+            </a:extLst>
+          </a:blip>
+          <a:srcRect/>
+          <a:stretch>
+            <a:fillRect/>
+          </a:stretch>
+        </p:blipFill>
+        <p:spPr bwMode="auto">
+          <a:xfrm>
+            <a:off x="6462346" y="1809555"/>
+            <a:ext cx="4107779" cy="4645525"/>
+          </a:xfrm>
+          <a:prstGeom prst="rect">
+            <a:avLst/>
+          </a:prstGeom>
+          <a:noFill/>
+          <a:extLst>
+            <a:ext uri="{909E8E84-426E-40DD-AFC4-6F175D3DCCD1}">
+              <a14:hiddenFill xmlns:a14="http://schemas.microsoft.com/office/drawing/2010/main">
+                <a:solidFill>
+                  <a:srgbClr val="FFFFFF"/>
+                </a:solidFill>
+              </a14:hiddenFill>
+            </a:ext>
+          </a:extLst>
         </p:spPr>
       </p:pic>
     </p:spTree>
@@ -16270,28 +16876,45 @@
       </p:sp>
       <p:pic>
         <p:nvPicPr>
-          <p:cNvPr id="4" name="Объект 3"/>
+          <p:cNvPr id="2050" name="Picture 2" descr="https://www.dealer.su/images/533611134044.jpg"/>
           <p:cNvPicPr>
-            <a:picLocks noGrp="1" noChangeAspect="1"/>
+            <a:picLocks noGrp="1" noChangeAspect="1" noChangeArrowheads="1"/>
           </p:cNvPicPr>
           <p:nvPr>
             <p:ph idx="1"/>
           </p:nvPr>
         </p:nvPicPr>
         <p:blipFill>
-          <a:blip r:embed="rId2"/>
+          <a:blip r:embed="rId2">
+            <a:extLst>
+              <a:ext uri="{28A0092B-C50C-407E-A947-70E740481C1C}">
+                <a14:useLocalDpi xmlns:a14="http://schemas.microsoft.com/office/drawing/2010/main" val="0"/>
+              </a:ext>
+            </a:extLst>
+          </a:blip>
+          <a:srcRect/>
           <a:stretch>
             <a:fillRect/>
           </a:stretch>
         </p:blipFill>
-        <p:spPr>
+        <p:spPr bwMode="auto">
           <a:xfrm>
-            <a:off x="2264196" y="1951630"/>
-            <a:ext cx="7660432" cy="4567051"/>
+            <a:off x="4478927" y="1704365"/>
+            <a:ext cx="3230970" cy="4637472"/>
           </a:xfrm>
           <a:prstGeom prst="rect">
             <a:avLst/>
           </a:prstGeom>
+          <a:noFill/>
+          <a:extLst>
+            <a:ext uri="{909E8E84-426E-40DD-AFC4-6F175D3DCCD1}">
+              <a14:hiddenFill xmlns:a14="http://schemas.microsoft.com/office/drawing/2010/main">
+                <a:solidFill>
+                  <a:srgbClr val="FFFFFF"/>
+                </a:solidFill>
+              </a14:hiddenFill>
+            </a:ext>
+          </a:extLst>
         </p:spPr>
       </p:pic>
     </p:spTree>
@@ -16359,7 +16982,7 @@
         <p:spPr/>
         <p:txBody>
           <a:bodyPr>
-            <a:normAutofit fontScale="92500" lnSpcReduction="20000"/>
+            <a:normAutofit/>
           </a:bodyPr>
           <a:lstStyle/>
           <a:p>
@@ -16414,67 +17037,6 @@
             <a:r>
               <a:rPr lang="ru-RU" dirty="0"/>
               <a:t> совокупность протоколов всех уровней, используемая на хосте.</a:t>
-            </a:r>
-          </a:p>
-          <a:p>
-            <a:r>
-              <a:rPr lang="ru-RU" b="1" dirty="0"/>
-              <a:t>Два класса сервисов:</a:t>
-            </a:r>
-            <a:endParaRPr lang="ru-RU" dirty="0"/>
-          </a:p>
-          <a:p>
-            <a:pPr lvl="1"/>
-            <a:r>
-              <a:rPr lang="ru-RU" i="1" dirty="0" err="1"/>
-              <a:t>Connection-Oriented</a:t>
-            </a:r>
-            <a:r>
-              <a:rPr lang="ru-RU" i="1" dirty="0"/>
-              <a:t> (с установлением соединения):</a:t>
-            </a:r>
-            <a:r>
-              <a:rPr lang="ru-RU" dirty="0"/>
-              <a:t> </a:t>
-            </a:r>
-            <a:r>
-              <a:rPr lang="ru-RU" dirty="0" err="1"/>
-              <a:t>handshake</a:t>
-            </a:r>
-            <a:r>
-              <a:rPr lang="ru-RU" dirty="0"/>
-              <a:t> </a:t>
-            </a:r>
-            <a:r>
-              <a:rPr lang="ru-RU" dirty="0" smtClean="0"/>
-              <a:t>→</a:t>
-            </a:r>
-            <a:r>
-              <a:rPr lang="ru-RU" dirty="0"/>
-              <a:t> передача </a:t>
-            </a:r>
-            <a:r>
-              <a:rPr lang="ru-RU" dirty="0" smtClean="0"/>
-              <a:t>→</a:t>
-            </a:r>
-            <a:r>
-              <a:rPr lang="ru-RU" dirty="0"/>
-              <a:t> разрыв.</a:t>
-            </a:r>
-          </a:p>
-          <a:p>
-            <a:pPr lvl="1"/>
-            <a:r>
-              <a:rPr lang="ru-RU" i="1" dirty="0" err="1"/>
-              <a:t>Connectionless</a:t>
-            </a:r>
-            <a:r>
-              <a:rPr lang="ru-RU" i="1" dirty="0"/>
-              <a:t> (без соединения):</a:t>
-            </a:r>
-            <a:r>
-              <a:rPr lang="ru-RU" dirty="0"/>
-              <a:t> независимая доставка дейтаграмм.</a:t>
             </a:r>
           </a:p>
           <a:p>
@@ -16561,7 +17123,7 @@
         <p:spPr/>
         <p:txBody>
           <a:bodyPr>
-            <a:normAutofit fontScale="92500"/>
+            <a:normAutofit fontScale="92500" lnSpcReduction="20000"/>
           </a:bodyPr>
           <a:lstStyle/>
           <a:p>
@@ -16621,8 +17183,13 @@
             <a:pPr lvl="1"/>
             <a:r>
               <a:rPr lang="ru-RU" dirty="0"/>
-              <a:t>При необходимости выполняется фрагментация больших сообщений на пакеты.</a:t>
-            </a:r>
+              <a:t>При необходимости выполняется фрагментация больших сообщений на </a:t>
+            </a:r>
+            <a:r>
+              <a:rPr lang="ru-RU" dirty="0" smtClean="0"/>
+              <a:t>части.</a:t>
+            </a:r>
+            <a:endParaRPr lang="ru-RU" dirty="0"/>
           </a:p>
           <a:p>
             <a:r>
@@ -16654,8 +17221,37 @@
             <a:pPr lvl="1"/>
             <a:r>
               <a:rPr lang="ru-RU" dirty="0"/>
-              <a:t>Пошаговое снятие заголовков соответствующего уровня, проверка целостности и передача наверх.</a:t>
-            </a:r>
+              <a:t>Пошаговое снятие заголовков соответствующего уровня, проверка целостности и передача наверх</a:t>
+            </a:r>
+            <a:r>
+              <a:rPr lang="ru-RU" dirty="0" smtClean="0"/>
+              <a:t>.</a:t>
+            </a:r>
+            <a:endParaRPr lang="en-US" dirty="0" smtClean="0"/>
+          </a:p>
+          <a:p>
+            <a:pPr lvl="1"/>
+            <a:r>
+              <a:rPr lang="ru-RU" dirty="0"/>
+              <a:t>При необходимости выполняется </a:t>
+            </a:r>
+            <a:r>
+              <a:rPr lang="ru-RU" dirty="0" smtClean="0"/>
+              <a:t>сборка </a:t>
+            </a:r>
+            <a:r>
+              <a:rPr lang="ru-RU" dirty="0"/>
+              <a:t>больших </a:t>
+            </a:r>
+            <a:r>
+              <a:rPr lang="ru-RU" dirty="0" smtClean="0"/>
+              <a:t>сообщений из отдельных частей.</a:t>
+            </a:r>
+            <a:endParaRPr lang="ru-RU" dirty="0"/>
+          </a:p>
+          <a:p>
+            <a:pPr lvl="1"/>
+            <a:endParaRPr lang="ru-RU" dirty="0"/>
           </a:p>
           <a:p>
             <a:endParaRPr lang="ru-RU" dirty="0"/>
@@ -16717,13 +17313,44 @@
         </p:spPr>
         <p:txBody>
           <a:bodyPr>
-            <a:normAutofit fontScale="92500" lnSpcReduction="10000"/>
+            <a:normAutofit fontScale="85000" lnSpcReduction="20000"/>
           </a:bodyPr>
           <a:lstStyle/>
           <a:p>
             <a:r>
+              <a:rPr lang="ru-RU" sz="2800" b="1" dirty="0"/>
+              <a:t>Сетевая </a:t>
+            </a:r>
+            <a:r>
+              <a:rPr lang="ru-RU" sz="2800" b="1" dirty="0" smtClean="0"/>
+              <a:t>модель</a:t>
+            </a:r>
+            <a:r>
+              <a:rPr lang="en-US" sz="2800" b="1" dirty="0" smtClean="0"/>
+              <a:t>:</a:t>
+            </a:r>
+            <a:r>
+              <a:rPr lang="ru-RU" sz="2800" b="1" dirty="0" smtClean="0"/>
+              <a:t> </a:t>
+            </a:r>
+            <a:r>
+              <a:rPr lang="ru-RU" sz="2800" dirty="0"/>
+              <a:t>теоретическое описание принципов работы набора сетевых протоколов, взаимодействующих друг с другом</a:t>
+            </a:r>
+            <a:r>
+              <a:rPr lang="ru-RU" sz="2800" dirty="0" smtClean="0"/>
+              <a:t>.</a:t>
+            </a:r>
+            <a:endParaRPr lang="ru-RU" sz="2900" dirty="0" smtClean="0"/>
+          </a:p>
+          <a:p>
+            <a:r>
+              <a:rPr lang="ru-RU" sz="2900" b="1" dirty="0" smtClean="0"/>
+              <a:t>Сетевой </a:t>
+            </a:r>
+            <a:r>
               <a:rPr lang="ru-RU" sz="2900" b="1" dirty="0"/>
-              <a:t>Сетевой протокол:</a:t>
+              <a:t>протокол:</a:t>
             </a:r>
             <a:r>
               <a:rPr lang="ru-RU" sz="2900" dirty="0"/>
@@ -16848,6 +17475,136 @@
 </file>
 
 <file path=ppt/slides/slide8.xml><?xml version="1.0" encoding="utf-8"?>
+<p:sld xmlns:a="http://schemas.openxmlformats.org/drawingml/2006/main" xmlns:r="http://schemas.openxmlformats.org/officeDocument/2006/relationships" xmlns:p="http://schemas.openxmlformats.org/presentationml/2006/main">
+  <p:cSld>
+    <p:spTree>
+      <p:nvGrpSpPr>
+        <p:cNvPr id="1" name=""/>
+        <p:cNvGrpSpPr/>
+        <p:nvPr/>
+      </p:nvGrpSpPr>
+      <p:grpSpPr>
+        <a:xfrm>
+          <a:off x="0" y="0"/>
+          <a:ext cx="0" cy="0"/>
+          <a:chOff x="0" y="0"/>
+          <a:chExt cx="0" cy="0"/>
+        </a:xfrm>
+      </p:grpSpPr>
+      <p:sp>
+        <p:nvSpPr>
+          <p:cNvPr id="2" name="Заголовок 1"/>
+          <p:cNvSpPr>
+            <a:spLocks noGrp="1"/>
+          </p:cNvSpPr>
+          <p:nvPr>
+            <p:ph type="title"/>
+          </p:nvPr>
+        </p:nvSpPr>
+        <p:spPr/>
+        <p:txBody>
+          <a:bodyPr/>
+          <a:lstStyle/>
+          <a:p>
+            <a:r>
+              <a:rPr lang="ru-RU" dirty="0" smtClean="0"/>
+              <a:t>Классы сервисов</a:t>
+            </a:r>
+            <a:endParaRPr lang="ru-RU" dirty="0"/>
+          </a:p>
+        </p:txBody>
+      </p:sp>
+      <p:sp>
+        <p:nvSpPr>
+          <p:cNvPr id="3" name="Объект 2"/>
+          <p:cNvSpPr>
+            <a:spLocks noGrp="1"/>
+          </p:cNvSpPr>
+          <p:nvPr>
+            <p:ph idx="1"/>
+          </p:nvPr>
+        </p:nvSpPr>
+        <p:spPr>
+          <a:xfrm>
+            <a:off x="1141413" y="3023210"/>
+            <a:ext cx="10490811" cy="1777390"/>
+          </a:xfrm>
+        </p:spPr>
+        <p:txBody>
+          <a:bodyPr/>
+          <a:lstStyle/>
+          <a:p>
+            <a:r>
+              <a:rPr lang="ru-RU" b="1" dirty="0"/>
+              <a:t>Два класса сервисов:</a:t>
+            </a:r>
+            <a:endParaRPr lang="ru-RU" dirty="0"/>
+          </a:p>
+          <a:p>
+            <a:pPr lvl="1"/>
+            <a:r>
+              <a:rPr lang="ru-RU" i="1" dirty="0" err="1"/>
+              <a:t>Connection-Oriented</a:t>
+            </a:r>
+            <a:r>
+              <a:rPr lang="ru-RU" i="1" dirty="0"/>
+              <a:t> (с установлением </a:t>
+            </a:r>
+            <a:r>
+              <a:rPr lang="ru-RU" i="1" dirty="0" smtClean="0"/>
+              <a:t>соединения</a:t>
+            </a:r>
+            <a:r>
+              <a:rPr lang="ru-RU" i="1" dirty="0"/>
+              <a:t>):</a:t>
+            </a:r>
+            <a:r>
+              <a:rPr lang="ru-RU" dirty="0"/>
+              <a:t> </a:t>
+            </a:r>
+            <a:r>
+              <a:rPr lang="ru-RU" dirty="0" err="1"/>
+              <a:t>handshake</a:t>
+            </a:r>
+            <a:r>
+              <a:rPr lang="ru-RU" dirty="0"/>
+              <a:t> → передача → разрыв.</a:t>
+            </a:r>
+          </a:p>
+          <a:p>
+            <a:pPr lvl="1"/>
+            <a:r>
+              <a:rPr lang="ru-RU" i="1" dirty="0" err="1"/>
+              <a:t>Connectionless</a:t>
+            </a:r>
+            <a:r>
+              <a:rPr lang="ru-RU" i="1" dirty="0"/>
+              <a:t> (без соединения):</a:t>
+            </a:r>
+            <a:r>
+              <a:rPr lang="ru-RU" dirty="0"/>
+              <a:t> независимая доставка дейтаграмм.</a:t>
+            </a:r>
+          </a:p>
+          <a:p>
+            <a:endParaRPr lang="ru-RU" dirty="0"/>
+          </a:p>
+        </p:txBody>
+      </p:sp>
+    </p:spTree>
+    <p:extLst>
+      <p:ext uri="{BB962C8B-B14F-4D97-AF65-F5344CB8AC3E}">
+        <p14:creationId xmlns:p14="http://schemas.microsoft.com/office/powerpoint/2010/main" val="618060989"/>
+      </p:ext>
+    </p:extLst>
+  </p:cSld>
+  <p:clrMapOvr>
+    <a:masterClrMapping/>
+  </p:clrMapOvr>
+</p:sld>
+</file>
+
+<file path=ppt/slides/slide9.xml><?xml version="1.0" encoding="utf-8"?>
 <p:sld xmlns:a="http://schemas.openxmlformats.org/drawingml/2006/main" xmlns:r="http://schemas.openxmlformats.org/officeDocument/2006/relationships" xmlns:p="http://schemas.openxmlformats.org/presentationml/2006/main">
   <p:cSld>
     <p:spTree>
@@ -18143,262 +18900,6 @@
 </p:sld>
 </file>
 
-<file path=ppt/slides/slide9.xml><?xml version="1.0" encoding="utf-8"?>
-<p:sld xmlns:a="http://schemas.openxmlformats.org/drawingml/2006/main" xmlns:r="http://schemas.openxmlformats.org/officeDocument/2006/relationships" xmlns:p="http://schemas.openxmlformats.org/presentationml/2006/main">
-  <p:cSld>
-    <p:spTree>
-      <p:nvGrpSpPr>
-        <p:cNvPr id="1" name=""/>
-        <p:cNvGrpSpPr/>
-        <p:nvPr/>
-      </p:nvGrpSpPr>
-      <p:grpSpPr>
-        <a:xfrm>
-          <a:off x="0" y="0"/>
-          <a:ext cx="0" cy="0"/>
-          <a:chOff x="0" y="0"/>
-          <a:chExt cx="0" cy="0"/>
-        </a:xfrm>
-      </p:grpSpPr>
-      <p:sp>
-        <p:nvSpPr>
-          <p:cNvPr id="3" name="Объект 2"/>
-          <p:cNvSpPr>
-            <a:spLocks noGrp="1"/>
-          </p:cNvSpPr>
-          <p:nvPr>
-            <p:ph idx="1"/>
-          </p:nvPr>
-        </p:nvSpPr>
-        <p:spPr>
-          <a:xfrm>
-            <a:off x="976312" y="357186"/>
-            <a:ext cx="10821988" cy="6157913"/>
-          </a:xfrm>
-        </p:spPr>
-        <p:txBody>
-          <a:bodyPr>
-            <a:normAutofit fontScale="92500"/>
-          </a:bodyPr>
-          <a:lstStyle/>
-          <a:p>
-            <a:r>
-              <a:rPr lang="ru-RU" b="1" dirty="0"/>
-              <a:t>Физический (</a:t>
-            </a:r>
-            <a:r>
-              <a:rPr lang="ru-RU" b="1" dirty="0" err="1"/>
-              <a:t>Physical</a:t>
-            </a:r>
-            <a:r>
-              <a:rPr lang="ru-RU" b="1" dirty="0"/>
-              <a:t>):</a:t>
-            </a:r>
-            <a:r>
-              <a:rPr lang="ru-RU" dirty="0"/>
-              <a:t> передача неструктурированного потока сырых бит по среде.</a:t>
-            </a:r>
-          </a:p>
-          <a:p>
-            <a:r>
-              <a:rPr lang="ru-RU" b="1" dirty="0"/>
-              <a:t>Канальный (</a:t>
-            </a:r>
-            <a:r>
-              <a:rPr lang="ru-RU" b="1" dirty="0" err="1"/>
-              <a:t>Data</a:t>
-            </a:r>
-            <a:r>
-              <a:rPr lang="ru-RU" b="1" dirty="0"/>
-              <a:t> </a:t>
-            </a:r>
-            <a:r>
-              <a:rPr lang="ru-RU" b="1" dirty="0" err="1"/>
-              <a:t>Link</a:t>
-            </a:r>
-            <a:r>
-              <a:rPr lang="ru-RU" b="1" dirty="0"/>
-              <a:t>):</a:t>
-            </a:r>
-            <a:r>
-              <a:rPr lang="ru-RU" dirty="0"/>
-              <a:t> передача </a:t>
-            </a:r>
-            <a:r>
-              <a:rPr lang="ru-RU" b="1" dirty="0"/>
-              <a:t>кадров (</a:t>
-            </a:r>
-            <a:r>
-              <a:rPr lang="ru-RU" b="1" dirty="0" err="1"/>
-              <a:t>frames</a:t>
-            </a:r>
-            <a:r>
-              <a:rPr lang="ru-RU" b="1" dirty="0"/>
-              <a:t>)</a:t>
-            </a:r>
-            <a:r>
-              <a:rPr lang="ru-RU" dirty="0"/>
-              <a:t> в пределах одного сегмента сети, обнаружение ошибок, MAC-адресация.</a:t>
-            </a:r>
-          </a:p>
-          <a:p>
-            <a:r>
-              <a:rPr lang="ru-RU" b="1" dirty="0"/>
-              <a:t>Сетевой (</a:t>
-            </a:r>
-            <a:r>
-              <a:rPr lang="ru-RU" b="1" dirty="0" err="1"/>
-              <a:t>Network</a:t>
-            </a:r>
-            <a:r>
-              <a:rPr lang="ru-RU" b="1" dirty="0"/>
-              <a:t>):</a:t>
-            </a:r>
-            <a:r>
-              <a:rPr lang="ru-RU" dirty="0"/>
-              <a:t> сквозная маршрутизация </a:t>
-            </a:r>
-            <a:r>
-              <a:rPr lang="ru-RU" b="1" dirty="0"/>
-              <a:t>пакетов (</a:t>
-            </a:r>
-            <a:r>
-              <a:rPr lang="ru-RU" b="1" dirty="0" err="1"/>
-              <a:t>packets</a:t>
-            </a:r>
-            <a:r>
-              <a:rPr lang="ru-RU" b="1" dirty="0"/>
-              <a:t>)</a:t>
-            </a:r>
-            <a:r>
-              <a:rPr lang="ru-RU" dirty="0"/>
-              <a:t> между сетями, логическая адресация (IP).</a:t>
-            </a:r>
-          </a:p>
-          <a:p>
-            <a:r>
-              <a:rPr lang="ru-RU" b="1" dirty="0"/>
-              <a:t>Транспортный (</a:t>
-            </a:r>
-            <a:r>
-              <a:rPr lang="ru-RU" b="1" dirty="0" err="1"/>
-              <a:t>Transport</a:t>
-            </a:r>
-            <a:r>
-              <a:rPr lang="ru-RU" b="1" dirty="0"/>
-              <a:t>):</a:t>
-            </a:r>
-            <a:r>
-              <a:rPr lang="ru-RU" dirty="0"/>
-              <a:t> передача </a:t>
-            </a:r>
-            <a:r>
-              <a:rPr lang="ru-RU" b="1" dirty="0"/>
-              <a:t>сегментов (</a:t>
-            </a:r>
-            <a:r>
-              <a:rPr lang="ru-RU" b="1" dirty="0" err="1"/>
-              <a:t>segments</a:t>
-            </a:r>
-            <a:r>
-              <a:rPr lang="ru-RU" b="1" dirty="0"/>
-              <a:t>) / дейтаграмм</a:t>
-            </a:r>
-            <a:r>
-              <a:rPr lang="ru-RU" dirty="0"/>
-              <a:t> между процессами хостов (</a:t>
-            </a:r>
-            <a:r>
-              <a:rPr lang="ru-RU" dirty="0" err="1"/>
-              <a:t>end-to-end</a:t>
-            </a:r>
-            <a:r>
-              <a:rPr lang="ru-RU" dirty="0"/>
-              <a:t>).</a:t>
-            </a:r>
-          </a:p>
-          <a:p>
-            <a:r>
-              <a:rPr lang="ru-RU" b="1" dirty="0"/>
-              <a:t>Сеансовый (</a:t>
-            </a:r>
-            <a:r>
-              <a:rPr lang="ru-RU" b="1" dirty="0" err="1"/>
-              <a:t>Session</a:t>
-            </a:r>
-            <a:r>
-              <a:rPr lang="ru-RU" b="1" dirty="0"/>
-              <a:t>):</a:t>
-            </a:r>
-            <a:r>
-              <a:rPr lang="ru-RU" dirty="0"/>
-              <a:t> управление сессиями и диалогами между приложениями.</a:t>
-            </a:r>
-          </a:p>
-          <a:p>
-            <a:r>
-              <a:rPr lang="ru-RU" b="1" dirty="0"/>
-              <a:t>Уровень представления (</a:t>
-            </a:r>
-            <a:r>
-              <a:rPr lang="ru-RU" b="1" dirty="0" err="1"/>
-              <a:t>Presentation</a:t>
-            </a:r>
-            <a:r>
-              <a:rPr lang="ru-RU" b="1" dirty="0"/>
-              <a:t>):</a:t>
-            </a:r>
-            <a:r>
-              <a:rPr lang="ru-RU" dirty="0"/>
-              <a:t> кодирование, сжатие, шифрование и форматирование данных.</a:t>
-            </a:r>
-          </a:p>
-          <a:p>
-            <a:r>
-              <a:rPr lang="ru-RU" b="1" dirty="0"/>
-              <a:t>Прикладной (</a:t>
-            </a:r>
-            <a:r>
-              <a:rPr lang="ru-RU" b="1" dirty="0" err="1"/>
-              <a:t>Application</a:t>
-            </a:r>
-            <a:r>
-              <a:rPr lang="ru-RU" b="1" dirty="0"/>
-              <a:t>):</a:t>
-            </a:r>
-            <a:r>
-              <a:rPr lang="ru-RU" dirty="0"/>
-              <a:t> интерфейс взаимодействия пользовательских программ с сетью (HTTP, FTP, DNS).</a:t>
-            </a:r>
-          </a:p>
-          <a:p>
-            <a:pPr marL="0" indent="0">
-              <a:buNone/>
-            </a:pPr>
-            <a:endParaRPr lang="ru-RU" dirty="0"/>
-          </a:p>
-        </p:txBody>
-      </p:sp>
-    </p:spTree>
-    <p:extLst>
-      <p:ext uri="{BB962C8B-B14F-4D97-AF65-F5344CB8AC3E}">
-        <p14:creationId xmlns:p14="http://schemas.microsoft.com/office/powerpoint/2010/main" val="3241851205"/>
-      </p:ext>
-    </p:extLst>
-  </p:cSld>
-  <p:clrMapOvr>
-    <a:masterClrMapping/>
-  </p:clrMapOvr>
-  <p:timing>
-    <p:tnLst>
-      <p:par>
-        <p:cTn id="1" dur="indefinite" restart="never" nodeType="tmRoot"/>
-      </p:par>
-    </p:tnLst>
-  </p:timing>
-</p:sld>
-</file>
-
 <file path=ppt/theme/theme1.xml><?xml version="1.0" encoding="utf-8"?>
 <a:theme xmlns:a="http://schemas.openxmlformats.org/drawingml/2006/main" name="Контур">
   <a:themeElements>
